--- a/docs/team/learn-notes-intro.pptx
+++ b/docs/team/learn-notes-intro.pptx
@@ -128,14 +128,14 @@
   <p:extLst>
     <p:ext uri="{521415D9-36F7-43E2-AB2F-B90AF26B5E84}">
       <p14:sectionLst xmlns:p14="http://schemas.microsoft.com/office/powerpoint/2010/main">
-        <p14:section name="시작" id="{cb2fe21f-2ab2-ce9e-0b67-ee78d145ddf3}">
+        <p14:section name="시작" id="{6949afa2-fb54-d9a6-fd1c-b35037d8f716}">
           <p14:sldIdLst>
             <p14:sldId id="256"/>
             <p14:sldId id="257"/>
             <p14:sldId id="258"/>
           </p14:sldIdLst>
         </p14:section>
-        <p14:section name="모드(MOD)란?" id="{eb778a12-7fa6-3b53-c1e8-9e82081e77e3}">
+        <p14:section name="모드(MOD)란?" id="{ea92f561-f0d1-673a-b8fc-a053dc6126a4}">
           <p14:sldIdLst>
             <p14:sldId id="259"/>
             <p14:sldId id="260"/>
@@ -144,7 +144,7 @@
             <p14:sldId id="263"/>
           </p14:sldIdLst>
         </p14:section>
-        <p14:section name="learn-notes 기능" id="{c1da85be-6f16-df81-0549-1391f7bfe6dd}">
+        <p14:section name="learn-notes 기능" id="{4d966fac-e731-3478-52b8-8f65b26e2531}">
           <p14:sldIdLst>
             <p14:sldId id="264"/>
             <p14:sldId id="265"/>
@@ -157,7 +157,7 @@
             <p14:sldId id="272"/>
           </p14:sldIdLst>
         </p14:section>
-        <p14:section name="시작하기" id="{ed9cf1dc-5360-d0f0-42aa-af2201839410}">
+        <p14:section name="시작하기" id="{9c75ba56-2aa2-1def-7ab2-871bfc5c3d9d}">
           <p14:sldIdLst>
             <p14:sldId id="273"/>
             <p14:sldId id="274"/>
@@ -165,7 +165,7 @@
             <p14:sldId id="276"/>
           </p14:sldIdLst>
         </p14:section>
-        <p14:section name="마무리" id="{99b4a07e-9da3-48b4-9049-23185a84400a}">
+        <p14:section name="마무리" id="{a2748d8a-0273-218e-7c0f-63ee88992182}">
           <p14:sldIdLst>
             <p14:sldId id="277"/>
           </p14:sldIdLst>
@@ -662,7 +662,7 @@
           <a:p>
             <a:r>
               <a:rPr lang="en-US" dirty="0"/>
-              <a:t>Claude가 파일을 고친 턴이 끝나면 몇 초 안에 이런 노트가 뜹니다. 다섯 칸으로 짧게, 350단어 안쪽으로 씁니다. 배울 개념은 이미 배운 이름을 재사용해서, 같은 개념은 같은 이름으로 쌓이고 "(복습)"이 붙습니다. 설명 수준은 설정에서 입문·중급·숙련으로 고를 수 있습니다.</a:t>
+              <a:t>Claude가 파일을 고친 턴이 끝나면 몇 초 안에 이런 노트가 뜹니다. 다섯 칸으로 짧게, 350단어 안쪽으로 씁니다. 무엇이 바뀌었나는 코드 설명 대신 전에 하던 일, 이제 하는 일, 그 차이가 드러나는 예시를 한 줄씩 보여 줘서 한눈에 들어옵니다. 배울 개념은 이미 배운 이름을 재사용해서, 같은 개념은 같은 이름으로 쌓이고 "(복습)"이 붙습니다. 설명 수준은 설정에서 입문·중급·숙련으로 고를 수 있습니다.</a:t>
             </a:r>
             <a:endParaRPr lang="en-US" dirty="0"/>
           </a:p>
@@ -750,7 +750,7 @@
           <a:p>
             <a:r>
               <a:rPr lang="en-US" dirty="0"/>
-              <a:t>패널 위쪽 줄에 보기 다섯 개가 있습니다. v를 누르면 노트, 전/후, diff, 개념 모음을 돌고, q는 어디서든 퀴즈로 갑니다. 오른쪽이 전/후 보기로, 바뀐 곳마다 원래 코드와 바뀐 코드를 줄 번호 그대로 보여 줍니다. 단축키는 ctrl+x tab으로 패널을 먼저 고른 뒤 누릅니다.</a:t>
+              <a:t>v를 누르면 전/후 보기로 갑니다. 바뀐 곳마다 원래 코드와 바뀐 코드를 줄 번호 그대로 놓는데, 바뀌지 않은 줄은 흐리게, 바뀐 줄은 마이너스와 플러스로 표시하고, 한 줄을 고친 것이면 그 줄에서 바뀐 낱말만 굵은 색으로 칠합니다. 오른쪽 화면에서 var가 let으로, for 반복이 for...of로 바뀐 부분만 칠해진 것을 볼 수 있습니다. 맨 위에는 노트의 전, 후, 예가 다시 나와서 코드를 읽기 전에 무엇이 달라졌는지 먼저 잡고 갑니다. 보기는 노트, 전/후, 개념 모음 셋을 v로 돌고, q는 어디서든 퀴즈입니다.</a:t>
             </a:r>
             <a:endParaRPr lang="en-US" dirty="0"/>
           </a:p>
@@ -838,7 +838,7 @@
           <a:p>
             <a:r>
               <a:rPr lang="en-US" dirty="0"/>
-              <a:t>노트를 읽다 궁금한 게 생기면 그 자리에서 이어 갑니다. t는 이 노트의 개념만으로 퀴즈, e는 더 쉬운 말로 다시 쓰기, i는 질문하기입니다. 오른쪽은 "기본값 0은 왜 넣은 거야?"라고 물은 실제 답입니다. 답은 노트 아래와 일지에 남고, 이어서 물으면 앞의 답을 읽고 답합니다.</a:t>
+              <a:t>노트를 읽다 궁금한 게 생기면 그 자리에서 이어 갑니다. t는 이 노트의 개념만으로 퀴즈, e는 더 쉬운 말로 다시 쓰기, r은 예시로 따라가기, i는 질문하기입니다. 오른쪽은 r을 누른 실제 답으로, 주문 두 개를 예로 들어 n 값이 0, 1, 1로 바뀌는 과정을 따라가고 이전 코드라면 2가 나온다고 짚어 줍니다. 답은 노트 아래와 일지에 남고, 이어서 물으면 앞의 답을 읽고 답합니다.</a:t>
             </a:r>
             <a:endParaRPr lang="en-US" dirty="0"/>
           </a:p>
@@ -3367,7 +3367,7 @@
                   <a:schemeClr val="accent6"/>
                 </a:solidFill>
               </a:rPr>
-              <a:t>learn-notes 1.4.0 — Claude가 고친 코드를 턴마다 학습 노트로 정리하고, 잊을 때쯤 내 코드로 복습 퀴즈를 내 주는 Claude Code 모드</a:t>
+              <a:t>learn-notes 1.5.0 — Claude가 고친 코드가 무엇을 어떻게 달라지게 했는지 턴마다 학습 노트로 보여 주고, 잊을 때쯤 내 코드로 복습 퀴즈를 내 주는 Claude Code 모드</a:t>
             </a:r>
             <a:endParaRPr lang="en-US" sz="1600" dirty="0"/>
           </a:p>
@@ -3763,7 +3763,7 @@
                   <a:srgbClr val="5A6B70"/>
                 </a:solidFill>
               </a:rPr>
-              <a:t>파일별로 "전 → 후"를 한두 줄씩</a:t>
+              <a:t>코드가 하던 일(전) · 이제 하는 일(후) · 차이가 드러나는 예를 한 줄씩</a:t>
             </a:r>
             <a:endParaRPr lang="en-US" sz="1350" dirty="0"/>
           </a:p>
@@ -4397,7 +4397,7 @@
                   <a:schemeClr val="tx2"/>
                 </a:solidFill>
               </a:rPr>
-              <a:t>보기 바꾸기와 단축키</a:t>
+              <a:t>전/후 — 무엇이 달라졌는지 한눈에</a:t>
             </a:r>
             <a:endParaRPr lang="en-US" sz="3000" dirty="0"/>
           </a:p>
@@ -4412,7 +4412,70 @@
         <p:spPr>
           <a:xfrm>
             <a:off x="548640" y="1463040"/>
-            <a:ext cx="1097280" cy="502920"/>
+            <a:ext cx="1261872" cy="502920"/>
+          </a:xfrm>
+          <a:prstGeom prst="roundRect">
+            <a:avLst>
+              <a:gd name="adj" fmla="val 49091"/>
+            </a:avLst>
+          </a:prstGeom>
+          <a:solidFill>
+            <a:schemeClr val="bg2"/>
+          </a:solidFill>
+          <a:ln w="12700">
+            <a:solidFill>
+              <a:schemeClr val="bg2"/>
+            </a:solidFill>
+            <a:prstDash val="solid"/>
+          </a:ln>
+        </p:spPr>
+      </p:sp>
+      <p:sp>
+        <p:nvSpPr>
+          <p:cNvPr id="4" name="Text 2"/>
+          <p:cNvSpPr txBox="1"/>
+          <p:nvPr/>
+        </p:nvSpPr>
+        <p:spPr>
+          <a:xfrm>
+            <a:off x="548640" y="1463040"/>
+            <a:ext cx="1261872" cy="502920"/>
+          </a:xfrm>
+          <a:prstGeom prst="rect">
+            <a:avLst/>
+          </a:prstGeom>
+          <a:noFill/>
+          <a:ln/>
+        </p:spPr>
+        <p:txBody>
+          <a:bodyPr wrap="square" lIns="0" tIns="0" rIns="0" bIns="0" rtlCol="0" anchor="ctr"/>
+          <a:lstStyle/>
+          <a:p>
+            <a:pPr algn="ctr" indent="0" marL="0">
+              <a:buNone/>
+            </a:pPr>
+            <a:r>
+              <a:rPr lang="en-US" sz="1300" b="1" dirty="0">
+                <a:solidFill>
+                  <a:schemeClr val="tx2"/>
+                </a:solidFill>
+              </a:rPr>
+              <a:t>노트</a:t>
+            </a:r>
+            <a:endParaRPr lang="en-US" sz="1300" dirty="0"/>
+          </a:p>
+        </p:txBody>
+      </p:sp>
+      <p:sp>
+        <p:nvSpPr>
+          <p:cNvPr id="5" name="view-1"/>
+          <p:cNvSpPr/>
+          <p:nvPr/>
+        </p:nvSpPr>
+        <p:spPr>
+          <a:xfrm>
+            <a:off x="1920240" y="1463040"/>
+            <a:ext cx="1261872" cy="502920"/>
           </a:xfrm>
           <a:prstGeom prst="roundRect">
             <a:avLst>
@@ -4432,14 +4495,14 @@
       </p:sp>
       <p:sp>
         <p:nvSpPr>
-          <p:cNvPr id="4" name="Text 2"/>
-          <p:cNvSpPr txBox="1"/>
-          <p:nvPr/>
-        </p:nvSpPr>
-        <p:spPr>
-          <a:xfrm>
-            <a:off x="548640" y="1463040"/>
-            <a:ext cx="1097280" cy="502920"/>
+          <p:cNvPr id="6" name="Text 4"/>
+          <p:cNvSpPr txBox="1"/>
+          <p:nvPr/>
+        </p:nvSpPr>
+        <p:spPr>
+          <a:xfrm>
+            <a:off x="1920240" y="1463040"/>
+            <a:ext cx="1261872" cy="502920"/>
           </a:xfrm>
           <a:prstGeom prst="rect">
             <a:avLst/>
@@ -4460,7 +4523,7 @@
                   <a:schemeClr val="bg1"/>
                 </a:solidFill>
               </a:rPr>
-              <a:t>노트</a:t>
+              <a:t>전/후</a:t>
             </a:r>
             <a:endParaRPr lang="en-US" sz="1300" dirty="0"/>
           </a:p>
@@ -4468,14 +4531,14 @@
       </p:sp>
       <p:sp>
         <p:nvSpPr>
-          <p:cNvPr id="5" name="view-1"/>
+          <p:cNvPr id="7" name="view-2"/>
           <p:cNvSpPr/>
           <p:nvPr/>
         </p:nvSpPr>
         <p:spPr>
           <a:xfrm>
-            <a:off x="1755648" y="1463040"/>
-            <a:ext cx="1097280" cy="502920"/>
+            <a:off x="3291840" y="1463040"/>
+            <a:ext cx="1261872" cy="502920"/>
           </a:xfrm>
           <a:prstGeom prst="roundRect">
             <a:avLst>
@@ -4495,14 +4558,14 @@
       </p:sp>
       <p:sp>
         <p:nvSpPr>
-          <p:cNvPr id="6" name="Text 4"/>
-          <p:cNvSpPr txBox="1"/>
-          <p:nvPr/>
-        </p:nvSpPr>
-        <p:spPr>
-          <a:xfrm>
-            <a:off x="1755648" y="1463040"/>
-            <a:ext cx="1097280" cy="502920"/>
+          <p:cNvPr id="8" name="Text 6"/>
+          <p:cNvSpPr txBox="1"/>
+          <p:nvPr/>
+        </p:nvSpPr>
+        <p:spPr>
+          <a:xfrm>
+            <a:off x="3291840" y="1463040"/>
+            <a:ext cx="1261872" cy="502920"/>
           </a:xfrm>
           <a:prstGeom prst="rect">
             <a:avLst/>
@@ -4523,70 +4586,7 @@
                   <a:schemeClr val="tx2"/>
                 </a:solidFill>
               </a:rPr>
-              <a:t>전/후</a:t>
-            </a:r>
-            <a:endParaRPr lang="en-US" sz="1300" dirty="0"/>
-          </a:p>
-        </p:txBody>
-      </p:sp>
-      <p:sp>
-        <p:nvSpPr>
-          <p:cNvPr id="7" name="view-2"/>
-          <p:cNvSpPr/>
-          <p:nvPr/>
-        </p:nvSpPr>
-        <p:spPr>
-          <a:xfrm>
-            <a:off x="2962656" y="1463040"/>
-            <a:ext cx="1097280" cy="502920"/>
-          </a:xfrm>
-          <a:prstGeom prst="roundRect">
-            <a:avLst>
-              <a:gd name="adj" fmla="val 49091"/>
-            </a:avLst>
-          </a:prstGeom>
-          <a:solidFill>
-            <a:schemeClr val="bg2"/>
-          </a:solidFill>
-          <a:ln w="12700">
-            <a:solidFill>
-              <a:schemeClr val="bg2"/>
-            </a:solidFill>
-            <a:prstDash val="solid"/>
-          </a:ln>
-        </p:spPr>
-      </p:sp>
-      <p:sp>
-        <p:nvSpPr>
-          <p:cNvPr id="8" name="Text 6"/>
-          <p:cNvSpPr txBox="1"/>
-          <p:nvPr/>
-        </p:nvSpPr>
-        <p:spPr>
-          <a:xfrm>
-            <a:off x="2962656" y="1463040"/>
-            <a:ext cx="1097280" cy="502920"/>
-          </a:xfrm>
-          <a:prstGeom prst="rect">
-            <a:avLst/>
-          </a:prstGeom>
-          <a:noFill/>
-          <a:ln/>
-        </p:spPr>
-        <p:txBody>
-          <a:bodyPr wrap="square" lIns="0" tIns="0" rIns="0" bIns="0" rtlCol="0" anchor="ctr"/>
-          <a:lstStyle/>
-          <a:p>
-            <a:pPr algn="ctr" indent="0" marL="0">
-              <a:buNone/>
-            </a:pPr>
-            <a:r>
-              <a:rPr lang="en-US" sz="1300" b="1" dirty="0">
-                <a:solidFill>
-                  <a:schemeClr val="tx2"/>
-                </a:solidFill>
-              </a:rPr>
-              <a:t>diff</a:t>
+              <a:t>개념 모음</a:t>
             </a:r>
             <a:endParaRPr lang="en-US" sz="1300" dirty="0"/>
           </a:p>
@@ -4600,71 +4600,8 @@
         </p:nvSpPr>
         <p:spPr>
           <a:xfrm>
-            <a:off x="4169664" y="1463040"/>
-            <a:ext cx="1097280" cy="502920"/>
-          </a:xfrm>
-          <a:prstGeom prst="roundRect">
-            <a:avLst>
-              <a:gd name="adj" fmla="val 49091"/>
-            </a:avLst>
-          </a:prstGeom>
-          <a:solidFill>
-            <a:schemeClr val="bg2"/>
-          </a:solidFill>
-          <a:ln w="12700">
-            <a:solidFill>
-              <a:schemeClr val="bg2"/>
-            </a:solidFill>
-            <a:prstDash val="solid"/>
-          </a:ln>
-        </p:spPr>
-      </p:sp>
-      <p:sp>
-        <p:nvSpPr>
-          <p:cNvPr id="10" name="Text 8"/>
-          <p:cNvSpPr txBox="1"/>
-          <p:nvPr/>
-        </p:nvSpPr>
-        <p:spPr>
-          <a:xfrm>
-            <a:off x="4169664" y="1463040"/>
-            <a:ext cx="1097280" cy="502920"/>
-          </a:xfrm>
-          <a:prstGeom prst="rect">
-            <a:avLst/>
-          </a:prstGeom>
-          <a:noFill/>
-          <a:ln/>
-        </p:spPr>
-        <p:txBody>
-          <a:bodyPr wrap="square" lIns="0" tIns="0" rIns="0" bIns="0" rtlCol="0" anchor="ctr"/>
-          <a:lstStyle/>
-          <a:p>
-            <a:pPr algn="ctr" indent="0" marL="0">
-              <a:buNone/>
-            </a:pPr>
-            <a:r>
-              <a:rPr lang="en-US" sz="1300" b="1" dirty="0">
-                <a:solidFill>
-                  <a:schemeClr val="tx2"/>
-                </a:solidFill>
-              </a:rPr>
-              <a:t>개념 모음</a:t>
-            </a:r>
-            <a:endParaRPr lang="en-US" sz="1300" dirty="0"/>
-          </a:p>
-        </p:txBody>
-      </p:sp>
-      <p:sp>
-        <p:nvSpPr>
-          <p:cNvPr id="11" name="view-4"/>
-          <p:cNvSpPr/>
-          <p:nvPr/>
-        </p:nvSpPr>
-        <p:spPr>
-          <a:xfrm>
-            <a:off x="5376672" y="1463040"/>
-            <a:ext cx="1097280" cy="502920"/>
+            <a:off x="4663440" y="1463040"/>
+            <a:ext cx="1261872" cy="502920"/>
           </a:xfrm>
           <a:prstGeom prst="roundRect">
             <a:avLst>
@@ -4684,14 +4621,89 @@
       </p:sp>
       <p:sp>
         <p:nvSpPr>
+          <p:cNvPr id="10" name="Text 8"/>
+          <p:cNvSpPr txBox="1"/>
+          <p:nvPr/>
+        </p:nvSpPr>
+        <p:spPr>
+          <a:xfrm>
+            <a:off x="4663440" y="1463040"/>
+            <a:ext cx="1261872" cy="502920"/>
+          </a:xfrm>
+          <a:prstGeom prst="rect">
+            <a:avLst/>
+          </a:prstGeom>
+          <a:noFill/>
+          <a:ln/>
+        </p:spPr>
+        <p:txBody>
+          <a:bodyPr wrap="square" lIns="0" tIns="0" rIns="0" bIns="0" rtlCol="0" anchor="ctr"/>
+          <a:lstStyle/>
+          <a:p>
+            <a:pPr algn="ctr" indent="0" marL="0">
+              <a:buNone/>
+            </a:pPr>
+            <a:r>
+              <a:rPr lang="en-US" sz="1300" b="1" dirty="0">
+                <a:solidFill>
+                  <a:schemeClr val="bg1"/>
+                </a:solidFill>
+              </a:rPr>
+              <a:t>퀴즈</a:t>
+            </a:r>
+            <a:endParaRPr lang="en-US" sz="1300" dirty="0"/>
+          </a:p>
+        </p:txBody>
+      </p:sp>
+      <p:sp>
+        <p:nvSpPr>
+          <p:cNvPr id="11" name="Text 9"/>
+          <p:cNvSpPr txBox="1"/>
+          <p:nvPr/>
+        </p:nvSpPr>
+        <p:spPr>
+          <a:xfrm>
+            <a:off x="548640" y="2286000"/>
+            <a:ext cx="1097280" cy="438912"/>
+          </a:xfrm>
+          <a:prstGeom prst="rect">
+            <a:avLst/>
+          </a:prstGeom>
+          <a:noFill/>
+          <a:ln/>
+        </p:spPr>
+        <p:txBody>
+          <a:bodyPr wrap="square" lIns="0" tIns="0" rIns="0" bIns="0" rtlCol="0" anchor="ctr"/>
+          <a:lstStyle/>
+          <a:p>
+            <a:pPr indent="0" marL="0">
+              <a:buNone/>
+            </a:pPr>
+            <a:r>
+              <a:rPr lang="en-US" sz="1400" b="1" dirty="0">
+                <a:solidFill>
+                  <a:schemeClr val="accent4"/>
+                </a:solidFill>
+                <a:latin typeface="Courier New" pitchFamily="34" charset="0"/>
+                <a:ea typeface="Courier New" pitchFamily="34" charset="-122"/>
+                <a:cs typeface="Courier New" pitchFamily="34" charset="-120"/>
+              </a:rPr>
+              <a:t>−  +</a:t>
+            </a:r>
+            <a:endParaRPr lang="en-US" sz="1400" dirty="0"/>
+          </a:p>
+        </p:txBody>
+      </p:sp>
+      <p:sp>
+        <p:nvSpPr>
           <p:cNvPr id="12" name="Text 10"/>
           <p:cNvSpPr txBox="1"/>
           <p:nvPr/>
         </p:nvSpPr>
         <p:spPr>
           <a:xfrm>
-            <a:off x="5376672" y="1463040"/>
-            <a:ext cx="1097280" cy="502920"/>
+            <a:off x="1691640" y="2286000"/>
+            <a:ext cx="4434840" cy="438912"/>
           </a:xfrm>
           <a:prstGeom prst="rect">
             <a:avLst/>
@@ -4703,30 +4715,180 @@
           <a:bodyPr wrap="square" lIns="0" tIns="0" rIns="0" bIns="0" rtlCol="0" anchor="ctr"/>
           <a:lstStyle/>
           <a:p>
-            <a:pPr algn="ctr" indent="0" marL="0">
-              <a:buNone/>
-            </a:pPr>
-            <a:r>
-              <a:rPr lang="en-US" sz="1300" b="1" dirty="0">
-                <a:solidFill>
-                  <a:schemeClr val="bg1"/>
-                </a:solidFill>
-              </a:rPr>
-              <a:t>퀴즈</a:t>
-            </a:r>
-            <a:endParaRPr lang="en-US" sz="1300" dirty="0"/>
-          </a:p>
-        </p:txBody>
-      </p:sp>
-      <p:sp>
-        <p:nvSpPr>
-          <p:cNvPr id="13" name="key-v"/>
+            <a:pPr indent="0" marL="0">
+              <a:buNone/>
+            </a:pPr>
+            <a:r>
+              <a:rPr lang="en-US" sz="1400" dirty="0">
+                <a:solidFill>
+                  <a:schemeClr val="tx1"/>
+                </a:solidFill>
+              </a:rPr>
+              <a:t>바뀐 줄 앞에 표시합니다. 바뀌지 않은 줄은 흐리게</a:t>
+            </a:r>
+            <a:endParaRPr lang="en-US" sz="1400" dirty="0"/>
+          </a:p>
+        </p:txBody>
+      </p:sp>
+      <p:sp>
+        <p:nvSpPr>
+          <p:cNvPr id="13" name="Text 11"/>
+          <p:cNvSpPr txBox="1"/>
+          <p:nvPr/>
+        </p:nvSpPr>
+        <p:spPr>
+          <a:xfrm>
+            <a:off x="548640" y="2926080"/>
+            <a:ext cx="1097280" cy="438912"/>
+          </a:xfrm>
+          <a:prstGeom prst="rect">
+            <a:avLst/>
+          </a:prstGeom>
+          <a:noFill/>
+          <a:ln/>
+        </p:spPr>
+        <p:txBody>
+          <a:bodyPr wrap="square" lIns="0" tIns="0" rIns="0" bIns="0" rtlCol="0" anchor="ctr"/>
+          <a:lstStyle/>
+          <a:p>
+            <a:pPr indent="0" marL="0">
+              <a:buNone/>
+            </a:pPr>
+            <a:r>
+              <a:rPr lang="en-US" sz="1400" b="1" dirty="0">
+                <a:solidFill>
+                  <a:schemeClr val="accent1"/>
+                </a:solidFill>
+                <a:latin typeface="Courier New" pitchFamily="34" charset="0"/>
+                <a:ea typeface="Courier New" pitchFamily="34" charset="-122"/>
+                <a:cs typeface="Courier New" pitchFamily="34" charset="-120"/>
+              </a:rPr>
+              <a:t>굵게</a:t>
+            </a:r>
+            <a:endParaRPr lang="en-US" sz="1400" dirty="0"/>
+          </a:p>
+        </p:txBody>
+      </p:sp>
+      <p:sp>
+        <p:nvSpPr>
+          <p:cNvPr id="14" name="Text 12"/>
+          <p:cNvSpPr txBox="1"/>
+          <p:nvPr/>
+        </p:nvSpPr>
+        <p:spPr>
+          <a:xfrm>
+            <a:off x="1691640" y="2926080"/>
+            <a:ext cx="4434840" cy="438912"/>
+          </a:xfrm>
+          <a:prstGeom prst="rect">
+            <a:avLst/>
+          </a:prstGeom>
+          <a:noFill/>
+          <a:ln/>
+        </p:spPr>
+        <p:txBody>
+          <a:bodyPr wrap="square" lIns="0" tIns="0" rIns="0" bIns="0" rtlCol="0" anchor="ctr"/>
+          <a:lstStyle/>
+          <a:p>
+            <a:pPr indent="0" marL="0">
+              <a:buNone/>
+            </a:pPr>
+            <a:r>
+              <a:rPr lang="en-US" sz="1400" dirty="0">
+                <a:solidFill>
+                  <a:schemeClr val="tx1"/>
+                </a:solidFill>
+              </a:rPr>
+              <a:t>한 줄을 고친 것이면 그 줄에서 바뀐 낱말만 굵은 색으로 (var → let)</a:t>
+            </a:r>
+            <a:endParaRPr lang="en-US" sz="1400" dirty="0"/>
+          </a:p>
+        </p:txBody>
+      </p:sp>
+      <p:sp>
+        <p:nvSpPr>
+          <p:cNvPr id="15" name="Text 13"/>
+          <p:cNvSpPr txBox="1"/>
+          <p:nvPr/>
+        </p:nvSpPr>
+        <p:spPr>
+          <a:xfrm>
+            <a:off x="548640" y="3566160"/>
+            <a:ext cx="1097280" cy="438912"/>
+          </a:xfrm>
+          <a:prstGeom prst="rect">
+            <a:avLst/>
+          </a:prstGeom>
+          <a:noFill/>
+          <a:ln/>
+        </p:spPr>
+        <p:txBody>
+          <a:bodyPr wrap="square" lIns="0" tIns="0" rIns="0" bIns="0" rtlCol="0" anchor="ctr"/>
+          <a:lstStyle/>
+          <a:p>
+            <a:pPr indent="0" marL="0">
+              <a:buNone/>
+            </a:pPr>
+            <a:r>
+              <a:rPr lang="en-US" sz="1400" b="1" dirty="0">
+                <a:solidFill>
+                  <a:schemeClr val="accent3"/>
+                </a:solidFill>
+                <a:latin typeface="Courier New" pitchFamily="34" charset="0"/>
+                <a:ea typeface="Courier New" pitchFamily="34" charset="-122"/>
+                <a:cs typeface="Courier New" pitchFamily="34" charset="-120"/>
+              </a:rPr>
+              <a:t>전 후 예</a:t>
+            </a:r>
+            <a:endParaRPr lang="en-US" sz="1400" dirty="0"/>
+          </a:p>
+        </p:txBody>
+      </p:sp>
+      <p:sp>
+        <p:nvSpPr>
+          <p:cNvPr id="16" name="Text 14"/>
+          <p:cNvSpPr txBox="1"/>
+          <p:nvPr/>
+        </p:nvSpPr>
+        <p:spPr>
+          <a:xfrm>
+            <a:off x="1691640" y="3566160"/>
+            <a:ext cx="4434840" cy="438912"/>
+          </a:xfrm>
+          <a:prstGeom prst="rect">
+            <a:avLst/>
+          </a:prstGeom>
+          <a:noFill/>
+          <a:ln/>
+        </p:spPr>
+        <p:txBody>
+          <a:bodyPr wrap="square" lIns="0" tIns="0" rIns="0" bIns="0" rtlCol="0" anchor="ctr"/>
+          <a:lstStyle/>
+          <a:p>
+            <a:pPr indent="0" marL="0">
+              <a:buNone/>
+            </a:pPr>
+            <a:r>
+              <a:rPr lang="en-US" sz="1400" dirty="0">
+                <a:solidFill>
+                  <a:schemeClr val="tx1"/>
+                </a:solidFill>
+              </a:rPr>
+              <a:t>맨 위에 노트의 전 · 후 · 예가 다시 나옵니다</a:t>
+            </a:r>
+            <a:endParaRPr lang="en-US" sz="1400" dirty="0"/>
+          </a:p>
+        </p:txBody>
+      </p:sp>
+      <p:sp>
+        <p:nvSpPr>
+          <p:cNvPr id="17" name="key-v"/>
           <p:cNvSpPr/>
           <p:nvPr/>
         </p:nvSpPr>
         <p:spPr>
           <a:xfrm>
-            <a:off x="548640" y="2331720"/>
+            <a:off x="548640" y="4343400"/>
             <a:ext cx="384048" cy="384048"/>
           </a:xfrm>
           <a:prstGeom prst="roundRect">
@@ -4747,13 +4909,13 @@
       </p:sp>
       <p:sp>
         <p:nvSpPr>
-          <p:cNvPr id="14" name="Text 12"/>
-          <p:cNvSpPr txBox="1"/>
-          <p:nvPr/>
-        </p:nvSpPr>
-        <p:spPr>
-          <a:xfrm>
-            <a:off x="548640" y="2331720"/>
+          <p:cNvPr id="18" name="Text 16"/>
+          <p:cNvSpPr txBox="1"/>
+          <p:nvPr/>
+        </p:nvSpPr>
+        <p:spPr>
+          <a:xfrm>
+            <a:off x="548640" y="4343400"/>
             <a:ext cx="384048" cy="384048"/>
           </a:xfrm>
           <a:prstGeom prst="rect">
@@ -4786,14 +4948,14 @@
       </p:sp>
       <p:sp>
         <p:nvSpPr>
-          <p:cNvPr id="15" name="Text 13"/>
-          <p:cNvSpPr txBox="1"/>
-          <p:nvPr/>
-        </p:nvSpPr>
-        <p:spPr>
-          <a:xfrm>
-            <a:off x="1600200" y="2331720"/>
-            <a:ext cx="4480560" cy="384048"/>
+          <p:cNvPr id="19" name="Text 17"/>
+          <p:cNvSpPr txBox="1"/>
+          <p:nvPr/>
+        </p:nvSpPr>
+        <p:spPr>
+          <a:xfrm>
+            <a:off x="1143000" y="4343400"/>
+            <a:ext cx="4983480" cy="384048"/>
           </a:xfrm>
           <a:prstGeom prst="rect">
             <a:avLst/>
@@ -4809,26 +4971,26 @@
               <a:buNone/>
             </a:pPr>
             <a:r>
-              <a:rPr lang="en-US" sz="1500" dirty="0">
+              <a:rPr lang="en-US" sz="1350" dirty="0">
                 <a:solidFill>
                   <a:schemeClr val="tx1"/>
                 </a:solidFill>
               </a:rPr>
-              <a:t>다음 보기로: 노트 → 전/후 → diff → 개념 모음</a:t>
-            </a:r>
-            <a:endParaRPr lang="en-US" sz="1500" dirty="0"/>
-          </a:p>
-        </p:txBody>
-      </p:sp>
-      <p:sp>
-        <p:nvSpPr>
-          <p:cNvPr id="16" name="key-q"/>
+              <a:t>다음 보기로: 노트 → 전/후 → 개념 모음</a:t>
+            </a:r>
+            <a:endParaRPr lang="en-US" sz="1350" dirty="0"/>
+          </a:p>
+        </p:txBody>
+      </p:sp>
+      <p:sp>
+        <p:nvSpPr>
+          <p:cNvPr id="20" name="key-q"/>
           <p:cNvSpPr/>
           <p:nvPr/>
         </p:nvSpPr>
         <p:spPr>
           <a:xfrm>
-            <a:off x="548640" y="3044952"/>
+            <a:off x="548640" y="4910328"/>
             <a:ext cx="384048" cy="384048"/>
           </a:xfrm>
           <a:prstGeom prst="roundRect">
@@ -4849,13 +5011,13 @@
       </p:sp>
       <p:sp>
         <p:nvSpPr>
-          <p:cNvPr id="17" name="Text 15"/>
-          <p:cNvSpPr txBox="1"/>
-          <p:nvPr/>
-        </p:nvSpPr>
-        <p:spPr>
-          <a:xfrm>
-            <a:off x="548640" y="3044952"/>
+          <p:cNvPr id="21" name="Text 19"/>
+          <p:cNvSpPr txBox="1"/>
+          <p:nvPr/>
+        </p:nvSpPr>
+        <p:spPr>
+          <a:xfrm>
+            <a:off x="548640" y="4910328"/>
             <a:ext cx="384048" cy="384048"/>
           </a:xfrm>
           <a:prstGeom prst="rect">
@@ -4888,14 +5050,14 @@
       </p:sp>
       <p:sp>
         <p:nvSpPr>
-          <p:cNvPr id="18" name="Text 16"/>
-          <p:cNvSpPr txBox="1"/>
-          <p:nvPr/>
-        </p:nvSpPr>
-        <p:spPr>
-          <a:xfrm>
-            <a:off x="1600200" y="3044952"/>
-            <a:ext cx="4480560" cy="384048"/>
+          <p:cNvPr id="22" name="Text 20"/>
+          <p:cNvSpPr txBox="1"/>
+          <p:nvPr/>
+        </p:nvSpPr>
+        <p:spPr>
+          <a:xfrm>
+            <a:off x="1143000" y="4910328"/>
+            <a:ext cx="4983480" cy="384048"/>
           </a:xfrm>
           <a:prstGeom prst="rect">
             <a:avLst/>
@@ -4911,301 +5073,31 @@
               <a:buNone/>
             </a:pPr>
             <a:r>
-              <a:rPr lang="en-US" sz="1500" dirty="0">
+              <a:rPr lang="en-US" sz="1350" dirty="0">
                 <a:solidFill>
                   <a:schemeClr val="tx1"/>
                 </a:solidFill>
               </a:rPr>
-              <a:t>어디서든 퀴즈로</a:t>
-            </a:r>
-            <a:endParaRPr lang="en-US" sz="1500" dirty="0"/>
-          </a:p>
-        </p:txBody>
-      </p:sp>
-      <p:sp>
-        <p:nvSpPr>
-          <p:cNvPr id="19" name="key-p"/>
+              <a:t>어디서든 퀴즈로 · p n 이전 · 다음 노트 · w 다시 쓰기</a:t>
+            </a:r>
+            <a:endParaRPr lang="en-US" sz="1350" dirty="0"/>
+          </a:p>
+        </p:txBody>
+      </p:sp>
+      <p:sp>
+        <p:nvSpPr>
+          <p:cNvPr id="23" name="card"/>
           <p:cNvSpPr/>
           <p:nvPr/>
         </p:nvSpPr>
         <p:spPr>
           <a:xfrm>
-            <a:off x="548640" y="3758184"/>
-            <a:ext cx="384048" cy="384048"/>
+            <a:off x="548640" y="5486400"/>
+            <a:ext cx="5577840" cy="621792"/>
           </a:xfrm>
           <a:prstGeom prst="roundRect">
             <a:avLst>
-              <a:gd name="adj" fmla="val 14286"/>
-            </a:avLst>
-          </a:prstGeom>
-          <a:solidFill>
-            <a:schemeClr val="bg1"/>
-          </a:solidFill>
-          <a:ln w="15875">
-            <a:solidFill>
-              <a:srgbClr val="B9C7C2"/>
-            </a:solidFill>
-            <a:prstDash val="solid"/>
-          </a:ln>
-        </p:spPr>
-      </p:sp>
-      <p:sp>
-        <p:nvSpPr>
-          <p:cNvPr id="20" name="Text 18"/>
-          <p:cNvSpPr txBox="1"/>
-          <p:nvPr/>
-        </p:nvSpPr>
-        <p:spPr>
-          <a:xfrm>
-            <a:off x="548640" y="3758184"/>
-            <a:ext cx="384048" cy="384048"/>
-          </a:xfrm>
-          <a:prstGeom prst="rect">
-            <a:avLst/>
-          </a:prstGeom>
-          <a:noFill/>
-          <a:ln/>
-        </p:spPr>
-        <p:txBody>
-          <a:bodyPr wrap="square" lIns="0" tIns="0" rIns="0" bIns="0" rtlCol="0" anchor="ctr"/>
-          <a:lstStyle/>
-          <a:p>
-            <a:pPr algn="ctr" indent="0" marL="0">
-              <a:buNone/>
-            </a:pPr>
-            <a:r>
-              <a:rPr lang="en-US" sz="1500" b="1" dirty="0">
-                <a:solidFill>
-                  <a:schemeClr val="tx2"/>
-                </a:solidFill>
-                <a:latin typeface="Courier New" pitchFamily="34" charset="0"/>
-                <a:ea typeface="Courier New" pitchFamily="34" charset="-122"/>
-                <a:cs typeface="Courier New" pitchFamily="34" charset="-120"/>
-              </a:rPr>
-              <a:t>p</a:t>
-            </a:r>
-            <a:endParaRPr lang="en-US" sz="1500" dirty="0"/>
-          </a:p>
-        </p:txBody>
-      </p:sp>
-      <p:sp>
-        <p:nvSpPr>
-          <p:cNvPr id="21" name="key-n"/>
-          <p:cNvSpPr/>
-          <p:nvPr/>
-        </p:nvSpPr>
-        <p:spPr>
-          <a:xfrm>
-            <a:off x="1024128" y="3758184"/>
-            <a:ext cx="384048" cy="384048"/>
-          </a:xfrm>
-          <a:prstGeom prst="roundRect">
-            <a:avLst>
-              <a:gd name="adj" fmla="val 14286"/>
-            </a:avLst>
-          </a:prstGeom>
-          <a:solidFill>
-            <a:schemeClr val="bg1"/>
-          </a:solidFill>
-          <a:ln w="15875">
-            <a:solidFill>
-              <a:srgbClr val="B9C7C2"/>
-            </a:solidFill>
-            <a:prstDash val="solid"/>
-          </a:ln>
-        </p:spPr>
-      </p:sp>
-      <p:sp>
-        <p:nvSpPr>
-          <p:cNvPr id="22" name="Text 20"/>
-          <p:cNvSpPr txBox="1"/>
-          <p:nvPr/>
-        </p:nvSpPr>
-        <p:spPr>
-          <a:xfrm>
-            <a:off x="1024128" y="3758184"/>
-            <a:ext cx="384048" cy="384048"/>
-          </a:xfrm>
-          <a:prstGeom prst="rect">
-            <a:avLst/>
-          </a:prstGeom>
-          <a:noFill/>
-          <a:ln/>
-        </p:spPr>
-        <p:txBody>
-          <a:bodyPr wrap="square" lIns="0" tIns="0" rIns="0" bIns="0" rtlCol="0" anchor="ctr"/>
-          <a:lstStyle/>
-          <a:p>
-            <a:pPr algn="ctr" indent="0" marL="0">
-              <a:buNone/>
-            </a:pPr>
-            <a:r>
-              <a:rPr lang="en-US" sz="1500" b="1" dirty="0">
-                <a:solidFill>
-                  <a:schemeClr val="tx2"/>
-                </a:solidFill>
-                <a:latin typeface="Courier New" pitchFamily="34" charset="0"/>
-                <a:ea typeface="Courier New" pitchFamily="34" charset="-122"/>
-                <a:cs typeface="Courier New" pitchFamily="34" charset="-120"/>
-              </a:rPr>
-              <a:t>n</a:t>
-            </a:r>
-            <a:endParaRPr lang="en-US" sz="1500" dirty="0"/>
-          </a:p>
-        </p:txBody>
-      </p:sp>
-      <p:sp>
-        <p:nvSpPr>
-          <p:cNvPr id="23" name="Text 21"/>
-          <p:cNvSpPr txBox="1"/>
-          <p:nvPr/>
-        </p:nvSpPr>
-        <p:spPr>
-          <a:xfrm>
-            <a:off x="1600200" y="3758184"/>
-            <a:ext cx="4480560" cy="384048"/>
-          </a:xfrm>
-          <a:prstGeom prst="rect">
-            <a:avLst/>
-          </a:prstGeom>
-          <a:noFill/>
-          <a:ln/>
-        </p:spPr>
-        <p:txBody>
-          <a:bodyPr wrap="square" lIns="0" tIns="0" rIns="0" bIns="0" rtlCol="0" anchor="ctr"/>
-          <a:lstStyle/>
-          <a:p>
-            <a:pPr indent="0" marL="0">
-              <a:buNone/>
-            </a:pPr>
-            <a:r>
-              <a:rPr lang="en-US" sz="1500" dirty="0">
-                <a:solidFill>
-                  <a:schemeClr val="tx1"/>
-                </a:solidFill>
-              </a:rPr>
-              <a:t>이전 · 다음 노트 (지난 세션 노트까지)</a:t>
-            </a:r>
-            <a:endParaRPr lang="en-US" sz="1500" dirty="0"/>
-          </a:p>
-        </p:txBody>
-      </p:sp>
-      <p:sp>
-        <p:nvSpPr>
-          <p:cNvPr id="24" name="key-w"/>
-          <p:cNvSpPr/>
-          <p:nvPr/>
-        </p:nvSpPr>
-        <p:spPr>
-          <a:xfrm>
-            <a:off x="548640" y="4471416"/>
-            <a:ext cx="384048" cy="384048"/>
-          </a:xfrm>
-          <a:prstGeom prst="roundRect">
-            <a:avLst>
-              <a:gd name="adj" fmla="val 14286"/>
-            </a:avLst>
-          </a:prstGeom>
-          <a:solidFill>
-            <a:schemeClr val="bg1"/>
-          </a:solidFill>
-          <a:ln w="15875">
-            <a:solidFill>
-              <a:srgbClr val="B9C7C2"/>
-            </a:solidFill>
-            <a:prstDash val="solid"/>
-          </a:ln>
-        </p:spPr>
-      </p:sp>
-      <p:sp>
-        <p:nvSpPr>
-          <p:cNvPr id="25" name="Text 23"/>
-          <p:cNvSpPr txBox="1"/>
-          <p:nvPr/>
-        </p:nvSpPr>
-        <p:spPr>
-          <a:xfrm>
-            <a:off x="548640" y="4471416"/>
-            <a:ext cx="384048" cy="384048"/>
-          </a:xfrm>
-          <a:prstGeom prst="rect">
-            <a:avLst/>
-          </a:prstGeom>
-          <a:noFill/>
-          <a:ln/>
-        </p:spPr>
-        <p:txBody>
-          <a:bodyPr wrap="square" lIns="0" tIns="0" rIns="0" bIns="0" rtlCol="0" anchor="ctr"/>
-          <a:lstStyle/>
-          <a:p>
-            <a:pPr algn="ctr" indent="0" marL="0">
-              <a:buNone/>
-            </a:pPr>
-            <a:r>
-              <a:rPr lang="en-US" sz="1500" b="1" dirty="0">
-                <a:solidFill>
-                  <a:schemeClr val="tx2"/>
-                </a:solidFill>
-                <a:latin typeface="Courier New" pitchFamily="34" charset="0"/>
-                <a:ea typeface="Courier New" pitchFamily="34" charset="-122"/>
-                <a:cs typeface="Courier New" pitchFamily="34" charset="-120"/>
-              </a:rPr>
-              <a:t>w</a:t>
-            </a:r>
-            <a:endParaRPr lang="en-US" sz="1500" dirty="0"/>
-          </a:p>
-        </p:txBody>
-      </p:sp>
-      <p:sp>
-        <p:nvSpPr>
-          <p:cNvPr id="26" name="Text 24"/>
-          <p:cNvSpPr txBox="1"/>
-          <p:nvPr/>
-        </p:nvSpPr>
-        <p:spPr>
-          <a:xfrm>
-            <a:off x="1600200" y="4471416"/>
-            <a:ext cx="4480560" cy="384048"/>
-          </a:xfrm>
-          <a:prstGeom prst="rect">
-            <a:avLst/>
-          </a:prstGeom>
-          <a:noFill/>
-          <a:ln/>
-        </p:spPr>
-        <p:txBody>
-          <a:bodyPr wrap="square" lIns="0" tIns="0" rIns="0" bIns="0" rtlCol="0" anchor="ctr"/>
-          <a:lstStyle/>
-          <a:p>
-            <a:pPr indent="0" marL="0">
-              <a:buNone/>
-            </a:pPr>
-            <a:r>
-              <a:rPr lang="en-US" sz="1500" dirty="0">
-                <a:solidFill>
-                  <a:schemeClr val="tx1"/>
-                </a:solidFill>
-              </a:rPr>
-              <a:t>노트 다시 쓰기 (실패해도 원래 노트는 그대로)</a:t>
-            </a:r>
-            <a:endParaRPr lang="en-US" sz="1500" dirty="0"/>
-          </a:p>
-        </p:txBody>
-      </p:sp>
-      <p:sp>
-        <p:nvSpPr>
-          <p:cNvPr id="27" name="card"/>
-          <p:cNvSpPr/>
-          <p:nvPr/>
-        </p:nvSpPr>
-        <p:spPr>
-          <a:xfrm>
-            <a:off x="548640" y="5257800"/>
-            <a:ext cx="5577840" cy="841248"/>
-          </a:xfrm>
-          <a:prstGeom prst="roundRect">
-            <a:avLst>
-              <a:gd name="adj" fmla="val 10870"/>
+              <a:gd name="adj" fmla="val 14706"/>
             </a:avLst>
           </a:prstGeom>
           <a:solidFill>
@@ -5221,32 +5113,68 @@
       </p:sp>
       <p:sp>
         <p:nvSpPr>
-          <p:cNvPr id="28" name="badge-LuKeyboard"/>
-          <p:cNvSpPr/>
-          <p:nvPr/>
-        </p:nvSpPr>
-        <p:spPr>
-          <a:xfrm>
-            <a:off x="731520" y="5394960"/>
-            <a:ext cx="566928" cy="566928"/>
-          </a:xfrm>
-          <a:prstGeom prst="ellipse">
-            <a:avLst/>
-          </a:prstGeom>
-          <a:solidFill>
-            <a:schemeClr val="tx2"/>
-          </a:solidFill>
-          <a:ln w="12700">
-            <a:solidFill>
-              <a:schemeClr val="tx2"/>
-            </a:solidFill>
-            <a:prstDash val="solid"/>
-          </a:ln>
-        </p:spPr>
+          <p:cNvPr id="24" name="Text 22"/>
+          <p:cNvSpPr txBox="1"/>
+          <p:nvPr/>
+        </p:nvSpPr>
+        <p:spPr>
+          <a:xfrm>
+            <a:off x="731520" y="5486400"/>
+            <a:ext cx="5303520" cy="621792"/>
+          </a:xfrm>
+          <a:prstGeom prst="rect">
+            <a:avLst/>
+          </a:prstGeom>
+          <a:noFill/>
+          <a:ln/>
+        </p:spPr>
+        <p:txBody>
+          <a:bodyPr wrap="square" lIns="0" tIns="0" rIns="0" bIns="0" rtlCol="0" anchor="ctr"/>
+          <a:lstStyle/>
+          <a:p>
+            <a:pPr indent="0" marL="0">
+              <a:buNone/>
+            </a:pPr>
+            <a:r>
+              <a:rPr lang="en-US" sz="1300" dirty="0">
+                <a:solidFill>
+                  <a:schemeClr val="tx1"/>
+                </a:solidFill>
+              </a:rPr>
+              <a:t>단축키는 </a:t>
+            </a:r>
+            <a:pPr indent="0" marL="0">
+              <a:buNone/>
+            </a:pPr>
+            <a:r>
+              <a:rPr lang="en-US" sz="1300" b="1" dirty="0">
+                <a:solidFill>
+                  <a:schemeClr val="tx1"/>
+                </a:solidFill>
+                <a:latin typeface="Courier New" pitchFamily="34" charset="0"/>
+                <a:ea typeface="Courier New" pitchFamily="34" charset="-122"/>
+                <a:cs typeface="Courier New" pitchFamily="34" charset="-120"/>
+              </a:rPr>
+              <a:t>ctrl+x tab</a:t>
+            </a:r>
+            <a:pPr indent="0" marL="0">
+              <a:buNone/>
+            </a:pPr>
+            <a:r>
+              <a:rPr lang="en-US" sz="1300" dirty="0">
+                <a:solidFill>
+                  <a:schemeClr val="tx1"/>
+                </a:solidFill>
+              </a:rPr>
+              <a:t>으로 패널을 고른 뒤 누릅니다. 보기 이름은 클릭해도 됩니다.</a:t>
+            </a:r>
+            <a:endParaRPr lang="en-US" sz="1300" dirty="0"/>
+          </a:p>
+        </p:txBody>
       </p:sp>
       <p:pic>
         <p:nvPicPr>
-          <p:cNvPr id="29" name="icon-LuKeyboard" descr="LuKeyboard">    </p:cNvPr>
+          <p:cNvPr id="25" name="split-pane" descr="split-pane">    </p:cNvPr>
           <p:cNvPicPr>
             <a:picLocks noChangeAspect="1"/>
           </p:cNvPicPr>
@@ -5254,91 +5182,6 @@
         </p:nvPicPr>
         <p:blipFill>
           <a:blip r:embed="rId1"/>
-          <a:stretch>
-            <a:fillRect/>
-          </a:stretch>
-        </p:blipFill>
-        <p:spPr>
-          <a:xfrm>
-            <a:off x="867583" y="5531023"/>
-            <a:ext cx="294803" cy="294803"/>
-          </a:xfrm>
-          <a:prstGeom prst="rect">
-            <a:avLst/>
-          </a:prstGeom>
-        </p:spPr>
-      </p:pic>
-      <p:sp>
-        <p:nvSpPr>
-          <p:cNvPr id="30" name="Text 27"/>
-          <p:cNvSpPr txBox="1"/>
-          <p:nvPr/>
-        </p:nvSpPr>
-        <p:spPr>
-          <a:xfrm>
-            <a:off x="1463040" y="5257800"/>
-            <a:ext cx="4572000" cy="841248"/>
-          </a:xfrm>
-          <a:prstGeom prst="rect">
-            <a:avLst/>
-          </a:prstGeom>
-          <a:noFill/>
-          <a:ln/>
-        </p:spPr>
-        <p:txBody>
-          <a:bodyPr wrap="square" lIns="0" tIns="0" rIns="0" bIns="0" rtlCol="0" anchor="ctr"/>
-          <a:lstStyle/>
-          <a:p>
-            <a:pPr indent="0" marL="0">
-              <a:buNone/>
-            </a:pPr>
-            <a:r>
-              <a:rPr lang="en-US" sz="1350" dirty="0">
-                <a:solidFill>
-                  <a:schemeClr val="tx1"/>
-                </a:solidFill>
-              </a:rPr>
-              <a:t>단축키는 </a:t>
-            </a:r>
-            <a:pPr indent="0" marL="0">
-              <a:buNone/>
-            </a:pPr>
-            <a:r>
-              <a:rPr lang="en-US" sz="1350" b="1" dirty="0">
-                <a:solidFill>
-                  <a:schemeClr val="tx1"/>
-                </a:solidFill>
-                <a:latin typeface="Courier New" pitchFamily="34" charset="0"/>
-                <a:ea typeface="Courier New" pitchFamily="34" charset="-122"/>
-                <a:cs typeface="Courier New" pitchFamily="34" charset="-120"/>
-              </a:rPr>
-              <a:t>ctrl+x tab</a:t>
-            </a:r>
-            <a:pPr indent="0" marL="0">
-              <a:buNone/>
-            </a:pPr>
-            <a:r>
-              <a:rPr lang="en-US" sz="1350" dirty="0">
-                <a:solidFill>
-                  <a:schemeClr val="tx1"/>
-                </a:solidFill>
-              </a:rPr>
-              <a:t>으로 패널을 고른 뒤 누릅니다. 보기 이름은 클릭해도 됩니다.</a:t>
-            </a:r>
-            <a:endParaRPr lang="en-US" sz="1350" dirty="0"/>
-          </a:p>
-        </p:txBody>
-      </p:sp>
-      <p:pic>
-        <p:nvPicPr>
-          <p:cNvPr id="31" name="split-pane" descr="split-pane">    </p:cNvPr>
-          <p:cNvPicPr>
-            <a:picLocks noChangeAspect="1"/>
-          </p:cNvPicPr>
-          <p:nvPr/>
-        </p:nvPicPr>
-        <p:blipFill>
-          <a:blip r:embed="rId2"/>
           <a:stretch>
             <a:fillRect/>
           </a:stretch>
@@ -5476,12 +5319,12 @@
         </p:nvSpPr>
         <p:spPr>
           <a:xfrm>
-            <a:off x="548640" y="1463040"/>
-            <a:ext cx="731520" cy="731520"/>
+            <a:off x="548640" y="1417320"/>
+            <a:ext cx="658368" cy="658368"/>
           </a:xfrm>
           <a:prstGeom prst="roundRect">
             <a:avLst>
-              <a:gd name="adj" fmla="val 15000"/>
+              <a:gd name="adj" fmla="val 16667"/>
             </a:avLst>
           </a:prstGeom>
           <a:solidFill>
@@ -5503,8 +5346,8 @@
         </p:nvSpPr>
         <p:spPr>
           <a:xfrm>
-            <a:off x="548640" y="1463040"/>
-            <a:ext cx="731520" cy="731520"/>
+            <a:off x="548640" y="1417320"/>
+            <a:ext cx="658368" cy="658368"/>
           </a:xfrm>
           <a:prstGeom prst="rect">
             <a:avLst/>
@@ -5520,7 +5363,7 @@
               <a:buNone/>
             </a:pPr>
             <a:r>
-              <a:rPr lang="en-US" sz="2600" b="1" dirty="0">
+              <a:rPr lang="en-US" sz="2400" b="1" dirty="0">
                 <a:solidFill>
                   <a:schemeClr val="bg1"/>
                 </a:solidFill>
@@ -5530,7 +5373,7 @@
               </a:rPr>
               <a:t>t</a:t>
             </a:r>
-            <a:endParaRPr lang="en-US" sz="2600" dirty="0"/>
+            <a:endParaRPr lang="en-US" sz="2400" dirty="0"/>
           </a:p>
         </p:txBody>
       </p:sp>
@@ -5542,8 +5385,8 @@
         </p:nvSpPr>
         <p:spPr>
           <a:xfrm>
-            <a:off x="1508760" y="1444752"/>
-            <a:ext cx="4480560" cy="384048"/>
+            <a:off x="1417320" y="1380744"/>
+            <a:ext cx="4572000" cy="365760"/>
           </a:xfrm>
           <a:prstGeom prst="rect">
             <a:avLst/>
@@ -5559,14 +5402,14 @@
               <a:buNone/>
             </a:pPr>
             <a:r>
-              <a:rPr lang="en-US" sz="1800" b="1" dirty="0">
+              <a:rPr lang="en-US" sz="1700" b="1" dirty="0">
                 <a:solidFill>
                   <a:schemeClr val="tx2"/>
                 </a:solidFill>
               </a:rPr>
               <a:t>이 노트 퀴즈</a:t>
             </a:r>
-            <a:endParaRPr lang="en-US" sz="1800" dirty="0"/>
+            <a:endParaRPr lang="en-US" sz="1700" dirty="0"/>
           </a:p>
         </p:txBody>
       </p:sp>
@@ -5578,8 +5421,8 @@
         </p:nvSpPr>
         <p:spPr>
           <a:xfrm>
-            <a:off x="1508760" y="1847088"/>
-            <a:ext cx="4480560" cy="640080"/>
+            <a:off x="1417320" y="1746504"/>
+            <a:ext cx="4572000" cy="411480"/>
           </a:xfrm>
           <a:prstGeom prst="rect">
             <a:avLst/>
@@ -5595,14 +5438,14 @@
               <a:buNone/>
             </a:pPr>
             <a:r>
-              <a:rPr lang="en-US" sz="1400" dirty="0">
+              <a:rPr lang="en-US" sz="1350" dirty="0">
                 <a:solidFill>
                   <a:schemeClr val="tx1"/>
                 </a:solidFill>
               </a:rPr>
               <a:t>방금 읽은 노트의 개념만으로 문제를 받습니다</a:t>
             </a:r>
-            <a:endParaRPr lang="en-US" sz="1400" dirty="0"/>
+            <a:endParaRPr lang="en-US" sz="1350" dirty="0"/>
           </a:p>
         </p:txBody>
       </p:sp>
@@ -5614,12 +5457,12 @@
         </p:nvSpPr>
         <p:spPr>
           <a:xfrm>
-            <a:off x="548640" y="2697480"/>
-            <a:ext cx="731520" cy="731520"/>
+            <a:off x="548640" y="2350008"/>
+            <a:ext cx="658368" cy="658368"/>
           </a:xfrm>
           <a:prstGeom prst="roundRect">
             <a:avLst>
-              <a:gd name="adj" fmla="val 15000"/>
+              <a:gd name="adj" fmla="val 16667"/>
             </a:avLst>
           </a:prstGeom>
           <a:solidFill>
@@ -5641,8 +5484,8 @@
         </p:nvSpPr>
         <p:spPr>
           <a:xfrm>
-            <a:off x="548640" y="2697480"/>
-            <a:ext cx="731520" cy="731520"/>
+            <a:off x="548640" y="2350008"/>
+            <a:ext cx="658368" cy="658368"/>
           </a:xfrm>
           <a:prstGeom prst="rect">
             <a:avLst/>
@@ -5658,7 +5501,7 @@
               <a:buNone/>
             </a:pPr>
             <a:r>
-              <a:rPr lang="en-US" sz="2600" b="1" dirty="0">
+              <a:rPr lang="en-US" sz="2400" b="1" dirty="0">
                 <a:solidFill>
                   <a:schemeClr val="bg1"/>
                 </a:solidFill>
@@ -5668,7 +5511,7 @@
               </a:rPr>
               <a:t>e</a:t>
             </a:r>
-            <a:endParaRPr lang="en-US" sz="2600" dirty="0"/>
+            <a:endParaRPr lang="en-US" sz="2400" dirty="0"/>
           </a:p>
         </p:txBody>
       </p:sp>
@@ -5680,8 +5523,8 @@
         </p:nvSpPr>
         <p:spPr>
           <a:xfrm>
-            <a:off x="1508760" y="2679192"/>
-            <a:ext cx="4480560" cy="384048"/>
+            <a:off x="1417320" y="2313432"/>
+            <a:ext cx="4572000" cy="365760"/>
           </a:xfrm>
           <a:prstGeom prst="rect">
             <a:avLst/>
@@ -5697,14 +5540,14 @@
               <a:buNone/>
             </a:pPr>
             <a:r>
-              <a:rPr lang="en-US" sz="1800" b="1" dirty="0">
+              <a:rPr lang="en-US" sz="1700" b="1" dirty="0">
                 <a:solidFill>
                   <a:schemeClr val="tx2"/>
                 </a:solidFill>
               </a:rPr>
               <a:t>더 쉽게</a:t>
             </a:r>
-            <a:endParaRPr lang="en-US" sz="1800" dirty="0"/>
+            <a:endParaRPr lang="en-US" sz="1700" dirty="0"/>
           </a:p>
         </p:txBody>
       </p:sp>
@@ -5716,8 +5559,8 @@
         </p:nvSpPr>
         <p:spPr>
           <a:xfrm>
-            <a:off x="1508760" y="3081528"/>
-            <a:ext cx="4480560" cy="640080"/>
+            <a:off x="1417320" y="2679192"/>
+            <a:ext cx="4572000" cy="411480"/>
           </a:xfrm>
           <a:prstGeom prst="rect">
             <a:avLst/>
@@ -5733,31 +5576,169 @@
               <a:buNone/>
             </a:pPr>
             <a:r>
-              <a:rPr lang="en-US" sz="1400" dirty="0">
+              <a:rPr lang="en-US" sz="1350" dirty="0">
                 <a:solidFill>
                   <a:schemeClr val="tx1"/>
                 </a:solidFill>
               </a:rPr>
               <a:t>짧은 문장, 일상어, 개념마다 일상의 비유로 다시 씁니다</a:t>
             </a:r>
-            <a:endParaRPr lang="en-US" sz="1400" dirty="0"/>
-          </a:p>
-        </p:txBody>
-      </p:sp>
-      <p:sp>
-        <p:nvSpPr>
-          <p:cNvPr id="11" name="tool-i"/>
+            <a:endParaRPr lang="en-US" sz="1350" dirty="0"/>
+          </a:p>
+        </p:txBody>
+      </p:sp>
+      <p:sp>
+        <p:nvSpPr>
+          <p:cNvPr id="11" name="tool-r"/>
           <p:cNvSpPr/>
           <p:nvPr/>
         </p:nvSpPr>
         <p:spPr>
           <a:xfrm>
-            <a:off x="548640" y="3931920"/>
-            <a:ext cx="731520" cy="731520"/>
+            <a:off x="548640" y="3282696"/>
+            <a:ext cx="658368" cy="658368"/>
           </a:xfrm>
           <a:prstGeom prst="roundRect">
             <a:avLst>
-              <a:gd name="adj" fmla="val 15000"/>
+              <a:gd name="adj" fmla="val 16667"/>
+            </a:avLst>
+          </a:prstGeom>
+          <a:solidFill>
+            <a:schemeClr val="accent5"/>
+          </a:solidFill>
+          <a:ln w="12700">
+            <a:solidFill>
+              <a:schemeClr val="accent5"/>
+            </a:solidFill>
+            <a:prstDash val="solid"/>
+          </a:ln>
+        </p:spPr>
+      </p:sp>
+      <p:sp>
+        <p:nvSpPr>
+          <p:cNvPr id="12" name="Text 10"/>
+          <p:cNvSpPr txBox="1"/>
+          <p:nvPr/>
+        </p:nvSpPr>
+        <p:spPr>
+          <a:xfrm>
+            <a:off x="548640" y="3282696"/>
+            <a:ext cx="658368" cy="658368"/>
+          </a:xfrm>
+          <a:prstGeom prst="rect">
+            <a:avLst/>
+          </a:prstGeom>
+          <a:noFill/>
+          <a:ln/>
+        </p:spPr>
+        <p:txBody>
+          <a:bodyPr wrap="square" lIns="0" tIns="0" rIns="0" bIns="0" rtlCol="0" anchor="ctr"/>
+          <a:lstStyle/>
+          <a:p>
+            <a:pPr algn="ctr" indent="0" marL="0">
+              <a:buNone/>
+            </a:pPr>
+            <a:r>
+              <a:rPr lang="en-US" sz="2400" b="1" dirty="0">
+                <a:solidFill>
+                  <a:schemeClr val="bg1"/>
+                </a:solidFill>
+                <a:latin typeface="Courier New" pitchFamily="34" charset="0"/>
+                <a:ea typeface="Courier New" pitchFamily="34" charset="-122"/>
+                <a:cs typeface="Courier New" pitchFamily="34" charset="-120"/>
+              </a:rPr>
+              <a:t>r</a:t>
+            </a:r>
+            <a:endParaRPr lang="en-US" sz="2400" dirty="0"/>
+          </a:p>
+        </p:txBody>
+      </p:sp>
+      <p:sp>
+        <p:nvSpPr>
+          <p:cNvPr id="13" name="Text 11"/>
+          <p:cNvSpPr txBox="1"/>
+          <p:nvPr/>
+        </p:nvSpPr>
+        <p:spPr>
+          <a:xfrm>
+            <a:off x="1417320" y="3246120"/>
+            <a:ext cx="4572000" cy="365760"/>
+          </a:xfrm>
+          <a:prstGeom prst="rect">
+            <a:avLst/>
+          </a:prstGeom>
+          <a:noFill/>
+          <a:ln/>
+        </p:spPr>
+        <p:txBody>
+          <a:bodyPr wrap="square" lIns="0" tIns="0" rIns="0" bIns="0" rtlCol="0" anchor="t"/>
+          <a:lstStyle/>
+          <a:p>
+            <a:pPr indent="0" marL="0">
+              <a:buNone/>
+            </a:pPr>
+            <a:r>
+              <a:rPr lang="en-US" sz="1700" b="1" dirty="0">
+                <a:solidFill>
+                  <a:schemeClr val="tx2"/>
+                </a:solidFill>
+              </a:rPr>
+              <a:t>예시로 따라가기</a:t>
+            </a:r>
+            <a:endParaRPr lang="en-US" sz="1700" dirty="0"/>
+          </a:p>
+        </p:txBody>
+      </p:sp>
+      <p:sp>
+        <p:nvSpPr>
+          <p:cNvPr id="14" name="Text 12"/>
+          <p:cNvSpPr txBox="1"/>
+          <p:nvPr/>
+        </p:nvSpPr>
+        <p:spPr>
+          <a:xfrm>
+            <a:off x="1417320" y="3611880"/>
+            <a:ext cx="4572000" cy="411480"/>
+          </a:xfrm>
+          <a:prstGeom prst="rect">
+            <a:avLst/>
+          </a:prstGeom>
+          <a:noFill/>
+          <a:ln/>
+        </p:spPr>
+        <p:txBody>
+          <a:bodyPr wrap="square" lIns="0" tIns="0" rIns="0" bIns="0" rtlCol="0" anchor="t"/>
+          <a:lstStyle/>
+          <a:p>
+            <a:pPr indent="0" marL="0">
+              <a:buNone/>
+            </a:pPr>
+            <a:r>
+              <a:rPr lang="en-US" sz="1350" dirty="0">
+                <a:solidFill>
+                  <a:schemeClr val="tx1"/>
+                </a:solidFill>
+              </a:rPr>
+              <a:t>예시 입력 하나로 바뀐 코드를 한 단계씩, 변수 값과 함께</a:t>
+            </a:r>
+            <a:endParaRPr lang="en-US" sz="1350" dirty="0"/>
+          </a:p>
+        </p:txBody>
+      </p:sp>
+      <p:sp>
+        <p:nvSpPr>
+          <p:cNvPr id="15" name="tool-i"/>
+          <p:cNvSpPr/>
+          <p:nvPr/>
+        </p:nvSpPr>
+        <p:spPr>
+          <a:xfrm>
+            <a:off x="548640" y="4215384"/>
+            <a:ext cx="658368" cy="658368"/>
+          </a:xfrm>
+          <a:prstGeom prst="roundRect">
+            <a:avLst>
+              <a:gd name="adj" fmla="val 16667"/>
             </a:avLst>
           </a:prstGeom>
           <a:solidFill>
@@ -5773,14 +5754,14 @@
       </p:sp>
       <p:sp>
         <p:nvSpPr>
-          <p:cNvPr id="12" name="Text 10"/>
-          <p:cNvSpPr txBox="1"/>
-          <p:nvPr/>
-        </p:nvSpPr>
-        <p:spPr>
-          <a:xfrm>
-            <a:off x="548640" y="3931920"/>
-            <a:ext cx="731520" cy="731520"/>
+          <p:cNvPr id="16" name="Text 14"/>
+          <p:cNvSpPr txBox="1"/>
+          <p:nvPr/>
+        </p:nvSpPr>
+        <p:spPr>
+          <a:xfrm>
+            <a:off x="548640" y="4215384"/>
+            <a:ext cx="658368" cy="658368"/>
           </a:xfrm>
           <a:prstGeom prst="rect">
             <a:avLst/>
@@ -5796,7 +5777,7 @@
               <a:buNone/>
             </a:pPr>
             <a:r>
-              <a:rPr lang="en-US" sz="2600" b="1" dirty="0">
+              <a:rPr lang="en-US" sz="2400" b="1" dirty="0">
                 <a:solidFill>
                   <a:schemeClr val="bg1"/>
                 </a:solidFill>
@@ -5806,20 +5787,20 @@
               </a:rPr>
               <a:t>i</a:t>
             </a:r>
-            <a:endParaRPr lang="en-US" sz="2600" dirty="0"/>
-          </a:p>
-        </p:txBody>
-      </p:sp>
-      <p:sp>
-        <p:nvSpPr>
-          <p:cNvPr id="13" name="Text 11"/>
-          <p:cNvSpPr txBox="1"/>
-          <p:nvPr/>
-        </p:nvSpPr>
-        <p:spPr>
-          <a:xfrm>
-            <a:off x="1508760" y="3913632"/>
-            <a:ext cx="4480560" cy="384048"/>
+            <a:endParaRPr lang="en-US" sz="2400" dirty="0"/>
+          </a:p>
+        </p:txBody>
+      </p:sp>
+      <p:sp>
+        <p:nvSpPr>
+          <p:cNvPr id="17" name="Text 15"/>
+          <p:cNvSpPr txBox="1"/>
+          <p:nvPr/>
+        </p:nvSpPr>
+        <p:spPr>
+          <a:xfrm>
+            <a:off x="1417320" y="4178808"/>
+            <a:ext cx="4572000" cy="365760"/>
           </a:xfrm>
           <a:prstGeom prst="rect">
             <a:avLst/>
@@ -5835,27 +5816,27 @@
               <a:buNone/>
             </a:pPr>
             <a:r>
-              <a:rPr lang="en-US" sz="1800" b="1" dirty="0">
+              <a:rPr lang="en-US" sz="1700" b="1" dirty="0">
                 <a:solidFill>
                   <a:schemeClr val="tx2"/>
                 </a:solidFill>
               </a:rPr>
               <a:t>질문하기</a:t>
             </a:r>
-            <a:endParaRPr lang="en-US" sz="1800" dirty="0"/>
-          </a:p>
-        </p:txBody>
-      </p:sp>
-      <p:sp>
-        <p:nvSpPr>
-          <p:cNvPr id="14" name="Text 12"/>
-          <p:cNvSpPr txBox="1"/>
-          <p:nvPr/>
-        </p:nvSpPr>
-        <p:spPr>
-          <a:xfrm>
-            <a:off x="1508760" y="4315968"/>
-            <a:ext cx="4480560" cy="640080"/>
+            <a:endParaRPr lang="en-US" sz="1700" dirty="0"/>
+          </a:p>
+        </p:txBody>
+      </p:sp>
+      <p:sp>
+        <p:nvSpPr>
+          <p:cNvPr id="18" name="Text 16"/>
+          <p:cNvSpPr txBox="1"/>
+          <p:nvPr/>
+        </p:nvSpPr>
+        <p:spPr>
+          <a:xfrm>
+            <a:off x="1417320" y="4544568"/>
+            <a:ext cx="4572000" cy="411480"/>
           </a:xfrm>
           <a:prstGeom prst="rect">
             <a:avLst/>
@@ -5871,20 +5852,20 @@
               <a:buNone/>
             </a:pPr>
             <a:r>
-              <a:rPr lang="en-US" sz="1400" dirty="0">
+              <a:rPr lang="en-US" sz="1350" dirty="0">
                 <a:solidFill>
                   <a:schemeClr val="tx1"/>
                 </a:solidFill>
               </a:rPr>
               <a:t>노트 아래 질문칸에 적고 Enter. 이어서 물으면 앞의 답을 읽고 답합니다</a:t>
             </a:r>
-            <a:endParaRPr lang="en-US" sz="1400" dirty="0"/>
-          </a:p>
-        </p:txBody>
-      </p:sp>
-      <p:sp>
-        <p:nvSpPr>
-          <p:cNvPr id="15" name="card"/>
+            <a:endParaRPr lang="en-US" sz="1350" dirty="0"/>
+          </a:p>
+        </p:txBody>
+      </p:sp>
+      <p:sp>
+        <p:nvSpPr>
+          <p:cNvPr id="19" name="card"/>
           <p:cNvSpPr/>
           <p:nvPr/>
         </p:nvSpPr>
@@ -5911,7 +5892,7 @@
       </p:sp>
       <p:sp>
         <p:nvSpPr>
-          <p:cNvPr id="16" name="Text 14"/>
+          <p:cNvPr id="20" name="Text 18"/>
           <p:cNvSpPr txBox="1"/>
           <p:nvPr/>
         </p:nvSpPr>
@@ -5958,7 +5939,7 @@
       </p:sp>
       <p:pic>
         <p:nvPicPr>
-          <p:cNvPr id="17" name="ask-pane" descr="ask-pane">    </p:cNvPr>
+          <p:cNvPr id="21" name="trace-pane" descr="trace-pane">    </p:cNvPr>
           <p:cNvPicPr>
             <a:picLocks noChangeAspect="1"/>
           </p:cNvPicPr>
@@ -11738,7 +11719,7 @@
                   <a:srgbClr val="5A6B70"/>
                 </a:solidFill>
               </a:rPr>
-              <a:t>/learn help에 "질문하기"가 보이면 1.4.0입니다.</a:t>
+              <a:t>/learn help에 "예시로 따라가기"가 보이면 1.5.0입니다.</a:t>
             </a:r>
             <a:endParaRPr lang="en-US" sz="1300" dirty="0"/>
           </a:p>
@@ -12806,7 +12787,7 @@
                   <a:schemeClr val="tx1"/>
                 </a:solidFill>
               </a:rPr>
-              <a:t>낯선 개념은 노트 아래에서 i로 질문, 어려우면 e로 더 쉽게. 흐름이 끊기지 않습니다.</a:t>
+              <a:t>낯선 개념은 i로 질문, 코드 흐름은 r로 따라가기, 어려우면 e로 더 쉽게. 흐름이 끊기지 않습니다.</a:t>
             </a:r>
             <a:endParaRPr lang="en-US" sz="1400" dirty="0"/>
           </a:p>

--- a/docs/team/learn-notes-intro.pptx
+++ b/docs/team/learn-notes-intro.pptx
@@ -27,9 +27,10 @@
     <p:sldId id="275" r:id="rId21"/>
     <p:sldId id="276" r:id="rId22"/>
     <p:sldId id="277" r:id="rId23"/>
+    <p:sldId id="278" r:id="rId24"/>
   </p:sldIdLst>
   <p:notesMasterIdLst>
-    <p:notesMasterId r:id="rId24"/>
+    <p:notesMasterId r:id="rId25"/>
   </p:notesMasterIdLst>
   <p:sldSz cx="12192000" cy="6858000"/>
   <p:notesSz cx="6858000" cy="12192000"/>
@@ -128,14 +129,14 @@
   <p:extLst>
     <p:ext uri="{521415D9-36F7-43E2-AB2F-B90AF26B5E84}">
       <p14:sectionLst xmlns:p14="http://schemas.microsoft.com/office/powerpoint/2010/main">
-        <p14:section name="시작" id="{6949afa2-fb54-d9a6-fd1c-b35037d8f716}">
+        <p14:section name="시작" id="{f5e06f3a-3ac5-0f87-6e55-016615831c66}">
           <p14:sldIdLst>
             <p14:sldId id="256"/>
             <p14:sldId id="257"/>
             <p14:sldId id="258"/>
           </p14:sldIdLst>
         </p14:section>
-        <p14:section name="모드(MOD)란?" id="{ea92f561-f0d1-673a-b8fc-a053dc6126a4}">
+        <p14:section name="모드(MOD)란?" id="{d1c828cf-78e1-7c9c-4b3c-55f659f138ba}">
           <p14:sldIdLst>
             <p14:sldId id="259"/>
             <p14:sldId id="260"/>
@@ -144,7 +145,7 @@
             <p14:sldId id="263"/>
           </p14:sldIdLst>
         </p14:section>
-        <p14:section name="learn-notes 기능" id="{4d966fac-e731-3478-52b8-8f65b26e2531}">
+        <p14:section name="learn-notes 기능" id="{32ddf522-e112-9c65-9660-f819c5ba2548}">
           <p14:sldIdLst>
             <p14:sldId id="264"/>
             <p14:sldId id="265"/>
@@ -157,17 +158,18 @@
             <p14:sldId id="272"/>
           </p14:sldIdLst>
         </p14:section>
-        <p14:section name="시작하기" id="{9c75ba56-2aa2-1def-7ab2-871bfc5c3d9d}">
+        <p14:section name="시작하기" id="{ff28516c-b347-4ff5-efc7-2223ab4a18e2}">
           <p14:sldIdLst>
             <p14:sldId id="273"/>
             <p14:sldId id="274"/>
             <p14:sldId id="275"/>
             <p14:sldId id="276"/>
+            <p14:sldId id="277"/>
           </p14:sldIdLst>
         </p14:section>
-        <p14:section name="마무리" id="{a2748d8a-0273-218e-7c0f-63ee88992182}">
+        <p14:section name="마무리" id="{cf34337b-1dd0-0d39-c020-d7e8ef3a3266}">
           <p14:sldIdLst>
-            <p14:sldId id="277"/>
+            <p14:sldId id="278"/>
           </p14:sldIdLst>
         </p14:section>
       </p14:sectionLst>
@@ -574,7 +576,7 @@
           <a:p>
             <a:r>
               <a:rPr lang="en-US" dirty="0"/>
-              <a:t>안녕하세요. 오늘은 Claude Code로 코딩하면서 배운 것을 남겨 주는 모드, learn-notes를 소개합니다. 오른쪽은 실제 패널 화면이고, 노트 글은 작은 모델(haiku)이 실제로 쓴 글입니다. 먼저 모드가 무엇인지 짚고, 기능을 보고, 마지막에 설치하는 법을 안내하겠습니다.</a:t>
+              <a:t>안녕하세요. 오늘은 Claude Code로 코딩하면서 배운 것을 남겨 주는 모드, learn-notes를 소개합니다. 오른쪽은 실제 패널 화면이고, 노트 글은 작은 모델(haiku)이 실제로 쓴 글입니다. 먼저 모드가 무엇인지 짚고, 기능을 보고, 마지막에 설치하는 법과 팀으로 쓰는 법을 안내하겠습니다.</a:t>
             </a:r>
             <a:endParaRPr lang="en-US" dirty="0"/>
           </a:p>
@@ -662,7 +664,7 @@
           <a:p>
             <a:r>
               <a:rPr lang="en-US" dirty="0"/>
-              <a:t>Claude가 파일을 고친 턴이 끝나면 몇 초 안에 이런 노트가 뜹니다. 다섯 칸으로 짧게, 350단어 안쪽으로 씁니다. 무엇이 바뀌었나는 코드 설명 대신 전에 하던 일, 이제 하는 일, 그 차이가 드러나는 예시를 한 줄씩 보여 줘서 한눈에 들어옵니다. 배울 개념은 이미 배운 이름을 재사용해서, 같은 개념은 같은 이름으로 쌓이고 "(복습)"이 붙습니다. 설명 수준은 설정에서 입문·중급·숙련으로 고를 수 있습니다.</a:t>
+              <a:t>Claude가 파일을 고친 턴이 끝나면 몇 초 안에 이런 노트가 뜹니다. 다섯 칸으로 짧게, 350단어 안쪽으로 씁니다. 무엇이 바뀌었나는 코드 설명 대신 세 줄입니다. 빨간 전은 코드가 하던 일, 초록 후는 이제 하는 일, 하늘색 예는 그 차이가 드러나는 입력 하나와 결과입니다. 왜 이렇게 바꿨을까는 요청과 바뀐 코드를 근거로 쓰고, 저장소에 팀 규칙 파일이 있으면 바뀐 코드와 직접 닿을 때만 팀 규칙 한 줄이 붙습니다. 배울 개념은 이미 배운 이름을 그대로 써서, 같은 개념은 같은 이름으로 쌓이고 "(복습)"이 붙습니다. 1.6.0부터 아는 개념으로 표시했거나 졸업한 개념은 다시 가르치지 않고, 퀴즈로 3단계 이상 익힌 개념은 (복습) 한 줄로만 짚어 자리를 새 개념에 줍니다. 설명 수준은 설정에서 입문·중급·숙련으로 고를 수 있습니다.</a:t>
             </a:r>
             <a:endParaRPr lang="en-US" dirty="0"/>
           </a:p>
@@ -750,7 +752,7 @@
           <a:p>
             <a:r>
               <a:rPr lang="en-US" dirty="0"/>
-              <a:t>v를 누르면 전/후 보기로 갑니다. 바뀐 곳마다 원래 코드와 바뀐 코드를 줄 번호 그대로 놓는데, 바뀌지 않은 줄은 흐리게, 바뀐 줄은 마이너스와 플러스로 표시하고, 한 줄을 고친 것이면 그 줄에서 바뀐 낱말만 굵은 색으로 칠합니다. 오른쪽 화면에서 var가 let으로, for 반복이 for...of로 바뀐 부분만 칠해진 것을 볼 수 있습니다. 맨 위에는 노트의 전, 후, 예가 다시 나와서 코드를 읽기 전에 무엇이 달라졌는지 먼저 잡고 갑니다. 보기는 노트, 전/후, 개념 모음 셋을 v로 돌고, q는 어디서든 퀴즈입니다.</a:t>
+              <a:t>2를 누르면 전/후 보기로 갑니다. 바뀐 곳마다 원래 코드와 바뀐 코드를 줄 번호 그대로 놓는데, 바뀌지 않은 줄은 흐리게, 바뀐 줄은 마이너스와 플러스로 표시하고, 한 줄을 고친 것이면 그 줄에서 바뀐 낱말만 굵은 색으로 칠합니다. 맨 위에는 노트의 전, 후, 예가 다시 나와서 코드를 읽기 전에 무엇이 달라졌는지 먼저 잡고 갑니다. 1.6.0부터 보기는 숫자로 고정입니다. 1 노트, 2 전/후, 3 개념 모음, 4 퀴즈이고, 예전의 v는 없어졌습니다. 숫자는 한/영 상태와 상관없이 눌려서, 한글로 대화하다가도 바로 쓸 수 있습니다. q는 이제 오늘 복습을 바로 시작하는 키로, 복습할 개념이 있을 때 보기 줄 끝에 노란 점과 함께 보입니다. /learn은 패널만 열고 키는 대화 입력칸에 둡니다. 이어서 친 글자가 패널의 키로 눌리지 않게 하려는 것입니다. 패널의 키를 쓰려면 ctrl+x tab을 누르거나 패널을 클릭하고, 그러면 보기 줄 아래에 "Esc: 대화로 돌아가기"가 보입니다. Esc는 패널을 닫지 않고 키만 대화로 돌려줍니다. 오늘 복습은 /learn 복습 한 번이면 패널이 퀴즈로 열리고 커서가 답 칸에 있습니다. q, p 같은 글자 키는 영문 상태에서 눌러야 합니다. 한글 상태면 q가 ㅂ으로 들어갑니다.</a:t>
             </a:r>
             <a:endParaRPr lang="en-US" dirty="0"/>
           </a:p>
@@ -838,7 +840,7 @@
           <a:p>
             <a:r>
               <a:rPr lang="en-US" dirty="0"/>
-              <a:t>노트를 읽다 궁금한 게 생기면 그 자리에서 이어 갑니다. t는 이 노트의 개념만으로 퀴즈, e는 더 쉬운 말로 다시 쓰기, r은 예시로 따라가기, i는 질문하기입니다. 오른쪽은 r을 누른 실제 답으로, 주문 두 개를 예로 들어 n 값이 0, 1, 1로 바뀌는 과정을 따라가고 이전 코드라면 2가 나온다고 짚어 줍니다. 답은 노트 아래와 일지에 남고, 이어서 물으면 앞의 답을 읽고 답합니다.</a:t>
+              <a:t>노트를 읽다 궁금한 게 생기면 노트 맨 아래 "이 노트로" 줄에서 이어 갑니다. t는 이 노트 퀴즈입니다. 방금 읽은 노트의 코드로 결과를 맞히는 예측 문제와 코드를 바꿔 보는 문제만 내고, 노트에 적힌 정의를 그대로 되묻지 않습니다. e는 더 쉽게입니다. 1.6.0부터 원래 노트를 덮어쓰지 않고, 노트 아래에 "▶ 더 쉽게"로 쉬운 말과 일상의 비유를 넣은 설명을 덧붙입니다. 설정한 설명 수준과 상관없이 입문자 기준이라, 원래 노트와 나란히 견주어 읽으면 됩니다. r은 예시로 따라가기, i는 질문하기입니다. 오른쪽은 r을 누른 답으로, 예시 입력 하나로 변수 값이 바뀌는 과정을 따라가고 이전 코드라면 어디서 결과가 갈리는지 짚어 줍니다. 답은 노트 아래와 일지에 남고, 이어서 물으면 앞의 답을 읽고 답합니다. e, r, 질문은 할 때마다 모델 호출 한 번이고, 개념 수는 바뀌지 않습니다. 노트를 처음부터 다시 쓰는 w는 이 줄 끝에 흐리게 있습니다.</a:t>
             </a:r>
             <a:endParaRPr lang="en-US" dirty="0"/>
           </a:p>
@@ -926,7 +928,7 @@
           <a:p>
             <a:r>
               <a:rPr lang="en-US" dirty="0"/>
-              <a:t>퀴즈는 q로 열고 s로 받습니다. 일반적인 예제가 아니라, 그 개념을 처음 배운 노트의 내 코드로 묻는 게 특징입니다. 오른쪽은 장바구니 코드로 낸 실제 문제와 힌트입니다. 답을 적고 Enter를 누르면 Claude가 채점하고, 정답만 보고 스스로 채점해도 됩니다.</a:t>
+              <a:t>퀴즈는 /learn 복습으로 바로 시작합니다. 패널이 퀴즈로 열리고 커서가 답 칸에 있습니다. 패널에서는 오늘 복습할 개념이 있을 때 보기 줄 끝에 "q: 복습 n개"가 보이고, q를 누르면 퀴즈 보기로 가서 풀던 문제가 없으면 바로 새 문제를 받습니다. 4로 퀴즈 보기를 열고 s로 받아도 됩니다. 일반적인 예제가 아니라 그 개념을 배운 노트의 내 코드로 묻는 게 특징이고, 세 문제는 되도록 서로 다른 노트에서 고릅니다. 문제 제목에는 유형이 붙습니다. 예측은 코드를 보고 출력이나 값을 맞히고, 왜는 어떤 줄을 빼거나 바꾸면 어떻게 되는지, 왜 그렇게 썼는지 묻고, 바꿔 보기는 바라는 동작이 되게 어느 줄을 어떻게 바꿀지 묻습니다. 문제가 나오면 커서가 이미 내 답 칸에 있습니다. 답을 적고 Enter를 누르면 채점되고, 커서는 다음 문제 칸으로, 마지막 문제 뒤에는 새 문제 받기로 갑니다. 그래서 한/영을 바꾸지 않고 한글로 답을 적으며 이어 풀 수 있습니다. 다만 커서가 답 칸에 있는 동안 글자 키는 답으로 들어가므로, 힌트나 정답은 Tab으로 버튼에 간 뒤 누르거나 마우스로 누릅니다. 풀던 문제가 남았을 때 s는 한 번 더 눌러야 새 문제를 받아서, 실수로 퀴즈를 버리지 않습니다. 막히면 먼저 h로 힌트를 보고, 그래도 모르면 a로 정답을 본 뒤 o, x로 스스로 채점합니다. Claude가 틀림이나 거의 맞음으로 채점한 문제 아래에는 n이 나와서, 그 개념을 배운 노트로 바로 가 r로 코드를 따라가 볼 수 있습니다.</a:t>
             </a:r>
             <a:endParaRPr lang="en-US" dirty="0"/>
           </a:p>
@@ -1014,7 +1016,7 @@
           <a:p>
             <a:r>
               <a:rPr lang="en-US" dirty="0"/>
-              <a:t>왼쪽은 "sum에 더하는 거요"라고 답한 실제 채점 화면입니다. Claude가 거의 맞음으로 보고 "더한 결과를 다시 저장한다"는 부분이 빠졌다고 짚었습니다. 판정은 맞힘, 거의 맞음, 틀림 세 가지이고, 그에 따라 다음 복습 시기가 바뀝니다. 채점이 이상하면 f로 바꿀 수 있고, 복습 단계도 처음부터 그렇게 채점한 것처럼 돌아갑니다.</a:t>
+              <a:t>왼쪽은 답을 적고 Enter를 눌러 Claude가 채점한 화면입니다. 거의 맞음이면 무엇이 빠졌는지 한두 문장으로 짚어 줍니다. 판정은 맞힘, 거의 맞음, 틀림 세 가지이고, 그에 따라 다음 복습 시기가 바뀝니다. 표현이 달라도 뜻이 같으면 맞힘입니다. 예측 문제는 값이 같으면 설명이 없어도 맞힘이고, 바꿔 보기는 정답과 다른 코드여도 바라는 대로 동작하면 맞힘입니다. 힌트를 봤으면 결과 줄에 "힌트 봄"이, 정답을 보고 맞힘으로 채점했으면 "정답 봄"이 붙습니다. 채점이 이상하면 f로 맞힘과 틀림을 바꿀 수 있고, 복습 단계도 처음부터 그렇게 채점한 것처럼 돌아갑니다.</a:t>
             </a:r>
             <a:endParaRPr lang="en-US" dirty="0"/>
           </a:p>
@@ -1102,7 +1104,7 @@
           <a:p>
             <a:r>
               <a:rPr lang="en-US" dirty="0"/>
-              <a:t>간격 반복은 잊을 때쯤 다시 보여 주는 학습법입니다. 맞힐 때마다 1일, 3일, 7일, 14일, 30일, 60일로 간격이 늘어납니다. 틀린 개념은 바로 다음 퀴즈 맨 앞에 나옵니다. 복습할 개념이 생기면 상태줄에 개수가 떠서, 따로 챙기지 않아도 됩니다.</a:t>
+              <a:t>간격 반복은 잊을 때쯤 다시 보여 주는 학습법입니다. 맞힐 때마다 1일, 3일, 7일, 14일, 30일, 60일로 간격이 늘어납니다. 1.6.0부터는 직접 떠올린 것만 복습으로 칩니다. 때가 된 개념을 답을 직접 적어 맞혀야 한 칸 오르고, 힌트나 정답을 보고 맞히면 단계는 그대로이고 같은 간격 뒤에 다시 나옵니다. 노트에서 그 개념을 다시 만난 것은 복습 날짜를 바꾸지 않습니다. 거의 맞으면 한 칸 내려가고, 틀리면 처음 단계로 돌아가 다음 퀴즈 맨 앞에 나옵니다. 순서는 틀린 개념, 퀴즈로 본 개념, 최근 배운 개념입니다. 하루 복습은 10문제까지만 셉니다. 복습할 개념이 있으면 프롬프트 아래 상태줄에 "학습 노트 · 오늘 복습 3개 · /learn 복습"이 뜨고, 10문제를 채점하면 상태줄이 내려갑니다. 60일 단계에서 때가 되어 또 맞히면 졸업해서 아는 개념이 됩니다. 아는 개념은 복습과 퀴즈에서 빠지고 다음 노트에서 다시 가르치지 않습니다. 이미 아는 개념은 /learn 안다 뒤에 이름을 적어 바로 뺄 수 있고, /learn 모른다로 되돌립니다. 업그레이드한 날에는 퀴즈를 본 적 없는 예전 개념이 한꺼번에 때가 되어 복습할 개념이 늘 수 있지만, 상태줄은 하루 10개까지만 셉니다.</a:t>
             </a:r>
             <a:endParaRPr lang="en-US" dirty="0"/>
           </a:p>
@@ -1190,7 +1192,7 @@
           <a:p>
             <a:r>
               <a:rPr lang="en-US" dirty="0"/>
-              <a:t>배운 개념은 프로젝트를 넘어 한 목록에 모입니다. 몇 번 만났는지, 다음 복습은 언제인지, 어느 노트에서 나왔는지까지 보입니다. /learn recap은 하루나 한 주를 네 칸으로 정리하고, /learn stats는 연속 학습일과 정답률을 보여 줍니다. Anki로 내보내면 휴대폰에서도 복습할 수 있습니다.</a:t>
+              <a:t>배운 개념은 프로젝트를 넘어 한 목록에 모입니다. 3을 누르면 개념 모음이고, 맨 위에 배운 개념 수, 최근 7일 새로 배운 수, 연속 학습일, 퀴즈 정답 수가 한 줄로 나옵니다. 개념마다 몇 번 만났는지, 아직 떠올려 본 적이 없는지 다음 복습이 언제인지, 어느 노트에서 나왔는지까지 보입니다. /learn 정리는 하루나 한 주를 한 일, 핵심 개념, 헷갈리기 쉬운 것, 다음에 해 볼 것 네 칸으로 정리하는데, 헷갈리기 쉬운 것은 짐작 대신 그 기간에 퀴즈에서 틀린 개념부터 씁니다. 1.6.0부터 통계와 개념 목록은 /learn 기록 하나로 합쳐졌고, 맨 아래에 학습 노트의 모델 호출 수도 나옵니다. 하위 명령을 몰라도 대화창에 그냥 물으면 Claude가 읽기 전용 학습 기록 도구로 내 노트를 읽고 답합니다. Anki로 내보내면 휴대폰에서도 복습할 수 있습니다.</a:t>
             </a:r>
             <a:endParaRPr lang="en-US" dirty="0"/>
           </a:p>
@@ -1278,7 +1280,7 @@
           <a:p>
             <a:r>
               <a:rPr lang="en-US" dirty="0"/>
-              <a:t>명령은 /learn 하나에 하위 명령을 붙입니다. 패널이 안 보이는 클라우드 세션이나 모바일에서도 명령만으로 퀴즈를 받고 채점받고 질문할 수 있습니다. 한글로 /learn 퀴즈처럼 써도 됩니다.</a:t>
+              <a:t>명령은 /learn 하나에 하위 명령을 붙입니다. 1.6.0부터 도움말은 한글 명령 위주로 짧아졌고, 예전 영어 이름도 그대로 됩니다. /learn 퀴즈는 풀던 문제가 남아 있으면 모델을 부르지 않고 그 퀴즈를 다시 보여 주고, 새 문제는 /learn 퀴즈 새로로 받습니다. 번호 없이 답만 적으면 아직 안 푼 첫 문제로 채점합니다. 통계와 개념 목록은 /learn 기록 하나로 합쳐졌습니다. 패널이 안 보이는 클라우드 세션이나 모바일에서도 명령만으로 퀴즈를 받고 채점받고 질문할 수 있습니다. 자주 안 쓰는 것은 도움말 맨 끝 "가끔" 줄에 있습니다.</a:t>
             </a:r>
             <a:endParaRPr lang="en-US" dirty="0"/>
           </a:p>
@@ -1454,7 +1456,7 @@
           <a:p>
             <a:r>
               <a:rPr lang="en-US" dirty="0"/>
-              <a:t>설치는 Claude Code 안에서 두 줄입니다. 다시 시작한 뒤 /tui fullscreen으로 전체 화면을 켜고 /learn으로 패널을 엽니다. 그다음은 평소처럼 코딩을 요청하면 됩니다. Windows에서는 작업할 폴더에서 Claude Code를 켜는 것만 기억해 주세요.</a:t>
+              <a:t>설치는 Claude Code 안에서 두 줄입니다. 처음 설치한 세션에서는 "learn-notes가 켜졌습니다" 알림이 한 번 뜹니다. 다시 시작한 뒤 /tui fullscreen으로 전체 화면을 켜고 /learn으로 패널을 엽니다. 패널의 키는 ctrl+x tab이나 클릭으로 옮기고, Esc를 누르면 대화 입력칸으로 돌아갑니다. 오늘 복습은 /learn 복습입니다. 그다음은 평소처럼 코딩을 요청하면 됩니다. 숫자 1부터 4는 한/영 상태와 상관없이 눌리지만, q 같은 글자 키는 영문 상태에서 눌러야 합니다. Windows에서는 작업할 폴더에서 Claude Code를 켜는 것만 기억해 주세요. 이미 설치한 분은 /plugin에서 Update를 누른 뒤 /reload-plugins를 하고, /learn help에 /learn 보고서가 보이면 1.6.0입니다.</a:t>
             </a:r>
             <a:endParaRPr lang="en-US" dirty="0"/>
           </a:p>
@@ -1630,7 +1632,7 @@
           <a:p>
             <a:r>
               <a:rPr lang="en-US" dirty="0"/>
-              <a:t>팀에서는 이런 리듬을 추천합니다. 아침에 복습 세 문제, 작업 중에는 모르면 바로 질문, 하루 끝에 /learn recap으로 정리해 핵심 한 줄을 공유하고, 주 1회 함께 회고합니다. 하루 5분, 한 주 15분이면 충분합니다.</a:t>
+              <a:t>팀에서는 이런 리듬을 추천합니다. 아침에 상태줄에 오늘 복습이 보이면 /learn 복습을 칩니다. 커서가 답 칸에 있으니 답을 적고 Enter로 이어 풀면 됩니다. 오늘 복습은 하루 10문제까지라 부담이 없습니다. 작업 중에는 모르면 바로 질문하고, 하루 끝에 /learn 정리로 정리해 핵심 한 줄을 공유합니다. 주 1회는 각자 /learn 보고서를 붙이고 "내 말로 한 줄"을 채워 회고합니다. 하루 5분, 한 주 15분이면 충분합니다.</a:t>
             </a:r>
             <a:endParaRPr lang="en-US" dirty="0"/>
           </a:p>
@@ -1718,7 +1720,7 @@
           <a:p>
             <a:r>
               <a:rPr lang="en-US" dirty="0"/>
-              <a:t>비용은 파일을 바꾼 턴마다 작은 모델 호출 한 번이 기본입니다. 퀴즈, 채점, 질문, 정리는 쓸 때마다 한 번씩입니다. 노트와 기록은 모두 내 컴퓨터에만 저장됩니다. 노트가 안 생기면 이 네 가지를 확인해 주세요. 그래도 안 되면 GitHub Issues나 팀 채널에 캡처를 남겨 주세요.</a:t>
+              <a:t>팀으로 쓸 때 알아 두실 네 가지입니다. 첫째, 팀 규칙 파일입니다. 저장소의 .claude/learn-notes.md에 규칙, 용어, 빼기 세 제목으로 적어 커밋하면, 새 명령 없이 팀원 모두의 노트가 그것을 따릅니다. 바뀐 코드와 직접 닿는 규칙이 있을 때만 노트의 "왜 이렇게 바꿨을까" 끝에 팀 규칙 한 줄이 붙고, 달라 보이면 "팀 규칙과 다를 수 있음"으로 단정하지 않고 적습니다. 용어에 있는 개념은 그 이름 그대로 쓰여서 모두의 개념 모음에 같은 이름으로 쌓입니다. 빼기는 노트에 내용을 싣지 않을 경로이고, 설정 excludePaths와 합쳐집니다. 규칙과 용어는 합쳐 앞 3,000자까지만 모델에 보내고, 규칙 판정은 참고 의견일 뿐 코드 리뷰를 대신하지 않습니다. 파일은 Claude Code를 켠 폴더 아래에서 찾으니 저장소 맨 위에서 켜 주세요. 둘째, 설치를 한 번에 하는 방법입니다. 저장소의 .claude/settings.json에 learn-notes 마켓플레이스(extraKnownMarketplaces)와 enabledPlugins를 커밋하면, 팀원이 폴더 신뢰 창을 받아들인 뒤 따로 설치하지 않아도 켜집니다. 조직 전체라면 관리자가 관리 설정(claude.ai 관리 콘솔, MDM, managed-settings.json)에 같은 키를 넣고, pluginConfigs에 learn-notes@learn-notes 값을 넣어 잠급니다. 잠근 값은 /config의 learn-notes 항목에 보이지만 바꿀 수 없고, 나머지는 각자 /config에서 고릅니다. 모델을 haiku로, 하루 자동 노트 수를 dailyAutoNotes로 정해 두면 비용을 가늠하기 쉽습니다. 셋째, 비밀값입니다. .env 같은 비밀 파일과 package-lock.json 같은 잠금·생성 파일은 내용을 모으지 않고 이름만 남기고, 코드 속 흔한 키 형식은 «가림»으로 바꾼 뒤 모델에 보냅니다. 흔한 형식만 잡으므로 사내 비밀 파일은 빼기에 넣어 주세요. 메인 Claude는 그 파일을 읽고 고치면서 이미 내용을 봤다는 점도 기억해 주세요. 넷째, /learn 보고서는 코드, 요청 문장, 파일 이름 없이 학습한 날, 노트 수, 새 개념 이름, 정답률, 틀린 개념을 정리해 클립보드에 복사합니다. 멘토와의 1:1이나 회고에 붙여 이야기 거리로 쓰시고, 사람을 줄 세우는 데는 쓰지 않길 권합니다. 개념 이름에 업무 내용이 드러날 수 있으니 붙이기 전에 한 번 읽어 보세요.</a:t>
             </a:r>
             <a:endParaRPr lang="en-US" dirty="0"/>
           </a:p>
@@ -1806,7 +1808,7 @@
           <a:p>
             <a:r>
               <a:rPr lang="en-US" dirty="0"/>
-              <a:t>설치는 이 두 줄이면 됩니다. 오늘 첫 요청부터 노트가 쌓입니다. 궁금한 점 있으시면 편하게 물어봐 주세요.</a:t>
+              <a:t>비용은 파일을 바꾼 턴마다 작은 모델 호출 한 번이 기본입니다. 퀴즈, 채점, 질문, 정리는 쓸 때마다 한 번씩입니다. 기록, 보고서, 힌트, 찾기는 모델을 부르지 않습니다. 뺀 파일만 바뀐 턴, 그리고 JS나 CSS 같은 파일에서 띄어쓰기와 줄바꿈만 바뀐 턴도 모델을 부르지 않습니다. 하루 자동 노트 수는 dailyAutoNotes로 정할 수 있고, 사용량은 /learn 기록 맨 아래에 나옵니다. 노트와 기록은 모두 내 컴퓨터에만 저장됩니다. 다만 /learn 명령의 답은 대화창에 들어가 메인 Claude도 읽습니다. 노트가 안 생기면 이 네 가지를 확인해 주세요. 숫자 1부터 4는 한/영과 상관없이 눌리고, 글자 키가 안 먹으면 한/영이 한글 상태인 경우가 많습니다. 그래도 안 되면 GitHub Issues나 팀 채널에 캡처를 남겨 주세요.</a:t>
             </a:r>
             <a:endParaRPr lang="en-US" dirty="0"/>
           </a:p>
@@ -1830,6 +1832,94 @@
             <a:fld id="{F7021451-1387-4CA6-816F-3879F97B5CBC}" type="slidenum">
               <a:rPr lang="en-US"/>
               <a:t>22</a:t>
+            </a:fld>
+            <a:endParaRPr lang="en-US"/>
+          </a:p>
+        </p:txBody>
+      </p:sp>
+    </p:spTree>
+    <p:extLst>
+      <p:ext uri="{BB962C8B-B14F-4D97-AF65-F5344CB8AC3E}">
+        <p14:creationId xmlns:p14="http://schemas.microsoft.com/office/powerpoint/2010/main" val="1024086991"/>
+      </p:ext>
+    </p:extLst>
+  </p:cSld>
+  <p:clrMapOvr>
+    <a:masterClrMapping/>
+  </p:clrMapOvr>
+</p:notes>
+</file>
+
+<file path=ppt/notesSlides/notesSlide23.xml><?xml version="1.0" encoding="utf-8"?>
+<p:notes xmlns:a="http://schemas.openxmlformats.org/drawingml/2006/main" xmlns:r="http://schemas.openxmlformats.org/officeDocument/2006/relationships" xmlns:p="http://schemas.openxmlformats.org/presentationml/2006/main">
+  <p:cSld>
+    <p:spTree>
+      <p:nvGrpSpPr>
+        <p:cNvPr id="1" name=""/>
+        <p:cNvGrpSpPr/>
+        <p:nvPr/>
+      </p:nvGrpSpPr>
+      <p:grpSpPr>
+        <a:xfrm>
+          <a:off x="0" y="0"/>
+          <a:ext cx="0" cy="0"/>
+          <a:chOff x="0" y="0"/>
+          <a:chExt cx="0" cy="0"/>
+        </a:xfrm>
+      </p:grpSpPr>
+      <p:sp>
+        <p:nvSpPr>
+          <p:cNvPr id="2" name="Slide Image Placeholder 1"/>
+          <p:cNvSpPr>
+            <a:spLocks noGrp="1" noRot="1" noChangeAspect="1"/>
+          </p:cNvSpPr>
+          <p:nvPr>
+            <p:ph type="sldImg"/>
+          </p:nvPr>
+        </p:nvSpPr>
+        <p:spPr/>
+      </p:sp>
+      <p:sp>
+        <p:nvSpPr>
+          <p:cNvPr id="3" name="Notes Placeholder 2"/>
+          <p:cNvSpPr>
+            <a:spLocks noGrp="1"/>
+          </p:cNvSpPr>
+          <p:nvPr>
+            <p:ph type="body" idx="1"/>
+          </p:nvPr>
+        </p:nvSpPr>
+        <p:spPr/>
+        <p:txBody>
+          <a:bodyPr/>
+          <a:lstStyle/>
+          <a:p>
+            <a:r>
+              <a:rPr lang="en-US" dirty="0"/>
+              <a:t>설치는 이 두 줄이면 됩니다. 오늘 첫 요청부터 노트가 쌓입니다. 궁금한 점 있으시면 편하게 물어봐 주세요.</a:t>
+            </a:r>
+            <a:endParaRPr lang="en-US" dirty="0"/>
+          </a:p>
+        </p:txBody>
+      </p:sp>
+      <p:sp>
+        <p:nvSpPr>
+          <p:cNvPr id="4" name="Slide Number Placeholder 3"/>
+          <p:cNvSpPr>
+            <a:spLocks noGrp="1"/>
+          </p:cNvSpPr>
+          <p:nvPr>
+            <p:ph type="sldNum" sz="quarter" idx="10"/>
+          </p:nvPr>
+        </p:nvSpPr>
+        <p:spPr/>
+        <p:txBody>
+          <a:bodyPr/>
+          <a:lstStyle/>
+          <a:p>
+            <a:fld id="{F7021451-1387-4CA6-816F-3879F97B5CBC}" type="slidenum">
+              <a:rPr lang="en-US"/>
+              <a:t>23</a:t>
             </a:fld>
             <a:endParaRPr lang="en-US"/>
           </a:p>
@@ -2246,7 +2336,7 @@
           <a:p>
             <a:r>
               <a:rPr lang="en-US" dirty="0"/>
-              <a:t>Claude Code의 한 턴은 이렇게 이어집니다. 요청을 보내면 턴이 시작되고, Claude가 파일을 고치고, 턴이 끝나고, 화면이 그려집니다. learn-notes의 훅은 각 순간에 끼어들어 필요한 것만 챙깁니다. 특히 파일이 바뀌는 순간 전과 후를 잡아 두었다가, 턴이 끝나면 작은 모델이 노트를 씁니다. Claude의 작업 방식은 바뀌지 않습니다.</a:t>
+              <a:t>Claude Code의 한 턴은 이렇게 이어집니다. 요청을 보내면 턴이 시작되고, Claude가 파일을 고치고, 턴이 끝나고, 화면이 그려집니다. learn-notes의 훅은 각 순간에 끼어들어 필요한 것만 챙깁니다. 특히 파일이 바뀌는 순간 전과 후를 잡아 두었다가, 턴이 끝나면 작은 모델이 노트를 씁니다. 이때 .env 같은 비밀 파일은 내용을 모으지 않고 이름만 남기고, 코드 속 흔한 키 형식은 «가림»으로 바꾼 뒤 보냅니다. Claude의 작업 방식은 바뀌지 않습니다.</a:t>
             </a:r>
             <a:endParaRPr lang="en-US" dirty="0"/>
           </a:p>
@@ -2334,7 +2424,7 @@
           <a:p>
             <a:r>
               <a:rPr lang="en-US" dirty="0"/>
-              <a:t>모드는 Claude Code가 허락한 기능만 쓸 수 있습니다. learn-notes는 그중 여섯 가지를 씁니다. 대화 옆 패널, /learn 명령, 상태줄 알림, 작은 모델 호출, 내 컴퓨터의 파일 저장, 그리고 세션을 넘는 저장소입니다. 노트와 기록은 모두 내 컴퓨터에 남습니다.</a:t>
+              <a:t>모드는 Claude Code가 허락한 기능만 쓸 수 있습니다. learn-notes는 그중 여섯 가지를 씁니다. 대화 옆 패널, /learn 명령, 상태줄 알림, 작은 모델 호출, 내 컴퓨터의 파일 저장, 그리고 세션을 넘는 저장소입니다. 노트와 기록은 모두 내 컴퓨터에 남습니다. 1.6.0부터는 Claude가 읽는 읽기 전용 학습 기록 도구도 하나 등록합니다. 그래서 대화창에 "오늘 배운 거 알려 줘"라고 그냥 물어도 Claude가 내 노트와 개념 모음을 읽고 답합니다. Claude Code가 이 도구를 받아들였으면 /learn 도움말 맨 위에 그 안내 줄이 보입니다.</a:t>
             </a:r>
             <a:endParaRPr lang="en-US" dirty="0"/>
           </a:p>
@@ -3367,7 +3457,7 @@
                   <a:schemeClr val="accent6"/>
                 </a:solidFill>
               </a:rPr>
-              <a:t>learn-notes 1.5.0 — Claude가 고친 코드가 무엇을 어떻게 달라지게 했는지 턴마다 학습 노트로 보여 주고, 잊을 때쯤 내 코드로 복습 퀴즈를 내 주는 Claude Code 모드</a:t>
+              <a:t>learn-notes 1.6.0 — Claude가 고친 코드가 무엇을 어떻게 달라지게 했는지 턴마다 학습 노트로 보여 주고, 잊을 때쯤 내 코드로 복습 퀴즈를 내 주는 Claude Code 모드</a:t>
             </a:r>
             <a:endParaRPr lang="en-US" sz="1600" dirty="0"/>
           </a:p>
@@ -3758,12 +3848,67 @@
               <a:buNone/>
             </a:pPr>
             <a:r>
+              <a:rPr lang="en-US" sz="1350" b="1" dirty="0">
+                <a:solidFill>
+                  <a:schemeClr val="accent4"/>
+                </a:solidFill>
+              </a:rPr>
+              <a:t>− 전</a:t>
+            </a:r>
+            <a:pPr indent="0" marL="0">
+              <a:buNone/>
+            </a:pPr>
+            <a:r>
               <a:rPr lang="en-US" sz="1350" dirty="0">
                 <a:solidFill>
                   <a:srgbClr val="5A6B70"/>
                 </a:solidFill>
               </a:rPr>
-              <a:t>코드가 하던 일(전) · 이제 하는 일(후) · 차이가 드러나는 예를 한 줄씩</a:t>
+              <a:t> 하던 일  ·  </a:t>
+            </a:r>
+            <a:pPr indent="0" marL="0">
+              <a:buNone/>
+            </a:pPr>
+            <a:r>
+              <a:rPr lang="en-US" sz="1350" b="1" dirty="0">
+                <a:solidFill>
+                  <a:schemeClr val="accent1"/>
+                </a:solidFill>
+              </a:rPr>
+              <a:t>+ 후</a:t>
+            </a:r>
+            <a:pPr indent="0" marL="0">
+              <a:buNone/>
+            </a:pPr>
+            <a:r>
+              <a:rPr lang="en-US" sz="1350" dirty="0">
+                <a:solidFill>
+                  <a:srgbClr val="5A6B70"/>
+                </a:solidFill>
+              </a:rPr>
+              <a:t> 이제 하는 일  ·  </a:t>
+            </a:r>
+            <a:pPr indent="0" marL="0">
+              <a:buNone/>
+            </a:pPr>
+            <a:r>
+              <a:rPr lang="en-US" sz="1350" b="1" dirty="0">
+                <a:solidFill>
+                  <a:schemeClr val="accent3"/>
+                </a:solidFill>
+              </a:rPr>
+              <a:t>→ 예</a:t>
+            </a:r>
+            <a:pPr indent="0" marL="0">
+              <a:buNone/>
+            </a:pPr>
+            <a:r>
+              <a:rPr lang="en-US" sz="1350" dirty="0">
+                <a:solidFill>
+                  <a:srgbClr val="5A6B70"/>
+                </a:solidFill>
+              </a:rPr>
+              <a:t> 차이가 드러나는 입력과 결과</a:t>
             </a:r>
             <a:endParaRPr lang="en-US" sz="1350" dirty="0"/>
           </a:p>
@@ -3896,7 +4041,7 @@
                   <a:srgbClr val="5A6B70"/>
                 </a:solidFill>
               </a:rPr>
-              <a:t>요청과 바뀐 코드를 근거로 이유를 풀어 줍니다</a:t>
+              <a:t>요청과 바뀐 코드를 근거로 · 팀 규칙 파일이 있으면 "팀 규칙: …" 한 줄</a:t>
             </a:r>
             <a:endParaRPr lang="en-US" sz="1350" dirty="0"/>
           </a:p>
@@ -4397,7 +4542,7 @@
                   <a:schemeClr val="tx2"/>
                 </a:solidFill>
               </a:rPr>
-              <a:t>전/후 — 무엇이 달라졌는지 한눈에</a:t>
+              <a:t>전/후는 바뀐 낱말까지, 보기는 숫자 1~4로</a:t>
             </a:r>
             <a:endParaRPr lang="en-US" sz="3000" dirty="0"/>
           </a:p>
@@ -4405,18 +4550,18 @@
       </p:sp>
       <p:sp>
         <p:nvSpPr>
-          <p:cNvPr id="3" name="view-0"/>
+          <p:cNvPr id="3" name="view-1"/>
           <p:cNvSpPr/>
           <p:nvPr/>
         </p:nvSpPr>
         <p:spPr>
           <a:xfrm>
-            <a:off x="548640" y="1463040"/>
-            <a:ext cx="1261872" cy="502920"/>
+            <a:off x="548640" y="1417320"/>
+            <a:ext cx="987552" cy="457200"/>
           </a:xfrm>
           <a:prstGeom prst="roundRect">
             <a:avLst>
-              <a:gd name="adj" fmla="val 49091"/>
+              <a:gd name="adj" fmla="val 50000"/>
             </a:avLst>
           </a:prstGeom>
           <a:solidFill>
@@ -4438,8 +4583,8 @@
         </p:nvSpPr>
         <p:spPr>
           <a:xfrm>
-            <a:off x="548640" y="1463040"/>
-            <a:ext cx="1261872" cy="502920"/>
+            <a:off x="548640" y="1417320"/>
+            <a:ext cx="987552" cy="457200"/>
           </a:xfrm>
           <a:prstGeom prst="rect">
             <a:avLst/>
@@ -4455,31 +4600,31 @@
               <a:buNone/>
             </a:pPr>
             <a:r>
-              <a:rPr lang="en-US" sz="1300" b="1" dirty="0">
+              <a:rPr lang="en-US" sz="1200" b="1" dirty="0">
                 <a:solidFill>
                   <a:schemeClr val="tx2"/>
                 </a:solidFill>
               </a:rPr>
-              <a:t>노트</a:t>
-            </a:r>
-            <a:endParaRPr lang="en-US" sz="1300" dirty="0"/>
-          </a:p>
-        </p:txBody>
-      </p:sp>
-      <p:sp>
-        <p:nvSpPr>
-          <p:cNvPr id="5" name="view-1"/>
+              <a:t>1: 노트</a:t>
+            </a:r>
+            <a:endParaRPr lang="en-US" sz="1200" dirty="0"/>
+          </a:p>
+        </p:txBody>
+      </p:sp>
+      <p:sp>
+        <p:nvSpPr>
+          <p:cNvPr id="5" name="view-2"/>
           <p:cNvSpPr/>
           <p:nvPr/>
         </p:nvSpPr>
         <p:spPr>
           <a:xfrm>
-            <a:off x="1920240" y="1463040"/>
-            <a:ext cx="1261872" cy="502920"/>
+            <a:off x="1609344" y="1417320"/>
+            <a:ext cx="987552" cy="457200"/>
           </a:xfrm>
           <a:prstGeom prst="roundRect">
             <a:avLst>
-              <a:gd name="adj" fmla="val 49091"/>
+              <a:gd name="adj" fmla="val 50000"/>
             </a:avLst>
           </a:prstGeom>
           <a:solidFill>
@@ -4501,8 +4646,8 @@
         </p:nvSpPr>
         <p:spPr>
           <a:xfrm>
-            <a:off x="1920240" y="1463040"/>
-            <a:ext cx="1261872" cy="502920"/>
+            <a:off x="1609344" y="1417320"/>
+            <a:ext cx="987552" cy="457200"/>
           </a:xfrm>
           <a:prstGeom prst="rect">
             <a:avLst/>
@@ -4518,31 +4663,31 @@
               <a:buNone/>
             </a:pPr>
             <a:r>
-              <a:rPr lang="en-US" sz="1300" b="1" dirty="0">
+              <a:rPr lang="en-US" sz="1200" b="1" dirty="0">
                 <a:solidFill>
                   <a:schemeClr val="bg1"/>
                 </a:solidFill>
               </a:rPr>
-              <a:t>전/후</a:t>
-            </a:r>
-            <a:endParaRPr lang="en-US" sz="1300" dirty="0"/>
-          </a:p>
-        </p:txBody>
-      </p:sp>
-      <p:sp>
-        <p:nvSpPr>
-          <p:cNvPr id="7" name="view-2"/>
+              <a:t>2: 전/후</a:t>
+            </a:r>
+            <a:endParaRPr lang="en-US" sz="1200" dirty="0"/>
+          </a:p>
+        </p:txBody>
+      </p:sp>
+      <p:sp>
+        <p:nvSpPr>
+          <p:cNvPr id="7" name="view-3"/>
           <p:cNvSpPr/>
           <p:nvPr/>
         </p:nvSpPr>
         <p:spPr>
           <a:xfrm>
-            <a:off x="3291840" y="1463040"/>
-            <a:ext cx="1261872" cy="502920"/>
+            <a:off x="2670048" y="1417320"/>
+            <a:ext cx="987552" cy="457200"/>
           </a:xfrm>
           <a:prstGeom prst="roundRect">
             <a:avLst>
-              <a:gd name="adj" fmla="val 49091"/>
+              <a:gd name="adj" fmla="val 50000"/>
             </a:avLst>
           </a:prstGeom>
           <a:solidFill>
@@ -4564,8 +4709,8 @@
         </p:nvSpPr>
         <p:spPr>
           <a:xfrm>
-            <a:off x="3291840" y="1463040"/>
-            <a:ext cx="1261872" cy="502920"/>
+            <a:off x="2670048" y="1417320"/>
+            <a:ext cx="987552" cy="457200"/>
           </a:xfrm>
           <a:prstGeom prst="rect">
             <a:avLst/>
@@ -4581,37 +4726,100 @@
               <a:buNone/>
             </a:pPr>
             <a:r>
-              <a:rPr lang="en-US" sz="1300" b="1" dirty="0">
+              <a:rPr lang="en-US" sz="1200" b="1" dirty="0">
                 <a:solidFill>
                   <a:schemeClr val="tx2"/>
                 </a:solidFill>
               </a:rPr>
-              <a:t>개념 모음</a:t>
-            </a:r>
-            <a:endParaRPr lang="en-US" sz="1300" dirty="0"/>
-          </a:p>
-        </p:txBody>
-      </p:sp>
-      <p:sp>
-        <p:nvSpPr>
-          <p:cNvPr id="9" name="view-3"/>
+              <a:t>3: 개념 모음</a:t>
+            </a:r>
+            <a:endParaRPr lang="en-US" sz="1200" dirty="0"/>
+          </a:p>
+        </p:txBody>
+      </p:sp>
+      <p:sp>
+        <p:nvSpPr>
+          <p:cNvPr id="9" name="view-4"/>
           <p:cNvSpPr/>
           <p:nvPr/>
         </p:nvSpPr>
         <p:spPr>
           <a:xfrm>
-            <a:off x="4663440" y="1463040"/>
-            <a:ext cx="1261872" cy="502920"/>
+            <a:off x="3730752" y="1417320"/>
+            <a:ext cx="987552" cy="457200"/>
           </a:xfrm>
           <a:prstGeom prst="roundRect">
             <a:avLst>
-              <a:gd name="adj" fmla="val 49091"/>
+              <a:gd name="adj" fmla="val 50000"/>
             </a:avLst>
           </a:prstGeom>
           <a:solidFill>
-            <a:schemeClr val="accent2"/>
+            <a:schemeClr val="bg2"/>
           </a:solidFill>
           <a:ln w="12700">
+            <a:solidFill>
+              <a:schemeClr val="bg2"/>
+            </a:solidFill>
+            <a:prstDash val="solid"/>
+          </a:ln>
+        </p:spPr>
+      </p:sp>
+      <p:sp>
+        <p:nvSpPr>
+          <p:cNvPr id="10" name="Text 8"/>
+          <p:cNvSpPr txBox="1"/>
+          <p:nvPr/>
+        </p:nvSpPr>
+        <p:spPr>
+          <a:xfrm>
+            <a:off x="3730752" y="1417320"/>
+            <a:ext cx="987552" cy="457200"/>
+          </a:xfrm>
+          <a:prstGeom prst="rect">
+            <a:avLst/>
+          </a:prstGeom>
+          <a:noFill/>
+          <a:ln/>
+        </p:spPr>
+        <p:txBody>
+          <a:bodyPr wrap="square" lIns="0" tIns="0" rIns="0" bIns="0" rtlCol="0" anchor="ctr"/>
+          <a:lstStyle/>
+          <a:p>
+            <a:pPr algn="ctr" indent="0" marL="0">
+              <a:buNone/>
+            </a:pPr>
+            <a:r>
+              <a:rPr lang="en-US" sz="1200" b="1" dirty="0">
+                <a:solidFill>
+                  <a:schemeClr val="tx2"/>
+                </a:solidFill>
+              </a:rPr>
+              <a:t>4: 퀴즈</a:t>
+            </a:r>
+            <a:endParaRPr lang="en-US" sz="1200" dirty="0"/>
+          </a:p>
+        </p:txBody>
+      </p:sp>
+      <p:sp>
+        <p:nvSpPr>
+          <p:cNvPr id="11" name="view-review"/>
+          <p:cNvSpPr/>
+          <p:nvPr/>
+        </p:nvSpPr>
+        <p:spPr>
+          <a:xfrm>
+            <a:off x="4846320" y="1417320"/>
+            <a:ext cx="1280160" cy="457200"/>
+          </a:xfrm>
+          <a:prstGeom prst="roundRect">
+            <a:avLst>
+              <a:gd name="adj" fmla="val 50000"/>
+            </a:avLst>
+          </a:prstGeom>
+          <a:solidFill>
+            <a:srgbClr val="FDF3E2"/>
+          </a:solidFill>
+          <a:ln w="15875">
             <a:solidFill>
               <a:schemeClr val="accent2"/>
             </a:solidFill>
@@ -4621,14 +4829,14 @@
       </p:sp>
       <p:sp>
         <p:nvSpPr>
-          <p:cNvPr id="10" name="Text 8"/>
-          <p:cNvSpPr txBox="1"/>
-          <p:nvPr/>
-        </p:nvSpPr>
-        <p:spPr>
-          <a:xfrm>
-            <a:off x="4663440" y="1463040"/>
-            <a:ext cx="1261872" cy="502920"/>
+          <p:cNvPr id="12" name="Text 10"/>
+          <p:cNvSpPr txBox="1"/>
+          <p:nvPr/>
+        </p:nvSpPr>
+        <p:spPr>
+          <a:xfrm>
+            <a:off x="4846320" y="1417320"/>
+            <a:ext cx="1280160" cy="457200"/>
           </a:xfrm>
           <a:prstGeom prst="rect">
             <a:avLst/>
@@ -4644,27 +4852,38 @@
               <a:buNone/>
             </a:pPr>
             <a:r>
-              <a:rPr lang="en-US" sz="1300" b="1" dirty="0">
-                <a:solidFill>
-                  <a:schemeClr val="bg1"/>
-                </a:solidFill>
-              </a:rPr>
-              <a:t>퀴즈</a:t>
-            </a:r>
-            <a:endParaRPr lang="en-US" sz="1300" dirty="0"/>
-          </a:p>
-        </p:txBody>
-      </p:sp>
-      <p:sp>
-        <p:nvSpPr>
-          <p:cNvPr id="11" name="Text 9"/>
-          <p:cNvSpPr txBox="1"/>
-          <p:nvPr/>
-        </p:nvSpPr>
-        <p:spPr>
-          <a:xfrm>
-            <a:off x="548640" y="2286000"/>
-            <a:ext cx="1097280" cy="438912"/>
+              <a:rPr lang="en-US" sz="1200" b="1" dirty="0">
+                <a:solidFill>
+                  <a:schemeClr val="accent2"/>
+                </a:solidFill>
+              </a:rPr>
+              <a:t>● </a:t>
+            </a:r>
+            <a:pPr algn="ctr" indent="0" marL="0">
+              <a:buNone/>
+            </a:pPr>
+            <a:r>
+              <a:rPr lang="en-US" sz="1200" b="1" dirty="0">
+                <a:solidFill>
+                  <a:srgbClr val="A8650B"/>
+                </a:solidFill>
+              </a:rPr>
+              <a:t>q: 복습 3개</a:t>
+            </a:r>
+            <a:endParaRPr lang="en-US" sz="1200" dirty="0"/>
+          </a:p>
+        </p:txBody>
+      </p:sp>
+      <p:sp>
+        <p:nvSpPr>
+          <p:cNvPr id="13" name="Text 11"/>
+          <p:cNvSpPr txBox="1"/>
+          <p:nvPr/>
+        </p:nvSpPr>
+        <p:spPr>
+          <a:xfrm>
+            <a:off x="548640" y="2103120"/>
+            <a:ext cx="1097280" cy="402336"/>
           </a:xfrm>
           <a:prstGeom prst="rect">
             <a:avLst/>
@@ -4696,14 +4915,14 @@
       </p:sp>
       <p:sp>
         <p:nvSpPr>
-          <p:cNvPr id="12" name="Text 10"/>
-          <p:cNvSpPr txBox="1"/>
-          <p:nvPr/>
-        </p:nvSpPr>
-        <p:spPr>
-          <a:xfrm>
-            <a:off x="1691640" y="2286000"/>
-            <a:ext cx="4434840" cy="438912"/>
+          <p:cNvPr id="14" name="Text 12"/>
+          <p:cNvSpPr txBox="1"/>
+          <p:nvPr/>
+        </p:nvSpPr>
+        <p:spPr>
+          <a:xfrm>
+            <a:off x="1691640" y="2103120"/>
+            <a:ext cx="4434840" cy="402336"/>
           </a:xfrm>
           <a:prstGeom prst="rect">
             <a:avLst/>
@@ -4732,14 +4951,14 @@
       </p:sp>
       <p:sp>
         <p:nvSpPr>
-          <p:cNvPr id="13" name="Text 11"/>
-          <p:cNvSpPr txBox="1"/>
-          <p:nvPr/>
-        </p:nvSpPr>
-        <p:spPr>
-          <a:xfrm>
-            <a:off x="548640" y="2926080"/>
-            <a:ext cx="1097280" cy="438912"/>
+          <p:cNvPr id="15" name="Text 13"/>
+          <p:cNvSpPr txBox="1"/>
+          <p:nvPr/>
+        </p:nvSpPr>
+        <p:spPr>
+          <a:xfrm>
+            <a:off x="548640" y="2578608"/>
+            <a:ext cx="1097280" cy="402336"/>
           </a:xfrm>
           <a:prstGeom prst="rect">
             <a:avLst/>
@@ -4771,14 +4990,14 @@
       </p:sp>
       <p:sp>
         <p:nvSpPr>
-          <p:cNvPr id="14" name="Text 12"/>
-          <p:cNvSpPr txBox="1"/>
-          <p:nvPr/>
-        </p:nvSpPr>
-        <p:spPr>
-          <a:xfrm>
-            <a:off x="1691640" y="2926080"/>
-            <a:ext cx="4434840" cy="438912"/>
+          <p:cNvPr id="16" name="Text 14"/>
+          <p:cNvSpPr txBox="1"/>
+          <p:nvPr/>
+        </p:nvSpPr>
+        <p:spPr>
+          <a:xfrm>
+            <a:off x="1691640" y="2578608"/>
+            <a:ext cx="4434840" cy="402336"/>
           </a:xfrm>
           <a:prstGeom prst="rect">
             <a:avLst/>
@@ -4799,7 +5018,7 @@
                   <a:schemeClr val="tx1"/>
                 </a:solidFill>
               </a:rPr>
-              <a:t>한 줄을 고친 것이면 그 줄에서 바뀐 낱말만 굵은 색으로 (var → let)</a:t>
+              <a:t>바뀐 낱말만 굵은 색으로 (var → let)</a:t>
             </a:r>
             <a:endParaRPr lang="en-US" sz="1400" dirty="0"/>
           </a:p>
@@ -4807,14 +5026,14 @@
       </p:sp>
       <p:sp>
         <p:nvSpPr>
-          <p:cNvPr id="15" name="Text 13"/>
-          <p:cNvSpPr txBox="1"/>
-          <p:nvPr/>
-        </p:nvSpPr>
-        <p:spPr>
-          <a:xfrm>
-            <a:off x="548640" y="3566160"/>
-            <a:ext cx="1097280" cy="438912"/>
+          <p:cNvPr id="17" name="Text 15"/>
+          <p:cNvSpPr txBox="1"/>
+          <p:nvPr/>
+        </p:nvSpPr>
+        <p:spPr>
+          <a:xfrm>
+            <a:off x="548640" y="3054096"/>
+            <a:ext cx="1097280" cy="402336"/>
           </a:xfrm>
           <a:prstGeom prst="rect">
             <a:avLst/>
@@ -4846,14 +5065,14 @@
       </p:sp>
       <p:sp>
         <p:nvSpPr>
-          <p:cNvPr id="16" name="Text 14"/>
-          <p:cNvSpPr txBox="1"/>
-          <p:nvPr/>
-        </p:nvSpPr>
-        <p:spPr>
-          <a:xfrm>
-            <a:off x="1691640" y="3566160"/>
-            <a:ext cx="4434840" cy="438912"/>
+          <p:cNvPr id="18" name="Text 16"/>
+          <p:cNvSpPr txBox="1"/>
+          <p:nvPr/>
+        </p:nvSpPr>
+        <p:spPr>
+          <a:xfrm>
+            <a:off x="1691640" y="3054096"/>
+            <a:ext cx="4434840" cy="402336"/>
           </a:xfrm>
           <a:prstGeom prst="rect">
             <a:avLst/>
@@ -4882,18 +5101,41 @@
       </p:sp>
       <p:sp>
         <p:nvSpPr>
-          <p:cNvPr id="17" name="key-v"/>
+          <p:cNvPr id="19" name="divider"/>
           <p:cNvSpPr/>
           <p:nvPr/>
         </p:nvSpPr>
         <p:spPr>
           <a:xfrm>
-            <a:off x="548640" y="4343400"/>
-            <a:ext cx="384048" cy="384048"/>
+            <a:off x="548640" y="3611880"/>
+            <a:ext cx="5577840" cy="0"/>
+          </a:xfrm>
+          <a:prstGeom prst="line">
+            <a:avLst/>
+          </a:prstGeom>
+          <a:noFill/>
+          <a:ln w="12700">
+            <a:solidFill>
+              <a:srgbClr val="D9E3DF"/>
+            </a:solidFill>
+            <a:prstDash val="solid"/>
+          </a:ln>
+        </p:spPr>
+      </p:sp>
+      <p:sp>
+        <p:nvSpPr>
+          <p:cNvPr id="20" name="key-1~4"/>
+          <p:cNvSpPr/>
+          <p:nvPr/>
+        </p:nvSpPr>
+        <p:spPr>
+          <a:xfrm>
+            <a:off x="548640" y="3749040"/>
+            <a:ext cx="777240" cy="365760"/>
           </a:xfrm>
           <a:prstGeom prst="roundRect">
             <a:avLst>
-              <a:gd name="adj" fmla="val 14286"/>
+              <a:gd name="adj" fmla="val 15000"/>
             </a:avLst>
           </a:prstGeom>
           <a:solidFill>
@@ -4909,14 +5151,14 @@
       </p:sp>
       <p:sp>
         <p:nvSpPr>
-          <p:cNvPr id="18" name="Text 16"/>
-          <p:cNvSpPr txBox="1"/>
-          <p:nvPr/>
-        </p:nvSpPr>
-        <p:spPr>
-          <a:xfrm>
-            <a:off x="548640" y="4343400"/>
-            <a:ext cx="384048" cy="384048"/>
+          <p:cNvPr id="21" name="Text 19"/>
+          <p:cNvSpPr txBox="1"/>
+          <p:nvPr/>
+        </p:nvSpPr>
+        <p:spPr>
+          <a:xfrm>
+            <a:off x="548640" y="3749040"/>
+            <a:ext cx="777240" cy="365760"/>
           </a:xfrm>
           <a:prstGeom prst="rect">
             <a:avLst/>
@@ -4932,7 +5174,7 @@
               <a:buNone/>
             </a:pPr>
             <a:r>
-              <a:rPr lang="en-US" sz="1500" b="1" dirty="0">
+              <a:rPr lang="en-US" sz="1250" b="1" dirty="0">
                 <a:solidFill>
                   <a:schemeClr val="tx2"/>
                 </a:solidFill>
@@ -4940,22 +5182,22 @@
                 <a:ea typeface="Courier New" pitchFamily="34" charset="-122"/>
                 <a:cs typeface="Courier New" pitchFamily="34" charset="-120"/>
               </a:rPr>
-              <a:t>v</a:t>
-            </a:r>
-            <a:endParaRPr lang="en-US" sz="1500" dirty="0"/>
-          </a:p>
-        </p:txBody>
-      </p:sp>
-      <p:sp>
-        <p:nvSpPr>
-          <p:cNvPr id="19" name="Text 17"/>
-          <p:cNvSpPr txBox="1"/>
-          <p:nvPr/>
-        </p:nvSpPr>
-        <p:spPr>
-          <a:xfrm>
-            <a:off x="1143000" y="4343400"/>
-            <a:ext cx="4983480" cy="384048"/>
+              <a:t>1~4</a:t>
+            </a:r>
+            <a:endParaRPr lang="en-US" sz="1250" dirty="0"/>
+          </a:p>
+        </p:txBody>
+      </p:sp>
+      <p:sp>
+        <p:nvSpPr>
+          <p:cNvPr id="22" name="Text 20"/>
+          <p:cNvSpPr txBox="1"/>
+          <p:nvPr/>
+        </p:nvSpPr>
+        <p:spPr>
+          <a:xfrm>
+            <a:off x="1508760" y="3749040"/>
+            <a:ext cx="4617720" cy="365760"/>
           </a:xfrm>
           <a:prstGeom prst="rect">
             <a:avLst/>
@@ -4976,7 +5218,7 @@
                   <a:schemeClr val="tx1"/>
                 </a:solidFill>
               </a:rPr>
-              <a:t>다음 보기로: 노트 → 전/후 → 개념 모음</a:t>
+              <a:t>보기 바꾸기 · 숫자는 한/영 상관없이 눌립니다</a:t>
             </a:r>
             <a:endParaRPr lang="en-US" sz="1350" dirty="0"/>
           </a:p>
@@ -4984,18 +5226,18 @@
       </p:sp>
       <p:sp>
         <p:nvSpPr>
-          <p:cNvPr id="20" name="key-q"/>
+          <p:cNvPr id="23" name="key-q"/>
           <p:cNvSpPr/>
           <p:nvPr/>
         </p:nvSpPr>
         <p:spPr>
           <a:xfrm>
-            <a:off x="548640" y="4910328"/>
-            <a:ext cx="384048" cy="384048"/>
+            <a:off x="548640" y="4206240"/>
+            <a:ext cx="384048" cy="365760"/>
           </a:xfrm>
           <a:prstGeom prst="roundRect">
             <a:avLst>
-              <a:gd name="adj" fmla="val 14286"/>
+              <a:gd name="adj" fmla="val 15000"/>
             </a:avLst>
           </a:prstGeom>
           <a:solidFill>
@@ -5011,14 +5253,14 @@
       </p:sp>
       <p:sp>
         <p:nvSpPr>
-          <p:cNvPr id="21" name="Text 19"/>
-          <p:cNvSpPr txBox="1"/>
-          <p:nvPr/>
-        </p:nvSpPr>
-        <p:spPr>
-          <a:xfrm>
-            <a:off x="548640" y="4910328"/>
-            <a:ext cx="384048" cy="384048"/>
+          <p:cNvPr id="24" name="Text 22"/>
+          <p:cNvSpPr txBox="1"/>
+          <p:nvPr/>
+        </p:nvSpPr>
+        <p:spPr>
+          <a:xfrm>
+            <a:off x="548640" y="4206240"/>
+            <a:ext cx="384048" cy="365760"/>
           </a:xfrm>
           <a:prstGeom prst="rect">
             <a:avLst/>
@@ -5050,14 +5292,14 @@
       </p:sp>
       <p:sp>
         <p:nvSpPr>
-          <p:cNvPr id="22" name="Text 20"/>
-          <p:cNvSpPr txBox="1"/>
-          <p:nvPr/>
-        </p:nvSpPr>
-        <p:spPr>
-          <a:xfrm>
-            <a:off x="1143000" y="4910328"/>
-            <a:ext cx="4983480" cy="384048"/>
+          <p:cNvPr id="25" name="Text 23"/>
+          <p:cNvSpPr txBox="1"/>
+          <p:nvPr/>
+        </p:nvSpPr>
+        <p:spPr>
+          <a:xfrm>
+            <a:off x="1508760" y="4206240"/>
+            <a:ext cx="4617720" cy="365760"/>
           </a:xfrm>
           <a:prstGeom prst="rect">
             <a:avLst/>
@@ -5078,7 +5320,7 @@
                   <a:schemeClr val="tx1"/>
                 </a:solidFill>
               </a:rPr>
-              <a:t>어디서든 퀴즈로 · p n 이전 · 다음 노트 · w 다시 쓰기</a:t>
+              <a:t>오늘 복습 바로 시작 (보기 줄 끝에 보일 때)</a:t>
             </a:r>
             <a:endParaRPr lang="en-US" sz="1350" dirty="0"/>
           </a:p>
@@ -5086,18 +5328,288 @@
       </p:sp>
       <p:sp>
         <p:nvSpPr>
-          <p:cNvPr id="23" name="card"/>
+          <p:cNvPr id="26" name="key-p"/>
           <p:cNvSpPr/>
           <p:nvPr/>
         </p:nvSpPr>
         <p:spPr>
           <a:xfrm>
-            <a:off x="548640" y="5486400"/>
-            <a:ext cx="5577840" cy="621792"/>
+            <a:off x="548640" y="4663440"/>
+            <a:ext cx="384048" cy="365760"/>
           </a:xfrm>
           <a:prstGeom prst="roundRect">
             <a:avLst>
-              <a:gd name="adj" fmla="val 14706"/>
+              <a:gd name="adj" fmla="val 15000"/>
+            </a:avLst>
+          </a:prstGeom>
+          <a:solidFill>
+            <a:schemeClr val="bg1"/>
+          </a:solidFill>
+          <a:ln w="15875">
+            <a:solidFill>
+              <a:srgbClr val="B9C7C2"/>
+            </a:solidFill>
+            <a:prstDash val="solid"/>
+          </a:ln>
+        </p:spPr>
+      </p:sp>
+      <p:sp>
+        <p:nvSpPr>
+          <p:cNvPr id="27" name="Text 25"/>
+          <p:cNvSpPr txBox="1"/>
+          <p:nvPr/>
+        </p:nvSpPr>
+        <p:spPr>
+          <a:xfrm>
+            <a:off x="548640" y="4663440"/>
+            <a:ext cx="384048" cy="365760"/>
+          </a:xfrm>
+          <a:prstGeom prst="rect">
+            <a:avLst/>
+          </a:prstGeom>
+          <a:noFill/>
+          <a:ln/>
+        </p:spPr>
+        <p:txBody>
+          <a:bodyPr wrap="square" lIns="0" tIns="0" rIns="0" bIns="0" rtlCol="0" anchor="ctr"/>
+          <a:lstStyle/>
+          <a:p>
+            <a:pPr algn="ctr" indent="0" marL="0">
+              <a:buNone/>
+            </a:pPr>
+            <a:r>
+              <a:rPr lang="en-US" sz="1500" b="1" dirty="0">
+                <a:solidFill>
+                  <a:schemeClr val="tx2"/>
+                </a:solidFill>
+                <a:latin typeface="Courier New" pitchFamily="34" charset="0"/>
+                <a:ea typeface="Courier New" pitchFamily="34" charset="-122"/>
+                <a:cs typeface="Courier New" pitchFamily="34" charset="-120"/>
+              </a:rPr>
+              <a:t>p</a:t>
+            </a:r>
+            <a:endParaRPr lang="en-US" sz="1500" dirty="0"/>
+          </a:p>
+        </p:txBody>
+      </p:sp>
+      <p:sp>
+        <p:nvSpPr>
+          <p:cNvPr id="28" name="key-n"/>
+          <p:cNvSpPr/>
+          <p:nvPr/>
+        </p:nvSpPr>
+        <p:spPr>
+          <a:xfrm>
+            <a:off x="960120" y="4663440"/>
+            <a:ext cx="384048" cy="365760"/>
+          </a:xfrm>
+          <a:prstGeom prst="roundRect">
+            <a:avLst>
+              <a:gd name="adj" fmla="val 15000"/>
+            </a:avLst>
+          </a:prstGeom>
+          <a:solidFill>
+            <a:schemeClr val="bg1"/>
+          </a:solidFill>
+          <a:ln w="15875">
+            <a:solidFill>
+              <a:srgbClr val="B9C7C2"/>
+            </a:solidFill>
+            <a:prstDash val="solid"/>
+          </a:ln>
+        </p:spPr>
+      </p:sp>
+      <p:sp>
+        <p:nvSpPr>
+          <p:cNvPr id="29" name="Text 27"/>
+          <p:cNvSpPr txBox="1"/>
+          <p:nvPr/>
+        </p:nvSpPr>
+        <p:spPr>
+          <a:xfrm>
+            <a:off x="960120" y="4663440"/>
+            <a:ext cx="384048" cy="365760"/>
+          </a:xfrm>
+          <a:prstGeom prst="rect">
+            <a:avLst/>
+          </a:prstGeom>
+          <a:noFill/>
+          <a:ln/>
+        </p:spPr>
+        <p:txBody>
+          <a:bodyPr wrap="square" lIns="0" tIns="0" rIns="0" bIns="0" rtlCol="0" anchor="ctr"/>
+          <a:lstStyle/>
+          <a:p>
+            <a:pPr algn="ctr" indent="0" marL="0">
+              <a:buNone/>
+            </a:pPr>
+            <a:r>
+              <a:rPr lang="en-US" sz="1500" b="1" dirty="0">
+                <a:solidFill>
+                  <a:schemeClr val="tx2"/>
+                </a:solidFill>
+                <a:latin typeface="Courier New" pitchFamily="34" charset="0"/>
+                <a:ea typeface="Courier New" pitchFamily="34" charset="-122"/>
+                <a:cs typeface="Courier New" pitchFamily="34" charset="-120"/>
+              </a:rPr>
+              <a:t>n</a:t>
+            </a:r>
+            <a:endParaRPr lang="en-US" sz="1500" dirty="0"/>
+          </a:p>
+        </p:txBody>
+      </p:sp>
+      <p:sp>
+        <p:nvSpPr>
+          <p:cNvPr id="30" name="Text 28"/>
+          <p:cNvSpPr txBox="1"/>
+          <p:nvPr/>
+        </p:nvSpPr>
+        <p:spPr>
+          <a:xfrm>
+            <a:off x="1508760" y="4663440"/>
+            <a:ext cx="4617720" cy="365760"/>
+          </a:xfrm>
+          <a:prstGeom prst="rect">
+            <a:avLst/>
+          </a:prstGeom>
+          <a:noFill/>
+          <a:ln/>
+        </p:spPr>
+        <p:txBody>
+          <a:bodyPr wrap="square" lIns="0" tIns="0" rIns="0" bIns="0" rtlCol="0" anchor="ctr"/>
+          <a:lstStyle/>
+          <a:p>
+            <a:pPr indent="0" marL="0">
+              <a:buNone/>
+            </a:pPr>
+            <a:r>
+              <a:rPr lang="en-US" sz="1350" dirty="0">
+                <a:solidFill>
+                  <a:schemeClr val="tx1"/>
+                </a:solidFill>
+              </a:rPr>
+              <a:t>이전 · 다음 노트 (지난 세션 노트까지)</a:t>
+            </a:r>
+            <a:endParaRPr lang="en-US" sz="1350" dirty="0"/>
+          </a:p>
+        </p:txBody>
+      </p:sp>
+      <p:sp>
+        <p:nvSpPr>
+          <p:cNvPr id="31" name="key-Esc"/>
+          <p:cNvSpPr/>
+          <p:nvPr/>
+        </p:nvSpPr>
+        <p:spPr>
+          <a:xfrm>
+            <a:off x="548640" y="5120640"/>
+            <a:ext cx="777240" cy="365760"/>
+          </a:xfrm>
+          <a:prstGeom prst="roundRect">
+            <a:avLst>
+              <a:gd name="adj" fmla="val 15000"/>
+            </a:avLst>
+          </a:prstGeom>
+          <a:solidFill>
+            <a:schemeClr val="bg1"/>
+          </a:solidFill>
+          <a:ln w="15875">
+            <a:solidFill>
+              <a:srgbClr val="B9C7C2"/>
+            </a:solidFill>
+            <a:prstDash val="solid"/>
+          </a:ln>
+        </p:spPr>
+      </p:sp>
+      <p:sp>
+        <p:nvSpPr>
+          <p:cNvPr id="32" name="Text 30"/>
+          <p:cNvSpPr txBox="1"/>
+          <p:nvPr/>
+        </p:nvSpPr>
+        <p:spPr>
+          <a:xfrm>
+            <a:off x="548640" y="5120640"/>
+            <a:ext cx="777240" cy="365760"/>
+          </a:xfrm>
+          <a:prstGeom prst="rect">
+            <a:avLst/>
+          </a:prstGeom>
+          <a:noFill/>
+          <a:ln/>
+        </p:spPr>
+        <p:txBody>
+          <a:bodyPr wrap="square" lIns="0" tIns="0" rIns="0" bIns="0" rtlCol="0" anchor="ctr"/>
+          <a:lstStyle/>
+          <a:p>
+            <a:pPr algn="ctr" indent="0" marL="0">
+              <a:buNone/>
+            </a:pPr>
+            <a:r>
+              <a:rPr lang="en-US" sz="1250" b="1" dirty="0">
+                <a:solidFill>
+                  <a:schemeClr val="tx2"/>
+                </a:solidFill>
+                <a:latin typeface="Courier New" pitchFamily="34" charset="0"/>
+                <a:ea typeface="Courier New" pitchFamily="34" charset="-122"/>
+                <a:cs typeface="Courier New" pitchFamily="34" charset="-120"/>
+              </a:rPr>
+              <a:t>Esc</a:t>
+            </a:r>
+            <a:endParaRPr lang="en-US" sz="1250" dirty="0"/>
+          </a:p>
+        </p:txBody>
+      </p:sp>
+      <p:sp>
+        <p:nvSpPr>
+          <p:cNvPr id="33" name="Text 31"/>
+          <p:cNvSpPr txBox="1"/>
+          <p:nvPr/>
+        </p:nvSpPr>
+        <p:spPr>
+          <a:xfrm>
+            <a:off x="1508760" y="5120640"/>
+            <a:ext cx="4617720" cy="365760"/>
+          </a:xfrm>
+          <a:prstGeom prst="rect">
+            <a:avLst/>
+          </a:prstGeom>
+          <a:noFill/>
+          <a:ln/>
+        </p:spPr>
+        <p:txBody>
+          <a:bodyPr wrap="square" lIns="0" tIns="0" rIns="0" bIns="0" rtlCol="0" anchor="ctr"/>
+          <a:lstStyle/>
+          <a:p>
+            <a:pPr indent="0" marL="0">
+              <a:buNone/>
+            </a:pPr>
+            <a:r>
+              <a:rPr lang="en-US" sz="1350" dirty="0">
+                <a:solidFill>
+                  <a:schemeClr val="tx1"/>
+                </a:solidFill>
+              </a:rPr>
+              <a:t>대화 입력칸으로 돌아가기 · 패널은 그대로</a:t>
+            </a:r>
+            <a:endParaRPr lang="en-US" sz="1350" dirty="0"/>
+          </a:p>
+        </p:txBody>
+      </p:sp>
+      <p:sp>
+        <p:nvSpPr>
+          <p:cNvPr id="34" name="card"/>
+          <p:cNvSpPr/>
+          <p:nvPr/>
+        </p:nvSpPr>
+        <p:spPr>
+          <a:xfrm>
+            <a:off x="548640" y="5623560"/>
+            <a:ext cx="5577840" cy="502920"/>
+          </a:xfrm>
+          <a:prstGeom prst="roundRect">
+            <a:avLst>
+              <a:gd name="adj" fmla="val 18182"/>
             </a:avLst>
           </a:prstGeom>
           <a:solidFill>
@@ -5113,14 +5625,14 @@
       </p:sp>
       <p:sp>
         <p:nvSpPr>
-          <p:cNvPr id="24" name="Text 22"/>
-          <p:cNvSpPr txBox="1"/>
-          <p:nvPr/>
-        </p:nvSpPr>
-        <p:spPr>
-          <a:xfrm>
-            <a:off x="731520" y="5486400"/>
-            <a:ext cx="5303520" cy="621792"/>
+          <p:cNvPr id="35" name="Text 33"/>
+          <p:cNvSpPr txBox="1"/>
+          <p:nvPr/>
+        </p:nvSpPr>
+        <p:spPr>
+          <a:xfrm>
+            <a:off x="731520" y="5623560"/>
+            <a:ext cx="5303520" cy="502920"/>
           </a:xfrm>
           <a:prstGeom prst="rect">
             <a:avLst/>
@@ -5136,26 +5648,15 @@
               <a:buNone/>
             </a:pPr>
             <a:r>
-              <a:rPr lang="en-US" sz="1300" dirty="0">
-                <a:solidFill>
-                  <a:schemeClr val="tx1"/>
-                </a:solidFill>
-              </a:rPr>
-              <a:t>단축키는 </a:t>
-            </a:r>
-            <a:pPr indent="0" marL="0">
-              <a:buNone/>
-            </a:pPr>
-            <a:r>
               <a:rPr lang="en-US" sz="1300" b="1" dirty="0">
                 <a:solidFill>
-                  <a:schemeClr val="tx1"/>
+                  <a:schemeClr val="accent1"/>
                 </a:solidFill>
                 <a:latin typeface="Courier New" pitchFamily="34" charset="0"/>
                 <a:ea typeface="Courier New" pitchFamily="34" charset="-122"/>
                 <a:cs typeface="Courier New" pitchFamily="34" charset="-120"/>
               </a:rPr>
-              <a:t>ctrl+x tab</a:t>
+              <a:t>/learn</a:t>
             </a:r>
             <a:pPr indent="0" marL="0">
               <a:buNone/>
@@ -5166,7 +5667,7 @@
                   <a:schemeClr val="tx1"/>
                 </a:solidFill>
               </a:rPr>
-              <a:t>으로 패널을 고른 뒤 누릅니다. 보기 이름은 클릭해도 됩니다.</a:t>
+              <a:t> 복습으로 오늘 복습 바로 시작. 글자 키는 영문 상태에서.</a:t>
             </a:r>
             <a:endParaRPr lang="en-US" sz="1300" dirty="0"/>
           </a:p>
@@ -5174,7 +5675,7 @@
       </p:sp>
       <p:pic>
         <p:nvPicPr>
-          <p:cNvPr id="25" name="split-pane" descr="split-pane">    </p:cNvPr>
+          <p:cNvPr id="36" name="split-pane" descr="split-pane">    </p:cNvPr>
           <p:cNvPicPr>
             <a:picLocks noChangeAspect="1"/>
           </p:cNvPicPr>
@@ -5443,7 +5944,7 @@
                   <a:schemeClr val="tx1"/>
                 </a:solidFill>
               </a:rPr>
-              <a:t>방금 읽은 노트의 개념만으로 문제를 받습니다</a:t>
+              <a:t>그 노트의 코드로 예측 · 바꿔 보기 문제를 받습니다</a:t>
             </a:r>
             <a:endParaRPr lang="en-US" sz="1350" dirty="0"/>
           </a:p>
@@ -5581,7 +6082,7 @@
                   <a:schemeClr val="tx1"/>
                 </a:solidFill>
               </a:rPr>
-              <a:t>짧은 문장, 일상어, 개념마다 일상의 비유로 다시 씁니다</a:t>
+              <a:t>노트는 그대로, 아래에 ▶ 더 쉽게를 덧붙입니다</a:t>
             </a:r>
             <a:endParaRPr lang="en-US" sz="1350" dirty="0"/>
           </a:p>
@@ -5857,7 +6358,7 @@
                   <a:schemeClr val="tx1"/>
                 </a:solidFill>
               </a:rPr>
-              <a:t>노트 아래 질문칸에 적고 Enter. 이어서 물으면 앞의 답을 읽고 답합니다</a:t>
+              <a:t>질문칸에 적고 Enter. 이어서 물어도 됩니다</a:t>
             </a:r>
             <a:endParaRPr lang="en-US" sz="1350" dirty="0"/>
           </a:p>
@@ -6084,8 +6585,8 @@
         </p:nvSpPr>
         <p:spPr>
           <a:xfrm>
-            <a:off x="548640" y="1371600"/>
-            <a:ext cx="5669280" cy="685800"/>
+            <a:off x="548640" y="1325880"/>
+            <a:ext cx="5623560" cy="594360"/>
           </a:xfrm>
           <a:prstGeom prst="rect">
             <a:avLst/>
@@ -6101,31 +6602,691 @@
               <a:buNone/>
             </a:pPr>
             <a:r>
-              <a:rPr lang="en-US" sz="1500" dirty="0">
+              <a:rPr lang="en-US" sz="1450" dirty="0">
                 <a:solidFill>
                   <a:schemeClr val="tx1"/>
                 </a:solidFill>
               </a:rPr>
-              <a:t>복습할 때가 된 개념부터, 그 개념을 처음 배운 노트의 내 코드를 보여 주며 묻습니다.</a:t>
-            </a:r>
-            <a:endParaRPr lang="en-US" sz="1500" dirty="0"/>
-          </a:p>
-        </p:txBody>
-      </p:sp>
-      <p:sp>
-        <p:nvSpPr>
-          <p:cNvPr id="4" name="key-q"/>
+              <a:t>복습할 때가 된 개념부터, 그 개념을 배운 노트의 내 코드를 보여 주며 묻습니다. 한 번에 최대 3문제입니다.</a:t>
+            </a:r>
+            <a:endParaRPr lang="en-US" sz="1450" dirty="0"/>
+          </a:p>
+        </p:txBody>
+      </p:sp>
+      <p:sp>
+        <p:nvSpPr>
+          <p:cNvPr id="4" name="kind-0"/>
           <p:cNvSpPr/>
           <p:nvPr/>
         </p:nvSpPr>
         <p:spPr>
           <a:xfrm>
-            <a:off x="548640" y="2240280"/>
-            <a:ext cx="384048" cy="384048"/>
+            <a:off x="548640" y="1965960"/>
+            <a:ext cx="1801368" cy="1005840"/>
           </a:xfrm>
           <a:prstGeom prst="roundRect">
             <a:avLst>
-              <a:gd name="adj" fmla="val 14286"/>
+              <a:gd name="adj" fmla="val 9091"/>
+            </a:avLst>
+          </a:prstGeom>
+          <a:solidFill>
+            <a:schemeClr val="bg1"/>
+          </a:solidFill>
+          <a:ln w="12700">
+            <a:solidFill>
+              <a:schemeClr val="accent3"/>
+            </a:solidFill>
+            <a:prstDash val="solid"/>
+          </a:ln>
+        </p:spPr>
+      </p:sp>
+      <p:sp>
+        <p:nvSpPr>
+          <p:cNvPr id="5" name="Text 3"/>
+          <p:cNvSpPr txBox="1"/>
+          <p:nvPr/>
+        </p:nvSpPr>
+        <p:spPr>
+          <a:xfrm>
+            <a:off x="713232" y="2048256"/>
+            <a:ext cx="1508760" cy="329184"/>
+          </a:xfrm>
+          <a:prstGeom prst="rect">
+            <a:avLst/>
+          </a:prstGeom>
+          <a:noFill/>
+          <a:ln/>
+        </p:spPr>
+        <p:txBody>
+          <a:bodyPr wrap="square" lIns="0" tIns="0" rIns="0" bIns="0" rtlCol="0" anchor="t"/>
+          <a:lstStyle/>
+          <a:p>
+            <a:pPr indent="0" marL="0">
+              <a:buNone/>
+            </a:pPr>
+            <a:r>
+              <a:rPr lang="en-US" sz="1600" b="1" dirty="0">
+                <a:solidFill>
+                  <a:schemeClr val="accent3"/>
+                </a:solidFill>
+              </a:rPr>
+              <a:t>예측</a:t>
+            </a:r>
+            <a:endParaRPr lang="en-US" sz="1600" dirty="0"/>
+          </a:p>
+        </p:txBody>
+      </p:sp>
+      <p:sp>
+        <p:nvSpPr>
+          <p:cNvPr id="6" name="Text 4"/>
+          <p:cNvSpPr txBox="1"/>
+          <p:nvPr/>
+        </p:nvSpPr>
+        <p:spPr>
+          <a:xfrm>
+            <a:off x="713232" y="2395728"/>
+            <a:ext cx="1508760" cy="530352"/>
+          </a:xfrm>
+          <a:prstGeom prst="rect">
+            <a:avLst/>
+          </a:prstGeom>
+          <a:noFill/>
+          <a:ln/>
+        </p:spPr>
+        <p:txBody>
+          <a:bodyPr wrap="square" lIns="0" tIns="0" rIns="0" bIns="0" rtlCol="0" anchor="t"/>
+          <a:lstStyle/>
+          <a:p>
+            <a:pPr indent="0" marL="0">
+              <a:buNone/>
+            </a:pPr>
+            <a:r>
+              <a:rPr lang="en-US" sz="1200" dirty="0">
+                <a:solidFill>
+                  <a:schemeClr val="tx1"/>
+                </a:solidFill>
+              </a:rPr>
+              <a:t>코드를 보고 출력이나 값을 맞힙니다</a:t>
+            </a:r>
+            <a:endParaRPr lang="en-US" sz="1200" dirty="0"/>
+          </a:p>
+        </p:txBody>
+      </p:sp>
+      <p:sp>
+        <p:nvSpPr>
+          <p:cNvPr id="7" name="kind-1"/>
+          <p:cNvSpPr/>
+          <p:nvPr/>
+        </p:nvSpPr>
+        <p:spPr>
+          <a:xfrm>
+            <a:off x="2459736" y="1965960"/>
+            <a:ext cx="1801368" cy="1005840"/>
+          </a:xfrm>
+          <a:prstGeom prst="roundRect">
+            <a:avLst>
+              <a:gd name="adj" fmla="val 9091"/>
+            </a:avLst>
+          </a:prstGeom>
+          <a:solidFill>
+            <a:schemeClr val="bg1"/>
+          </a:solidFill>
+          <a:ln w="12700">
+            <a:solidFill>
+              <a:schemeClr val="accent5"/>
+            </a:solidFill>
+            <a:prstDash val="solid"/>
+          </a:ln>
+        </p:spPr>
+      </p:sp>
+      <p:sp>
+        <p:nvSpPr>
+          <p:cNvPr id="8" name="Text 6"/>
+          <p:cNvSpPr txBox="1"/>
+          <p:nvPr/>
+        </p:nvSpPr>
+        <p:spPr>
+          <a:xfrm>
+            <a:off x="2624328" y="2048256"/>
+            <a:ext cx="1508760" cy="329184"/>
+          </a:xfrm>
+          <a:prstGeom prst="rect">
+            <a:avLst/>
+          </a:prstGeom>
+          <a:noFill/>
+          <a:ln/>
+        </p:spPr>
+        <p:txBody>
+          <a:bodyPr wrap="square" lIns="0" tIns="0" rIns="0" bIns="0" rtlCol="0" anchor="t"/>
+          <a:lstStyle/>
+          <a:p>
+            <a:pPr indent="0" marL="0">
+              <a:buNone/>
+            </a:pPr>
+            <a:r>
+              <a:rPr lang="en-US" sz="1600" b="1" dirty="0">
+                <a:solidFill>
+                  <a:schemeClr val="accent5"/>
+                </a:solidFill>
+              </a:rPr>
+              <a:t>왜</a:t>
+            </a:r>
+            <a:endParaRPr lang="en-US" sz="1600" dirty="0"/>
+          </a:p>
+        </p:txBody>
+      </p:sp>
+      <p:sp>
+        <p:nvSpPr>
+          <p:cNvPr id="9" name="Text 7"/>
+          <p:cNvSpPr txBox="1"/>
+          <p:nvPr/>
+        </p:nvSpPr>
+        <p:spPr>
+          <a:xfrm>
+            <a:off x="2624328" y="2395728"/>
+            <a:ext cx="1508760" cy="530352"/>
+          </a:xfrm>
+          <a:prstGeom prst="rect">
+            <a:avLst/>
+          </a:prstGeom>
+          <a:noFill/>
+          <a:ln/>
+        </p:spPr>
+        <p:txBody>
+          <a:bodyPr wrap="square" lIns="0" tIns="0" rIns="0" bIns="0" rtlCol="0" anchor="t"/>
+          <a:lstStyle/>
+          <a:p>
+            <a:pPr indent="0" marL="0">
+              <a:buNone/>
+            </a:pPr>
+            <a:r>
+              <a:rPr lang="en-US" sz="1200" dirty="0">
+                <a:solidFill>
+                  <a:schemeClr val="tx1"/>
+                </a:solidFill>
+              </a:rPr>
+              <a:t>이 줄을 빼면? 왜 이렇게 썼을까?</a:t>
+            </a:r>
+            <a:endParaRPr lang="en-US" sz="1200" dirty="0"/>
+          </a:p>
+        </p:txBody>
+      </p:sp>
+      <p:sp>
+        <p:nvSpPr>
+          <p:cNvPr id="10" name="kind-2"/>
+          <p:cNvSpPr/>
+          <p:nvPr/>
+        </p:nvSpPr>
+        <p:spPr>
+          <a:xfrm>
+            <a:off x="4370832" y="1965960"/>
+            <a:ext cx="1801368" cy="1005840"/>
+          </a:xfrm>
+          <a:prstGeom prst="roundRect">
+            <a:avLst>
+              <a:gd name="adj" fmla="val 9091"/>
+            </a:avLst>
+          </a:prstGeom>
+          <a:solidFill>
+            <a:schemeClr val="bg1"/>
+          </a:solidFill>
+          <a:ln w="12700">
+            <a:solidFill>
+              <a:schemeClr val="accent2"/>
+            </a:solidFill>
+            <a:prstDash val="solid"/>
+          </a:ln>
+        </p:spPr>
+      </p:sp>
+      <p:sp>
+        <p:nvSpPr>
+          <p:cNvPr id="11" name="Text 9"/>
+          <p:cNvSpPr txBox="1"/>
+          <p:nvPr/>
+        </p:nvSpPr>
+        <p:spPr>
+          <a:xfrm>
+            <a:off x="4535424" y="2048256"/>
+            <a:ext cx="1508760" cy="329184"/>
+          </a:xfrm>
+          <a:prstGeom prst="rect">
+            <a:avLst/>
+          </a:prstGeom>
+          <a:noFill/>
+          <a:ln/>
+        </p:spPr>
+        <p:txBody>
+          <a:bodyPr wrap="square" lIns="0" tIns="0" rIns="0" bIns="0" rtlCol="0" anchor="t"/>
+          <a:lstStyle/>
+          <a:p>
+            <a:pPr indent="0" marL="0">
+              <a:buNone/>
+            </a:pPr>
+            <a:r>
+              <a:rPr lang="en-US" sz="1600" b="1" dirty="0">
+                <a:solidFill>
+                  <a:schemeClr val="accent2"/>
+                </a:solidFill>
+              </a:rPr>
+              <a:t>바꿔 보기</a:t>
+            </a:r>
+            <a:endParaRPr lang="en-US" sz="1600" dirty="0"/>
+          </a:p>
+        </p:txBody>
+      </p:sp>
+      <p:sp>
+        <p:nvSpPr>
+          <p:cNvPr id="12" name="Text 10"/>
+          <p:cNvSpPr txBox="1"/>
+          <p:nvPr/>
+        </p:nvSpPr>
+        <p:spPr>
+          <a:xfrm>
+            <a:off x="4535424" y="2395728"/>
+            <a:ext cx="1508760" cy="530352"/>
+          </a:xfrm>
+          <a:prstGeom prst="rect">
+            <a:avLst/>
+          </a:prstGeom>
+          <a:noFill/>
+          <a:ln/>
+        </p:spPr>
+        <p:txBody>
+          <a:bodyPr wrap="square" lIns="0" tIns="0" rIns="0" bIns="0" rtlCol="0" anchor="t"/>
+          <a:lstStyle/>
+          <a:p>
+            <a:pPr indent="0" marL="0">
+              <a:buNone/>
+            </a:pPr>
+            <a:r>
+              <a:rPr lang="en-US" sz="1200" dirty="0">
+                <a:solidFill>
+                  <a:schemeClr val="tx1"/>
+                </a:solidFill>
+              </a:rPr>
+              <a:t>바라는 동작이 되게 고쳐 봅니다</a:t>
+            </a:r>
+            <a:endParaRPr lang="en-US" sz="1200" dirty="0"/>
+          </a:p>
+        </p:txBody>
+      </p:sp>
+      <p:sp>
+        <p:nvSpPr>
+          <p:cNvPr id="13" name="Text 11"/>
+          <p:cNvSpPr txBox="1"/>
+          <p:nvPr/>
+        </p:nvSpPr>
+        <p:spPr>
+          <a:xfrm>
+            <a:off x="548640" y="3127248"/>
+            <a:ext cx="5623560" cy="347472"/>
+          </a:xfrm>
+          <a:prstGeom prst="rect">
+            <a:avLst/>
+          </a:prstGeom>
+          <a:noFill/>
+          <a:ln/>
+        </p:spPr>
+        <p:txBody>
+          <a:bodyPr wrap="square" lIns="0" tIns="0" rIns="0" bIns="0" rtlCol="0" anchor="t"/>
+          <a:lstStyle/>
+          <a:p>
+            <a:pPr indent="0" marL="0">
+              <a:buNone/>
+            </a:pPr>
+            <a:r>
+              <a:rPr lang="en-US" sz="1450" b="1" dirty="0">
+                <a:solidFill>
+                  <a:schemeClr val="tx2"/>
+                </a:solidFill>
+              </a:rPr>
+              <a:t>답은 적고 Enter — 한/영을 바꾸지 않고 이어 풉니다</a:t>
+            </a:r>
+            <a:endParaRPr lang="en-US" sz="1450" dirty="0"/>
+          </a:p>
+        </p:txBody>
+      </p:sp>
+      <p:sp>
+        <p:nvSpPr>
+          <p:cNvPr id="14" name="flow-0"/>
+          <p:cNvSpPr/>
+          <p:nvPr/>
+        </p:nvSpPr>
+        <p:spPr>
+          <a:xfrm>
+            <a:off x="548640" y="3529584"/>
+            <a:ext cx="1261872" cy="548640"/>
+          </a:xfrm>
+          <a:prstGeom prst="roundRect">
+            <a:avLst>
+              <a:gd name="adj" fmla="val 16667"/>
+            </a:avLst>
+          </a:prstGeom>
+          <a:solidFill>
+            <a:schemeClr val="bg2"/>
+          </a:solidFill>
+          <a:ln w="12700">
+            <a:solidFill>
+              <a:schemeClr val="bg2"/>
+            </a:solidFill>
+            <a:prstDash val="solid"/>
+          </a:ln>
+        </p:spPr>
+      </p:sp>
+      <p:sp>
+        <p:nvSpPr>
+          <p:cNvPr id="15" name="Text 13"/>
+          <p:cNvSpPr txBox="1"/>
+          <p:nvPr/>
+        </p:nvSpPr>
+        <p:spPr>
+          <a:xfrm>
+            <a:off x="548640" y="3529584"/>
+            <a:ext cx="1261872" cy="548640"/>
+          </a:xfrm>
+          <a:prstGeom prst="rect">
+            <a:avLst/>
+          </a:prstGeom>
+          <a:noFill/>
+          <a:ln/>
+        </p:spPr>
+        <p:txBody>
+          <a:bodyPr wrap="square" lIns="0" tIns="0" rIns="0" bIns="0" rtlCol="0" anchor="ctr"/>
+          <a:lstStyle/>
+          <a:p>
+            <a:pPr algn="ctr" indent="0" marL="0">
+              <a:buNone/>
+            </a:pPr>
+            <a:r>
+              <a:rPr lang="en-US" sz="1250" b="1" dirty="0">
+                <a:solidFill>
+                  <a:schemeClr val="tx2"/>
+                </a:solidFill>
+              </a:rPr>
+              <a:t>/learn 복습</a:t>
+            </a:r>
+            <a:endParaRPr lang="en-US" sz="1250" dirty="0"/>
+          </a:p>
+        </p:txBody>
+      </p:sp>
+      <p:sp>
+        <p:nvSpPr>
+          <p:cNvPr id="16" name="arrow"/>
+          <p:cNvSpPr/>
+          <p:nvPr/>
+        </p:nvSpPr>
+        <p:spPr>
+          <a:xfrm rot="5400000">
+            <a:off x="1856232" y="3721608"/>
+            <a:ext cx="128016" cy="164592"/>
+          </a:xfrm>
+          <a:prstGeom prst="triangle">
+            <a:avLst/>
+          </a:prstGeom>
+          <a:solidFill>
+            <a:srgbClr val="B9C7C2"/>
+          </a:solidFill>
+          <a:ln w="12700">
+            <a:solidFill>
+              <a:srgbClr val="B9C7C2"/>
+            </a:solidFill>
+            <a:prstDash val="solid"/>
+          </a:ln>
+        </p:spPr>
+      </p:sp>
+      <p:sp>
+        <p:nvSpPr>
+          <p:cNvPr id="17" name="flow-1"/>
+          <p:cNvSpPr/>
+          <p:nvPr/>
+        </p:nvSpPr>
+        <p:spPr>
+          <a:xfrm>
+            <a:off x="2002536" y="3529584"/>
+            <a:ext cx="1261872" cy="548640"/>
+          </a:xfrm>
+          <a:prstGeom prst="roundRect">
+            <a:avLst>
+              <a:gd name="adj" fmla="val 16667"/>
+            </a:avLst>
+          </a:prstGeom>
+          <a:solidFill>
+            <a:schemeClr val="bg2"/>
+          </a:solidFill>
+          <a:ln w="12700">
+            <a:solidFill>
+              <a:schemeClr val="bg2"/>
+            </a:solidFill>
+            <a:prstDash val="solid"/>
+          </a:ln>
+        </p:spPr>
+      </p:sp>
+      <p:sp>
+        <p:nvSpPr>
+          <p:cNvPr id="18" name="Text 16"/>
+          <p:cNvSpPr txBox="1"/>
+          <p:nvPr/>
+        </p:nvSpPr>
+        <p:spPr>
+          <a:xfrm>
+            <a:off x="2002536" y="3529584"/>
+            <a:ext cx="1261872" cy="548640"/>
+          </a:xfrm>
+          <a:prstGeom prst="rect">
+            <a:avLst/>
+          </a:prstGeom>
+          <a:noFill/>
+          <a:ln/>
+        </p:spPr>
+        <p:txBody>
+          <a:bodyPr wrap="square" lIns="0" tIns="0" rIns="0" bIns="0" rtlCol="0" anchor="ctr"/>
+          <a:lstStyle/>
+          <a:p>
+            <a:pPr algn="ctr" indent="0" marL="0">
+              <a:buNone/>
+            </a:pPr>
+            <a:r>
+              <a:rPr lang="en-US" sz="1250" b="1" dirty="0">
+                <a:solidFill>
+                  <a:schemeClr val="tx2"/>
+                </a:solidFill>
+              </a:rPr>
+              <a:t>내 답 칸에 적기</a:t>
+            </a:r>
+            <a:endParaRPr lang="en-US" sz="1250" dirty="0"/>
+          </a:p>
+        </p:txBody>
+      </p:sp>
+      <p:sp>
+        <p:nvSpPr>
+          <p:cNvPr id="19" name="arrow"/>
+          <p:cNvSpPr/>
+          <p:nvPr/>
+        </p:nvSpPr>
+        <p:spPr>
+          <a:xfrm rot="5400000">
+            <a:off x="3310128" y="3721608"/>
+            <a:ext cx="128016" cy="164592"/>
+          </a:xfrm>
+          <a:prstGeom prst="triangle">
+            <a:avLst/>
+          </a:prstGeom>
+          <a:solidFill>
+            <a:srgbClr val="B9C7C2"/>
+          </a:solidFill>
+          <a:ln w="12700">
+            <a:solidFill>
+              <a:srgbClr val="B9C7C2"/>
+            </a:solidFill>
+            <a:prstDash val="solid"/>
+          </a:ln>
+        </p:spPr>
+      </p:sp>
+      <p:sp>
+        <p:nvSpPr>
+          <p:cNvPr id="20" name="flow-2"/>
+          <p:cNvSpPr/>
+          <p:nvPr/>
+        </p:nvSpPr>
+        <p:spPr>
+          <a:xfrm>
+            <a:off x="3456432" y="3529584"/>
+            <a:ext cx="1261872" cy="548640"/>
+          </a:xfrm>
+          <a:prstGeom prst="roundRect">
+            <a:avLst>
+              <a:gd name="adj" fmla="val 16667"/>
+            </a:avLst>
+          </a:prstGeom>
+          <a:solidFill>
+            <a:schemeClr val="accent1"/>
+          </a:solidFill>
+          <a:ln w="12700">
+            <a:solidFill>
+              <a:schemeClr val="accent1"/>
+            </a:solidFill>
+            <a:prstDash val="solid"/>
+          </a:ln>
+        </p:spPr>
+      </p:sp>
+      <p:sp>
+        <p:nvSpPr>
+          <p:cNvPr id="21" name="Text 19"/>
+          <p:cNvSpPr txBox="1"/>
+          <p:nvPr/>
+        </p:nvSpPr>
+        <p:spPr>
+          <a:xfrm>
+            <a:off x="3456432" y="3529584"/>
+            <a:ext cx="1261872" cy="548640"/>
+          </a:xfrm>
+          <a:prstGeom prst="rect">
+            <a:avLst/>
+          </a:prstGeom>
+          <a:noFill/>
+          <a:ln/>
+        </p:spPr>
+        <p:txBody>
+          <a:bodyPr wrap="square" lIns="0" tIns="0" rIns="0" bIns="0" rtlCol="0" anchor="ctr"/>
+          <a:lstStyle/>
+          <a:p>
+            <a:pPr algn="ctr" indent="0" marL="0">
+              <a:buNone/>
+            </a:pPr>
+            <a:r>
+              <a:rPr lang="en-US" sz="1250" b="1" dirty="0">
+                <a:solidFill>
+                  <a:schemeClr val="bg1"/>
+                </a:solidFill>
+              </a:rPr>
+              <a:t>Enter로 채점</a:t>
+            </a:r>
+            <a:endParaRPr lang="en-US" sz="1250" dirty="0"/>
+          </a:p>
+        </p:txBody>
+      </p:sp>
+      <p:sp>
+        <p:nvSpPr>
+          <p:cNvPr id="22" name="arrow"/>
+          <p:cNvSpPr/>
+          <p:nvPr/>
+        </p:nvSpPr>
+        <p:spPr>
+          <a:xfrm rot="5400000">
+            <a:off x="4764024" y="3721608"/>
+            <a:ext cx="128016" cy="164592"/>
+          </a:xfrm>
+          <a:prstGeom prst="triangle">
+            <a:avLst/>
+          </a:prstGeom>
+          <a:solidFill>
+            <a:srgbClr val="B9C7C2"/>
+          </a:solidFill>
+          <a:ln w="12700">
+            <a:solidFill>
+              <a:srgbClr val="B9C7C2"/>
+            </a:solidFill>
+            <a:prstDash val="solid"/>
+          </a:ln>
+        </p:spPr>
+      </p:sp>
+      <p:sp>
+        <p:nvSpPr>
+          <p:cNvPr id="23" name="flow-3"/>
+          <p:cNvSpPr/>
+          <p:nvPr/>
+        </p:nvSpPr>
+        <p:spPr>
+          <a:xfrm>
+            <a:off x="4910328" y="3529584"/>
+            <a:ext cx="1261872" cy="548640"/>
+          </a:xfrm>
+          <a:prstGeom prst="roundRect">
+            <a:avLst>
+              <a:gd name="adj" fmla="val 16667"/>
+            </a:avLst>
+          </a:prstGeom>
+          <a:solidFill>
+            <a:schemeClr val="bg2"/>
+          </a:solidFill>
+          <a:ln w="12700">
+            <a:solidFill>
+              <a:schemeClr val="bg2"/>
+            </a:solidFill>
+            <a:prstDash val="solid"/>
+          </a:ln>
+        </p:spPr>
+      </p:sp>
+      <p:sp>
+        <p:nvSpPr>
+          <p:cNvPr id="24" name="Text 22"/>
+          <p:cNvSpPr txBox="1"/>
+          <p:nvPr/>
+        </p:nvSpPr>
+        <p:spPr>
+          <a:xfrm>
+            <a:off x="4910328" y="3529584"/>
+            <a:ext cx="1261872" cy="548640"/>
+          </a:xfrm>
+          <a:prstGeom prst="rect">
+            <a:avLst/>
+          </a:prstGeom>
+          <a:noFill/>
+          <a:ln/>
+        </p:spPr>
+        <p:txBody>
+          <a:bodyPr wrap="square" lIns="0" tIns="0" rIns="0" bIns="0" rtlCol="0" anchor="ctr"/>
+          <a:lstStyle/>
+          <a:p>
+            <a:pPr algn="ctr" indent="0" marL="0">
+              <a:buNone/>
+            </a:pPr>
+            <a:r>
+              <a:rPr lang="en-US" sz="1250" b="1" dirty="0">
+                <a:solidFill>
+                  <a:schemeClr val="tx2"/>
+                </a:solidFill>
+              </a:rPr>
+              <a:t>다음 문제로</a:t>
+            </a:r>
+            <a:endParaRPr lang="en-US" sz="1250" dirty="0"/>
+          </a:p>
+        </p:txBody>
+      </p:sp>
+      <p:sp>
+        <p:nvSpPr>
+          <p:cNvPr id="25" name="key-h"/>
+          <p:cNvSpPr/>
+          <p:nvPr/>
+        </p:nvSpPr>
+        <p:spPr>
+          <a:xfrm>
+            <a:off x="548640" y="4297680"/>
+            <a:ext cx="365760" cy="365760"/>
+          </a:xfrm>
+          <a:prstGeom prst="roundRect">
+            <a:avLst>
+              <a:gd name="adj" fmla="val 15000"/>
             </a:avLst>
           </a:prstGeom>
           <a:solidFill>
@@ -6141,14 +7302,14 @@
       </p:sp>
       <p:sp>
         <p:nvSpPr>
-          <p:cNvPr id="5" name="Text 3"/>
-          <p:cNvSpPr txBox="1"/>
-          <p:nvPr/>
-        </p:nvSpPr>
-        <p:spPr>
-          <a:xfrm>
-            <a:off x="548640" y="2240280"/>
-            <a:ext cx="384048" cy="384048"/>
+          <p:cNvPr id="26" name="Text 24"/>
+          <p:cNvSpPr txBox="1"/>
+          <p:nvPr/>
+        </p:nvSpPr>
+        <p:spPr>
+          <a:xfrm>
+            <a:off x="548640" y="4297680"/>
+            <a:ext cx="365760" cy="365760"/>
           </a:xfrm>
           <a:prstGeom prst="rect">
             <a:avLst/>
@@ -6172,7 +7333,7 @@
                 <a:ea typeface="Courier New" pitchFamily="34" charset="-122"/>
                 <a:cs typeface="Courier New" pitchFamily="34" charset="-120"/>
               </a:rPr>
-              <a:t>q</a:t>
+              <a:t>h</a:t>
             </a:r>
             <a:endParaRPr lang="en-US" sz="1500" dirty="0"/>
           </a:p>
@@ -6180,18 +7341,54 @@
       </p:sp>
       <p:sp>
         <p:nvSpPr>
-          <p:cNvPr id="6" name="key-s"/>
+          <p:cNvPr id="27" name="Text 25"/>
+          <p:cNvSpPr txBox="1"/>
+          <p:nvPr/>
+        </p:nvSpPr>
+        <p:spPr>
+          <a:xfrm>
+            <a:off x="1097280" y="4297680"/>
+            <a:ext cx="5074920" cy="365760"/>
+          </a:xfrm>
+          <a:prstGeom prst="rect">
+            <a:avLst/>
+          </a:prstGeom>
+          <a:noFill/>
+          <a:ln/>
+        </p:spPr>
+        <p:txBody>
+          <a:bodyPr wrap="square" lIns="0" tIns="0" rIns="0" bIns="0" rtlCol="0" anchor="ctr"/>
+          <a:lstStyle/>
+          <a:p>
+            <a:pPr indent="0" marL="0">
+              <a:buNone/>
+            </a:pPr>
+            <a:r>
+              <a:rPr lang="en-US" sz="1400" dirty="0">
+                <a:solidFill>
+                  <a:schemeClr val="tx1"/>
+                </a:solidFill>
+              </a:rPr>
+              <a:t>막히면 힌트: 답 대신 실마리만</a:t>
+            </a:r>
+            <a:endParaRPr lang="en-US" sz="1400" dirty="0"/>
+          </a:p>
+        </p:txBody>
+      </p:sp>
+      <p:sp>
+        <p:nvSpPr>
+          <p:cNvPr id="28" name="key-a"/>
           <p:cNvSpPr/>
           <p:nvPr/>
         </p:nvSpPr>
         <p:spPr>
           <a:xfrm>
-            <a:off x="1024128" y="2240280"/>
-            <a:ext cx="384048" cy="384048"/>
+            <a:off x="548640" y="4754880"/>
+            <a:ext cx="365760" cy="365760"/>
           </a:xfrm>
           <a:prstGeom prst="roundRect">
             <a:avLst>
-              <a:gd name="adj" fmla="val 14286"/>
+              <a:gd name="adj" fmla="val 15000"/>
             </a:avLst>
           </a:prstGeom>
           <a:solidFill>
@@ -6207,14 +7404,14 @@
       </p:sp>
       <p:sp>
         <p:nvSpPr>
-          <p:cNvPr id="7" name="Text 5"/>
-          <p:cNvSpPr txBox="1"/>
-          <p:nvPr/>
-        </p:nvSpPr>
-        <p:spPr>
-          <a:xfrm>
-            <a:off x="1024128" y="2240280"/>
-            <a:ext cx="384048" cy="384048"/>
+          <p:cNvPr id="29" name="Text 27"/>
+          <p:cNvSpPr txBox="1"/>
+          <p:nvPr/>
+        </p:nvSpPr>
+        <p:spPr>
+          <a:xfrm>
+            <a:off x="548640" y="4754880"/>
+            <a:ext cx="365760" cy="365760"/>
           </a:xfrm>
           <a:prstGeom prst="rect">
             <a:avLst/>
@@ -6238,7 +7435,7 @@
                 <a:ea typeface="Courier New" pitchFamily="34" charset="-122"/>
                 <a:cs typeface="Courier New" pitchFamily="34" charset="-120"/>
               </a:rPr>
-              <a:t>s</a:t>
+              <a:t>a</a:t>
             </a:r>
             <a:endParaRPr lang="en-US" sz="1500" dirty="0"/>
           </a:p>
@@ -6246,14 +7443,14 @@
       </p:sp>
       <p:sp>
         <p:nvSpPr>
-          <p:cNvPr id="8" name="Text 6"/>
-          <p:cNvSpPr txBox="1"/>
-          <p:nvPr/>
-        </p:nvSpPr>
-        <p:spPr>
-          <a:xfrm>
-            <a:off x="1600200" y="2240280"/>
-            <a:ext cx="4572000" cy="384048"/>
+          <p:cNvPr id="30" name="Text 28"/>
+          <p:cNvSpPr txBox="1"/>
+          <p:nvPr/>
+        </p:nvSpPr>
+        <p:spPr>
+          <a:xfrm>
+            <a:off x="1097280" y="4754880"/>
+            <a:ext cx="5074920" cy="365760"/>
           </a:xfrm>
           <a:prstGeom prst="rect">
             <a:avLst/>
@@ -6269,31 +7466,31 @@
               <a:buNone/>
             </a:pPr>
             <a:r>
-              <a:rPr lang="en-US" sz="1500" dirty="0">
+              <a:rPr lang="en-US" sz="1400" dirty="0">
                 <a:solidFill>
                   <a:schemeClr val="tx1"/>
                 </a:solidFill>
               </a:rPr>
-              <a:t>퀴즈를 열고 문제 받기 (최대 3문제)</a:t>
-            </a:r>
-            <a:endParaRPr lang="en-US" sz="1500" dirty="0"/>
-          </a:p>
-        </p:txBody>
-      </p:sp>
-      <p:sp>
-        <p:nvSpPr>
-          <p:cNvPr id="9" name="key-h"/>
+              <a:t>정답만 보고 o · x로 스스로 채점해도 됩니다</a:t>
+            </a:r>
+            <a:endParaRPr lang="en-US" sz="1400" dirty="0"/>
+          </a:p>
+        </p:txBody>
+      </p:sp>
+      <p:sp>
+        <p:nvSpPr>
+          <p:cNvPr id="31" name="key-n"/>
           <p:cNvSpPr/>
           <p:nvPr/>
         </p:nvSpPr>
         <p:spPr>
           <a:xfrm>
-            <a:off x="548640" y="2990088"/>
-            <a:ext cx="384048" cy="384048"/>
+            <a:off x="548640" y="5212080"/>
+            <a:ext cx="365760" cy="365760"/>
           </a:xfrm>
           <a:prstGeom prst="roundRect">
             <a:avLst>
-              <a:gd name="adj" fmla="val 14286"/>
+              <a:gd name="adj" fmla="val 15000"/>
             </a:avLst>
           </a:prstGeom>
           <a:solidFill>
@@ -6309,14 +7506,14 @@
       </p:sp>
       <p:sp>
         <p:nvSpPr>
-          <p:cNvPr id="10" name="Text 8"/>
-          <p:cNvSpPr txBox="1"/>
-          <p:nvPr/>
-        </p:nvSpPr>
-        <p:spPr>
-          <a:xfrm>
-            <a:off x="548640" y="2990088"/>
-            <a:ext cx="384048" cy="384048"/>
+          <p:cNvPr id="32" name="Text 30"/>
+          <p:cNvSpPr txBox="1"/>
+          <p:nvPr/>
+        </p:nvSpPr>
+        <p:spPr>
+          <a:xfrm>
+            <a:off x="548640" y="5212080"/>
+            <a:ext cx="365760" cy="365760"/>
           </a:xfrm>
           <a:prstGeom prst="rect">
             <a:avLst/>
@@ -6340,7 +7537,7 @@
                 <a:ea typeface="Courier New" pitchFamily="34" charset="-122"/>
                 <a:cs typeface="Courier New" pitchFamily="34" charset="-120"/>
               </a:rPr>
-              <a:t>h</a:t>
+              <a:t>n</a:t>
             </a:r>
             <a:endParaRPr lang="en-US" sz="1500" dirty="0"/>
           </a:p>
@@ -6348,14 +7545,14 @@
       </p:sp>
       <p:sp>
         <p:nvSpPr>
-          <p:cNvPr id="11" name="Text 9"/>
-          <p:cNvSpPr txBox="1"/>
-          <p:nvPr/>
-        </p:nvSpPr>
-        <p:spPr>
-          <a:xfrm>
-            <a:off x="1600200" y="2990088"/>
-            <a:ext cx="4572000" cy="384048"/>
+          <p:cNvPr id="33" name="Text 31"/>
+          <p:cNvSpPr txBox="1"/>
+          <p:nvPr/>
+        </p:nvSpPr>
+        <p:spPr>
+          <a:xfrm>
+            <a:off x="1097280" y="5212080"/>
+            <a:ext cx="5074920" cy="365760"/>
           </a:xfrm>
           <a:prstGeom prst="rect">
             <a:avLst/>
@@ -6371,326 +7568,56 @@
               <a:buNone/>
             </a:pPr>
             <a:r>
-              <a:rPr lang="en-US" sz="1500" dirty="0">
+              <a:rPr lang="en-US" sz="1400" dirty="0">
                 <a:solidFill>
                   <a:schemeClr val="tx1"/>
                 </a:solidFill>
               </a:rPr>
-              <a:t>막히면 힌트: 답 대신 실마리만</a:t>
-            </a:r>
-            <a:endParaRPr lang="en-US" sz="1500" dirty="0"/>
-          </a:p>
-        </p:txBody>
-      </p:sp>
-      <p:sp>
-        <p:nvSpPr>
-          <p:cNvPr id="12" name="key-i"/>
-          <p:cNvSpPr/>
-          <p:nvPr/>
-        </p:nvSpPr>
-        <p:spPr>
-          <a:xfrm>
-            <a:off x="548640" y="3739896"/>
-            <a:ext cx="384048" cy="384048"/>
-          </a:xfrm>
-          <a:prstGeom prst="roundRect">
-            <a:avLst>
-              <a:gd name="adj" fmla="val 14286"/>
-            </a:avLst>
-          </a:prstGeom>
-          <a:solidFill>
-            <a:schemeClr val="bg1"/>
-          </a:solidFill>
-          <a:ln w="15875">
-            <a:solidFill>
-              <a:srgbClr val="B9C7C2"/>
-            </a:solidFill>
-            <a:prstDash val="solid"/>
-          </a:ln>
-        </p:spPr>
-      </p:sp>
-      <p:sp>
-        <p:nvSpPr>
-          <p:cNvPr id="13" name="Text 11"/>
-          <p:cNvSpPr txBox="1"/>
-          <p:nvPr/>
-        </p:nvSpPr>
-        <p:spPr>
-          <a:xfrm>
-            <a:off x="548640" y="3739896"/>
-            <a:ext cx="384048" cy="384048"/>
-          </a:xfrm>
-          <a:prstGeom prst="rect">
-            <a:avLst/>
-          </a:prstGeom>
-          <a:noFill/>
-          <a:ln/>
-        </p:spPr>
-        <p:txBody>
-          <a:bodyPr wrap="square" lIns="0" tIns="0" rIns="0" bIns="0" rtlCol="0" anchor="ctr"/>
-          <a:lstStyle/>
-          <a:p>
-            <a:pPr algn="ctr" indent="0" marL="0">
-              <a:buNone/>
-            </a:pPr>
-            <a:r>
-              <a:rPr lang="en-US" sz="1500" b="1" dirty="0">
-                <a:solidFill>
-                  <a:schemeClr val="tx2"/>
-                </a:solidFill>
-                <a:latin typeface="Courier New" pitchFamily="34" charset="0"/>
-                <a:ea typeface="Courier New" pitchFamily="34" charset="-122"/>
-                <a:cs typeface="Courier New" pitchFamily="34" charset="-120"/>
-              </a:rPr>
-              <a:t>i</a:t>
-            </a:r>
-            <a:endParaRPr lang="en-US" sz="1500" dirty="0"/>
-          </a:p>
-        </p:txBody>
-      </p:sp>
-      <p:sp>
-        <p:nvSpPr>
-          <p:cNvPr id="14" name="Text 12"/>
-          <p:cNvSpPr txBox="1"/>
-          <p:nvPr/>
-        </p:nvSpPr>
-        <p:spPr>
-          <a:xfrm>
-            <a:off x="1600200" y="3739896"/>
-            <a:ext cx="4572000" cy="384048"/>
-          </a:xfrm>
-          <a:prstGeom prst="rect">
-            <a:avLst/>
-          </a:prstGeom>
-          <a:noFill/>
-          <a:ln/>
-        </p:spPr>
-        <p:txBody>
-          <a:bodyPr wrap="square" lIns="0" tIns="0" rIns="0" bIns="0" rtlCol="0" anchor="ctr"/>
+              <a:t>틀리면 그 개념을 배운 노트로 바로 갑니다</a:t>
+            </a:r>
+            <a:endParaRPr lang="en-US" sz="1400" dirty="0"/>
+          </a:p>
+        </p:txBody>
+      </p:sp>
+      <p:sp>
+        <p:nvSpPr>
+          <p:cNvPr id="34" name="Text 32"/>
+          <p:cNvSpPr txBox="1"/>
+          <p:nvPr/>
+        </p:nvSpPr>
+        <p:spPr>
+          <a:xfrm>
+            <a:off x="548640" y="5715000"/>
+            <a:ext cx="5623560" cy="411480"/>
+          </a:xfrm>
+          <a:prstGeom prst="rect">
+            <a:avLst/>
+          </a:prstGeom>
+          <a:noFill/>
+          <a:ln/>
+        </p:spPr>
+        <p:txBody>
+          <a:bodyPr wrap="square" lIns="0" tIns="0" rIns="0" bIns="0" rtlCol="0" anchor="t"/>
           <a:lstStyle/>
           <a:p>
             <a:pPr indent="0" marL="0">
               <a:buNone/>
             </a:pPr>
             <a:r>
-              <a:rPr lang="en-US" sz="1500" dirty="0">
-                <a:solidFill>
-                  <a:schemeClr val="tx1"/>
-                </a:solidFill>
-              </a:rPr>
-              <a:t>답을 적고 Enter → Claude가 채점</a:t>
-            </a:r>
-            <a:endParaRPr lang="en-US" sz="1500" dirty="0"/>
-          </a:p>
-        </p:txBody>
-      </p:sp>
-      <p:sp>
-        <p:nvSpPr>
-          <p:cNvPr id="15" name="key-a"/>
-          <p:cNvSpPr/>
-          <p:nvPr/>
-        </p:nvSpPr>
-        <p:spPr>
-          <a:xfrm>
-            <a:off x="548640" y="4489704"/>
-            <a:ext cx="384048" cy="384048"/>
-          </a:xfrm>
-          <a:prstGeom prst="roundRect">
-            <a:avLst>
-              <a:gd name="adj" fmla="val 14286"/>
-            </a:avLst>
-          </a:prstGeom>
-          <a:solidFill>
-            <a:schemeClr val="bg1"/>
-          </a:solidFill>
-          <a:ln w="15875">
-            <a:solidFill>
-              <a:srgbClr val="B9C7C2"/>
-            </a:solidFill>
-            <a:prstDash val="solid"/>
-          </a:ln>
-        </p:spPr>
-      </p:sp>
-      <p:sp>
-        <p:nvSpPr>
-          <p:cNvPr id="16" name="Text 14"/>
-          <p:cNvSpPr txBox="1"/>
-          <p:nvPr/>
-        </p:nvSpPr>
-        <p:spPr>
-          <a:xfrm>
-            <a:off x="548640" y="4489704"/>
-            <a:ext cx="384048" cy="384048"/>
-          </a:xfrm>
-          <a:prstGeom prst="rect">
-            <a:avLst/>
-          </a:prstGeom>
-          <a:noFill/>
-          <a:ln/>
-        </p:spPr>
-        <p:txBody>
-          <a:bodyPr wrap="square" lIns="0" tIns="0" rIns="0" bIns="0" rtlCol="0" anchor="ctr"/>
-          <a:lstStyle/>
-          <a:p>
-            <a:pPr algn="ctr" indent="0" marL="0">
-              <a:buNone/>
-            </a:pPr>
-            <a:r>
-              <a:rPr lang="en-US" sz="1500" b="1" dirty="0">
-                <a:solidFill>
-                  <a:schemeClr val="tx2"/>
-                </a:solidFill>
-                <a:latin typeface="Courier New" pitchFamily="34" charset="0"/>
-                <a:ea typeface="Courier New" pitchFamily="34" charset="-122"/>
-                <a:cs typeface="Courier New" pitchFamily="34" charset="-120"/>
-              </a:rPr>
-              <a:t>a</a:t>
-            </a:r>
-            <a:endParaRPr lang="en-US" sz="1500" dirty="0"/>
-          </a:p>
-        </p:txBody>
-      </p:sp>
-      <p:sp>
-        <p:nvSpPr>
-          <p:cNvPr id="17" name="Text 15"/>
-          <p:cNvSpPr txBox="1"/>
-          <p:nvPr/>
-        </p:nvSpPr>
-        <p:spPr>
-          <a:xfrm>
-            <a:off x="1600200" y="4489704"/>
-            <a:ext cx="4572000" cy="384048"/>
-          </a:xfrm>
-          <a:prstGeom prst="rect">
-            <a:avLst/>
-          </a:prstGeom>
-          <a:noFill/>
-          <a:ln/>
-        </p:spPr>
-        <p:txBody>
-          <a:bodyPr wrap="square" lIns="0" tIns="0" rIns="0" bIns="0" rtlCol="0" anchor="ctr"/>
-          <a:lstStyle/>
-          <a:p>
-            <a:pPr indent="0" marL="0">
-              <a:buNone/>
-            </a:pPr>
-            <a:r>
-              <a:rPr lang="en-US" sz="1500" dirty="0">
-                <a:solidFill>
-                  <a:schemeClr val="tx1"/>
-                </a:solidFill>
-              </a:rPr>
-              <a:t>정답만 보고 o · x로 스스로 채점해도 됩니다</a:t>
-            </a:r>
-            <a:endParaRPr lang="en-US" sz="1500" dirty="0"/>
-          </a:p>
-        </p:txBody>
-      </p:sp>
-      <p:sp>
-        <p:nvSpPr>
-          <p:cNvPr id="18" name="key-f"/>
-          <p:cNvSpPr/>
-          <p:nvPr/>
-        </p:nvSpPr>
-        <p:spPr>
-          <a:xfrm>
-            <a:off x="548640" y="5239512"/>
-            <a:ext cx="384048" cy="384048"/>
-          </a:xfrm>
-          <a:prstGeom prst="roundRect">
-            <a:avLst>
-              <a:gd name="adj" fmla="val 14286"/>
-            </a:avLst>
-          </a:prstGeom>
-          <a:solidFill>
-            <a:schemeClr val="bg1"/>
-          </a:solidFill>
-          <a:ln w="15875">
-            <a:solidFill>
-              <a:srgbClr val="B9C7C2"/>
-            </a:solidFill>
-            <a:prstDash val="solid"/>
-          </a:ln>
-        </p:spPr>
-      </p:sp>
-      <p:sp>
-        <p:nvSpPr>
-          <p:cNvPr id="19" name="Text 17"/>
-          <p:cNvSpPr txBox="1"/>
-          <p:nvPr/>
-        </p:nvSpPr>
-        <p:spPr>
-          <a:xfrm>
-            <a:off x="548640" y="5239512"/>
-            <a:ext cx="384048" cy="384048"/>
-          </a:xfrm>
-          <a:prstGeom prst="rect">
-            <a:avLst/>
-          </a:prstGeom>
-          <a:noFill/>
-          <a:ln/>
-        </p:spPr>
-        <p:txBody>
-          <a:bodyPr wrap="square" lIns="0" tIns="0" rIns="0" bIns="0" rtlCol="0" anchor="ctr"/>
-          <a:lstStyle/>
-          <a:p>
-            <a:pPr algn="ctr" indent="0" marL="0">
-              <a:buNone/>
-            </a:pPr>
-            <a:r>
-              <a:rPr lang="en-US" sz="1500" b="1" dirty="0">
-                <a:solidFill>
-                  <a:schemeClr val="tx2"/>
-                </a:solidFill>
-                <a:latin typeface="Courier New" pitchFamily="34" charset="0"/>
-                <a:ea typeface="Courier New" pitchFamily="34" charset="-122"/>
-                <a:cs typeface="Courier New" pitchFamily="34" charset="-120"/>
-              </a:rPr>
-              <a:t>f</a:t>
-            </a:r>
-            <a:endParaRPr lang="en-US" sz="1500" dirty="0"/>
-          </a:p>
-        </p:txBody>
-      </p:sp>
-      <p:sp>
-        <p:nvSpPr>
-          <p:cNvPr id="20" name="Text 18"/>
-          <p:cNvSpPr txBox="1"/>
-          <p:nvPr/>
-        </p:nvSpPr>
-        <p:spPr>
-          <a:xfrm>
-            <a:off x="1600200" y="5239512"/>
-            <a:ext cx="4572000" cy="384048"/>
-          </a:xfrm>
-          <a:prstGeom prst="rect">
-            <a:avLst/>
-          </a:prstGeom>
-          <a:noFill/>
-          <a:ln/>
-        </p:spPr>
-        <p:txBody>
-          <a:bodyPr wrap="square" lIns="0" tIns="0" rIns="0" bIns="0" rtlCol="0" anchor="ctr"/>
-          <a:lstStyle/>
-          <a:p>
-            <a:pPr indent="0" marL="0">
-              <a:buNone/>
-            </a:pPr>
-            <a:r>
-              <a:rPr lang="en-US" sz="1500" dirty="0">
-                <a:solidFill>
-                  <a:schemeClr val="tx1"/>
-                </a:solidFill>
-              </a:rPr>
-              <a:t>채점이 이상하면 맞힘 ↔ 틀림 바꾸기</a:t>
-            </a:r>
-            <a:endParaRPr lang="en-US" sz="1500" dirty="0"/>
+              <a:rPr lang="en-US" sz="1200" dirty="0">
+                <a:solidFill>
+                  <a:srgbClr val="5A6B70"/>
+                </a:solidFill>
+              </a:rPr>
+              <a:t>답 칸에서는 글자가 답으로 들어갑니다(한글로 적어도 됩니다). h · a · n은 Tab으로 버튼에 간 뒤 누르세요.</a:t>
+            </a:r>
+            <a:endParaRPr lang="en-US" sz="1200" dirty="0"/>
           </a:p>
         </p:txBody>
       </p:sp>
       <p:pic>
         <p:nvPicPr>
-          <p:cNvPr id="21" name="hint-pane" descr="hint-pane">    </p:cNvPr>
+          <p:cNvPr id="35" name="hint-pane" descr="hint-pane">    </p:cNvPr>
           <p:cNvPicPr>
             <a:picLocks noChangeAspect="1"/>
           </p:cNvPicPr>
@@ -7000,7 +7927,7 @@
                   <a:schemeClr val="tx1"/>
                 </a:solidFill>
               </a:rPr>
-              <a:t>복습 단계가 한 칸 올라 더 나중에 다시 나옵니다</a:t>
+              <a:t>때가 된 개념이면 한 칸 올라 더 나중에 다시 나옵니다</a:t>
             </a:r>
             <a:endParaRPr lang="en-US" sz="1350" dirty="0"/>
           </a:p>
@@ -7354,14 +8281,28 @@
               <a:buNone/>
             </a:pPr>
             <a:r>
-              <a:rPr lang="en-US" sz="1350" b="1" dirty="0">
+              <a:rPr lang="en-US" sz="1300" b="1" dirty="0">
                 <a:solidFill>
                   <a:schemeClr val="tx2"/>
                 </a:solidFill>
               </a:rPr>
-              <a:t>표현이 달라도 뜻이 같으면 맞힘 · 채점이 이상하면 f로 바꿉니다</a:t>
-            </a:r>
-            <a:endParaRPr lang="en-US" sz="1350" dirty="0"/>
+              <a:t>예측은 값이, 바꿔 보기는 동작이 맞으면 맞힘</a:t>
+            </a:r>
+            <a:endParaRPr lang="en-US" sz="1300" dirty="0"/>
+          </a:p>
+          <a:p>
+            <a:pPr indent="0" marL="0">
+              <a:buNone/>
+            </a:pPr>
+            <a:r>
+              <a:rPr lang="en-US" sz="1300" b="1" dirty="0">
+                <a:solidFill>
+                  <a:schemeClr val="tx2"/>
+                </a:solidFill>
+              </a:rPr>
+              <a:t>뜻이 같으면 맞힘 · 채점이 이상하면 f로 바꿉니다</a:t>
+            </a:r>
+            <a:endParaRPr lang="en-US" sz="1300" dirty="0"/>
           </a:p>
         </p:txBody>
       </p:sp>
@@ -7481,8 +8422,8 @@
         </p:nvSpPr>
         <p:spPr>
           <a:xfrm>
-            <a:off x="548640" y="1371600"/>
-            <a:ext cx="10972800" cy="457200"/>
+            <a:off x="548640" y="1325880"/>
+            <a:ext cx="11064240" cy="457200"/>
           </a:xfrm>
           <a:prstGeom prst="rect">
             <a:avLst/>
@@ -7503,7 +8444,7 @@
                   <a:schemeClr val="tx1"/>
                 </a:solidFill>
               </a:rPr>
-              <a:t>개념마다 복습 단계가 있습니다. 때가 된 개념을 맞힐 때마다 다음 복습까지의 간격이 늘어납니다.</a:t>
+              <a:t>직접 떠올려 맞힐 때만 다음 복습까지의 간격이 늘어납니다. 60일 단계까지 맞히면 졸업입니다.</a:t>
             </a:r>
             <a:endParaRPr lang="en-US" sz="1600" dirty="0"/>
           </a:p>
@@ -7517,7 +8458,7 @@
         </p:nvSpPr>
         <p:spPr>
           <a:xfrm>
-            <a:off x="1097280" y="2880360"/>
+            <a:off x="1097280" y="2606040"/>
             <a:ext cx="9966960" cy="0"/>
           </a:xfrm>
           <a:prstGeom prst="line">
@@ -7540,8 +8481,8 @@
         </p:nvSpPr>
         <p:spPr>
           <a:xfrm>
-            <a:off x="640080" y="2240280"/>
-            <a:ext cx="1280160" cy="1280160"/>
+            <a:off x="548640" y="2011680"/>
+            <a:ext cx="1188720" cy="1188720"/>
           </a:xfrm>
           <a:prstGeom prst="ellipse">
             <a:avLst/>
@@ -7565,8 +8506,8 @@
         </p:nvSpPr>
         <p:spPr>
           <a:xfrm>
-            <a:off x="640080" y="2240280"/>
-            <a:ext cx="1280160" cy="1280160"/>
+            <a:off x="548640" y="2011680"/>
+            <a:ext cx="1188720" cy="1188720"/>
           </a:xfrm>
           <a:prstGeom prst="rect">
             <a:avLst/>
@@ -7582,7 +8523,7 @@
               <a:buNone/>
             </a:pPr>
             <a:r>
-              <a:rPr lang="en-US" sz="3200" b="1" dirty="0">
+              <a:rPr lang="en-US" sz="3000" b="1" dirty="0">
                 <a:solidFill>
                   <a:schemeClr val="bg1"/>
                 </a:solidFill>
@@ -7615,8 +8556,8 @@
         </p:nvSpPr>
         <p:spPr>
           <a:xfrm>
-            <a:off x="640080" y="3639312"/>
-            <a:ext cx="1280160" cy="320040"/>
+            <a:off x="548640" y="3291840"/>
+            <a:ext cx="1188720" cy="320040"/>
           </a:xfrm>
           <a:prstGeom prst="rect">
             <a:avLst/>
@@ -7651,8 +8592,8 @@
         </p:nvSpPr>
         <p:spPr>
           <a:xfrm>
-            <a:off x="2633472" y="2240280"/>
-            <a:ext cx="1280160" cy="1280160"/>
+            <a:off x="2185416" y="2011680"/>
+            <a:ext cx="1188720" cy="1188720"/>
           </a:xfrm>
           <a:prstGeom prst="ellipse">
             <a:avLst/>
@@ -7676,8 +8617,8 @@
         </p:nvSpPr>
         <p:spPr>
           <a:xfrm>
-            <a:off x="2633472" y="2240280"/>
-            <a:ext cx="1280160" cy="1280160"/>
+            <a:off x="2185416" y="2011680"/>
+            <a:ext cx="1188720" cy="1188720"/>
           </a:xfrm>
           <a:prstGeom prst="rect">
             <a:avLst/>
@@ -7693,7 +8634,7 @@
               <a:buNone/>
             </a:pPr>
             <a:r>
-              <a:rPr lang="en-US" sz="3200" b="1" dirty="0">
+              <a:rPr lang="en-US" sz="3000" b="1" dirty="0">
                 <a:solidFill>
                   <a:schemeClr val="bg1"/>
                 </a:solidFill>
@@ -7726,8 +8667,8 @@
         </p:nvSpPr>
         <p:spPr>
           <a:xfrm>
-            <a:off x="2633472" y="3639312"/>
-            <a:ext cx="1280160" cy="320040"/>
+            <a:off x="2185416" y="3291840"/>
+            <a:ext cx="1188720" cy="320040"/>
           </a:xfrm>
           <a:prstGeom prst="rect">
             <a:avLst/>
@@ -7762,8 +8703,8 @@
         </p:nvSpPr>
         <p:spPr>
           <a:xfrm>
-            <a:off x="4626864" y="2240280"/>
-            <a:ext cx="1280160" cy="1280160"/>
+            <a:off x="3822192" y="2011680"/>
+            <a:ext cx="1188720" cy="1188720"/>
           </a:xfrm>
           <a:prstGeom prst="ellipse">
             <a:avLst/>
@@ -7787,8 +8728,8 @@
         </p:nvSpPr>
         <p:spPr>
           <a:xfrm>
-            <a:off x="4626864" y="2240280"/>
-            <a:ext cx="1280160" cy="1280160"/>
+            <a:off x="3822192" y="2011680"/>
+            <a:ext cx="1188720" cy="1188720"/>
           </a:xfrm>
           <a:prstGeom prst="rect">
             <a:avLst/>
@@ -7804,7 +8745,7 @@
               <a:buNone/>
             </a:pPr>
             <a:r>
-              <a:rPr lang="en-US" sz="3200" b="1" dirty="0">
+              <a:rPr lang="en-US" sz="3000" b="1" dirty="0">
                 <a:solidFill>
                   <a:schemeClr val="bg1"/>
                 </a:solidFill>
@@ -7837,8 +8778,8 @@
         </p:nvSpPr>
         <p:spPr>
           <a:xfrm>
-            <a:off x="4626864" y="3639312"/>
-            <a:ext cx="1280160" cy="320040"/>
+            <a:off x="3822192" y="3291840"/>
+            <a:ext cx="1188720" cy="320040"/>
           </a:xfrm>
           <a:prstGeom prst="rect">
             <a:avLst/>
@@ -7873,8 +8814,8 @@
         </p:nvSpPr>
         <p:spPr>
           <a:xfrm>
-            <a:off x="6620256" y="2240280"/>
-            <a:ext cx="1280160" cy="1280160"/>
+            <a:off x="5458968" y="2011680"/>
+            <a:ext cx="1188720" cy="1188720"/>
           </a:xfrm>
           <a:prstGeom prst="ellipse">
             <a:avLst/>
@@ -7898,8 +8839,8 @@
         </p:nvSpPr>
         <p:spPr>
           <a:xfrm>
-            <a:off x="6620256" y="2240280"/>
-            <a:ext cx="1280160" cy="1280160"/>
+            <a:off x="5458968" y="2011680"/>
+            <a:ext cx="1188720" cy="1188720"/>
           </a:xfrm>
           <a:prstGeom prst="rect">
             <a:avLst/>
@@ -7915,7 +8856,7 @@
               <a:buNone/>
             </a:pPr>
             <a:r>
-              <a:rPr lang="en-US" sz="3200" b="1" dirty="0">
+              <a:rPr lang="en-US" sz="3000" b="1" dirty="0">
                 <a:solidFill>
                   <a:schemeClr val="bg1"/>
                 </a:solidFill>
@@ -7948,8 +8889,8 @@
         </p:nvSpPr>
         <p:spPr>
           <a:xfrm>
-            <a:off x="6620256" y="3639312"/>
-            <a:ext cx="1280160" cy="320040"/>
+            <a:off x="5458968" y="3291840"/>
+            <a:ext cx="1188720" cy="320040"/>
           </a:xfrm>
           <a:prstGeom prst="rect">
             <a:avLst/>
@@ -7984,8 +8925,8 @@
         </p:nvSpPr>
         <p:spPr>
           <a:xfrm>
-            <a:off x="8613648" y="2240280"/>
-            <a:ext cx="1280160" cy="1280160"/>
+            <a:off x="7095744" y="2011680"/>
+            <a:ext cx="1188720" cy="1188720"/>
           </a:xfrm>
           <a:prstGeom prst="ellipse">
             <a:avLst/>
@@ -8009,8 +8950,8 @@
         </p:nvSpPr>
         <p:spPr>
           <a:xfrm>
-            <a:off x="8613648" y="2240280"/>
-            <a:ext cx="1280160" cy="1280160"/>
+            <a:off x="7095744" y="2011680"/>
+            <a:ext cx="1188720" cy="1188720"/>
           </a:xfrm>
           <a:prstGeom prst="rect">
             <a:avLst/>
@@ -8026,7 +8967,7 @@
               <a:buNone/>
             </a:pPr>
             <a:r>
-              <a:rPr lang="en-US" sz="3200" b="1" dirty="0">
+              <a:rPr lang="en-US" sz="3000" b="1" dirty="0">
                 <a:solidFill>
                   <a:schemeClr val="bg1"/>
                 </a:solidFill>
@@ -8059,8 +9000,8 @@
         </p:nvSpPr>
         <p:spPr>
           <a:xfrm>
-            <a:off x="8613648" y="3639312"/>
-            <a:ext cx="1280160" cy="320040"/>
+            <a:off x="7095744" y="3291840"/>
+            <a:ext cx="1188720" cy="320040"/>
           </a:xfrm>
           <a:prstGeom prst="rect">
             <a:avLst/>
@@ -8095,8 +9036,8 @@
         </p:nvSpPr>
         <p:spPr>
           <a:xfrm>
-            <a:off x="10607040" y="2240280"/>
-            <a:ext cx="1280160" cy="1280160"/>
+            <a:off x="8732520" y="2011680"/>
+            <a:ext cx="1188720" cy="1188720"/>
           </a:xfrm>
           <a:prstGeom prst="ellipse">
             <a:avLst/>
@@ -8120,8 +9061,8 @@
         </p:nvSpPr>
         <p:spPr>
           <a:xfrm>
-            <a:off x="10607040" y="2240280"/>
-            <a:ext cx="1280160" cy="1280160"/>
+            <a:off x="8732520" y="2011680"/>
+            <a:ext cx="1188720" cy="1188720"/>
           </a:xfrm>
           <a:prstGeom prst="rect">
             <a:avLst/>
@@ -8137,7 +9078,7 @@
               <a:buNone/>
             </a:pPr>
             <a:r>
-              <a:rPr lang="en-US" sz="3200" b="1" dirty="0">
+              <a:rPr lang="en-US" sz="3000" b="1" dirty="0">
                 <a:solidFill>
                   <a:schemeClr val="bg1"/>
                 </a:solidFill>
@@ -8170,8 +9111,8 @@
         </p:nvSpPr>
         <p:spPr>
           <a:xfrm>
-            <a:off x="10607040" y="3639312"/>
-            <a:ext cx="1280160" cy="320040"/>
+            <a:off x="8732520" y="3291840"/>
+            <a:ext cx="1188720" cy="320040"/>
           </a:xfrm>
           <a:prstGeom prst="rect">
             <a:avLst/>
@@ -8200,18 +9141,115 @@
       </p:sp>
       <p:sp>
         <p:nvSpPr>
-          <p:cNvPr id="23" name="card"/>
+          <p:cNvPr id="23" name="graduate"/>
           <p:cNvSpPr/>
           <p:nvPr/>
         </p:nvSpPr>
         <p:spPr>
           <a:xfrm>
-            <a:off x="548640" y="4343400"/>
-            <a:ext cx="5394960" cy="1737360"/>
+            <a:off x="10369296" y="2011680"/>
+            <a:ext cx="1188720" cy="1188720"/>
+          </a:xfrm>
+          <a:prstGeom prst="ellipse">
+            <a:avLst/>
+          </a:prstGeom>
+          <a:solidFill>
+            <a:schemeClr val="accent5"/>
+          </a:solidFill>
+          <a:ln w="38100">
+            <a:solidFill>
+              <a:schemeClr val="bg1"/>
+            </a:solidFill>
+            <a:prstDash val="solid"/>
+          </a:ln>
+        </p:spPr>
+      </p:sp>
+      <p:sp>
+        <p:nvSpPr>
+          <p:cNvPr id="24" name="Text 22"/>
+          <p:cNvSpPr txBox="1"/>
+          <p:nvPr/>
+        </p:nvSpPr>
+        <p:spPr>
+          <a:xfrm>
+            <a:off x="10369296" y="2011680"/>
+            <a:ext cx="1188720" cy="1188720"/>
+          </a:xfrm>
+          <a:prstGeom prst="rect">
+            <a:avLst/>
+          </a:prstGeom>
+          <a:noFill/>
+          <a:ln/>
+        </p:spPr>
+        <p:txBody>
+          <a:bodyPr wrap="square" lIns="0" tIns="0" rIns="0" bIns="0" rtlCol="0" anchor="ctr"/>
+          <a:lstStyle/>
+          <a:p>
+            <a:pPr algn="ctr" indent="0" marL="0">
+              <a:buNone/>
+            </a:pPr>
+            <a:r>
+              <a:rPr lang="en-US" sz="2200" b="1" dirty="0">
+                <a:solidFill>
+                  <a:schemeClr val="bg1"/>
+                </a:solidFill>
+              </a:rPr>
+              <a:t>졸업</a:t>
+            </a:r>
+            <a:endParaRPr lang="en-US" sz="2200" dirty="0"/>
+          </a:p>
+        </p:txBody>
+      </p:sp>
+      <p:sp>
+        <p:nvSpPr>
+          <p:cNvPr id="25" name="Text 23"/>
+          <p:cNvSpPr txBox="1"/>
+          <p:nvPr/>
+        </p:nvSpPr>
+        <p:spPr>
+          <a:xfrm>
+            <a:off x="10369296" y="3291840"/>
+            <a:ext cx="1188720" cy="320040"/>
+          </a:xfrm>
+          <a:prstGeom prst="rect">
+            <a:avLst/>
+          </a:prstGeom>
+          <a:noFill/>
+          <a:ln/>
+        </p:spPr>
+        <p:txBody>
+          <a:bodyPr wrap="square" lIns="0" tIns="0" rIns="0" bIns="0" rtlCol="0" anchor="t"/>
+          <a:lstStyle/>
+          <a:p>
+            <a:pPr algn="ctr" indent="0" marL="0">
+              <a:buNone/>
+            </a:pPr>
+            <a:r>
+              <a:rPr lang="en-US" sz="1300" dirty="0">
+                <a:solidFill>
+                  <a:srgbClr val="5A6B70"/>
+                </a:solidFill>
+              </a:rPr>
+              <a:t>아는 개념</a:t>
+            </a:r>
+            <a:endParaRPr lang="en-US" sz="1300" dirty="0"/>
+          </a:p>
+        </p:txBody>
+      </p:sp>
+      <p:sp>
+        <p:nvSpPr>
+          <p:cNvPr id="26" name="card"/>
+          <p:cNvSpPr/>
+          <p:nvPr/>
+        </p:nvSpPr>
+        <p:spPr>
+          <a:xfrm>
+            <a:off x="548640" y="3840480"/>
+            <a:ext cx="3502152" cy="2240280"/>
           </a:xfrm>
           <a:prstGeom prst="roundRect">
             <a:avLst>
-              <a:gd name="adj" fmla="val 5263"/>
+              <a:gd name="adj" fmla="val 4082"/>
             </a:avLst>
           </a:prstGeom>
           <a:solidFill>
@@ -8227,24 +9265,24 @@
       </p:sp>
       <p:sp>
         <p:nvSpPr>
-          <p:cNvPr id="24" name="badge-LuListChecks"/>
+          <p:cNvPr id="27" name="badge-LuBrain"/>
           <p:cNvSpPr/>
           <p:nvPr/>
         </p:nvSpPr>
         <p:spPr>
           <a:xfrm>
-            <a:off x="777240" y="4572000"/>
-            <a:ext cx="640080" cy="640080"/>
+            <a:off x="822960" y="4041648"/>
+            <a:ext cx="566928" cy="566928"/>
           </a:xfrm>
           <a:prstGeom prst="ellipse">
             <a:avLst/>
           </a:prstGeom>
           <a:solidFill>
-            <a:schemeClr val="tx2"/>
+            <a:schemeClr val="accent1"/>
           </a:solidFill>
           <a:ln w="12700">
             <a:solidFill>
-              <a:schemeClr val="tx2"/>
+              <a:schemeClr val="accent1"/>
             </a:solidFill>
             <a:prstDash val="solid"/>
           </a:ln>
@@ -8252,7 +9290,7 @@
       </p:sp>
       <p:pic>
         <p:nvPicPr>
-          <p:cNvPr id="25" name="icon-LuListChecks" descr="LuListChecks">    </p:cNvPr>
+          <p:cNvPr id="28" name="icon-LuBrain" descr="LuBrain">    </p:cNvPr>
           <p:cNvPicPr>
             <a:picLocks noChangeAspect="1"/>
           </p:cNvPicPr>
@@ -8266,8 +9304,8 @@
         </p:blipFill>
         <p:spPr>
           <a:xfrm>
-            <a:off x="930859" y="4725619"/>
-            <a:ext cx="332842" cy="332842"/>
+            <a:off x="959023" y="4177711"/>
+            <a:ext cx="294803" cy="294803"/>
           </a:xfrm>
           <a:prstGeom prst="rect">
             <a:avLst/>
@@ -8276,14 +9314,50 @@
       </p:pic>
       <p:sp>
         <p:nvSpPr>
-          <p:cNvPr id="26" name="Text 23"/>
-          <p:cNvSpPr txBox="1"/>
-          <p:nvPr/>
-        </p:nvSpPr>
-        <p:spPr>
-          <a:xfrm>
-            <a:off x="1600200" y="4572000"/>
-            <a:ext cx="4114800" cy="384048"/>
+          <p:cNvPr id="29" name="Text 26"/>
+          <p:cNvSpPr txBox="1"/>
+          <p:nvPr/>
+        </p:nvSpPr>
+        <p:spPr>
+          <a:xfrm>
+            <a:off x="1536192" y="4041648"/>
+            <a:ext cx="2377440" cy="566928"/>
+          </a:xfrm>
+          <a:prstGeom prst="rect">
+            <a:avLst/>
+          </a:prstGeom>
+          <a:noFill/>
+          <a:ln/>
+        </p:spPr>
+        <p:txBody>
+          <a:bodyPr wrap="square" lIns="0" tIns="0" rIns="0" bIns="0" rtlCol="0" anchor="ctr"/>
+          <a:lstStyle/>
+          <a:p>
+            <a:pPr indent="0" marL="0">
+              <a:buNone/>
+            </a:pPr>
+            <a:r>
+              <a:rPr lang="en-US" sz="1600" b="1" dirty="0">
+                <a:solidFill>
+                  <a:schemeClr val="tx2"/>
+                </a:solidFill>
+              </a:rPr>
+              <a:t>떠올린 것만 셉니다</a:t>
+            </a:r>
+            <a:endParaRPr lang="en-US" sz="1600" dirty="0"/>
+          </a:p>
+        </p:txBody>
+      </p:sp>
+      <p:sp>
+        <p:nvSpPr>
+          <p:cNvPr id="30" name="Text 27"/>
+          <p:cNvSpPr txBox="1"/>
+          <p:nvPr/>
+        </p:nvSpPr>
+        <p:spPr>
+          <a:xfrm>
+            <a:off x="822960" y="4754880"/>
+            <a:ext cx="3017520" cy="1234440"/>
           </a:xfrm>
           <a:prstGeom prst="rect">
             <a:avLst/>
@@ -8299,67 +9373,31 @@
               <a:buNone/>
             </a:pPr>
             <a:r>
-              <a:rPr lang="en-US" sz="1700" b="1" dirty="0">
-                <a:solidFill>
-                  <a:schemeClr val="tx2"/>
-                </a:solidFill>
-              </a:rPr>
-              <a:t>무엇부터 나오나</a:t>
-            </a:r>
-            <a:endParaRPr lang="en-US" sz="1700" dirty="0"/>
-          </a:p>
-        </p:txBody>
-      </p:sp>
-      <p:sp>
-        <p:nvSpPr>
-          <p:cNvPr id="27" name="Text 24"/>
-          <p:cNvSpPr txBox="1"/>
-          <p:nvPr/>
-        </p:nvSpPr>
-        <p:spPr>
-          <a:xfrm>
-            <a:off x="1600200" y="4983480"/>
-            <a:ext cx="4160520" cy="1051560"/>
-          </a:xfrm>
-          <a:prstGeom prst="rect">
-            <a:avLst/>
-          </a:prstGeom>
-          <a:noFill/>
-          <a:ln/>
-        </p:spPr>
-        <p:txBody>
-          <a:bodyPr wrap="square" lIns="0" tIns="0" rIns="0" bIns="0" rtlCol="0" anchor="t"/>
-          <a:lstStyle/>
-          <a:p>
-            <a:pPr indent="0" marL="0">
-              <a:buNone/>
-            </a:pPr>
-            <a:r>
-              <a:rPr lang="en-US" sz="1350" dirty="0">
+              <a:rPr lang="en-US" sz="1300" dirty="0">
                 <a:solidFill>
                   <a:schemeClr val="tx1"/>
                 </a:solidFill>
               </a:rPr>
-              <a:t>틀린 개념 먼저, 그다음 오래 밀린 개념. 퀴즈를 안 본 개념은 노트에서 다시 만난 횟수만큼 단계가 올라 있습니다.</a:t>
-            </a:r>
-            <a:endParaRPr lang="en-US" sz="1350" dirty="0"/>
-          </a:p>
-        </p:txBody>
-      </p:sp>
-      <p:sp>
-        <p:nvSpPr>
-          <p:cNvPr id="28" name="card"/>
+              <a:t>답을 직접 적어 맞혀야 한 칸 오릅니다. 힌트나 정답을 보고 맞히면 단계는 그대로입니다. 노트에서 다시 만난 것도 날짜를 바꾸지 않습니다.</a:t>
+            </a:r>
+            <a:endParaRPr lang="en-US" sz="1300" dirty="0"/>
+          </a:p>
+        </p:txBody>
+      </p:sp>
+      <p:sp>
+        <p:nvSpPr>
+          <p:cNvPr id="31" name="card"/>
           <p:cNvSpPr/>
           <p:nvPr/>
         </p:nvSpPr>
         <p:spPr>
           <a:xfrm>
-            <a:off x="6245352" y="4343400"/>
-            <a:ext cx="5394960" cy="1737360"/>
+            <a:off x="4343400" y="3840480"/>
+            <a:ext cx="3502152" cy="2240280"/>
           </a:xfrm>
           <a:prstGeom prst="roundRect">
             <a:avLst>
-              <a:gd name="adj" fmla="val 5263"/>
+              <a:gd name="adj" fmla="val 4082"/>
             </a:avLst>
           </a:prstGeom>
           <a:solidFill>
@@ -8375,14 +9413,14 @@
       </p:sp>
       <p:sp>
         <p:nvSpPr>
-          <p:cNvPr id="29" name="badge-LuBell"/>
+          <p:cNvPr id="32" name="badge-LuBell"/>
           <p:cNvSpPr/>
           <p:nvPr/>
         </p:nvSpPr>
         <p:spPr>
           <a:xfrm>
-            <a:off x="6473952" y="4572000"/>
-            <a:ext cx="640080" cy="640080"/>
+            <a:off x="4617720" y="4041648"/>
+            <a:ext cx="566928" cy="566928"/>
           </a:xfrm>
           <a:prstGeom prst="ellipse">
             <a:avLst/>
@@ -8400,7 +9438,7 @@
       </p:sp>
       <p:pic>
         <p:nvPicPr>
-          <p:cNvPr id="30" name="icon-LuBell" descr="LuBell">    </p:cNvPr>
+          <p:cNvPr id="33" name="icon-LuBell" descr="LuBell">    </p:cNvPr>
           <p:cNvPicPr>
             <a:picLocks noChangeAspect="1"/>
           </p:cNvPicPr>
@@ -8414,8 +9452,8 @@
         </p:blipFill>
         <p:spPr>
           <a:xfrm>
-            <a:off x="6627571" y="4725619"/>
-            <a:ext cx="332842" cy="332842"/>
+            <a:off x="4753783" y="4177711"/>
+            <a:ext cx="294803" cy="294803"/>
           </a:xfrm>
           <a:prstGeom prst="rect">
             <a:avLst/>
@@ -8424,14 +9462,50 @@
       </p:pic>
       <p:sp>
         <p:nvSpPr>
-          <p:cNvPr id="31" name="Text 27"/>
-          <p:cNvSpPr txBox="1"/>
-          <p:nvPr/>
-        </p:nvSpPr>
-        <p:spPr>
-          <a:xfrm>
-            <a:off x="7296912" y="4572000"/>
-            <a:ext cx="4114800" cy="384048"/>
+          <p:cNvPr id="34" name="Text 30"/>
+          <p:cNvSpPr txBox="1"/>
+          <p:nvPr/>
+        </p:nvSpPr>
+        <p:spPr>
+          <a:xfrm>
+            <a:off x="5330952" y="4041648"/>
+            <a:ext cx="2377440" cy="566928"/>
+          </a:xfrm>
+          <a:prstGeom prst="rect">
+            <a:avLst/>
+          </a:prstGeom>
+          <a:noFill/>
+          <a:ln/>
+        </p:spPr>
+        <p:txBody>
+          <a:bodyPr wrap="square" lIns="0" tIns="0" rIns="0" bIns="0" rtlCol="0" anchor="ctr"/>
+          <a:lstStyle/>
+          <a:p>
+            <a:pPr indent="0" marL="0">
+              <a:buNone/>
+            </a:pPr>
+            <a:r>
+              <a:rPr lang="en-US" sz="1600" b="1" dirty="0">
+                <a:solidFill>
+                  <a:schemeClr val="tx2"/>
+                </a:solidFill>
+              </a:rPr>
+              <a:t>오늘 복습은 10문제까지</a:t>
+            </a:r>
+            <a:endParaRPr lang="en-US" sz="1600" dirty="0"/>
+          </a:p>
+        </p:txBody>
+      </p:sp>
+      <p:sp>
+        <p:nvSpPr>
+          <p:cNvPr id="35" name="Text 31"/>
+          <p:cNvSpPr txBox="1"/>
+          <p:nvPr/>
+        </p:nvSpPr>
+        <p:spPr>
+          <a:xfrm>
+            <a:off x="4617720" y="4754880"/>
+            <a:ext cx="3017520" cy="320040"/>
           </a:xfrm>
           <a:prstGeom prst="rect">
             <a:avLst/>
@@ -8447,43 +9521,7 @@
               <a:buNone/>
             </a:pPr>
             <a:r>
-              <a:rPr lang="en-US" sz="1700" b="1" dirty="0">
-                <a:solidFill>
-                  <a:schemeClr val="tx2"/>
-                </a:solidFill>
-              </a:rPr>
-              <a:t>상태줄이 알려 줍니다</a:t>
-            </a:r>
-            <a:endParaRPr lang="en-US" sz="1700" dirty="0"/>
-          </a:p>
-        </p:txBody>
-      </p:sp>
-      <p:sp>
-        <p:nvSpPr>
-          <p:cNvPr id="32" name="Text 28"/>
-          <p:cNvSpPr txBox="1"/>
-          <p:nvPr/>
-        </p:nvSpPr>
-        <p:spPr>
-          <a:xfrm>
-            <a:off x="7296912" y="5001768"/>
-            <a:ext cx="4206240" cy="365760"/>
-          </a:xfrm>
-          <a:prstGeom prst="rect">
-            <a:avLst/>
-          </a:prstGeom>
-          <a:noFill/>
-          <a:ln/>
-        </p:spPr>
-        <p:txBody>
-          <a:bodyPr wrap="square" lIns="0" tIns="0" rIns="0" bIns="0" rtlCol="0" anchor="t"/>
-          <a:lstStyle/>
-          <a:p>
-            <a:pPr indent="0" marL="0">
-              <a:buNone/>
-            </a:pPr>
-            <a:r>
-              <a:rPr lang="en-US" sz="1250" dirty="0">
+              <a:rPr lang="en-US" sz="1200" b="1" dirty="0">
                 <a:solidFill>
                   <a:schemeClr val="accent1"/>
                 </a:solidFill>
@@ -8491,22 +9529,22 @@
                 <a:ea typeface="Courier New" pitchFamily="34" charset="-122"/>
                 <a:cs typeface="Courier New" pitchFamily="34" charset="-120"/>
               </a:rPr>
-              <a:t>학습 노트 · 복습할 개념 3개 · /learn 패널에서 q</a:t>
-            </a:r>
-            <a:endParaRPr lang="en-US" sz="1250" dirty="0"/>
-          </a:p>
-        </p:txBody>
-      </p:sp>
-      <p:sp>
-        <p:nvSpPr>
-          <p:cNvPr id="33" name="Text 29"/>
-          <p:cNvSpPr txBox="1"/>
-          <p:nvPr/>
-        </p:nvSpPr>
-        <p:spPr>
-          <a:xfrm>
-            <a:off x="7296912" y="5394960"/>
-            <a:ext cx="4206240" cy="548640"/>
+              <a:t>오늘 복습 3개 · /learn 복습</a:t>
+            </a:r>
+            <a:endParaRPr lang="en-US" sz="1200" dirty="0"/>
+          </a:p>
+        </p:txBody>
+      </p:sp>
+      <p:sp>
+        <p:nvSpPr>
+          <p:cNvPr id="36" name="Text 32"/>
+          <p:cNvSpPr txBox="1"/>
+          <p:nvPr/>
+        </p:nvSpPr>
+        <p:spPr>
+          <a:xfrm>
+            <a:off x="4617720" y="5138928"/>
+            <a:ext cx="3017520" cy="868680"/>
           </a:xfrm>
           <a:prstGeom prst="rect">
             <a:avLst/>
@@ -8522,14 +9560,162 @@
               <a:buNone/>
             </a:pPr>
             <a:r>
-              <a:rPr lang="en-US" sz="1350" dirty="0">
+              <a:rPr lang="en-US" sz="1300" dirty="0">
                 <a:solidFill>
                   <a:schemeClr val="tx1"/>
                 </a:solidFill>
               </a:rPr>
-              <a:t>복습할 때가 되면 프롬프트 아래에 개수가 뜹니다.</a:t>
-            </a:r>
-            <a:endParaRPr lang="en-US" sz="1350" dirty="0"/>
+              <a:t>틀린 개념부터 나옵니다. 10문제를 채점하면 상태줄이 내려갑니다.</a:t>
+            </a:r>
+            <a:endParaRPr lang="en-US" sz="1300" dirty="0"/>
+          </a:p>
+        </p:txBody>
+      </p:sp>
+      <p:sp>
+        <p:nvSpPr>
+          <p:cNvPr id="37" name="card"/>
+          <p:cNvSpPr/>
+          <p:nvPr/>
+        </p:nvSpPr>
+        <p:spPr>
+          <a:xfrm>
+            <a:off x="8138160" y="3840480"/>
+            <a:ext cx="3502152" cy="2240280"/>
+          </a:xfrm>
+          <a:prstGeom prst="roundRect">
+            <a:avLst>
+              <a:gd name="adj" fmla="val 4082"/>
+            </a:avLst>
+          </a:prstGeom>
+          <a:solidFill>
+            <a:schemeClr val="bg2"/>
+          </a:solidFill>
+          <a:ln w="9525">
+            <a:solidFill>
+              <a:schemeClr val="bg2"/>
+            </a:solidFill>
+            <a:prstDash val="solid"/>
+          </a:ln>
+        </p:spPr>
+      </p:sp>
+      <p:sp>
+        <p:nvSpPr>
+          <p:cNvPr id="38" name="badge-LuGraduationCap"/>
+          <p:cNvSpPr/>
+          <p:nvPr/>
+        </p:nvSpPr>
+        <p:spPr>
+          <a:xfrm>
+            <a:off x="8412480" y="4041648"/>
+            <a:ext cx="566928" cy="566928"/>
+          </a:xfrm>
+          <a:prstGeom prst="ellipse">
+            <a:avLst/>
+          </a:prstGeom>
+          <a:solidFill>
+            <a:schemeClr val="accent5"/>
+          </a:solidFill>
+          <a:ln w="12700">
+            <a:solidFill>
+              <a:schemeClr val="accent5"/>
+            </a:solidFill>
+            <a:prstDash val="solid"/>
+          </a:ln>
+        </p:spPr>
+      </p:sp>
+      <p:pic>
+        <p:nvPicPr>
+          <p:cNvPr id="39" name="icon-LuGraduationCap" descr="LuGraduationCap">    </p:cNvPr>
+          <p:cNvPicPr>
+            <a:picLocks noChangeAspect="1"/>
+          </p:cNvPicPr>
+          <p:nvPr/>
+        </p:nvPicPr>
+        <p:blipFill>
+          <a:blip r:embed="rId3"/>
+          <a:stretch>
+            <a:fillRect/>
+          </a:stretch>
+        </p:blipFill>
+        <p:spPr>
+          <a:xfrm>
+            <a:off x="8548543" y="4177711"/>
+            <a:ext cx="294803" cy="294803"/>
+          </a:xfrm>
+          <a:prstGeom prst="rect">
+            <a:avLst/>
+          </a:prstGeom>
+        </p:spPr>
+      </p:pic>
+      <p:sp>
+        <p:nvSpPr>
+          <p:cNvPr id="40" name="Text 35"/>
+          <p:cNvSpPr txBox="1"/>
+          <p:nvPr/>
+        </p:nvSpPr>
+        <p:spPr>
+          <a:xfrm>
+            <a:off x="9125712" y="4041648"/>
+            <a:ext cx="2377440" cy="566928"/>
+          </a:xfrm>
+          <a:prstGeom prst="rect">
+            <a:avLst/>
+          </a:prstGeom>
+          <a:noFill/>
+          <a:ln/>
+        </p:spPr>
+        <p:txBody>
+          <a:bodyPr wrap="square" lIns="0" tIns="0" rIns="0" bIns="0" rtlCol="0" anchor="ctr"/>
+          <a:lstStyle/>
+          <a:p>
+            <a:pPr indent="0" marL="0">
+              <a:buNone/>
+            </a:pPr>
+            <a:r>
+              <a:rPr lang="en-US" sz="1600" b="1" dirty="0">
+                <a:solidFill>
+                  <a:schemeClr val="tx2"/>
+                </a:solidFill>
+              </a:rPr>
+              <a:t>졸업한 개념은 쉬어요</a:t>
+            </a:r>
+            <a:endParaRPr lang="en-US" sz="1600" dirty="0"/>
+          </a:p>
+        </p:txBody>
+      </p:sp>
+      <p:sp>
+        <p:nvSpPr>
+          <p:cNvPr id="41" name="Text 36"/>
+          <p:cNvSpPr txBox="1"/>
+          <p:nvPr/>
+        </p:nvSpPr>
+        <p:spPr>
+          <a:xfrm>
+            <a:off x="8412480" y="4754880"/>
+            <a:ext cx="3017520" cy="1234440"/>
+          </a:xfrm>
+          <a:prstGeom prst="rect">
+            <a:avLst/>
+          </a:prstGeom>
+          <a:noFill/>
+          <a:ln/>
+        </p:spPr>
+        <p:txBody>
+          <a:bodyPr wrap="square" lIns="0" tIns="0" rIns="0" bIns="0" rtlCol="0" anchor="t"/>
+          <a:lstStyle/>
+          <a:p>
+            <a:pPr indent="0" marL="0">
+              <a:buNone/>
+            </a:pPr>
+            <a:r>
+              <a:rPr lang="en-US" sz="1300" dirty="0">
+                <a:solidFill>
+                  <a:schemeClr val="tx1"/>
+                </a:solidFill>
+              </a:rPr>
+              <a:t>60일 단계에서 또 맞히면 아는 개념이 되어 복습과 퀴즈에서 빠집니다. 이미 아는 것은 /learn 안다 이름.</a:t>
+            </a:r>
+            <a:endParaRPr lang="en-US" sz="1300" dirty="0"/>
           </a:p>
         </p:txBody>
       </p:sp>
@@ -8680,7 +9866,7 @@
         </p:nvSpPr>
         <p:spPr>
           <a:xfrm>
-            <a:off x="6080760" y="1417320"/>
+            <a:off x="6080760" y="1371600"/>
             <a:ext cx="685800" cy="685800"/>
           </a:xfrm>
           <a:prstGeom prst="ellipse">
@@ -8713,7 +9899,7 @@
         </p:blipFill>
         <p:spPr>
           <a:xfrm>
-            <a:off x="6245352" y="1581912"/>
+            <a:off x="6245352" y="1536192"/>
             <a:ext cx="356616" cy="356616"/>
           </a:xfrm>
           <a:prstGeom prst="rect">
@@ -8729,7 +9915,7 @@
         </p:nvSpPr>
         <p:spPr>
           <a:xfrm>
-            <a:off x="6949440" y="1399032"/>
+            <a:off x="6949440" y="1353312"/>
             <a:ext cx="4663440" cy="384048"/>
           </a:xfrm>
           <a:prstGeom prst="rect">
@@ -8751,7 +9937,7 @@
                   <a:schemeClr val="tx2"/>
                 </a:solidFill>
               </a:rPr>
-              <a:t>개념 모음</a:t>
+              <a:t>개념 모음 (3)</a:t>
             </a:r>
             <a:endParaRPr lang="en-US" sz="1800" dirty="0"/>
           </a:p>
@@ -8765,7 +9951,7 @@
         </p:nvSpPr>
         <p:spPr>
           <a:xfrm>
-            <a:off x="6949440" y="1801368"/>
+            <a:off x="6949440" y="1755648"/>
             <a:ext cx="4663440" cy="685800"/>
           </a:xfrm>
           <a:prstGeom prst="rect">
@@ -8787,7 +9973,7 @@
                   <a:schemeClr val="tx1"/>
                 </a:solidFill>
               </a:rPr>
-              <a:t>프로젝트를 넘어 모인 개념. 만난 횟수, 다음 복습 날짜, 그 개념이 나온 노트</a:t>
+              <a:t>프로젝트를 넘어 모인 개념. 만난 횟수, 복습 상태, 그 개념이 나온 노트</a:t>
             </a:r>
             <a:endParaRPr lang="en-US" sz="1350" dirty="0"/>
           </a:p>
@@ -8801,7 +9987,7 @@
         </p:nvSpPr>
         <p:spPr>
           <a:xfrm>
-            <a:off x="6080760" y="2606040"/>
+            <a:off x="6080760" y="2468880"/>
             <a:ext cx="685800" cy="685800"/>
           </a:xfrm>
           <a:prstGeom prst="ellipse">
@@ -8834,7 +10020,7 @@
         </p:blipFill>
         <p:spPr>
           <a:xfrm>
-            <a:off x="6245352" y="2770632"/>
+            <a:off x="6245352" y="2633472"/>
             <a:ext cx="356616" cy="356616"/>
           </a:xfrm>
           <a:prstGeom prst="rect">
@@ -8850,7 +10036,7 @@
         </p:nvSpPr>
         <p:spPr>
           <a:xfrm>
-            <a:off x="6949440" y="2587752"/>
+            <a:off x="6949440" y="2450592"/>
             <a:ext cx="4663440" cy="384048"/>
           </a:xfrm>
           <a:prstGeom prst="rect">
@@ -8875,7 +10061,18 @@
                 <a:ea typeface="Courier New" pitchFamily="34" charset="-122"/>
                 <a:cs typeface="Courier New" pitchFamily="34" charset="-120"/>
               </a:rPr>
-              <a:t>/learn recap</a:t>
+              <a:t>/learn</a:t>
+            </a:r>
+            <a:pPr indent="0" marL="0">
+              <a:buNone/>
+            </a:pPr>
+            <a:r>
+              <a:rPr lang="en-US" sz="1800" b="1" dirty="0">
+                <a:solidFill>
+                  <a:schemeClr val="tx2"/>
+                </a:solidFill>
+              </a:rPr>
+              <a:t> 정리</a:t>
             </a:r>
             <a:endParaRPr lang="en-US" sz="1800" dirty="0"/>
           </a:p>
@@ -8889,7 +10086,7 @@
         </p:nvSpPr>
         <p:spPr>
           <a:xfrm>
-            <a:off x="6949440" y="2990088"/>
+            <a:off x="6949440" y="2852928"/>
             <a:ext cx="4663440" cy="685800"/>
           </a:xfrm>
           <a:prstGeom prst="rect">
@@ -8911,7 +10108,7 @@
                   <a:schemeClr val="tx1"/>
                 </a:solidFill>
               </a:rPr>
-              <a:t>하루 · 한 주 정리: 한 일 · 핵심 개념 · 헷갈리기 쉬운 것 · 다음에 해 볼 것</a:t>
+              <a:t>하루 · 한 주 정리. 헷갈리기 쉬운 것은 그 기간에 퀴즈에서 틀린 개념부터</a:t>
             </a:r>
             <a:endParaRPr lang="en-US" sz="1350" dirty="0"/>
           </a:p>
@@ -8925,7 +10122,7 @@
         </p:nvSpPr>
         <p:spPr>
           <a:xfrm>
-            <a:off x="6080760" y="3794760"/>
+            <a:off x="6080760" y="3566160"/>
             <a:ext cx="685800" cy="685800"/>
           </a:xfrm>
           <a:prstGeom prst="ellipse">
@@ -8958,7 +10155,7 @@
         </p:blipFill>
         <p:spPr>
           <a:xfrm>
-            <a:off x="6245352" y="3959352"/>
+            <a:off x="6245352" y="3730752"/>
             <a:ext cx="356616" cy="356616"/>
           </a:xfrm>
           <a:prstGeom prst="rect">
@@ -8974,7 +10171,7 @@
         </p:nvSpPr>
         <p:spPr>
           <a:xfrm>
-            <a:off x="6949440" y="3776472"/>
+            <a:off x="6949440" y="3547872"/>
             <a:ext cx="4663440" cy="384048"/>
           </a:xfrm>
           <a:prstGeom prst="rect">
@@ -8999,7 +10196,18 @@
                 <a:ea typeface="Courier New" pitchFamily="34" charset="-122"/>
                 <a:cs typeface="Courier New" pitchFamily="34" charset="-120"/>
               </a:rPr>
-              <a:t>/learn stats</a:t>
+              <a:t>/learn</a:t>
+            </a:r>
+            <a:pPr indent="0" marL="0">
+              <a:buNone/>
+            </a:pPr>
+            <a:r>
+              <a:rPr lang="en-US" sz="1800" b="1" dirty="0">
+                <a:solidFill>
+                  <a:schemeClr val="tx2"/>
+                </a:solidFill>
+              </a:rPr>
+              <a:t> 기록</a:t>
             </a:r>
             <a:endParaRPr lang="en-US" sz="1800" dirty="0"/>
           </a:p>
@@ -9013,7 +10221,7 @@
         </p:nvSpPr>
         <p:spPr>
           <a:xfrm>
-            <a:off x="6949440" y="4178808"/>
+            <a:off x="6949440" y="3950208"/>
             <a:ext cx="4663440" cy="685800"/>
           </a:xfrm>
           <a:prstGeom prst="rect">
@@ -9035,7 +10243,7 @@
                   <a:schemeClr val="tx1"/>
                 </a:solidFill>
               </a:rPr>
-              <a:t>연속 학습일, 최근 7일 진도, 30일 정답률</a:t>
+              <a:t>연속 학습일 · 정답률 · 복습할 개념 · 배운 개념 · 모델 호출 수를 한 번에</a:t>
             </a:r>
             <a:endParaRPr lang="en-US" sz="1350" dirty="0"/>
           </a:p>
@@ -9043,13 +10251,13 @@
       </p:sp>
       <p:sp>
         <p:nvSpPr>
-          <p:cNvPr id="16" name="badge-LuDownload"/>
+          <p:cNvPr id="16" name="badge-LuMessagesSquare"/>
           <p:cNvSpPr/>
           <p:nvPr/>
         </p:nvSpPr>
         <p:spPr>
           <a:xfrm>
-            <a:off x="6080760" y="4983480"/>
+            <a:off x="6080760" y="4663440"/>
             <a:ext cx="685800" cy="685800"/>
           </a:xfrm>
           <a:prstGeom prst="ellipse">
@@ -9068,7 +10276,7 @@
       </p:sp>
       <p:pic>
         <p:nvPicPr>
-          <p:cNvPr id="17" name="icon-LuDownload" descr="LuDownload">    </p:cNvPr>
+          <p:cNvPr id="17" name="icon-LuMessagesSquare" descr="LuMessagesSquare">    </p:cNvPr>
           <p:cNvPicPr>
             <a:picLocks noChangeAspect="1"/>
           </p:cNvPicPr>
@@ -9082,7 +10290,7 @@
         </p:blipFill>
         <p:spPr>
           <a:xfrm>
-            <a:off x="6245352" y="5148072"/>
+            <a:off x="6245352" y="4828032"/>
             <a:ext cx="356616" cy="356616"/>
           </a:xfrm>
           <a:prstGeom prst="rect">
@@ -9098,7 +10306,7 @@
         </p:nvSpPr>
         <p:spPr>
           <a:xfrm>
-            <a:off x="6949440" y="4965192"/>
+            <a:off x="6949440" y="4645152"/>
             <a:ext cx="4663440" cy="384048"/>
           </a:xfrm>
           <a:prstGeom prst="rect">
@@ -9119,11 +10327,8 @@
                 <a:solidFill>
                   <a:schemeClr val="tx2"/>
                 </a:solidFill>
-                <a:latin typeface="Courier New" pitchFamily="34" charset="0"/>
-                <a:ea typeface="Courier New" pitchFamily="34" charset="-122"/>
-                <a:cs typeface="Courier New" pitchFamily="34" charset="-120"/>
-              </a:rPr>
-              <a:t>/learn anki</a:t>
+              </a:rPr>
+              <a:t>대화로 묻기</a:t>
             </a:r>
             <a:endParaRPr lang="en-US" sz="1800" dirty="0"/>
           </a:p>
@@ -9137,7 +10342,7 @@
         </p:nvSpPr>
         <p:spPr>
           <a:xfrm>
-            <a:off x="6949440" y="5367528"/>
+            <a:off x="6949440" y="5047488"/>
             <a:ext cx="4663440" cy="685800"/>
           </a:xfrm>
           <a:prstGeom prst="rect">
@@ -9159,7 +10364,7 @@
                   <a:schemeClr val="tx1"/>
                 </a:solidFill>
               </a:rPr>
-              <a:t>Anki 카드로 내보내 휴대폰에서도 복습</a:t>
+              <a:t>대화창에 "오늘 배운 거 알려 줘"처럼 물으면 Claude가 내 노트를 읽고 답합니다</a:t>
             </a:r>
             <a:endParaRPr lang="en-US" sz="1350" dirty="0"/>
           </a:p>
@@ -9173,8 +10378,8 @@
         </p:nvSpPr>
         <p:spPr>
           <a:xfrm>
-            <a:off x="6080760" y="5806440"/>
-            <a:ext cx="5577840" cy="320040"/>
+            <a:off x="6080760" y="5687568"/>
+            <a:ext cx="5577840" cy="438912"/>
           </a:xfrm>
           <a:prstGeom prst="rect">
             <a:avLst/>
@@ -9190,14 +10395,14 @@
               <a:buNone/>
             </a:pPr>
             <a:r>
-              <a:rPr lang="en-US" sz="1250" dirty="0">
+              <a:rPr lang="en-US" sz="1200" dirty="0">
                 <a:solidFill>
                   <a:srgbClr val="5A6B70"/>
                 </a:solidFill>
               </a:rPr>
-              <a:t>노트와 일지는 ~/.claude/learning-notes/ 에, 모두 내 컴퓨터에 쌓입니다.</a:t>
-            </a:r>
-            <a:endParaRPr lang="en-US" sz="1250" dirty="0"/>
+              <a:t>노트와 일지는 ~/.claude/learning-notes/ 에, 모두 내 컴퓨터에 쌓입니다. Anki 카드는 /learn 안키.</a:t>
+            </a:r>
+            <a:endParaRPr lang="en-US" sz="1200" dirty="0"/>
           </a:p>
         </p:txBody>
       </p:sp>
@@ -9479,11 +10684,7 @@
                         </a:rPr>
                         <a:t>/learn</a:t>
                       </a:r>
-                      <a:endParaRPr lang="en-US" sz="1400" dirty="0">
-                        <a:latin typeface="Courier New" charset="0"/>
-                        <a:ea typeface="Courier New" charset="0"/>
-                        <a:cs typeface="Courier New" charset="0"/>
-                      </a:endParaRPr>
+                      <a:endParaRPr lang="en-US" sz="1400" dirty="0"/>
                     </a:p>
                   </a:txBody>
                   <a:tcPr marL="137160" marR="137160" marT="0" marB="0" anchor="ctr">
@@ -9539,7 +10740,7 @@
                             <a:schemeClr val="tx1"/>
                           </a:solidFill>
                         </a:rPr>
-                        <a:t>학습 노트 패널 열기</a:t>
+                        <a:t>패널 열기 · 키는 ctrl+x tab 또는 클릭으로 패널에</a:t>
                       </a:r>
                       <a:endParaRPr lang="en-US" sz="1400" dirty="0"/>
                     </a:p>
@@ -9602,13 +10803,20 @@
                           <a:ea typeface="Courier New" pitchFamily="34" charset="-122"/>
                           <a:cs typeface="Courier New" pitchFamily="34" charset="-120"/>
                         </a:rPr>
-                        <a:t>/learn quiz</a:t>
+                        <a:t>/learn</a:t>
                       </a:r>
-                      <a:endParaRPr lang="en-US" sz="1400" dirty="0">
-                        <a:latin typeface="Courier New" charset="0"/>
-                        <a:ea typeface="Courier New" charset="0"/>
-                        <a:cs typeface="Courier New" charset="0"/>
-                      </a:endParaRPr>
+                      <a:pPr indent="0" marL="0">
+                        <a:buNone/>
+                      </a:pPr>
+                      <a:r>
+                        <a:rPr lang="en-US" sz="1400" b="1" dirty="0">
+                          <a:solidFill>
+                            <a:schemeClr val="accent1"/>
+                          </a:solidFill>
+                        </a:rPr>
+                        <a:t> 복습</a:t>
+                      </a:r>
+                      <a:endParaRPr lang="en-US" sz="1400" dirty="0"/>
                     </a:p>
                   </a:txBody>
                   <a:tcPr marL="137160" marR="137160" marT="0" marB="0" anchor="ctr">
@@ -9664,7 +10872,7 @@
                             <a:schemeClr val="tx1"/>
                           </a:solidFill>
                         </a:rPr>
-                        <a:t>복습할 개념으로 문제 받기 (내 코드로)</a:t>
+                        <a:t>오늘 복습 바로 시작 · 답 칸에서 시작</a:t>
                       </a:r>
                       <a:endParaRPr lang="en-US" sz="1400" dirty="0"/>
                     </a:p>
@@ -9727,13 +10935,20 @@
                           <a:ea typeface="Courier New" pitchFamily="34" charset="-122"/>
                           <a:cs typeface="Courier New" pitchFamily="34" charset="-120"/>
                         </a:rPr>
-                        <a:t>/learn quiz 1 내 답</a:t>
+                        <a:t>/learn</a:t>
                       </a:r>
-                      <a:endParaRPr lang="en-US" sz="1400" dirty="0">
-                        <a:latin typeface="Courier New" charset="0"/>
-                        <a:ea typeface="Courier New" charset="0"/>
-                        <a:cs typeface="Courier New" charset="0"/>
-                      </a:endParaRPr>
+                      <a:pPr indent="0" marL="0">
+                        <a:buNone/>
+                      </a:pPr>
+                      <a:r>
+                        <a:rPr lang="en-US" sz="1400" b="1" dirty="0">
+                          <a:solidFill>
+                            <a:schemeClr val="accent1"/>
+                          </a:solidFill>
+                        </a:rPr>
+                        <a:t> 퀴즈</a:t>
+                      </a:r>
+                      <a:endParaRPr lang="en-US" sz="1400" dirty="0"/>
                     </a:p>
                   </a:txBody>
                   <a:tcPr marL="137160" marR="137160" marT="0" marB="0" anchor="ctr">
@@ -9789,7 +11004,7 @@
                             <a:schemeClr val="tx1"/>
                           </a:solidFill>
                         </a:rPr>
-                        <a:t>답을 적어 Claude에게 채점받기 · 힌트 · 정답 · 문제</a:t>
+                        <a:t>대화창에서 풀기 · 1 내 답으로 채점 (새로 · 힌트 · 정답)</a:t>
                       </a:r>
                       <a:endParaRPr lang="en-US" sz="1400" dirty="0"/>
                     </a:p>
@@ -9852,13 +11067,20 @@
                           <a:ea typeface="Courier New" pitchFamily="34" charset="-122"/>
                           <a:cs typeface="Courier New" pitchFamily="34" charset="-120"/>
                         </a:rPr>
-                        <a:t>/learn recap</a:t>
+                        <a:t>/learn</a:t>
                       </a:r>
-                      <a:endParaRPr lang="en-US" sz="1400" dirty="0">
-                        <a:latin typeface="Courier New" charset="0"/>
-                        <a:ea typeface="Courier New" charset="0"/>
-                        <a:cs typeface="Courier New" charset="0"/>
-                      </a:endParaRPr>
+                      <a:pPr indent="0" marL="0">
+                        <a:buNone/>
+                      </a:pPr>
+                      <a:r>
+                        <a:rPr lang="en-US" sz="1400" b="1" dirty="0">
+                          <a:solidFill>
+                            <a:schemeClr val="accent1"/>
+                          </a:solidFill>
+                        </a:rPr>
+                        <a:t> 정리</a:t>
+                      </a:r>
+                      <a:endParaRPr lang="en-US" sz="1400" dirty="0"/>
                     </a:p>
                   </a:txBody>
                   <a:tcPr marL="137160" marR="137160" marT="0" marB="0" anchor="ctr">
@@ -9977,119 +11199,8 @@
                           <a:ea typeface="Courier New" pitchFamily="34" charset="-122"/>
                           <a:cs typeface="Courier New" pitchFamily="34" charset="-120"/>
                         </a:rPr>
-                        <a:t>/learn stats</a:t>
+                        <a:t>/learn</a:t>
                       </a:r>
-                      <a:endParaRPr lang="en-US" sz="1400" dirty="0">
-                        <a:latin typeface="Courier New" charset="0"/>
-                        <a:ea typeface="Courier New" charset="0"/>
-                        <a:cs typeface="Courier New" charset="0"/>
-                      </a:endParaRPr>
-                    </a:p>
-                  </a:txBody>
-                  <a:tcPr marL="137160" marR="137160" marT="0" marB="0" anchor="ctr">
-                    <a:lnL w="9525" cap="flat" cmpd="sng" algn="ctr">
-                      <a:solidFill>
-                        <a:srgbClr val="D9E3DF"/>
-                      </a:solidFill>
-                      <a:prstDash val="solid"/>
-                      <a:round/>
-                      <a:headEnd type="none" w="med" len="med"/>
-                      <a:tailEnd type="none" w="med" len="med"/>
-                    </a:lnL>
-                    <a:lnR w="9525" cap="flat" cmpd="sng" algn="ctr">
-                      <a:solidFill>
-                        <a:srgbClr val="D9E3DF"/>
-                      </a:solidFill>
-                      <a:prstDash val="solid"/>
-                      <a:round/>
-                      <a:headEnd type="none" w="med" len="med"/>
-                      <a:tailEnd type="none" w="med" len="med"/>
-                    </a:lnR>
-                    <a:lnT w="9525" cap="flat" cmpd="sng" algn="ctr">
-                      <a:solidFill>
-                        <a:srgbClr val="D9E3DF"/>
-                      </a:solidFill>
-                      <a:prstDash val="solid"/>
-                      <a:round/>
-                      <a:headEnd type="none" w="med" len="med"/>
-                      <a:tailEnd type="none" w="med" len="med"/>
-                    </a:lnT>
-                    <a:lnB w="9525" cap="flat" cmpd="sng" algn="ctr">
-                      <a:solidFill>
-                        <a:srgbClr val="D9E3DF"/>
-                      </a:solidFill>
-                      <a:prstDash val="solid"/>
-                      <a:round/>
-                      <a:headEnd type="none" w="med" len="med"/>
-                      <a:tailEnd type="none" w="med" len="med"/>
-                    </a:lnB>
-                  </a:tcPr>
-                </a:tc>
-                <a:tc>
-                  <a:txBody>
-                    <a:bodyPr/>
-                    <a:lstStyle/>
-                    <a:p>
-                      <a:pPr indent="0" marL="0">
-                        <a:buNone/>
-                      </a:pPr>
-                      <a:r>
-                        <a:rPr lang="en-US" sz="1400" dirty="0">
-                          <a:solidFill>
-                            <a:schemeClr val="tx1"/>
-                          </a:solidFill>
-                        </a:rPr>
-                        <a:t>연속 학습일 · 최근 7일 · 30일 정답률</a:t>
-                      </a:r>
-                      <a:endParaRPr lang="en-US" sz="1400" dirty="0"/>
-                    </a:p>
-                  </a:txBody>
-                  <a:tcPr marL="137160" marR="137160" marT="0" marB="0" anchor="ctr">
-                    <a:lnL w="9525" cap="flat" cmpd="sng" algn="ctr">
-                      <a:solidFill>
-                        <a:srgbClr val="D9E3DF"/>
-                      </a:solidFill>
-                      <a:prstDash val="solid"/>
-                      <a:round/>
-                      <a:headEnd type="none" w="med" len="med"/>
-                      <a:tailEnd type="none" w="med" len="med"/>
-                    </a:lnL>
-                    <a:lnR w="9525" cap="flat" cmpd="sng" algn="ctr">
-                      <a:solidFill>
-                        <a:srgbClr val="D9E3DF"/>
-                      </a:solidFill>
-                      <a:prstDash val="solid"/>
-                      <a:round/>
-                      <a:headEnd type="none" w="med" len="med"/>
-                      <a:tailEnd type="none" w="med" len="med"/>
-                    </a:lnR>
-                    <a:lnT w="9525" cap="flat" cmpd="sng" algn="ctr">
-                      <a:solidFill>
-                        <a:srgbClr val="D9E3DF"/>
-                      </a:solidFill>
-                      <a:prstDash val="solid"/>
-                      <a:round/>
-                      <a:headEnd type="none" w="med" len="med"/>
-                      <a:tailEnd type="none" w="med" len="med"/>
-                    </a:lnT>
-                    <a:lnB w="9525" cap="flat" cmpd="sng" algn="ctr">
-                      <a:solidFill>
-                        <a:srgbClr val="D9E3DF"/>
-                      </a:solidFill>
-                      <a:prstDash val="solid"/>
-                      <a:round/>
-                      <a:headEnd type="none" w="med" len="med"/>
-                      <a:tailEnd type="none" w="med" len="med"/>
-                    </a:lnB>
-                  </a:tcPr>
-                </a:tc>
-              </a:tr>
-              <a:tr h="402336">
-                <a:tc>
-                  <a:txBody>
-                    <a:bodyPr/>
-                    <a:lstStyle/>
-                    <a:p>
                       <a:pPr indent="0" marL="0">
                         <a:buNone/>
                       </a:pPr>
@@ -10098,17 +11209,10 @@
                           <a:solidFill>
                             <a:schemeClr val="accent1"/>
                           </a:solidFill>
-                          <a:latin typeface="Courier New" pitchFamily="34" charset="0"/>
-                          <a:ea typeface="Courier New" pitchFamily="34" charset="-122"/>
-                          <a:cs typeface="Courier New" pitchFamily="34" charset="-120"/>
                         </a:rPr>
-                        <a:t>/learn ask 질문</a:t>
+                        <a:t> 질문 …</a:t>
                       </a:r>
-                      <a:endParaRPr lang="en-US" sz="1400" dirty="0">
-                        <a:latin typeface="Courier New" charset="0"/>
-                        <a:ea typeface="Courier New" charset="0"/>
-                        <a:cs typeface="Courier New" charset="0"/>
-                      </a:endParaRPr>
+                      <a:endParaRPr lang="en-US" sz="1400" dirty="0"/>
                     </a:p>
                   </a:txBody>
                   <a:tcPr marL="137160" marR="137160" marT="0" marB="0" anchor="ctr">
@@ -10227,13 +11331,20 @@
                           <a:ea typeface="Courier New" pitchFamily="34" charset="-122"/>
                           <a:cs typeface="Courier New" pitchFamily="34" charset="-120"/>
                         </a:rPr>
-                        <a:t>/learn find 말</a:t>
+                        <a:t>/learn</a:t>
                       </a:r>
-                      <a:endParaRPr lang="en-US" sz="1400" dirty="0">
-                        <a:latin typeface="Courier New" charset="0"/>
-                        <a:ea typeface="Courier New" charset="0"/>
-                        <a:cs typeface="Courier New" charset="0"/>
-                      </a:endParaRPr>
+                      <a:pPr indent="0" marL="0">
+                        <a:buNone/>
+                      </a:pPr>
+                      <a:r>
+                        <a:rPr lang="en-US" sz="1400" b="1" dirty="0">
+                          <a:solidFill>
+                            <a:schemeClr val="accent1"/>
+                          </a:solidFill>
+                        </a:rPr>
+                        <a:t> 기록</a:t>
+                      </a:r>
+                      <a:endParaRPr lang="en-US" sz="1400" dirty="0"/>
                     </a:p>
                   </a:txBody>
                   <a:tcPr marL="137160" marR="137160" marT="0" marB="0" anchor="ctr">
@@ -10289,7 +11400,7 @@
                             <a:schemeClr val="tx1"/>
                           </a:solidFill>
                         </a:rPr>
-                        <a:t>모든 프로젝트의 노트에서 찾기</a:t>
+                        <a:t>연속 학습일 · 정답률 · 복습할 개념 · 배운 개념 · 모델 호출 수</a:t>
                       </a:r>
                       <a:endParaRPr lang="en-US" sz="1400" dirty="0"/>
                     </a:p>
@@ -10352,13 +11463,20 @@
                           <a:ea typeface="Courier New" pitchFamily="34" charset="-122"/>
                           <a:cs typeface="Courier New" pitchFamily="34" charset="-120"/>
                         </a:rPr>
-                        <a:t>/learn day</a:t>
+                        <a:t>/learn</a:t>
                       </a:r>
-                      <a:endParaRPr lang="en-US" sz="1400" dirty="0">
-                        <a:latin typeface="Courier New" charset="0"/>
-                        <a:ea typeface="Courier New" charset="0"/>
-                        <a:cs typeface="Courier New" charset="0"/>
-                      </a:endParaRPr>
+                      <a:pPr indent="0" marL="0">
+                        <a:buNone/>
+                      </a:pPr>
+                      <a:r>
+                        <a:rPr lang="en-US" sz="1400" b="1" dirty="0">
+                          <a:solidFill>
+                            <a:schemeClr val="accent1"/>
+                          </a:solidFill>
+                        </a:rPr>
+                        <a:t> 보고서</a:t>
+                      </a:r>
+                      <a:endParaRPr lang="en-US" sz="1400" dirty="0"/>
                     </a:p>
                   </a:txBody>
                   <a:tcPr marL="137160" marR="137160" marT="0" marB="0" anchor="ctr">
@@ -10414,7 +11532,7 @@
                             <a:schemeClr val="tx1"/>
                           </a:solidFill>
                         </a:rPr>
-                        <a:t>오늘 노트 목차 (어제 · 날짜)</a:t>
+                        <a:t>코드 없는 학습 보고서를 클립보드와 파일로 (최근 7일)</a:t>
                       </a:r>
                       <a:endParaRPr lang="en-US" sz="1400" dirty="0"/>
                     </a:p>
@@ -10477,13 +11595,20 @@
                           <a:ea typeface="Courier New" pitchFamily="34" charset="-122"/>
                           <a:cs typeface="Courier New" pitchFamily="34" charset="-120"/>
                         </a:rPr>
-                        <a:t>/learn anki</a:t>
+                        <a:t>/learn</a:t>
                       </a:r>
-                      <a:endParaRPr lang="en-US" sz="1400" dirty="0">
-                        <a:latin typeface="Courier New" charset="0"/>
-                        <a:ea typeface="Courier New" charset="0"/>
-                        <a:cs typeface="Courier New" charset="0"/>
-                      </a:endParaRPr>
+                      <a:pPr indent="0" marL="0">
+                        <a:buNone/>
+                      </a:pPr>
+                      <a:r>
+                        <a:rPr lang="en-US" sz="1400" b="1" dirty="0">
+                          <a:solidFill>
+                            <a:schemeClr val="accent1"/>
+                          </a:solidFill>
+                        </a:rPr>
+                        <a:t> 찾기 말</a:t>
+                      </a:r>
+                      <a:endParaRPr lang="en-US" sz="1400" dirty="0"/>
                     </a:p>
                   </a:txBody>
                   <a:tcPr marL="137160" marR="137160" marT="0" marB="0" anchor="ctr">
@@ -10539,7 +11664,139 @@
                             <a:schemeClr val="tx1"/>
                           </a:solidFill>
                         </a:rPr>
-                        <a:t>Anki 카드 파일로 내보내기</a:t>
+                        <a:t>지난 노트 찾기</a:t>
+                      </a:r>
+                      <a:endParaRPr lang="en-US" sz="1400" dirty="0"/>
+                    </a:p>
+                  </a:txBody>
+                  <a:tcPr marL="137160" marR="137160" marT="0" marB="0" anchor="ctr">
+                    <a:lnL w="9525" cap="flat" cmpd="sng" algn="ctr">
+                      <a:solidFill>
+                        <a:srgbClr val="D9E3DF"/>
+                      </a:solidFill>
+                      <a:prstDash val="solid"/>
+                      <a:round/>
+                      <a:headEnd type="none" w="med" len="med"/>
+                      <a:tailEnd type="none" w="med" len="med"/>
+                    </a:lnL>
+                    <a:lnR w="9525" cap="flat" cmpd="sng" algn="ctr">
+                      <a:solidFill>
+                        <a:srgbClr val="D9E3DF"/>
+                      </a:solidFill>
+                      <a:prstDash val="solid"/>
+                      <a:round/>
+                      <a:headEnd type="none" w="med" len="med"/>
+                      <a:tailEnd type="none" w="med" len="med"/>
+                    </a:lnR>
+                    <a:lnT w="9525" cap="flat" cmpd="sng" algn="ctr">
+                      <a:solidFill>
+                        <a:srgbClr val="D9E3DF"/>
+                      </a:solidFill>
+                      <a:prstDash val="solid"/>
+                      <a:round/>
+                      <a:headEnd type="none" w="med" len="med"/>
+                      <a:tailEnd type="none" w="med" len="med"/>
+                    </a:lnT>
+                    <a:lnB w="9525" cap="flat" cmpd="sng" algn="ctr">
+                      <a:solidFill>
+                        <a:srgbClr val="D9E3DF"/>
+                      </a:solidFill>
+                      <a:prstDash val="solid"/>
+                      <a:round/>
+                      <a:headEnd type="none" w="med" len="med"/>
+                      <a:tailEnd type="none" w="med" len="med"/>
+                    </a:lnB>
+                  </a:tcPr>
+                </a:tc>
+              </a:tr>
+              <a:tr h="402336">
+                <a:tc>
+                  <a:txBody>
+                    <a:bodyPr/>
+                    <a:lstStyle/>
+                    <a:p>
+                      <a:pPr indent="0" marL="0">
+                        <a:buNone/>
+                      </a:pPr>
+                      <a:r>
+                        <a:rPr lang="en-US" sz="1400" b="1" dirty="0">
+                          <a:solidFill>
+                            <a:schemeClr val="accent1"/>
+                          </a:solidFill>
+                          <a:latin typeface="Courier New" pitchFamily="34" charset="0"/>
+                          <a:ea typeface="Courier New" pitchFamily="34" charset="-122"/>
+                          <a:cs typeface="Courier New" pitchFamily="34" charset="-120"/>
+                        </a:rPr>
+                        <a:t>/learn</a:t>
+                      </a:r>
+                      <a:pPr indent="0" marL="0">
+                        <a:buNone/>
+                      </a:pPr>
+                      <a:r>
+                        <a:rPr lang="en-US" sz="1400" b="1" dirty="0">
+                          <a:solidFill>
+                            <a:schemeClr val="accent1"/>
+                          </a:solidFill>
+                        </a:rPr>
+                        <a:t> 일지</a:t>
+                      </a:r>
+                      <a:endParaRPr lang="en-US" sz="1400" dirty="0"/>
+                    </a:p>
+                  </a:txBody>
+                  <a:tcPr marL="137160" marR="137160" marT="0" marB="0" anchor="ctr">
+                    <a:lnL w="9525" cap="flat" cmpd="sng" algn="ctr">
+                      <a:solidFill>
+                        <a:srgbClr val="D9E3DF"/>
+                      </a:solidFill>
+                      <a:prstDash val="solid"/>
+                      <a:round/>
+                      <a:headEnd type="none" w="med" len="med"/>
+                      <a:tailEnd type="none" w="med" len="med"/>
+                    </a:lnL>
+                    <a:lnR w="9525" cap="flat" cmpd="sng" algn="ctr">
+                      <a:solidFill>
+                        <a:srgbClr val="D9E3DF"/>
+                      </a:solidFill>
+                      <a:prstDash val="solid"/>
+                      <a:round/>
+                      <a:headEnd type="none" w="med" len="med"/>
+                      <a:tailEnd type="none" w="med" len="med"/>
+                    </a:lnR>
+                    <a:lnT w="9525" cap="flat" cmpd="sng" algn="ctr">
+                      <a:solidFill>
+                        <a:srgbClr val="D9E3DF"/>
+                      </a:solidFill>
+                      <a:prstDash val="solid"/>
+                      <a:round/>
+                      <a:headEnd type="none" w="med" len="med"/>
+                      <a:tailEnd type="none" w="med" len="med"/>
+                    </a:lnT>
+                    <a:lnB w="9525" cap="flat" cmpd="sng" algn="ctr">
+                      <a:solidFill>
+                        <a:srgbClr val="D9E3DF"/>
+                      </a:solidFill>
+                      <a:prstDash val="solid"/>
+                      <a:round/>
+                      <a:headEnd type="none" w="med" len="med"/>
+                      <a:tailEnd type="none" w="med" len="med"/>
+                    </a:lnB>
+                  </a:tcPr>
+                </a:tc>
+                <a:tc>
+                  <a:txBody>
+                    <a:bodyPr/>
+                    <a:lstStyle/>
+                    <a:p>
+                      <a:pPr indent="0" marL="0">
+                        <a:buNone/>
+                      </a:pPr>
+                      <a:r>
+                        <a:rPr lang="en-US" sz="1400" dirty="0">
+                          <a:solidFill>
+                            <a:schemeClr val="tx1"/>
+                          </a:solidFill>
+                        </a:rPr>
+                        <a:t>오늘 노트 목차 (어제 · 날짜 · 목록)</a:t>
                       </a:r>
                       <a:endParaRPr lang="en-US" sz="1400" dirty="0"/>
                     </a:p>
@@ -10645,7 +11902,7 @@
                   <a:schemeClr val="tx2"/>
                 </a:solidFill>
               </a:rPr>
-              <a:t>한글로도 됩니다  </a:t>
+              <a:t>가끔  </a:t>
             </a:r>
             <a:pPr indent="0" marL="0">
               <a:buNone/>
@@ -10656,7 +11913,7 @@
                   <a:schemeClr val="tx1"/>
                 </a:solidFill>
               </a:rPr>
-              <a:t>/learn 퀴즈 · 개념 · 정리 · 기록 · 질문 · 찾기 · 일지 · 도움말      전체 목록은 /learn help</a:t>
+              <a:t>마지막 · 합치기 · 안다 · 모른다 · 안키 · 비우기      영어(quiz · recap · stats …)도 됩니다 · 전체는 /learn 도움말</a:t>
             </a:r>
             <a:endParaRPr lang="en-US" sz="1350" dirty="0"/>
           </a:p>
@@ -10840,7 +12097,7 @@
                   <a:schemeClr val="accent6"/>
                 </a:solidFill>
               </a:rPr>
-              <a:t>설치는 두 줄, 첫 노트까지 5분</a:t>
+              <a:t>설치는 두 줄, 첫 노트까지 5분 · 팀으로 쓰는 법까지</a:t>
             </a:r>
             <a:endParaRPr lang="en-US" sz="1800" dirty="0"/>
           </a:p>
@@ -11194,151 +12451,7 @@
                   <a:schemeClr val="tx1"/>
                 </a:solidFill>
               </a:rPr>
-              <a:t> 으로 패널 열기</a:t>
-            </a:r>
-            <a:endParaRPr lang="en-US" sz="1600" dirty="0"/>
-          </a:p>
-        </p:txBody>
-      </p:sp>
-      <p:sp>
-        <p:nvSpPr>
-          <p:cNvPr id="10" name="Text 8"/>
-          <p:cNvSpPr txBox="1"/>
-          <p:nvPr/>
-        </p:nvSpPr>
-        <p:spPr>
-          <a:xfrm>
-            <a:off x="548640" y="4626864"/>
-            <a:ext cx="548640" cy="457200"/>
-          </a:xfrm>
-          <a:prstGeom prst="rect">
-            <a:avLst/>
-          </a:prstGeom>
-          <a:noFill/>
-          <a:ln/>
-        </p:spPr>
-        <p:txBody>
-          <a:bodyPr wrap="square" lIns="0" tIns="0" rIns="0" bIns="0" rtlCol="0" anchor="t"/>
-          <a:lstStyle/>
-          <a:p>
-            <a:pPr indent="0" marL="0">
-              <a:buNone/>
-            </a:pPr>
-            <a:r>
-              <a:rPr lang="en-US" sz="2000" b="1" dirty="0">
-                <a:solidFill>
-                  <a:schemeClr val="accent1"/>
-                </a:solidFill>
-              </a:rPr>
-              <a:t>④</a:t>
-            </a:r>
-            <a:endParaRPr lang="en-US" sz="2000" dirty="0"/>
-          </a:p>
-        </p:txBody>
-      </p:sp>
-      <p:sp>
-        <p:nvSpPr>
-          <p:cNvPr id="11" name="Text 9"/>
-          <p:cNvSpPr txBox="1"/>
-          <p:nvPr/>
-        </p:nvSpPr>
-        <p:spPr>
-          <a:xfrm>
-            <a:off x="1097280" y="4654296"/>
-            <a:ext cx="6035040" cy="457200"/>
-          </a:xfrm>
-          <a:prstGeom prst="rect">
-            <a:avLst/>
-          </a:prstGeom>
-          <a:noFill/>
-          <a:ln/>
-        </p:spPr>
-        <p:txBody>
-          <a:bodyPr wrap="square" lIns="0" tIns="0" rIns="0" bIns="0" rtlCol="0" anchor="t"/>
-          <a:lstStyle/>
-          <a:p>
-            <a:pPr indent="0" marL="0">
-              <a:buNone/>
-            </a:pPr>
-            <a:r>
-              <a:rPr lang="en-US" sz="1600" dirty="0">
-                <a:solidFill>
-                  <a:schemeClr val="tx1"/>
-                </a:solidFill>
-              </a:rPr>
-              <a:t>평소처럼 코딩 요청 → 몇 초 뒤 노트가 뜹니다</a:t>
-            </a:r>
-            <a:endParaRPr lang="en-US" sz="1600" dirty="0"/>
-          </a:p>
-        </p:txBody>
-      </p:sp>
-      <p:sp>
-        <p:nvSpPr>
-          <p:cNvPr id="12" name="Text 10"/>
-          <p:cNvSpPr txBox="1"/>
-          <p:nvPr/>
-        </p:nvSpPr>
-        <p:spPr>
-          <a:xfrm>
-            <a:off x="548640" y="5340096"/>
-            <a:ext cx="548640" cy="457200"/>
-          </a:xfrm>
-          <a:prstGeom prst="rect">
-            <a:avLst/>
-          </a:prstGeom>
-          <a:noFill/>
-          <a:ln/>
-        </p:spPr>
-        <p:txBody>
-          <a:bodyPr wrap="square" lIns="0" tIns="0" rIns="0" bIns="0" rtlCol="0" anchor="t"/>
-          <a:lstStyle/>
-          <a:p>
-            <a:pPr indent="0" marL="0">
-              <a:buNone/>
-            </a:pPr>
-            <a:r>
-              <a:rPr lang="en-US" sz="2000" b="1" dirty="0">
-                <a:solidFill>
-                  <a:schemeClr val="accent1"/>
-                </a:solidFill>
-              </a:rPr>
-              <a:t>⑤</a:t>
-            </a:r>
-            <a:endParaRPr lang="en-US" sz="2000" dirty="0"/>
-          </a:p>
-        </p:txBody>
-      </p:sp>
-      <p:sp>
-        <p:nvSpPr>
-          <p:cNvPr id="13" name="Text 11"/>
-          <p:cNvSpPr txBox="1"/>
-          <p:nvPr/>
-        </p:nvSpPr>
-        <p:spPr>
-          <a:xfrm>
-            <a:off x="1097280" y="5367528"/>
-            <a:ext cx="6035040" cy="457200"/>
-          </a:xfrm>
-          <a:prstGeom prst="rect">
-            <a:avLst/>
-          </a:prstGeom>
-          <a:noFill/>
-          <a:ln/>
-        </p:spPr>
-        <p:txBody>
-          <a:bodyPr wrap="square" lIns="0" tIns="0" rIns="0" bIns="0" rtlCol="0" anchor="t"/>
-          <a:lstStyle/>
-          <a:p>
-            <a:pPr indent="0" marL="0">
-              <a:buNone/>
-            </a:pPr>
-            <a:r>
-              <a:rPr lang="en-US" sz="1600" dirty="0">
-                <a:solidFill>
-                  <a:schemeClr val="tx1"/>
-                </a:solidFill>
-              </a:rPr>
-              <a:t>단축키는 </a:t>
+              <a:t> 으로 패널 열기 · 오늘 복습은 </a:t>
             </a:r>
             <a:pPr indent="0" marL="0">
               <a:buNone/>
@@ -11352,18 +12465,176 @@
                 <a:ea typeface="Courier New" pitchFamily="34" charset="-122"/>
                 <a:cs typeface="Courier New" pitchFamily="34" charset="-120"/>
               </a:rPr>
-              <a:t>ctrl+x tab</a:t>
-            </a:r>
+              <a:t>/learn 복습</a:t>
+            </a:r>
+            <a:endParaRPr lang="en-US" sz="1600" dirty="0"/>
+          </a:p>
+        </p:txBody>
+      </p:sp>
+      <p:sp>
+        <p:nvSpPr>
+          <p:cNvPr id="10" name="Text 8"/>
+          <p:cNvSpPr txBox="1"/>
+          <p:nvPr/>
+        </p:nvSpPr>
+        <p:spPr>
+          <a:xfrm>
+            <a:off x="548640" y="4626864"/>
+            <a:ext cx="548640" cy="457200"/>
+          </a:xfrm>
+          <a:prstGeom prst="rect">
+            <a:avLst/>
+          </a:prstGeom>
+          <a:noFill/>
+          <a:ln/>
+        </p:spPr>
+        <p:txBody>
+          <a:bodyPr wrap="square" lIns="0" tIns="0" rIns="0" bIns="0" rtlCol="0" anchor="t"/>
+          <a:lstStyle/>
+          <a:p>
             <a:pPr indent="0" marL="0">
               <a:buNone/>
             </a:pPr>
             <a:r>
+              <a:rPr lang="en-US" sz="2000" b="1" dirty="0">
+                <a:solidFill>
+                  <a:schemeClr val="accent1"/>
+                </a:solidFill>
+              </a:rPr>
+              <a:t>④</a:t>
+            </a:r>
+            <a:endParaRPr lang="en-US" sz="2000" dirty="0"/>
+          </a:p>
+        </p:txBody>
+      </p:sp>
+      <p:sp>
+        <p:nvSpPr>
+          <p:cNvPr id="11" name="Text 9"/>
+          <p:cNvSpPr txBox="1"/>
+          <p:nvPr/>
+        </p:nvSpPr>
+        <p:spPr>
+          <a:xfrm>
+            <a:off x="1097280" y="4654296"/>
+            <a:ext cx="6035040" cy="457200"/>
+          </a:xfrm>
+          <a:prstGeom prst="rect">
+            <a:avLst/>
+          </a:prstGeom>
+          <a:noFill/>
+          <a:ln/>
+        </p:spPr>
+        <p:txBody>
+          <a:bodyPr wrap="square" lIns="0" tIns="0" rIns="0" bIns="0" rtlCol="0" anchor="t"/>
+          <a:lstStyle/>
+          <a:p>
+            <a:pPr indent="0" marL="0">
+              <a:buNone/>
+            </a:pPr>
+            <a:r>
               <a:rPr lang="en-US" sz="1600" dirty="0">
                 <a:solidFill>
                   <a:schemeClr val="tx1"/>
                 </a:solidFill>
               </a:rPr>
-              <a:t>으로 패널을 고른 뒤</a:t>
+              <a:t>평소처럼 코딩 요청 → 몇 초 뒤 노트가 뜹니다</a:t>
+            </a:r>
+            <a:endParaRPr lang="en-US" sz="1600" dirty="0"/>
+          </a:p>
+        </p:txBody>
+      </p:sp>
+      <p:sp>
+        <p:nvSpPr>
+          <p:cNvPr id="12" name="Text 10"/>
+          <p:cNvSpPr txBox="1"/>
+          <p:nvPr/>
+        </p:nvSpPr>
+        <p:spPr>
+          <a:xfrm>
+            <a:off x="548640" y="5340096"/>
+            <a:ext cx="548640" cy="457200"/>
+          </a:xfrm>
+          <a:prstGeom prst="rect">
+            <a:avLst/>
+          </a:prstGeom>
+          <a:noFill/>
+          <a:ln/>
+        </p:spPr>
+        <p:txBody>
+          <a:bodyPr wrap="square" lIns="0" tIns="0" rIns="0" bIns="0" rtlCol="0" anchor="t"/>
+          <a:lstStyle/>
+          <a:p>
+            <a:pPr indent="0" marL="0">
+              <a:buNone/>
+            </a:pPr>
+            <a:r>
+              <a:rPr lang="en-US" sz="2000" b="1" dirty="0">
+                <a:solidFill>
+                  <a:schemeClr val="accent1"/>
+                </a:solidFill>
+              </a:rPr>
+              <a:t>⑤</a:t>
+            </a:r>
+            <a:endParaRPr lang="en-US" sz="2000" dirty="0"/>
+          </a:p>
+        </p:txBody>
+      </p:sp>
+      <p:sp>
+        <p:nvSpPr>
+          <p:cNvPr id="13" name="Text 11"/>
+          <p:cNvSpPr txBox="1"/>
+          <p:nvPr/>
+        </p:nvSpPr>
+        <p:spPr>
+          <a:xfrm>
+            <a:off x="1097280" y="5367528"/>
+            <a:ext cx="6035040" cy="457200"/>
+          </a:xfrm>
+          <a:prstGeom prst="rect">
+            <a:avLst/>
+          </a:prstGeom>
+          <a:noFill/>
+          <a:ln/>
+        </p:spPr>
+        <p:txBody>
+          <a:bodyPr wrap="square" lIns="0" tIns="0" rIns="0" bIns="0" rtlCol="0" anchor="t"/>
+          <a:lstStyle/>
+          <a:p>
+            <a:pPr indent="0" marL="0">
+              <a:buNone/>
+            </a:pPr>
+            <a:r>
+              <a:rPr lang="en-US" sz="1600" dirty="0">
+                <a:solidFill>
+                  <a:schemeClr val="tx1"/>
+                </a:solidFill>
+              </a:rPr>
+              <a:t>숫자 </a:t>
+            </a:r>
+            <a:pPr indent="0" marL="0">
+              <a:buNone/>
+            </a:pPr>
+            <a:r>
+              <a:rPr lang="en-US" sz="1600" b="1" dirty="0">
+                <a:solidFill>
+                  <a:schemeClr val="accent1"/>
+                </a:solidFill>
+                <a:latin typeface="Courier New" pitchFamily="34" charset="0"/>
+                <a:ea typeface="Courier New" pitchFamily="34" charset="-122"/>
+                <a:cs typeface="Courier New" pitchFamily="34" charset="-120"/>
+              </a:rPr>
+              <a:t>1~4</a:t>
+            </a:r>
+            <a:pPr indent="0" marL="0">
+              <a:buNone/>
+            </a:pPr>
+            <a:r>
+              <a:rPr lang="en-US" sz="1600" dirty="0">
+                <a:solidFill>
+                  <a:schemeClr val="tx1"/>
+                </a:solidFill>
+              </a:rPr>
+              <a:t>는 한/영 상관없이, 글자 키는 영문으로</a:t>
             </a:r>
             <a:endParaRPr lang="en-US" sz="1600" dirty="0"/>
           </a:p>
@@ -11714,12 +12985,12 @@
               <a:buNone/>
             </a:pPr>
             <a:r>
-              <a:rPr lang="en-US" sz="1300" dirty="0">
+              <a:rPr lang="en-US" sz="1200" dirty="0">
                 <a:solidFill>
                   <a:srgbClr val="5A6B70"/>
                 </a:solidFill>
               </a:rPr>
-              <a:t>/learn help에 "예시로 따라가기"가 보이면 1.5.0입니다.</a:t>
+              <a:t>/learn help에 /learn 보고서가 보이면 1.6.0입니다.</a:t>
             </a:r>
             <a:endParaRPr lang="en-US" sz="1300" dirty="0"/>
           </a:p>
@@ -12603,7 +13874,7 @@
                   <a:schemeClr val="tx2"/>
                 </a:solidFill>
               </a:rPr>
-              <a:t>아침 · 복습 3문제</a:t>
+              <a:t>아침 · 오늘 복습</a:t>
             </a:r>
             <a:endParaRPr lang="en-US" sz="1900" dirty="0"/>
           </a:p>
@@ -12639,7 +13910,7 @@
                   <a:schemeClr val="tx1"/>
                 </a:solidFill>
               </a:rPr>
-              <a:t>상태줄에 복습할 개념이 보이면 q → s. 답을 적어 채점받으면 간격이 알아서 늘어납니다.</a:t>
+              <a:t>상태줄에 "오늘 복습 n개"가 보이면 /learn 복습. 답을 적고 Enter로 이어 풉니다.</a:t>
             </a:r>
             <a:endParaRPr lang="en-US" sz="1400" dirty="0"/>
           </a:p>
@@ -12935,7 +14206,7 @@
                   <a:schemeClr val="tx1"/>
                 </a:solidFill>
               </a:rPr>
-              <a:t>/learn recap으로 정리하고, "핵심 개념" 한 줄을 팀 채널에 공유해 보세요.</a:t>
+              <a:t>/learn 정리로 정리하고, "핵심 개념" 한 줄을 팀 채널에 공유해 보세요.</a:t>
             </a:r>
             <a:endParaRPr lang="en-US" sz="1400" dirty="0"/>
           </a:p>
@@ -13083,7 +14354,7 @@
                   <a:schemeClr val="tx1"/>
                 </a:solidFill>
               </a:rPr>
-              <a:t>/learn recap 이번주와 /learn stats로 한 주를 돌아보고, 다시 만난 개념을 나눕니다.</a:t>
+              <a:t>/learn 보고서를 붙이고 "내 말로 한 줄"을 채워, 회고나 1:1에서 나눕니다.</a:t>
             </a:r>
             <a:endParaRPr lang="en-US" sz="1400" dirty="0"/>
           </a:p>
@@ -13191,7 +14462,7 @@
                   <a:schemeClr val="tx2"/>
                 </a:solidFill>
               </a:rPr>
-              <a:t>비용 · 개인정보 · 문제 해결</a:t>
+              <a:t>팀으로 쓰기</a:t>
             </a:r>
             <a:endParaRPr lang="en-US" sz="3000" dirty="0"/>
           </a:p>
@@ -13199,26 +14470,76 @@
       </p:sp>
       <p:sp>
         <p:nvSpPr>
-          <p:cNvPr id="3" name="card"/>
+          <p:cNvPr id="3" name="Text 1"/>
+          <p:cNvSpPr txBox="1"/>
+          <p:nvPr/>
+        </p:nvSpPr>
+        <p:spPr>
+          <a:xfrm>
+            <a:off x="548640" y="1371600"/>
+            <a:ext cx="5577840" cy="411480"/>
+          </a:xfrm>
+          <a:prstGeom prst="rect">
+            <a:avLst/>
+          </a:prstGeom>
+          <a:noFill/>
+          <a:ln/>
+        </p:spPr>
+        <p:txBody>
+          <a:bodyPr wrap="square" lIns="0" tIns="0" rIns="0" bIns="0" rtlCol="0" anchor="ctr"/>
+          <a:lstStyle/>
+          <a:p>
+            <a:pPr indent="0" marL="0">
+              <a:buNone/>
+            </a:pPr>
+            <a:r>
+              <a:rPr lang="en-US" sz="1800" b="1" dirty="0">
+                <a:solidFill>
+                  <a:schemeClr val="tx2"/>
+                </a:solidFill>
+              </a:rPr>
+              <a:t>팀 규칙 파일</a:t>
+            </a:r>
+            <a:pPr indent="0" marL="0">
+              <a:buNone/>
+            </a:pPr>
+            <a:r>
+              <a:rPr lang="en-US" sz="1400" b="1" dirty="0">
+                <a:solidFill>
+                  <a:schemeClr val="accent1"/>
+                </a:solidFill>
+                <a:latin typeface="Courier New" pitchFamily="34" charset="0"/>
+                <a:ea typeface="Courier New" pitchFamily="34" charset="-122"/>
+                <a:cs typeface="Courier New" pitchFamily="34" charset="-120"/>
+              </a:rPr>
+              <a:t>   .claude/learn-notes.md</a:t>
+            </a:r>
+            <a:endParaRPr lang="en-US" sz="1400" dirty="0"/>
+          </a:p>
+        </p:txBody>
+      </p:sp>
+      <p:sp>
+        <p:nvSpPr>
+          <p:cNvPr id="4" name="code"/>
           <p:cNvSpPr/>
           <p:nvPr/>
         </p:nvSpPr>
         <p:spPr>
           <a:xfrm>
-            <a:off x="548640" y="1417320"/>
-            <a:ext cx="3502152" cy="4663440"/>
+            <a:off x="548640" y="1920240"/>
+            <a:ext cx="5577840" cy="1920240"/>
           </a:xfrm>
           <a:prstGeom prst="roundRect">
             <a:avLst>
-              <a:gd name="adj" fmla="val 2611"/>
+              <a:gd name="adj" fmla="val 3810"/>
             </a:avLst>
           </a:prstGeom>
           <a:solidFill>
-            <a:schemeClr val="bg2"/>
+            <a:srgbClr val="0D1110"/>
           </a:solidFill>
-          <a:ln w="9525">
+          <a:ln w="12700">
             <a:solidFill>
-              <a:schemeClr val="bg2"/>
+              <a:srgbClr val="0D1110"/>
             </a:solidFill>
             <a:prstDash val="solid"/>
           </a:ln>
@@ -13226,14 +14547,573 @@
       </p:sp>
       <p:sp>
         <p:nvSpPr>
-          <p:cNvPr id="4" name="badge-LuCoins"/>
+          <p:cNvPr id="5" name="Text 3"/>
+          <p:cNvSpPr txBox="1"/>
+          <p:nvPr/>
+        </p:nvSpPr>
+        <p:spPr>
+          <a:xfrm>
+            <a:off x="822960" y="1920240"/>
+            <a:ext cx="5120640" cy="1920240"/>
+          </a:xfrm>
+          <a:prstGeom prst="rect">
+            <a:avLst/>
+          </a:prstGeom>
+          <a:noFill/>
+          <a:ln/>
+        </p:spPr>
+        <p:txBody>
+          <a:bodyPr wrap="square" lIns="0" tIns="0" rIns="0" bIns="0" rtlCol="0" anchor="ctr"/>
+          <a:lstStyle/>
+          <a:p>
+            <a:pPr indent="0" marL="0">
+              <a:buNone/>
+            </a:pPr>
+            <a:r>
+              <a:rPr lang="en-US" sz="1400" dirty="0">
+                <a:solidFill>
+                  <a:srgbClr val="D6DDD6"/>
+                </a:solidFill>
+              </a:rPr>
+              <a:t>## 규칙</a:t>
+            </a:r>
+            <a:endParaRPr lang="en-US" sz="1400" dirty="0"/>
+          </a:p>
+          <a:p>
+            <a:pPr indent="0" marL="0">
+              <a:buNone/>
+            </a:pPr>
+            <a:r>
+              <a:rPr lang="en-US" sz="1400" dirty="0">
+                <a:solidFill>
+                  <a:srgbClr val="D6DDD6"/>
+                </a:solidFill>
+              </a:rPr>
+              <a:t>- 바뀌지 않는 값은 const로 선언합니다</a:t>
+            </a:r>
+            <a:endParaRPr lang="en-US" sz="1400" dirty="0"/>
+          </a:p>
+          <a:p>
+            <a:pPr indent="0" marL="0">
+              <a:buNone/>
+            </a:pPr>
+            <a:r>
+              <a:rPr lang="en-US" sz="1400" dirty="0">
+                <a:solidFill>
+                  <a:srgbClr val="D6DDD6"/>
+                </a:solidFill>
+              </a:rPr>
+              <a:t>## 용어</a:t>
+            </a:r>
+            <a:endParaRPr lang="en-US" sz="1400" dirty="0"/>
+          </a:p>
+          <a:p>
+            <a:pPr indent="0" marL="0">
+              <a:buNone/>
+            </a:pPr>
+            <a:r>
+              <a:rPr lang="en-US" sz="1400" dirty="0">
+                <a:solidFill>
+                  <a:srgbClr val="D6DDD6"/>
+                </a:solidFill>
+              </a:rPr>
+              <a:t>- **불변 바인딩**: const로 묶은 이름</a:t>
+            </a:r>
+            <a:endParaRPr lang="en-US" sz="1400" dirty="0"/>
+          </a:p>
+          <a:p>
+            <a:pPr indent="0" marL="0">
+              <a:buNone/>
+            </a:pPr>
+            <a:r>
+              <a:rPr lang="en-US" sz="1400" dirty="0">
+                <a:solidFill>
+                  <a:srgbClr val="D6DDD6"/>
+                </a:solidFill>
+              </a:rPr>
+              <a:t>## 빼기</a:t>
+            </a:r>
+            <a:endParaRPr lang="en-US" sz="1400" dirty="0"/>
+          </a:p>
+          <a:p>
+            <a:pPr indent="0" marL="0">
+              <a:buNone/>
+            </a:pPr>
+            <a:r>
+              <a:rPr lang="en-US" sz="1400" dirty="0">
+                <a:solidFill>
+                  <a:srgbClr val="D6DDD6"/>
+                </a:solidFill>
+              </a:rPr>
+              <a:t>- legacy/**</a:t>
+            </a:r>
+            <a:endParaRPr lang="en-US" sz="1400" dirty="0"/>
+          </a:p>
+        </p:txBody>
+      </p:sp>
+      <p:sp>
+        <p:nvSpPr>
+          <p:cNvPr id="6" name="Text 4"/>
+          <p:cNvSpPr txBox="1"/>
+          <p:nvPr/>
+        </p:nvSpPr>
+        <p:spPr>
+          <a:xfrm>
+            <a:off x="548640" y="4023360"/>
+            <a:ext cx="5577840" cy="1463040"/>
+          </a:xfrm>
+          <a:prstGeom prst="rect">
+            <a:avLst/>
+          </a:prstGeom>
+          <a:noFill/>
+          <a:ln/>
+        </p:spPr>
+        <p:txBody>
+          <a:bodyPr wrap="square" lIns="0" tIns="0" rIns="0" bIns="0" rtlCol="0" anchor="t"/>
+          <a:lstStyle/>
+          <a:p>
+            <a:pPr marL="342900" indent="-342900">
+              <a:spcAft>
+                <a:spcPts val="800"/>
+              </a:spcAft>
+              <a:buSzPct val="100000"/>
+              <a:buChar char="•"/>
+            </a:pPr>
+            <a:r>
+              <a:rPr lang="en-US" sz="1400" dirty="0">
+                <a:solidFill>
+                  <a:schemeClr val="tx1"/>
+                </a:solidFill>
+              </a:rPr>
+              <a:t>저장소에 커밋하면 팀원 모두의 노트가 따릅니다</a:t>
+            </a:r>
+            <a:endParaRPr lang="en-US" sz="1400" dirty="0"/>
+          </a:p>
+          <a:p>
+            <a:pPr marL="342900" indent="-342900">
+              <a:spcAft>
+                <a:spcPts val="800"/>
+              </a:spcAft>
+              <a:buSzPct val="100000"/>
+              <a:buChar char="•"/>
+            </a:pPr>
+            <a:r>
+              <a:rPr lang="en-US" sz="1400" dirty="0">
+                <a:solidFill>
+                  <a:schemeClr val="tx1"/>
+                </a:solidFill>
+              </a:rPr>
+              <a:t>바뀐 코드와 닿는 규칙만 노트의 "왜"에 "팀 규칙: …" 한 줄</a:t>
+            </a:r>
+            <a:endParaRPr lang="en-US" sz="1400" dirty="0"/>
+          </a:p>
+          <a:p>
+            <a:pPr marL="342900" indent="-342900">
+              <a:spcAft>
+                <a:spcPts val="800"/>
+              </a:spcAft>
+              <a:buSzPct val="100000"/>
+              <a:buChar char="•"/>
+            </a:pPr>
+            <a:r>
+              <a:rPr lang="en-US" sz="1400" dirty="0">
+                <a:solidFill>
+                  <a:schemeClr val="tx1"/>
+                </a:solidFill>
+              </a:rPr>
+              <a:t>용어는 그 이름 그대로 모두의 개념 모음에 쌓입니다</a:t>
+            </a:r>
+            <a:endParaRPr lang="en-US" sz="1400" dirty="0"/>
+          </a:p>
+          <a:p>
+            <a:pPr marL="342900" indent="-342900">
+              <a:spcAft>
+                <a:spcPts val="800"/>
+              </a:spcAft>
+              <a:buSzPct val="100000"/>
+              <a:buChar char="•"/>
+            </a:pPr>
+            <a:r>
+              <a:rPr lang="en-US" sz="1400" dirty="0">
+                <a:solidFill>
+                  <a:schemeClr val="tx1"/>
+                </a:solidFill>
+              </a:rPr>
+              <a:t>## 빼기는 노트에 내용을 싣지 않을 경로입니다</a:t>
+            </a:r>
+            <a:endParaRPr lang="en-US" sz="1400" dirty="0"/>
+          </a:p>
+        </p:txBody>
+      </p:sp>
+      <p:sp>
+        <p:nvSpPr>
+          <p:cNvPr id="7" name="Text 5"/>
+          <p:cNvSpPr txBox="1"/>
+          <p:nvPr/>
+        </p:nvSpPr>
+        <p:spPr>
+          <a:xfrm>
+            <a:off x="548640" y="5596128"/>
+            <a:ext cx="5577840" cy="457200"/>
+          </a:xfrm>
+          <a:prstGeom prst="rect">
+            <a:avLst/>
+          </a:prstGeom>
+          <a:noFill/>
+          <a:ln/>
+        </p:spPr>
+        <p:txBody>
+          <a:bodyPr wrap="square" lIns="0" tIns="0" rIns="0" bIns="0" rtlCol="0" anchor="t"/>
+          <a:lstStyle/>
+          <a:p>
+            <a:pPr indent="0" marL="0">
+              <a:buNone/>
+            </a:pPr>
+            <a:r>
+              <a:rPr lang="en-US" sz="1200" dirty="0">
+                <a:solidFill>
+                  <a:srgbClr val="5A6B70"/>
+                </a:solidFill>
+              </a:rPr>
+              <a:t>규칙과 용어는 합쳐 앞 3,000자까지 모델에 보냅니다. 규칙 판정은 참고 의견이고, 코드 리뷰를 대신하지 않습니다.</a:t>
+            </a:r>
+            <a:endParaRPr lang="en-US" sz="1200" dirty="0"/>
+          </a:p>
+        </p:txBody>
+      </p:sp>
+      <p:sp>
+        <p:nvSpPr>
+          <p:cNvPr id="8" name="outline"/>
           <p:cNvSpPr/>
           <p:nvPr/>
         </p:nvSpPr>
         <p:spPr>
           <a:xfrm>
-            <a:off x="822960" y="1691640"/>
-            <a:ext cx="731520" cy="731520"/>
+            <a:off x="6446520" y="1371600"/>
+            <a:ext cx="5193792" cy="1417320"/>
+          </a:xfrm>
+          <a:prstGeom prst="roundRect">
+            <a:avLst>
+              <a:gd name="adj" fmla="val 6452"/>
+            </a:avLst>
+          </a:prstGeom>
+          <a:solidFill>
+            <a:schemeClr val="bg1"/>
+          </a:solidFill>
+          <a:ln w="12700">
+            <a:solidFill>
+              <a:srgbClr val="D9E3DF"/>
+            </a:solidFill>
+            <a:prstDash val="solid"/>
+          </a:ln>
+        </p:spPr>
+      </p:sp>
+      <p:sp>
+        <p:nvSpPr>
+          <p:cNvPr id="9" name="badge-LuLock"/>
+          <p:cNvSpPr/>
+          <p:nvPr/>
+        </p:nvSpPr>
+        <p:spPr>
+          <a:xfrm>
+            <a:off x="6675120" y="1600200"/>
+            <a:ext cx="640080" cy="640080"/>
+          </a:xfrm>
+          <a:prstGeom prst="ellipse">
+            <a:avLst/>
+          </a:prstGeom>
+          <a:solidFill>
+            <a:schemeClr val="accent5"/>
+          </a:solidFill>
+          <a:ln w="12700">
+            <a:solidFill>
+              <a:schemeClr val="accent5"/>
+            </a:solidFill>
+            <a:prstDash val="solid"/>
+          </a:ln>
+        </p:spPr>
+      </p:sp>
+      <p:pic>
+        <p:nvPicPr>
+          <p:cNvPr id="10" name="icon-LuLock" descr="LuLock">    </p:cNvPr>
+          <p:cNvPicPr>
+            <a:picLocks noChangeAspect="1"/>
+          </p:cNvPicPr>
+          <p:nvPr/>
+        </p:nvPicPr>
+        <p:blipFill>
+          <a:blip r:embed="rId1"/>
+          <a:stretch>
+            <a:fillRect/>
+          </a:stretch>
+        </p:blipFill>
+        <p:spPr>
+          <a:xfrm>
+            <a:off x="6828739" y="1753819"/>
+            <a:ext cx="332842" cy="332842"/>
+          </a:xfrm>
+          <a:prstGeom prst="rect">
+            <a:avLst/>
+          </a:prstGeom>
+        </p:spPr>
+      </p:pic>
+      <p:sp>
+        <p:nvSpPr>
+          <p:cNvPr id="11" name="Text 8"/>
+          <p:cNvSpPr txBox="1"/>
+          <p:nvPr/>
+        </p:nvSpPr>
+        <p:spPr>
+          <a:xfrm>
+            <a:off x="7498080" y="1536192"/>
+            <a:ext cx="3977640" cy="384048"/>
+          </a:xfrm>
+          <a:prstGeom prst="rect">
+            <a:avLst/>
+          </a:prstGeom>
+          <a:noFill/>
+          <a:ln/>
+        </p:spPr>
+        <p:txBody>
+          <a:bodyPr wrap="square" lIns="0" tIns="0" rIns="0" bIns="0" rtlCol="0" anchor="t"/>
+          <a:lstStyle/>
+          <a:p>
+            <a:pPr indent="0" marL="0">
+              <a:buNone/>
+            </a:pPr>
+            <a:r>
+              <a:rPr lang="en-US" sz="1700" b="1" dirty="0">
+                <a:solidFill>
+                  <a:schemeClr val="tx2"/>
+                </a:solidFill>
+              </a:rPr>
+              <a:t>저장소·조직에 한 번에 켜기</a:t>
+            </a:r>
+            <a:endParaRPr lang="en-US" sz="1700" dirty="0"/>
+          </a:p>
+        </p:txBody>
+      </p:sp>
+      <p:sp>
+        <p:nvSpPr>
+          <p:cNvPr id="12" name="Text 9"/>
+          <p:cNvSpPr txBox="1"/>
+          <p:nvPr/>
+        </p:nvSpPr>
+        <p:spPr>
+          <a:xfrm>
+            <a:off x="7498080" y="1938528"/>
+            <a:ext cx="3977640" cy="777240"/>
+          </a:xfrm>
+          <a:prstGeom prst="rect">
+            <a:avLst/>
+          </a:prstGeom>
+          <a:noFill/>
+          <a:ln/>
+        </p:spPr>
+        <p:txBody>
+          <a:bodyPr wrap="square" lIns="0" tIns="0" rIns="0" bIns="0" rtlCol="0" anchor="t"/>
+          <a:lstStyle/>
+          <a:p>
+            <a:pPr indent="0" marL="0">
+              <a:buNone/>
+            </a:pPr>
+            <a:r>
+              <a:rPr lang="en-US" sz="1300" dirty="0">
+                <a:solidFill>
+                  <a:schemeClr val="tx1"/>
+                </a:solidFill>
+              </a:rPr>
+              <a:t>저장소 .claude/settings.json의 enabledPlugins로 팀원에게 자동으로 켜고, 관리 설정의 pluginConfigs로 값을 잠급니다.</a:t>
+            </a:r>
+            <a:endParaRPr lang="en-US" sz="1300" dirty="0"/>
+          </a:p>
+        </p:txBody>
+      </p:sp>
+      <p:sp>
+        <p:nvSpPr>
+          <p:cNvPr id="13" name="outline"/>
+          <p:cNvSpPr/>
+          <p:nvPr/>
+        </p:nvSpPr>
+        <p:spPr>
+          <a:xfrm>
+            <a:off x="6446520" y="2971800"/>
+            <a:ext cx="5193792" cy="1417320"/>
+          </a:xfrm>
+          <a:prstGeom prst="roundRect">
+            <a:avLst>
+              <a:gd name="adj" fmla="val 6452"/>
+            </a:avLst>
+          </a:prstGeom>
+          <a:solidFill>
+            <a:schemeClr val="bg1"/>
+          </a:solidFill>
+          <a:ln w="12700">
+            <a:solidFill>
+              <a:srgbClr val="D9E3DF"/>
+            </a:solidFill>
+            <a:prstDash val="solid"/>
+          </a:ln>
+        </p:spPr>
+      </p:sp>
+      <p:sp>
+        <p:nvSpPr>
+          <p:cNvPr id="14" name="badge-LuShieldCheck"/>
+          <p:cNvSpPr/>
+          <p:nvPr/>
+        </p:nvSpPr>
+        <p:spPr>
+          <a:xfrm>
+            <a:off x="6675120" y="3200400"/>
+            <a:ext cx="640080" cy="640080"/>
+          </a:xfrm>
+          <a:prstGeom prst="ellipse">
+            <a:avLst/>
+          </a:prstGeom>
+          <a:solidFill>
+            <a:schemeClr val="accent1"/>
+          </a:solidFill>
+          <a:ln w="12700">
+            <a:solidFill>
+              <a:schemeClr val="accent1"/>
+            </a:solidFill>
+            <a:prstDash val="solid"/>
+          </a:ln>
+        </p:spPr>
+      </p:sp>
+      <p:pic>
+        <p:nvPicPr>
+          <p:cNvPr id="15" name="icon-LuShieldCheck" descr="LuShieldCheck">    </p:cNvPr>
+          <p:cNvPicPr>
+            <a:picLocks noChangeAspect="1"/>
+          </p:cNvPicPr>
+          <p:nvPr/>
+        </p:nvPicPr>
+        <p:blipFill>
+          <a:blip r:embed="rId2"/>
+          <a:stretch>
+            <a:fillRect/>
+          </a:stretch>
+        </p:blipFill>
+        <p:spPr>
+          <a:xfrm>
+            <a:off x="6828739" y="3354019"/>
+            <a:ext cx="332842" cy="332842"/>
+          </a:xfrm>
+          <a:prstGeom prst="rect">
+            <a:avLst/>
+          </a:prstGeom>
+        </p:spPr>
+      </p:pic>
+      <p:sp>
+        <p:nvSpPr>
+          <p:cNvPr id="16" name="Text 12"/>
+          <p:cNvSpPr txBox="1"/>
+          <p:nvPr/>
+        </p:nvSpPr>
+        <p:spPr>
+          <a:xfrm>
+            <a:off x="7498080" y="3136392"/>
+            <a:ext cx="3977640" cy="384048"/>
+          </a:xfrm>
+          <a:prstGeom prst="rect">
+            <a:avLst/>
+          </a:prstGeom>
+          <a:noFill/>
+          <a:ln/>
+        </p:spPr>
+        <p:txBody>
+          <a:bodyPr wrap="square" lIns="0" tIns="0" rIns="0" bIns="0" rtlCol="0" anchor="t"/>
+          <a:lstStyle/>
+          <a:p>
+            <a:pPr indent="0" marL="0">
+              <a:buNone/>
+            </a:pPr>
+            <a:r>
+              <a:rPr lang="en-US" sz="1700" b="1" dirty="0">
+                <a:solidFill>
+                  <a:schemeClr val="tx2"/>
+                </a:solidFill>
+              </a:rPr>
+              <a:t>비밀값은 싣지 않습니다</a:t>
+            </a:r>
+            <a:endParaRPr lang="en-US" sz="1700" dirty="0"/>
+          </a:p>
+        </p:txBody>
+      </p:sp>
+      <p:sp>
+        <p:nvSpPr>
+          <p:cNvPr id="17" name="Text 13"/>
+          <p:cNvSpPr txBox="1"/>
+          <p:nvPr/>
+        </p:nvSpPr>
+        <p:spPr>
+          <a:xfrm>
+            <a:off x="7498080" y="3538728"/>
+            <a:ext cx="3977640" cy="777240"/>
+          </a:xfrm>
+          <a:prstGeom prst="rect">
+            <a:avLst/>
+          </a:prstGeom>
+          <a:noFill/>
+          <a:ln/>
+        </p:spPr>
+        <p:txBody>
+          <a:bodyPr wrap="square" lIns="0" tIns="0" rIns="0" bIns="0" rtlCol="0" anchor="t"/>
+          <a:lstStyle/>
+          <a:p>
+            <a:pPr indent="0" marL="0">
+              <a:buNone/>
+            </a:pPr>
+            <a:r>
+              <a:rPr lang="en-US" sz="1300" dirty="0">
+                <a:solidFill>
+                  <a:schemeClr val="tx1"/>
+                </a:solidFill>
+              </a:rPr>
+              <a:t>.env · 키 · 잠금 파일은 내용 없이 이름만. 코드 속 흔한 키 형식은 «가림»으로 바꿔 보냅니다.</a:t>
+            </a:r>
+            <a:endParaRPr lang="en-US" sz="1300" dirty="0"/>
+          </a:p>
+        </p:txBody>
+      </p:sp>
+      <p:sp>
+        <p:nvSpPr>
+          <p:cNvPr id="18" name="outline"/>
+          <p:cNvSpPr/>
+          <p:nvPr/>
+        </p:nvSpPr>
+        <p:spPr>
+          <a:xfrm>
+            <a:off x="6446520" y="4572000"/>
+            <a:ext cx="5193792" cy="1417320"/>
+          </a:xfrm>
+          <a:prstGeom prst="roundRect">
+            <a:avLst>
+              <a:gd name="adj" fmla="val 6452"/>
+            </a:avLst>
+          </a:prstGeom>
+          <a:solidFill>
+            <a:schemeClr val="bg1"/>
+          </a:solidFill>
+          <a:ln w="12700">
+            <a:solidFill>
+              <a:srgbClr val="D9E3DF"/>
+            </a:solidFill>
+            <a:prstDash val="solid"/>
+          </a:ln>
+        </p:spPr>
+      </p:sp>
+      <p:sp>
+        <p:nvSpPr>
+          <p:cNvPr id="19" name="badge-LuClipboardList"/>
+          <p:cNvSpPr/>
+          <p:nvPr/>
+        </p:nvSpPr>
+        <p:spPr>
+          <a:xfrm>
+            <a:off x="6675120" y="4800600"/>
+            <a:ext cx="640080" cy="640080"/>
           </a:xfrm>
           <a:prstGeom prst="ellipse">
             <a:avLst/>
@@ -13251,401 +15131,7 @@
       </p:sp>
       <p:pic>
         <p:nvPicPr>
-          <p:cNvPr id="5" name="icon-LuCoins" descr="LuCoins">    </p:cNvPr>
-          <p:cNvPicPr>
-            <a:picLocks noChangeAspect="1"/>
-          </p:cNvPicPr>
-          <p:nvPr/>
-        </p:nvPicPr>
-        <p:blipFill>
-          <a:blip r:embed="rId1"/>
-          <a:stretch>
-            <a:fillRect/>
-          </a:stretch>
-        </p:blipFill>
-        <p:spPr>
-          <a:xfrm>
-            <a:off x="998525" y="1867205"/>
-            <a:ext cx="380390" cy="380390"/>
-          </a:xfrm>
-          <a:prstGeom prst="rect">
-            <a:avLst/>
-          </a:prstGeom>
-        </p:spPr>
-      </p:pic>
-      <p:sp>
-        <p:nvSpPr>
-          <p:cNvPr id="6" name="Text 3"/>
-          <p:cNvSpPr txBox="1"/>
-          <p:nvPr/>
-        </p:nvSpPr>
-        <p:spPr>
-          <a:xfrm>
-            <a:off x="822960" y="2606040"/>
-            <a:ext cx="3017520" cy="457200"/>
-          </a:xfrm>
-          <a:prstGeom prst="rect">
-            <a:avLst/>
-          </a:prstGeom>
-          <a:noFill/>
-          <a:ln/>
-        </p:spPr>
-        <p:txBody>
-          <a:bodyPr wrap="square" lIns="0" tIns="0" rIns="0" bIns="0" rtlCol="0" anchor="t"/>
-          <a:lstStyle/>
-          <a:p>
-            <a:pPr indent="0" marL="0">
-              <a:buNone/>
-            </a:pPr>
-            <a:r>
-              <a:rPr lang="en-US" sz="1900" b="1" dirty="0">
-                <a:solidFill>
-                  <a:schemeClr val="tx2"/>
-                </a:solidFill>
-              </a:rPr>
-              <a:t>비용</a:t>
-            </a:r>
-            <a:endParaRPr lang="en-US" sz="1900" dirty="0"/>
-          </a:p>
-        </p:txBody>
-      </p:sp>
-      <p:sp>
-        <p:nvSpPr>
-          <p:cNvPr id="7" name="Text 4"/>
-          <p:cNvSpPr txBox="1"/>
-          <p:nvPr/>
-        </p:nvSpPr>
-        <p:spPr>
-          <a:xfrm>
-            <a:off x="822960" y="3154680"/>
-            <a:ext cx="3017520" cy="2743200"/>
-          </a:xfrm>
-          <a:prstGeom prst="rect">
-            <a:avLst/>
-          </a:prstGeom>
-          <a:noFill/>
-          <a:ln/>
-        </p:spPr>
-        <p:txBody>
-          <a:bodyPr wrap="square" lIns="0" tIns="0" rIns="0" bIns="0" rtlCol="0" anchor="t"/>
-          <a:lstStyle/>
-          <a:p>
-            <a:pPr marL="342900" indent="-342900">
-              <a:spcAft>
-                <a:spcPts val="800"/>
-              </a:spcAft>
-              <a:buSzPct val="100000"/>
-              <a:buChar char="•"/>
-            </a:pPr>
-            <a:r>
-              <a:rPr lang="en-US" sz="1350" dirty="0">
-                <a:solidFill>
-                  <a:schemeClr val="tx1"/>
-                </a:solidFill>
-              </a:rPr>
-              <a:t>파일을 바꾼 턴마다 모델 호출 1번 (기본 haiku)</a:t>
-            </a:r>
-            <a:endParaRPr lang="en-US" sz="1350" dirty="0"/>
-          </a:p>
-          <a:p>
-            <a:pPr marL="342900" indent="-342900">
-              <a:spcAft>
-                <a:spcPts val="800"/>
-              </a:spcAft>
-              <a:buSzPct val="100000"/>
-              <a:buChar char="•"/>
-            </a:pPr>
-            <a:r>
-              <a:rPr lang="en-US" sz="1350" dirty="0">
-                <a:solidFill>
-                  <a:schemeClr val="tx1"/>
-                </a:solidFill>
-              </a:rPr>
-              <a:t>퀴즈 · 채점 · 질문 · 정리는 할 때마다 1번</a:t>
-            </a:r>
-            <a:endParaRPr lang="en-US" sz="1350" dirty="0"/>
-          </a:p>
-          <a:p>
-            <a:pPr marL="342900" indent="-342900">
-              <a:spcAft>
-                <a:spcPts val="800"/>
-              </a:spcAft>
-              <a:buSzPct val="100000"/>
-              <a:buChar char="•"/>
-            </a:pPr>
-            <a:r>
-              <a:rPr lang="en-US" sz="1350" dirty="0">
-                <a:solidFill>
-                  <a:schemeClr val="tx1"/>
-                </a:solidFill>
-              </a:rPr>
-              <a:t>통계 · Anki · 개념 모음은 0번</a:t>
-            </a:r>
-            <a:endParaRPr lang="en-US" sz="1350" dirty="0"/>
-          </a:p>
-          <a:p>
-            <a:pPr marL="342900" indent="-342900">
-              <a:spcAft>
-                <a:spcPts val="800"/>
-              </a:spcAft>
-              <a:buSzPct val="100000"/>
-              <a:buChar char="•"/>
-            </a:pPr>
-            <a:r>
-              <a:rPr lang="en-US" sz="1350" dirty="0">
-                <a:solidFill>
-                  <a:schemeClr val="tx1"/>
-                </a:solidFill>
-              </a:rPr>
-              <a:t>노트 자동 작성을 끄면 0</a:t>
-            </a:r>
-            <a:endParaRPr lang="en-US" sz="1350" dirty="0"/>
-          </a:p>
-        </p:txBody>
-      </p:sp>
-      <p:sp>
-        <p:nvSpPr>
-          <p:cNvPr id="8" name="card"/>
-          <p:cNvSpPr/>
-          <p:nvPr/>
-        </p:nvSpPr>
-        <p:spPr>
-          <a:xfrm>
-            <a:off x="4343400" y="1417320"/>
-            <a:ext cx="3502152" cy="4663440"/>
-          </a:xfrm>
-          <a:prstGeom prst="roundRect">
-            <a:avLst>
-              <a:gd name="adj" fmla="val 2611"/>
-            </a:avLst>
-          </a:prstGeom>
-          <a:solidFill>
-            <a:schemeClr val="bg2"/>
-          </a:solidFill>
-          <a:ln w="9525">
-            <a:solidFill>
-              <a:schemeClr val="bg2"/>
-            </a:solidFill>
-            <a:prstDash val="solid"/>
-          </a:ln>
-        </p:spPr>
-      </p:sp>
-      <p:sp>
-        <p:nvSpPr>
-          <p:cNvPr id="9" name="badge-LuShieldCheck"/>
-          <p:cNvSpPr/>
-          <p:nvPr/>
-        </p:nvSpPr>
-        <p:spPr>
-          <a:xfrm>
-            <a:off x="4617720" y="1691640"/>
-            <a:ext cx="731520" cy="731520"/>
-          </a:xfrm>
-          <a:prstGeom prst="ellipse">
-            <a:avLst/>
-          </a:prstGeom>
-          <a:solidFill>
-            <a:schemeClr val="accent1"/>
-          </a:solidFill>
-          <a:ln w="12700">
-            <a:solidFill>
-              <a:schemeClr val="accent1"/>
-            </a:solidFill>
-            <a:prstDash val="solid"/>
-          </a:ln>
-        </p:spPr>
-      </p:sp>
-      <p:pic>
-        <p:nvPicPr>
-          <p:cNvPr id="10" name="icon-LuShieldCheck" descr="LuShieldCheck">    </p:cNvPr>
-          <p:cNvPicPr>
-            <a:picLocks noChangeAspect="1"/>
-          </p:cNvPicPr>
-          <p:nvPr/>
-        </p:nvPicPr>
-        <p:blipFill>
-          <a:blip r:embed="rId2"/>
-          <a:stretch>
-            <a:fillRect/>
-          </a:stretch>
-        </p:blipFill>
-        <p:spPr>
-          <a:xfrm>
-            <a:off x="4793285" y="1867205"/>
-            <a:ext cx="380390" cy="380390"/>
-          </a:xfrm>
-          <a:prstGeom prst="rect">
-            <a:avLst/>
-          </a:prstGeom>
-        </p:spPr>
-      </p:pic>
-      <p:sp>
-        <p:nvSpPr>
-          <p:cNvPr id="11" name="Text 7"/>
-          <p:cNvSpPr txBox="1"/>
-          <p:nvPr/>
-        </p:nvSpPr>
-        <p:spPr>
-          <a:xfrm>
-            <a:off x="4617720" y="2606040"/>
-            <a:ext cx="3017520" cy="457200"/>
-          </a:xfrm>
-          <a:prstGeom prst="rect">
-            <a:avLst/>
-          </a:prstGeom>
-          <a:noFill/>
-          <a:ln/>
-        </p:spPr>
-        <p:txBody>
-          <a:bodyPr wrap="square" lIns="0" tIns="0" rIns="0" bIns="0" rtlCol="0" anchor="t"/>
-          <a:lstStyle/>
-          <a:p>
-            <a:pPr indent="0" marL="0">
-              <a:buNone/>
-            </a:pPr>
-            <a:r>
-              <a:rPr lang="en-US" sz="1900" b="1" dirty="0">
-                <a:solidFill>
-                  <a:schemeClr val="tx2"/>
-                </a:solidFill>
-              </a:rPr>
-              <a:t>개인정보</a:t>
-            </a:r>
-            <a:endParaRPr lang="en-US" sz="1900" dirty="0"/>
-          </a:p>
-        </p:txBody>
-      </p:sp>
-      <p:sp>
-        <p:nvSpPr>
-          <p:cNvPr id="12" name="Text 8"/>
-          <p:cNvSpPr txBox="1"/>
-          <p:nvPr/>
-        </p:nvSpPr>
-        <p:spPr>
-          <a:xfrm>
-            <a:off x="4617720" y="3154680"/>
-            <a:ext cx="3017520" cy="2743200"/>
-          </a:xfrm>
-          <a:prstGeom prst="rect">
-            <a:avLst/>
-          </a:prstGeom>
-          <a:noFill/>
-          <a:ln/>
-        </p:spPr>
-        <p:txBody>
-          <a:bodyPr wrap="square" lIns="0" tIns="0" rIns="0" bIns="0" rtlCol="0" anchor="t"/>
-          <a:lstStyle/>
-          <a:p>
-            <a:pPr marL="342900" indent="-342900">
-              <a:spcAft>
-                <a:spcPts val="800"/>
-              </a:spcAft>
-              <a:buSzPct val="100000"/>
-              <a:buChar char="•"/>
-            </a:pPr>
-            <a:r>
-              <a:rPr lang="en-US" sz="1350" dirty="0">
-                <a:solidFill>
-                  <a:schemeClr val="tx1"/>
-                </a:solidFill>
-              </a:rPr>
-              <a:t>바뀐 코드와 요청이 지금 계정의 모델 호출에 실림</a:t>
-            </a:r>
-            <a:endParaRPr lang="en-US" sz="1350" dirty="0"/>
-          </a:p>
-          <a:p>
-            <a:pPr marL="342900" indent="-342900">
-              <a:spcAft>
-                <a:spcPts val="800"/>
-              </a:spcAft>
-              <a:buSzPct val="100000"/>
-              <a:buChar char="•"/>
-            </a:pPr>
-            <a:r>
-              <a:rPr lang="en-US" sz="1350" dirty="0">
-                <a:solidFill>
-                  <a:schemeClr val="tx1"/>
-                </a:solidFill>
-              </a:rPr>
-              <a:t>노트 · 일지 · 기록은 내 컴퓨터에만</a:t>
-            </a:r>
-            <a:endParaRPr lang="en-US" sz="1350" dirty="0"/>
-          </a:p>
-          <a:p>
-            <a:pPr marL="342900" indent="-342900">
-              <a:spcAft>
-                <a:spcPts val="800"/>
-              </a:spcAft>
-              <a:buSzPct val="100000"/>
-              <a:buChar char="•"/>
-            </a:pPr>
-            <a:r>
-              <a:rPr lang="en-US" sz="1350" dirty="0">
-                <a:solidFill>
-                  <a:schemeClr val="tx1"/>
-                </a:solidFill>
-              </a:rPr>
-              <a:t>비밀값 파일을 다루면 autoNote 끄기</a:t>
-            </a:r>
-            <a:endParaRPr lang="en-US" sz="1350" dirty="0"/>
-          </a:p>
-        </p:txBody>
-      </p:sp>
-      <p:sp>
-        <p:nvSpPr>
-          <p:cNvPr id="13" name="card"/>
-          <p:cNvSpPr/>
-          <p:nvPr/>
-        </p:nvSpPr>
-        <p:spPr>
-          <a:xfrm>
-            <a:off x="8138160" y="1417320"/>
-            <a:ext cx="3502152" cy="4663440"/>
-          </a:xfrm>
-          <a:prstGeom prst="roundRect">
-            <a:avLst>
-              <a:gd name="adj" fmla="val 2611"/>
-            </a:avLst>
-          </a:prstGeom>
-          <a:solidFill>
-            <a:schemeClr val="bg2"/>
-          </a:solidFill>
-          <a:ln w="9525">
-            <a:solidFill>
-              <a:schemeClr val="bg2"/>
-            </a:solidFill>
-            <a:prstDash val="solid"/>
-          </a:ln>
-        </p:spPr>
-      </p:sp>
-      <p:sp>
-        <p:nvSpPr>
-          <p:cNvPr id="14" name="badge-LuWrench"/>
-          <p:cNvSpPr/>
-          <p:nvPr/>
-        </p:nvSpPr>
-        <p:spPr>
-          <a:xfrm>
-            <a:off x="8412480" y="1691640"/>
-            <a:ext cx="731520" cy="731520"/>
-          </a:xfrm>
-          <a:prstGeom prst="ellipse">
-            <a:avLst/>
-          </a:prstGeom>
-          <a:solidFill>
-            <a:schemeClr val="accent4"/>
-          </a:solidFill>
-          <a:ln w="12700">
-            <a:solidFill>
-              <a:schemeClr val="accent4"/>
-            </a:solidFill>
-            <a:prstDash val="solid"/>
-          </a:ln>
-        </p:spPr>
-      </p:sp>
-      <p:pic>
-        <p:nvPicPr>
-          <p:cNvPr id="15" name="icon-LuWrench" descr="LuWrench">    </p:cNvPr>
+          <p:cNvPr id="20" name="icon-LuClipboardList" descr="LuClipboardList">    </p:cNvPr>
           <p:cNvPicPr>
             <a:picLocks noChangeAspect="1"/>
           </p:cNvPicPr>
@@ -13659,8 +15145,8 @@
         </p:blipFill>
         <p:spPr>
           <a:xfrm>
-            <a:off x="8588045" y="1867205"/>
-            <a:ext cx="380390" cy="380390"/>
+            <a:off x="6828739" y="4954219"/>
+            <a:ext cx="332842" cy="332842"/>
           </a:xfrm>
           <a:prstGeom prst="rect">
             <a:avLst/>
@@ -13669,14 +15155,14 @@
       </p:pic>
       <p:sp>
         <p:nvSpPr>
-          <p:cNvPr id="16" name="Text 11"/>
-          <p:cNvSpPr txBox="1"/>
-          <p:nvPr/>
-        </p:nvSpPr>
-        <p:spPr>
-          <a:xfrm>
-            <a:off x="8412480" y="2606040"/>
-            <a:ext cx="3017520" cy="457200"/>
+          <p:cNvPr id="21" name="Text 16"/>
+          <p:cNvSpPr txBox="1"/>
+          <p:nvPr/>
+        </p:nvSpPr>
+        <p:spPr>
+          <a:xfrm>
+            <a:off x="7498080" y="4736592"/>
+            <a:ext cx="3977640" cy="384048"/>
           </a:xfrm>
           <a:prstGeom prst="rect">
             <a:avLst/>
@@ -13692,27 +15178,27 @@
               <a:buNone/>
             </a:pPr>
             <a:r>
-              <a:rPr lang="en-US" sz="1900" b="1" dirty="0">
+              <a:rPr lang="en-US" sz="1700" b="1" dirty="0">
                 <a:solidFill>
                   <a:schemeClr val="tx2"/>
                 </a:solidFill>
               </a:rPr>
-              <a:t>노트가 안 생기면</a:t>
-            </a:r>
-            <a:endParaRPr lang="en-US" sz="1900" dirty="0"/>
-          </a:p>
-        </p:txBody>
-      </p:sp>
-      <p:sp>
-        <p:nvSpPr>
-          <p:cNvPr id="17" name="Text 12"/>
-          <p:cNvSpPr txBox="1"/>
-          <p:nvPr/>
-        </p:nvSpPr>
-        <p:spPr>
-          <a:xfrm>
-            <a:off x="8412480" y="3154680"/>
-            <a:ext cx="3017520" cy="2743200"/>
+              <a:t>멘토에게는 /learn 보고서</a:t>
+            </a:r>
+            <a:endParaRPr lang="en-US" sz="1700" dirty="0"/>
+          </a:p>
+        </p:txBody>
+      </p:sp>
+      <p:sp>
+        <p:nvSpPr>
+          <p:cNvPr id="22" name="Text 17"/>
+          <p:cNvSpPr txBox="1"/>
+          <p:nvPr/>
+        </p:nvSpPr>
+        <p:spPr>
+          <a:xfrm>
+            <a:off x="7498080" y="5138928"/>
+            <a:ext cx="3977640" cy="777240"/>
           </a:xfrm>
           <a:prstGeom prst="rect">
             <a:avLst/>
@@ -13724,76 +15210,18 @@
           <a:bodyPr wrap="square" lIns="0" tIns="0" rIns="0" bIns="0" rtlCol="0" anchor="t"/>
           <a:lstStyle/>
           <a:p>
-            <a:pPr marL="342900" indent="-342900">
-              <a:spcAft>
-                <a:spcPts val="800"/>
-              </a:spcAft>
-              <a:buSzPct val="100000"/>
-              <a:buChar char="•"/>
-            </a:pPr>
-            <a:r>
-              <a:rPr lang="en-US" sz="1350" dirty="0">
+            <a:pPr indent="0" marL="0">
+              <a:buNone/>
+            </a:pPr>
+            <a:r>
+              <a:rPr lang="en-US" sz="1300" dirty="0">
                 <a:solidFill>
                   <a:schemeClr val="tx1"/>
                 </a:solidFill>
               </a:rPr>
-              <a:t>그 턴에 파일이 바뀌었나요?</a:t>
-            </a:r>
-            <a:endParaRPr lang="en-US" sz="1350" dirty="0"/>
-          </a:p>
-          <a:p>
-            <a:pPr marL="342900" indent="-342900">
-              <a:spcAft>
-                <a:spcPts val="800"/>
-              </a:spcAft>
-              <a:buSzPct val="100000"/>
-              <a:buChar char="•"/>
-            </a:pPr>
-            <a:r>
-              <a:rPr lang="en-US" sz="1350" dirty="0">
-                <a:solidFill>
-                  <a:schemeClr val="tx1"/>
-                </a:solidFill>
-              </a:rPr>
-              <a:t>패널을 열었나요? (/learn, 전체 화면)</a:t>
-            </a:r>
-            <a:endParaRPr lang="en-US" sz="1350" dirty="0"/>
-          </a:p>
-          <a:p>
-            <a:pPr marL="342900" indent="-342900">
-              <a:spcAft>
-                <a:spcPts val="800"/>
-              </a:spcAft>
-              <a:buSzPct val="100000"/>
-              <a:buChar char="•"/>
-            </a:pPr>
-            <a:r>
-              <a:rPr lang="en-US" sz="1350" dirty="0">
-                <a:solidFill>
-                  <a:schemeClr val="tx1"/>
-                </a:solidFill>
-              </a:rPr>
-              <a:t>단축키는 ctrl+x tab 뒤에</a:t>
-            </a:r>
-            <a:endParaRPr lang="en-US" sz="1350" dirty="0"/>
-          </a:p>
-          <a:p>
-            <a:pPr marL="342900" indent="-342900">
-              <a:spcAft>
-                <a:spcPts val="800"/>
-              </a:spcAft>
-              <a:buSzPct val="100000"/>
-              <a:buChar char="•"/>
-            </a:pPr>
-            <a:r>
-              <a:rPr lang="en-US" sz="1350" dirty="0">
-                <a:solidFill>
-                  <a:schemeClr val="tx1"/>
-                </a:solidFill>
-              </a:rPr>
-              <a:t>빨간 글씨는 이유와 할 일을 알려 줍니다</a:t>
-            </a:r>
-            <a:endParaRPr lang="en-US" sz="1350" dirty="0"/>
+              <a:t>코드 · 요청 · 파일 이름 없는 학습 보고서를 클립보드로. 1:1과 회고에 붙입니다.</a:t>
+            </a:r>
+            <a:endParaRPr lang="en-US" sz="1300" dirty="0"/>
           </a:p>
         </p:txBody>
       </p:sp>
@@ -13870,6 +15298,732 @@
       <p:sp>
         <p:nvSpPr>
           <p:cNvPr id="2" name="Text 0"/>
+          <p:cNvSpPr/>
+          <p:nvPr>
+            <p:ph idx="100" type="title" hasCustomPrompt="1"/>
+          </p:nvPr>
+        </p:nvSpPr>
+        <p:spPr>
+          <a:xfrm>
+            <a:off x="548640" y="365760"/>
+            <a:ext cx="11064240" cy="731520"/>
+          </a:xfrm>
+          <a:prstGeom prst="rect">
+            <a:avLst/>
+          </a:prstGeom>
+          <a:noFill/>
+          <a:ln/>
+        </p:spPr>
+        <p:txBody>
+          <a:bodyPr wrap="square" lIns="0" tIns="0" rIns="0" bIns="0" rtlCol="0" anchor="ctr"/>
+          <a:lstStyle/>
+          <a:p>
+            <a:pPr algn="l" indent="0" marL="0">
+              <a:buNone/>
+            </a:pPr>
+            <a:r>
+              <a:rPr lang="en-US" sz="3000" b="1" dirty="0">
+                <a:solidFill>
+                  <a:schemeClr val="tx2"/>
+                </a:solidFill>
+              </a:rPr>
+              <a:t>비용 · 개인정보 · 문제 해결</a:t>
+            </a:r>
+            <a:endParaRPr lang="en-US" sz="3000" dirty="0"/>
+          </a:p>
+        </p:txBody>
+      </p:sp>
+      <p:sp>
+        <p:nvSpPr>
+          <p:cNvPr id="3" name="card"/>
+          <p:cNvSpPr/>
+          <p:nvPr/>
+        </p:nvSpPr>
+        <p:spPr>
+          <a:xfrm>
+            <a:off x="548640" y="1417320"/>
+            <a:ext cx="3502152" cy="4663440"/>
+          </a:xfrm>
+          <a:prstGeom prst="roundRect">
+            <a:avLst>
+              <a:gd name="adj" fmla="val 2611"/>
+            </a:avLst>
+          </a:prstGeom>
+          <a:solidFill>
+            <a:schemeClr val="bg2"/>
+          </a:solidFill>
+          <a:ln w="9525">
+            <a:solidFill>
+              <a:schemeClr val="bg2"/>
+            </a:solidFill>
+            <a:prstDash val="solid"/>
+          </a:ln>
+        </p:spPr>
+      </p:sp>
+      <p:sp>
+        <p:nvSpPr>
+          <p:cNvPr id="4" name="badge-LuCoins"/>
+          <p:cNvSpPr/>
+          <p:nvPr/>
+        </p:nvSpPr>
+        <p:spPr>
+          <a:xfrm>
+            <a:off x="822960" y="1691640"/>
+            <a:ext cx="731520" cy="731520"/>
+          </a:xfrm>
+          <a:prstGeom prst="ellipse">
+            <a:avLst/>
+          </a:prstGeom>
+          <a:solidFill>
+            <a:schemeClr val="accent2"/>
+          </a:solidFill>
+          <a:ln w="12700">
+            <a:solidFill>
+              <a:schemeClr val="accent2"/>
+            </a:solidFill>
+            <a:prstDash val="solid"/>
+          </a:ln>
+        </p:spPr>
+      </p:sp>
+      <p:pic>
+        <p:nvPicPr>
+          <p:cNvPr id="5" name="icon-LuCoins" descr="LuCoins">    </p:cNvPr>
+          <p:cNvPicPr>
+            <a:picLocks noChangeAspect="1"/>
+          </p:cNvPicPr>
+          <p:nvPr/>
+        </p:nvPicPr>
+        <p:blipFill>
+          <a:blip r:embed="rId1"/>
+          <a:stretch>
+            <a:fillRect/>
+          </a:stretch>
+        </p:blipFill>
+        <p:spPr>
+          <a:xfrm>
+            <a:off x="998525" y="1867205"/>
+            <a:ext cx="380390" cy="380390"/>
+          </a:xfrm>
+          <a:prstGeom prst="rect">
+            <a:avLst/>
+          </a:prstGeom>
+        </p:spPr>
+      </p:pic>
+      <p:sp>
+        <p:nvSpPr>
+          <p:cNvPr id="6" name="Text 3"/>
+          <p:cNvSpPr txBox="1"/>
+          <p:nvPr/>
+        </p:nvSpPr>
+        <p:spPr>
+          <a:xfrm>
+            <a:off x="822960" y="2606040"/>
+            <a:ext cx="3017520" cy="457200"/>
+          </a:xfrm>
+          <a:prstGeom prst="rect">
+            <a:avLst/>
+          </a:prstGeom>
+          <a:noFill/>
+          <a:ln/>
+        </p:spPr>
+        <p:txBody>
+          <a:bodyPr wrap="square" lIns="0" tIns="0" rIns="0" bIns="0" rtlCol="0" anchor="t"/>
+          <a:lstStyle/>
+          <a:p>
+            <a:pPr indent="0" marL="0">
+              <a:buNone/>
+            </a:pPr>
+            <a:r>
+              <a:rPr lang="en-US" sz="1900" b="1" dirty="0">
+                <a:solidFill>
+                  <a:schemeClr val="tx2"/>
+                </a:solidFill>
+              </a:rPr>
+              <a:t>비용</a:t>
+            </a:r>
+            <a:endParaRPr lang="en-US" sz="1900" dirty="0"/>
+          </a:p>
+        </p:txBody>
+      </p:sp>
+      <p:sp>
+        <p:nvSpPr>
+          <p:cNvPr id="7" name="Text 4"/>
+          <p:cNvSpPr txBox="1"/>
+          <p:nvPr/>
+        </p:nvSpPr>
+        <p:spPr>
+          <a:xfrm>
+            <a:off x="822960" y="3154680"/>
+            <a:ext cx="3017520" cy="2743200"/>
+          </a:xfrm>
+          <a:prstGeom prst="rect">
+            <a:avLst/>
+          </a:prstGeom>
+          <a:noFill/>
+          <a:ln/>
+        </p:spPr>
+        <p:txBody>
+          <a:bodyPr wrap="square" lIns="0" tIns="0" rIns="0" bIns="0" rtlCol="0" anchor="t"/>
+          <a:lstStyle/>
+          <a:p>
+            <a:pPr marL="342900" indent="-342900">
+              <a:spcAft>
+                <a:spcPts val="800"/>
+              </a:spcAft>
+              <a:buSzPct val="100000"/>
+              <a:buChar char="•"/>
+            </a:pPr>
+            <a:r>
+              <a:rPr lang="en-US" sz="1350" dirty="0">
+                <a:solidFill>
+                  <a:schemeClr val="tx1"/>
+                </a:solidFill>
+              </a:rPr>
+              <a:t>파일을 바꾼 턴마다 모델 호출 1번 (기본 haiku)</a:t>
+            </a:r>
+            <a:endParaRPr lang="en-US" sz="1350" dirty="0"/>
+          </a:p>
+          <a:p>
+            <a:pPr marL="342900" indent="-342900">
+              <a:spcAft>
+                <a:spcPts val="800"/>
+              </a:spcAft>
+              <a:buSzPct val="100000"/>
+              <a:buChar char="•"/>
+            </a:pPr>
+            <a:r>
+              <a:rPr lang="en-US" sz="1350" dirty="0">
+                <a:solidFill>
+                  <a:schemeClr val="tx1"/>
+                </a:solidFill>
+              </a:rPr>
+              <a:t>퀴즈 · 채점 · 질문 · 정리는 할 때마다 1번</a:t>
+            </a:r>
+            <a:endParaRPr lang="en-US" sz="1350" dirty="0"/>
+          </a:p>
+          <a:p>
+            <a:pPr marL="342900" indent="-342900">
+              <a:spcAft>
+                <a:spcPts val="800"/>
+              </a:spcAft>
+              <a:buSzPct val="100000"/>
+              <a:buChar char="•"/>
+            </a:pPr>
+            <a:r>
+              <a:rPr lang="en-US" sz="1350" dirty="0">
+                <a:solidFill>
+                  <a:schemeClr val="tx1"/>
+                </a:solidFill>
+              </a:rPr>
+              <a:t>기록 · 보고서 · 힌트는 0번</a:t>
+            </a:r>
+            <a:endParaRPr lang="en-US" sz="1350" dirty="0"/>
+          </a:p>
+          <a:p>
+            <a:pPr marL="342900" indent="-342900">
+              <a:spcAft>
+                <a:spcPts val="800"/>
+              </a:spcAft>
+              <a:buSzPct val="100000"/>
+              <a:buChar char="•"/>
+            </a:pPr>
+            <a:r>
+              <a:rPr lang="en-US" sz="1350" dirty="0">
+                <a:solidFill>
+                  <a:schemeClr val="tx1"/>
+                </a:solidFill>
+              </a:rPr>
+              <a:t>하루 한도는 dailyAutoNotes, 사용량은 /learn 기록</a:t>
+            </a:r>
+            <a:endParaRPr lang="en-US" sz="1350" dirty="0"/>
+          </a:p>
+        </p:txBody>
+      </p:sp>
+      <p:sp>
+        <p:nvSpPr>
+          <p:cNvPr id="8" name="card"/>
+          <p:cNvSpPr/>
+          <p:nvPr/>
+        </p:nvSpPr>
+        <p:spPr>
+          <a:xfrm>
+            <a:off x="4343400" y="1417320"/>
+            <a:ext cx="3502152" cy="4663440"/>
+          </a:xfrm>
+          <a:prstGeom prst="roundRect">
+            <a:avLst>
+              <a:gd name="adj" fmla="val 2611"/>
+            </a:avLst>
+          </a:prstGeom>
+          <a:solidFill>
+            <a:schemeClr val="bg2"/>
+          </a:solidFill>
+          <a:ln w="9525">
+            <a:solidFill>
+              <a:schemeClr val="bg2"/>
+            </a:solidFill>
+            <a:prstDash val="solid"/>
+          </a:ln>
+        </p:spPr>
+      </p:sp>
+      <p:sp>
+        <p:nvSpPr>
+          <p:cNvPr id="9" name="badge-LuShieldCheck"/>
+          <p:cNvSpPr/>
+          <p:nvPr/>
+        </p:nvSpPr>
+        <p:spPr>
+          <a:xfrm>
+            <a:off x="4617720" y="1691640"/>
+            <a:ext cx="731520" cy="731520"/>
+          </a:xfrm>
+          <a:prstGeom prst="ellipse">
+            <a:avLst/>
+          </a:prstGeom>
+          <a:solidFill>
+            <a:schemeClr val="accent1"/>
+          </a:solidFill>
+          <a:ln w="12700">
+            <a:solidFill>
+              <a:schemeClr val="accent1"/>
+            </a:solidFill>
+            <a:prstDash val="solid"/>
+          </a:ln>
+        </p:spPr>
+      </p:sp>
+      <p:pic>
+        <p:nvPicPr>
+          <p:cNvPr id="10" name="icon-LuShieldCheck" descr="LuShieldCheck">    </p:cNvPr>
+          <p:cNvPicPr>
+            <a:picLocks noChangeAspect="1"/>
+          </p:cNvPicPr>
+          <p:nvPr/>
+        </p:nvPicPr>
+        <p:blipFill>
+          <a:blip r:embed="rId2"/>
+          <a:stretch>
+            <a:fillRect/>
+          </a:stretch>
+        </p:blipFill>
+        <p:spPr>
+          <a:xfrm>
+            <a:off x="4793285" y="1867205"/>
+            <a:ext cx="380390" cy="380390"/>
+          </a:xfrm>
+          <a:prstGeom prst="rect">
+            <a:avLst/>
+          </a:prstGeom>
+        </p:spPr>
+      </p:pic>
+      <p:sp>
+        <p:nvSpPr>
+          <p:cNvPr id="11" name="Text 7"/>
+          <p:cNvSpPr txBox="1"/>
+          <p:nvPr/>
+        </p:nvSpPr>
+        <p:spPr>
+          <a:xfrm>
+            <a:off x="4617720" y="2606040"/>
+            <a:ext cx="3017520" cy="457200"/>
+          </a:xfrm>
+          <a:prstGeom prst="rect">
+            <a:avLst/>
+          </a:prstGeom>
+          <a:noFill/>
+          <a:ln/>
+        </p:spPr>
+        <p:txBody>
+          <a:bodyPr wrap="square" lIns="0" tIns="0" rIns="0" bIns="0" rtlCol="0" anchor="t"/>
+          <a:lstStyle/>
+          <a:p>
+            <a:pPr indent="0" marL="0">
+              <a:buNone/>
+            </a:pPr>
+            <a:r>
+              <a:rPr lang="en-US" sz="1900" b="1" dirty="0">
+                <a:solidFill>
+                  <a:schemeClr val="tx2"/>
+                </a:solidFill>
+              </a:rPr>
+              <a:t>개인정보</a:t>
+            </a:r>
+            <a:endParaRPr lang="en-US" sz="1900" dirty="0"/>
+          </a:p>
+        </p:txBody>
+      </p:sp>
+      <p:sp>
+        <p:nvSpPr>
+          <p:cNvPr id="12" name="Text 8"/>
+          <p:cNvSpPr txBox="1"/>
+          <p:nvPr/>
+        </p:nvSpPr>
+        <p:spPr>
+          <a:xfrm>
+            <a:off x="4617720" y="3154680"/>
+            <a:ext cx="3017520" cy="2743200"/>
+          </a:xfrm>
+          <a:prstGeom prst="rect">
+            <a:avLst/>
+          </a:prstGeom>
+          <a:noFill/>
+          <a:ln/>
+        </p:spPr>
+        <p:txBody>
+          <a:bodyPr wrap="square" lIns="0" tIns="0" rIns="0" bIns="0" rtlCol="0" anchor="t"/>
+          <a:lstStyle/>
+          <a:p>
+            <a:pPr marL="342900" indent="-342900">
+              <a:spcAft>
+                <a:spcPts val="800"/>
+              </a:spcAft>
+              <a:buSzPct val="100000"/>
+              <a:buChar char="•"/>
+            </a:pPr>
+            <a:r>
+              <a:rPr lang="en-US" sz="1350" dirty="0">
+                <a:solidFill>
+                  <a:schemeClr val="tx1"/>
+                </a:solidFill>
+              </a:rPr>
+              <a:t>바뀐 코드와 요청이 지금 계정의 모델 호출에 실림</a:t>
+            </a:r>
+            <a:endParaRPr lang="en-US" sz="1350" dirty="0"/>
+          </a:p>
+          <a:p>
+            <a:pPr marL="342900" indent="-342900">
+              <a:spcAft>
+                <a:spcPts val="800"/>
+              </a:spcAft>
+              <a:buSzPct val="100000"/>
+              <a:buChar char="•"/>
+            </a:pPr>
+            <a:r>
+              <a:rPr lang="en-US" sz="1350" dirty="0">
+                <a:solidFill>
+                  <a:schemeClr val="tx1"/>
+                </a:solidFill>
+              </a:rPr>
+              <a:t>.env · 키 · 잠금 파일은 이름만</a:t>
+            </a:r>
+            <a:endParaRPr lang="en-US" sz="1350" dirty="0"/>
+          </a:p>
+          <a:p>
+            <a:pPr marL="342900" indent="-342900">
+              <a:spcAft>
+                <a:spcPts val="800"/>
+              </a:spcAft>
+              <a:buSzPct val="100000"/>
+              <a:buChar char="•"/>
+            </a:pPr>
+            <a:r>
+              <a:rPr lang="en-US" sz="1350" dirty="0">
+                <a:solidFill>
+                  <a:schemeClr val="tx1"/>
+                </a:solidFill>
+              </a:rPr>
+              <a:t>흔한 키 형식은 «가림»으로</a:t>
+            </a:r>
+            <a:endParaRPr lang="en-US" sz="1350" dirty="0"/>
+          </a:p>
+          <a:p>
+            <a:pPr marL="342900" indent="-342900">
+              <a:spcAft>
+                <a:spcPts val="800"/>
+              </a:spcAft>
+              <a:buSzPct val="100000"/>
+              <a:buChar char="•"/>
+            </a:pPr>
+            <a:r>
+              <a:rPr lang="en-US" sz="1350" dirty="0">
+                <a:solidFill>
+                  <a:schemeClr val="tx1"/>
+                </a:solidFill>
+              </a:rPr>
+              <a:t>노트 · 일지 · 기록은 내 컴퓨터에만</a:t>
+            </a:r>
+            <a:endParaRPr lang="en-US" sz="1350" dirty="0"/>
+          </a:p>
+        </p:txBody>
+      </p:sp>
+      <p:sp>
+        <p:nvSpPr>
+          <p:cNvPr id="13" name="card"/>
+          <p:cNvSpPr/>
+          <p:nvPr/>
+        </p:nvSpPr>
+        <p:spPr>
+          <a:xfrm>
+            <a:off x="8138160" y="1417320"/>
+            <a:ext cx="3502152" cy="4663440"/>
+          </a:xfrm>
+          <a:prstGeom prst="roundRect">
+            <a:avLst>
+              <a:gd name="adj" fmla="val 2611"/>
+            </a:avLst>
+          </a:prstGeom>
+          <a:solidFill>
+            <a:schemeClr val="bg2"/>
+          </a:solidFill>
+          <a:ln w="9525">
+            <a:solidFill>
+              <a:schemeClr val="bg2"/>
+            </a:solidFill>
+            <a:prstDash val="solid"/>
+          </a:ln>
+        </p:spPr>
+      </p:sp>
+      <p:sp>
+        <p:nvSpPr>
+          <p:cNvPr id="14" name="badge-LuWrench"/>
+          <p:cNvSpPr/>
+          <p:nvPr/>
+        </p:nvSpPr>
+        <p:spPr>
+          <a:xfrm>
+            <a:off x="8412480" y="1691640"/>
+            <a:ext cx="731520" cy="731520"/>
+          </a:xfrm>
+          <a:prstGeom prst="ellipse">
+            <a:avLst/>
+          </a:prstGeom>
+          <a:solidFill>
+            <a:schemeClr val="accent4"/>
+          </a:solidFill>
+          <a:ln w="12700">
+            <a:solidFill>
+              <a:schemeClr val="accent4"/>
+            </a:solidFill>
+            <a:prstDash val="solid"/>
+          </a:ln>
+        </p:spPr>
+      </p:sp>
+      <p:pic>
+        <p:nvPicPr>
+          <p:cNvPr id="15" name="icon-LuWrench" descr="LuWrench">    </p:cNvPr>
+          <p:cNvPicPr>
+            <a:picLocks noChangeAspect="1"/>
+          </p:cNvPicPr>
+          <p:nvPr/>
+        </p:nvPicPr>
+        <p:blipFill>
+          <a:blip r:embed="rId3"/>
+          <a:stretch>
+            <a:fillRect/>
+          </a:stretch>
+        </p:blipFill>
+        <p:spPr>
+          <a:xfrm>
+            <a:off x="8588045" y="1867205"/>
+            <a:ext cx="380390" cy="380390"/>
+          </a:xfrm>
+          <a:prstGeom prst="rect">
+            <a:avLst/>
+          </a:prstGeom>
+        </p:spPr>
+      </p:pic>
+      <p:sp>
+        <p:nvSpPr>
+          <p:cNvPr id="16" name="Text 11"/>
+          <p:cNvSpPr txBox="1"/>
+          <p:nvPr/>
+        </p:nvSpPr>
+        <p:spPr>
+          <a:xfrm>
+            <a:off x="8412480" y="2606040"/>
+            <a:ext cx="3017520" cy="457200"/>
+          </a:xfrm>
+          <a:prstGeom prst="rect">
+            <a:avLst/>
+          </a:prstGeom>
+          <a:noFill/>
+          <a:ln/>
+        </p:spPr>
+        <p:txBody>
+          <a:bodyPr wrap="square" lIns="0" tIns="0" rIns="0" bIns="0" rtlCol="0" anchor="t"/>
+          <a:lstStyle/>
+          <a:p>
+            <a:pPr indent="0" marL="0">
+              <a:buNone/>
+            </a:pPr>
+            <a:r>
+              <a:rPr lang="en-US" sz="1900" b="1" dirty="0">
+                <a:solidFill>
+                  <a:schemeClr val="tx2"/>
+                </a:solidFill>
+              </a:rPr>
+              <a:t>노트가 안 생기면</a:t>
+            </a:r>
+            <a:endParaRPr lang="en-US" sz="1900" dirty="0"/>
+          </a:p>
+        </p:txBody>
+      </p:sp>
+      <p:sp>
+        <p:nvSpPr>
+          <p:cNvPr id="17" name="Text 12"/>
+          <p:cNvSpPr txBox="1"/>
+          <p:nvPr/>
+        </p:nvSpPr>
+        <p:spPr>
+          <a:xfrm>
+            <a:off x="8412480" y="3154680"/>
+            <a:ext cx="3017520" cy="2743200"/>
+          </a:xfrm>
+          <a:prstGeom prst="rect">
+            <a:avLst/>
+          </a:prstGeom>
+          <a:noFill/>
+          <a:ln/>
+        </p:spPr>
+        <p:txBody>
+          <a:bodyPr wrap="square" lIns="0" tIns="0" rIns="0" bIns="0" rtlCol="0" anchor="t"/>
+          <a:lstStyle/>
+          <a:p>
+            <a:pPr marL="342900" indent="-342900">
+              <a:spcAft>
+                <a:spcPts val="800"/>
+              </a:spcAft>
+              <a:buSzPct val="100000"/>
+              <a:buChar char="•"/>
+            </a:pPr>
+            <a:r>
+              <a:rPr lang="en-US" sz="1350" dirty="0">
+                <a:solidFill>
+                  <a:schemeClr val="tx1"/>
+                </a:solidFill>
+              </a:rPr>
+              <a:t>그 턴에 파일이 바뀌었나요?</a:t>
+            </a:r>
+            <a:endParaRPr lang="en-US" sz="1350" dirty="0"/>
+          </a:p>
+          <a:p>
+            <a:pPr marL="342900" indent="-342900">
+              <a:spcAft>
+                <a:spcPts val="800"/>
+              </a:spcAft>
+              <a:buSzPct val="100000"/>
+              <a:buChar char="•"/>
+            </a:pPr>
+            <a:r>
+              <a:rPr lang="en-US" sz="1350" dirty="0">
+                <a:solidFill>
+                  <a:schemeClr val="tx1"/>
+                </a:solidFill>
+              </a:rPr>
+              <a:t>패널을 열었나요? (/learn, 전체 화면)</a:t>
+            </a:r>
+            <a:endParaRPr lang="en-US" sz="1350" dirty="0"/>
+          </a:p>
+          <a:p>
+            <a:pPr marL="342900" indent="-342900">
+              <a:spcAft>
+                <a:spcPts val="800"/>
+              </a:spcAft>
+              <a:buSzPct val="100000"/>
+              <a:buChar char="•"/>
+            </a:pPr>
+            <a:r>
+              <a:rPr lang="en-US" sz="1350" dirty="0">
+                <a:solidFill>
+                  <a:schemeClr val="tx1"/>
+                </a:solidFill>
+              </a:rPr>
+              <a:t>키가 안 먹으면 한/영을 영문으로</a:t>
+            </a:r>
+            <a:endParaRPr lang="en-US" sz="1350" dirty="0"/>
+          </a:p>
+          <a:p>
+            <a:pPr marL="342900" indent="-342900">
+              <a:spcAft>
+                <a:spcPts val="800"/>
+              </a:spcAft>
+              <a:buSzPct val="100000"/>
+              <a:buChar char="•"/>
+            </a:pPr>
+            <a:r>
+              <a:rPr lang="en-US" sz="1350" dirty="0">
+                <a:solidFill>
+                  <a:schemeClr val="tx1"/>
+                </a:solidFill>
+              </a:rPr>
+              <a:t>빨간 글씨는 이유와 할 일을 알려 줍니다</a:t>
+            </a:r>
+            <a:endParaRPr lang="en-US" sz="1350" dirty="0"/>
+          </a:p>
+        </p:txBody>
+      </p:sp>
+      <p:sp>
+        <p:nvSpPr>
+          <p:cNvPr id="25" name="Slide Number Placeholder 0"/>
+          <p:cNvSpPr>
+            <a:spLocks noGrp="1"/>
+          </p:cNvSpPr>
+          <p:nvPr>
+            <p:ph type="sldNum" sz="quarter" idx="4294967295"/>
+          </p:nvPr>
+        </p:nvSpPr>
+        <p:spPr>
+          <a:xfrm>
+            <a:off x="11183112" y="6400800"/>
+            <a:ext cx="457200" cy="274320"/>
+          </a:xfrm>
+          <a:prstGeom prst="rect">
+            <a:avLst/>
+          </a:prstGeom>
+          <a:extLst>
+            <a:ext uri="{C572A759-6A51-4108-AA02-DFA0A04FC94B}">
+              <ma14:wrappingTextBoxFlag xmlns:ma14="http://schemas.microsoft.com/office/mac/drawingml/2011/main" val="0"/>
+            </a:ext>
+          </a:extLst>
+        </p:spPr>
+        <p:txBody>
+          <a:bodyPr/>
+          <a:lstStyle>
+            <a:lvl1pPr>
+              <a:defRPr sz="1000">
+                <a:solidFill>
+                  <a:srgbClr val="8A9A9E"/>
+                </a:solidFill>
+              </a:defRPr>
+            </a:lvl1pPr>
+          </a:lstStyle>
+          <a:p>
+            <a:pPr algn="r"/>
+            <a:fld id="{F7021451-1387-4CA6-816F-3879F97B5CBC}" type="slidenum">
+              <a:rPr b="0" lang="en-US"/>
+              <a:t>22</a:t>
+            </a:fld>
+            <a:endParaRPr lang="en-US"/>
+          </a:p>
+        </p:txBody>
+      </p:sp>
+    </p:spTree>
+  </p:cSld>
+  <p:clrMapOvr>
+    <a:masterClrMapping/>
+  </p:clrMapOvr>
+</p:sld>
+</file>
+
+<file path=ppt/slides/slide23.xml><?xml version="1.0" encoding="utf-8"?>
+<p:sld xmlns:a="http://schemas.openxmlformats.org/drawingml/2006/main" xmlns:r="http://schemas.openxmlformats.org/officeDocument/2006/relationships" xmlns:p="http://schemas.openxmlformats.org/presentationml/2006/main">
+  <p:cSld name="Slide 23">
+    <p:spTree>
+      <p:nvGrpSpPr>
+        <p:cNvPr id="1" name=""/>
+        <p:cNvGrpSpPr/>
+        <p:nvPr/>
+      </p:nvGrpSpPr>
+      <p:grpSpPr>
+        <a:xfrm>
+          <a:off x="0" y="0"/>
+          <a:ext cx="0" cy="0"/>
+          <a:chOff x="0" y="0"/>
+          <a:chExt cx="0" cy="0"/>
+        </a:xfrm>
+      </p:grpSpPr>
+      <p:sp>
+        <p:nvSpPr>
+          <p:cNvPr id="2" name="Text 0"/>
           <p:cNvSpPr txBox="1"/>
           <p:nvPr/>
         </p:nvSpPr>
@@ -18489,7 +20643,7 @@
                   <a:schemeClr val="tx1"/>
                 </a:solidFill>
               </a:rPr>
-              <a:t>/learn 하나로 퀴즈 · 정리 · 질문 · 통계</a:t>
+              <a:t>/learn 하나로 퀴즈 · 정리 · 질문 · 기록 · 보고서</a:t>
             </a:r>
             <a:endParaRPr lang="en-US" sz="1400" dirty="0"/>
           </a:p>
@@ -18637,7 +20791,7 @@
                   <a:schemeClr val="tx1"/>
                 </a:solidFill>
               </a:rPr>
-              <a:t>복습할 개념 수, 노트가 준비됐다는 알림</a:t>
+              <a:t>오늘 복습할 개수, 노트가 준비됐다는 알림</a:t>
             </a:r>
             <a:endParaRPr lang="en-US" sz="1400" dirty="0"/>
           </a:p>

--- a/docs/team/learn-notes-intro.pptx
+++ b/docs/team/learn-notes-intro.pptx
@@ -129,14 +129,14 @@
   <p:extLst>
     <p:ext uri="{521415D9-36F7-43E2-AB2F-B90AF26B5E84}">
       <p14:sectionLst xmlns:p14="http://schemas.microsoft.com/office/powerpoint/2010/main">
-        <p14:section name="시작" id="{f5e06f3a-3ac5-0f87-6e55-016615831c66}">
+        <p14:section name="시작" id="{992d745b-3b56-0a76-bd25-ee2054c29f74}">
           <p14:sldIdLst>
             <p14:sldId id="256"/>
             <p14:sldId id="257"/>
             <p14:sldId id="258"/>
           </p14:sldIdLst>
         </p14:section>
-        <p14:section name="모드(MOD)란?" id="{d1c828cf-78e1-7c9c-4b3c-55f659f138ba}">
+        <p14:section name="모드(MOD)란?" id="{97be3566-02a9-5d4d-8ad9-567357ab76a5}">
           <p14:sldIdLst>
             <p14:sldId id="259"/>
             <p14:sldId id="260"/>
@@ -145,7 +145,7 @@
             <p14:sldId id="263"/>
           </p14:sldIdLst>
         </p14:section>
-        <p14:section name="learn-notes 기능" id="{32ddf522-e112-9c65-9660-f819c5ba2548}">
+        <p14:section name="learn-notes 기능" id="{a4e8faf0-9658-8b12-d7e9-d73b426edba8}">
           <p14:sldIdLst>
             <p14:sldId id="264"/>
             <p14:sldId id="265"/>
@@ -158,7 +158,7 @@
             <p14:sldId id="272"/>
           </p14:sldIdLst>
         </p14:section>
-        <p14:section name="시작하기" id="{ff28516c-b347-4ff5-efc7-2223ab4a18e2}">
+        <p14:section name="시작하기" id="{1570fbc1-2516-7361-e49f-04856d8c064d}">
           <p14:sldIdLst>
             <p14:sldId id="273"/>
             <p14:sldId id="274"/>
@@ -167,7 +167,7 @@
             <p14:sldId id="277"/>
           </p14:sldIdLst>
         </p14:section>
-        <p14:section name="마무리" id="{cf34337b-1dd0-0d39-c020-d7e8ef3a3266}">
+        <p14:section name="마무리" id="{880e6cf6-3ce8-45ad-f08d-e3f98b913c9e}">
           <p14:sldIdLst>
             <p14:sldId id="278"/>
           </p14:sldIdLst>
@@ -4041,7 +4041,7 @@
                   <a:srgbClr val="5A6B70"/>
                 </a:solidFill>
               </a:rPr>
-              <a:t>요청과 바뀐 코드를 근거로 · 팀 규칙 파일이 있으면 "팀 규칙: …" 한 줄</a:t>
+              <a:t>요청과 바뀐 코드를 근거로 · 팀 규칙과 직접 닿으면 "팀 규칙: …" 한 줄</a:t>
             </a:r>
             <a:endParaRPr lang="en-US" sz="1350" dirty="0"/>
           </a:p>
@@ -7573,7 +7573,7 @@
                   <a:schemeClr val="tx1"/>
                 </a:solidFill>
               </a:rPr>
-              <a:t>틀리면 그 개념을 배운 노트로 바로 갑니다</a:t>
+              <a:t>Claude가 틀림 · 거의로 채점하면 그 개념을 배운 노트로</a:t>
             </a:r>
             <a:endParaRPr lang="en-US" sz="1400" dirty="0"/>
           </a:p>

--- a/docs/team/learn-notes-intro.pptx
+++ b/docs/team/learn-notes-intro.pptx
@@ -133,14 +133,14 @@
   <p:extLst>
     <p:ext uri="{521415D9-36F7-43E2-AB2F-B90AF26B5E84}">
       <p14:sectionLst xmlns:p14="http://schemas.microsoft.com/office/powerpoint/2010/main">
-        <p14:section name="시작" id="{adb40ffc-519f-f66e-98fa-8b7736d5dcf5}">
+        <p14:section name="시작" id="{65fdd0a1-01a5-6d12-7225-2f5980e35f4a}">
           <p14:sldIdLst>
             <p14:sldId id="256"/>
             <p14:sldId id="257"/>
             <p14:sldId id="258"/>
           </p14:sldIdLst>
         </p14:section>
-        <p14:section name="모드(MOD)란?" id="{28058a79-c3f1-d446-bedc-1a3a77a063c7}">
+        <p14:section name="모드(MOD)란?" id="{4fc169d9-f8d1-f060-e5c8-dcba794269d5}">
           <p14:sldIdLst>
             <p14:sldId id="259"/>
             <p14:sldId id="260"/>
@@ -149,7 +149,7 @@
             <p14:sldId id="263"/>
           </p14:sldIdLst>
         </p14:section>
-        <p14:section name="learn-notes 기능" id="{b6d3f51e-0625-8525-6b72-895bbe3058e2}">
+        <p14:section name="learn-notes 기능" id="{31402116-5cd3-1d2a-7904-ff7da570f950}">
           <p14:sldIdLst>
             <p14:sldId id="264"/>
             <p14:sldId id="265"/>
@@ -164,7 +164,7 @@
             <p14:sldId id="274"/>
           </p14:sldIdLst>
         </p14:section>
-        <p14:section name="시작하기" id="{f9e1fde8-d7cc-30e5-6810-4750b784eb5e}">
+        <p14:section name="시작하기" id="{7d9eee8e-1fcd-d628-80c8-76136421190d}">
           <p14:sldIdLst>
             <p14:sldId id="275"/>
             <p14:sldId id="276"/>
@@ -175,7 +175,7 @@
             <p14:sldId id="281"/>
           </p14:sldIdLst>
         </p14:section>
-        <p14:section name="마무리" id="{5df4dfdf-0d93-74e8-e70e-582bd52625d7}">
+        <p14:section name="마무리" id="{10cd7a82-42fc-8bd3-a3eb-f3226c595f2b}">
           <p14:sldIdLst>
             <p14:sldId id="282"/>
           </p14:sldIdLst>
@@ -584,7 +584,7 @@
           <a:p>
             <a:r>
               <a:rPr lang="en-US" dirty="0"/>
-              <a:t>안녕하세요. 오늘은 Claude Code로 코딩하면서 배운 것을 남겨 주는 모드, learn-notes 1.7.0을 소개합니다. 오른쪽은 실제 패널 화면이고, 노트 글은 작은 모델(haiku)이 실제로 쓴 글입니다. 먼저 모드가 무엇인지 짚고, 기능을 보고, 마지막에 설치하는 법과 팀으로 쓰는 법, 회사에 깔 때 담당자가 알아 둘 것을 안내하겠습니다.</a:t>
+              <a:t>안녕하세요. 오늘은 Claude Code로 코딩하면서 배운 것을 남겨 주는 모드, learn-notes 1.7.1을 소개합니다. 오른쪽은 실제 패널 화면이고, 노트 글은 작은 모델(haiku)이 실제로 쓴 글입니다. 먼저 모드가 무엇인지 짚고, 기능을 보고, 마지막에 설치하는 법과 팀으로 쓰는 법, 회사에 깔 때 담당자가 알아 둘 것을 안내하겠습니다.</a:t>
             </a:r>
             <a:endParaRPr lang="en-US" dirty="0"/>
           </a:p>
@@ -936,7 +936,7 @@
           <a:p>
             <a:r>
               <a:rPr lang="en-US" dirty="0"/>
-              <a:t>Claude가 파일을 고친 턴의 노트 끝에는 "직접 해 보기" 칸이 있습니다. 할 일과 확인만 보이고, 고칠 줄과 예시 답은 감춰 둡니다. t를 누르면 모델을 부르지 않고, "이 노트로" 키 줄과 질문 칸 아래에 "연습입니다 · 파일은 바뀌지 않습니다"와 함께 고칠 줄이 입력칸으로 펼쳐지고, 위아래 줄이 흐리게 보입니다. 오른쪽 화면이 그 모습입니다. 칸에는 원래 줄이 미리 들어 있어서 그 줄을 고치면 됩니다. Enter를 누르면 확인합니다. 패널이 키를 받을 때마다(ctrl+x tab, 클릭, 다음 세션) 키는 먼저 이 칸으로 갑니다. 그래서 영문으로 친 코드가 패널의 r, e, w 같은 키로 눌리지 않습니다. Esc로 키를 대화에 돌려주면 칸 아래 줄 끝에 "ctrl+x tab: 고칠 줄 칸으로"가 보입니다. 칸에서 Tab을 누르면 1~4 보기 버튼으로, 한 번 고친 뒤에는 a 예시 답으로 갑니다. 고치지 않았거나 한글 상태로 적었으면 모델을 부르지 않고 바로 알려 줍니다. 예시 답과 같으면 호출 없이 "해냈습니다"이고, "모르겠어요"라고 적으면 호출 없이 힌트가 나옵니다. 다르게 고쳤으면 Claude가 할 일과 확인대로 동작하는지 한 번 봅니다. 첫 시도가 틀리면 퀴즈처럼 되묻기와 한 번 더 칸이 나오고, 두 번째에 맞히면 "해냈습니다 · 되짚어 맞힘"입니다. 예시 답은 한 번 고쳐 본 뒤에 a로 볼 수 있습니다. 결과는 퀴즈와 같은 규칙으로 그 노트의 첫 개념의 복습 단계에 들어갑니다. 되짚어 맞히거나 예시 답을 봤으면 단계는 그대로입니다. 헷갈린 점은 오답 노트에 남고, 오늘 복습 10문제에는 세지 않습니다. 코드는 영문 상태에서 적어 주세요. 한 번 더를 하지 않은 채 날이 바뀌면, 다음 세션 시작에 첫 시도의 판정대로 매깁니다. 고칠 만한 한 줄이 없는 노트나 1.7.0 전에 쓴 노트에는 t가 없습니다. 데스크톱 앱과 VS Code의 패널에서도 같은 칸으로 고칩니다. 모바일 앱에는 입력칸이 없어 예시 답만 볼 수 있습니다. 클라우드 세션의 /learn은 "터미널·데스크톱 앱의 패널에서 t로 고쳐 확인합니다"라고 안내합니다.</a:t>
+              <a:t>Claude가 파일을 고친 턴의 노트 끝에는 "직접 해 보기" 칸이 있습니다. 할 일과 확인만 보이고, 고칠 줄과 예시 답은 감춰 둡니다. t를 누르면 모델을 부르지 않고, "이 노트로" 키 줄과 질문 칸 아래에 "연습입니다 · 파일은 바뀌지 않습니다"와 함께 고칠 줄이 입력칸으로 펼쳐지고, 위아래 줄이 흐리게 보입니다. 오른쪽 화면이 그 모습입니다. 칸에는 원래 줄이 미리 들어 있어서 그 줄을 고치면 됩니다. Enter를 누르면 확인합니다. 패널이 키를 받을 때마다(ctrl+x tab, 클릭, 다음 세션) 키는 먼저 이 칸으로 갑니다. 그래서 영문으로 친 코드가 패널의 r, e, w 같은 키로 눌리지 않습니다. 칸 바로 위의 흐린 안내 줄이 Enter로 무엇을 하는지와 영문 상태를 알려 주고, Enter 뒤의 알림도 그 위에 뜹니다. Esc로 키를 대화에 돌려주면 터미널에서는 그 줄 끝에 "ctrl+x tab: 고칠 줄 칸으로"가 보입니다. 칸에서 Tab을 누르면 1~4 보기 버튼으로, 한 번 고친 뒤에는 a 예시 답으로 갑니다. 고치지 않았거나 한글 상태로 적었으면 모델을 부르지 않고 바로 알려 줍니다. 예시 답과 같으면 호출 없이 "해냈습니다"이고, "모르겠어요"라고 적으면 호출 없이 힌트가 나옵니다. 다르게 고쳤으면 Claude가 할 일과 확인대로 동작하는지 한 번 봅니다. 첫 시도가 틀리면 퀴즈처럼 되묻기와 한 번 더 칸이 나오고, 두 번째에 맞히면 "해냈습니다 · 되짚어 맞힘"입니다. 예시 답은 한 번 고쳐 본 뒤에 a로 볼 수 있습니다. 결과는 퀴즈와 같은 규칙으로 그 노트의 첫 개념의 복습 단계에 들어갑니다. 되짚어 맞히거나 예시 답을 봤으면 단계는 그대로입니다. 헷갈린 점은 오답 노트에 남고, 오늘 복습 10문제에는 세지 않습니다. 코드는 영문 상태에서 적어 주세요. 한 번 더를 하지 않은 채 날이 바뀌면, 다음 세션 시작에 첫 시도의 판정대로 매깁니다. 고칠 만한 한 줄이 없는 노트나 1.7.0 전에 쓴 노트에는 t가 없습니다. 데스크톱 앱의 패널에서도 같은 칸으로 고칩니다. VS Code 확장에는 패널이 없어 같은 폴더의 터미널에서 합니다. 모바일 앱에는 입력칸이 없어 예시 답만 볼 수 있습니다. 클라우드 세션의 노트는 클라우드 컴퓨터에만 있으니, 클라우드 세션의 /learn은 "데스크톱 앱에서 이 세션을 열면 패널에서 t로 고쳐 확인합니다"라고 안내합니다.</a:t>
             </a:r>
             <a:endParaRPr lang="en-US" dirty="0"/>
           </a:p>
@@ -1024,7 +1024,7 @@
           <a:p>
             <a:r>
               <a:rPr lang="en-US" dirty="0"/>
-              <a:t>퀴즈는 /learn 복습으로 바로 시작합니다. 패널이 퀴즈로 열리고 커서가 답 칸에 있습니다. 패널에서는 오늘 복습할 개념이 있을 때 보기 줄 끝에 "q: 복습 n개"가 보이고, q를 누르면 퀴즈 보기로 가서 풀던 문제가 없으면 바로 새 문제를 받습니다. 4로 퀴즈 보기를 열고 s로 받아도 됩니다. 첫 퀴즈 전에는 s 아래에 무엇으로 몇 문제를 낼지 나옵니다. 보통은 "s를 누르면 복습할 개념으로 내 코드에서 3문제를 냅니다"이고, 이 저장소의 팀 용어가 빈자리를 채울 때는 "복습할 개념과 이 저장소의 팀 용어로"처럼 그대로 알려 줍니다. 일반적인 예제가 아니라 그 개념을 배운 노트의 내 코드로 묻고, 문제 제목에 예측, 왜, 바꿔 보기 같은 유형이 붙습니다. 답을 적고 Enter를 누르면 채점됩니다. 1.7.0에서 바뀐 것은 첫 답이 틀렸을 때입니다. 거의 맞음이나 틀림이면 정답을 바로 펼치지 않고, 오른쪽처럼 내 답대로라면 무엇이 되는지 짚은 뒤 되묻기를 하나 던집니다. 커서는 빈 "내 답 (한 번 더)" 칸에 있어서, 한/영을 바꾸지 않고 다시 적으면 됩니다. 두 번째에 맞히면 맞힘에 "되짚어 맞힘"이 붙고, 도움을 받은 것이라 복습 단계는 그대로입니다. 두 번째도 틀리면 정답을 펼치고 틀림으로 매기고, 두 번 다 거의였으면 거의 맞음입니다. 정답 보기 a는 한 번 적어 본 뒤에만 나오고, 누르면 첫 판정대로 바로 매깁니다. 답이 떠오르지 않으면 "모르겠어요"라고 적고 Enter를 누르세요. 모델을 부르지 않고 힌트를 보여 주고, 힌트를 이미 봤으면 정답을 펼치고 틀림으로 매깁니다. 커서가 답 칸에 있는 동안 글자 키는 답으로 들어가므로, 힌트나 정답은 Tab으로 버튼에 간 뒤 누르거나 마우스로 누릅니다. 데스크톱 앱과 VS Code, 그리고 Esc로 키를 대화에 돌려준 터미널 패널에서는 Tab 줄 대신 답 칸 아래에 "모르면 '모르겠어요'라고 적고 Enter"가 보입니다. 한 번 더를 하지 않은 채 날이 바뀌거나 새 문제를 받으면, 남은 첫 답은 첫 판정대로 매깁니다. 날이 바뀐 경우는 다음 세션 시작이나 /learn 답 위에 "날이 바뀌어 한 번 더를 기다리던 …은 첫 답의 판정대로 매겼습니다"로 알려 줍니다. 모바일처럼 입력칸이 없는 화면, 채점 호출이 실패했을 때, /learn 퀴즈 정답으로 정답을 먼저 봤을 때는 예전처럼 o, x로 스스로 채점합니다. 대화창의 /learn 퀴즈 1 내 답에도 되묻기가 세 줄로 오고, /learn 퀴즈 1 뒤에 새 답을 적어 한 번 더 답합니다. 늘어나는 비용은 첫 오답의 두 번째 채점 한 번뿐입니다.</a:t>
+              <a:t>퀴즈는 /learn 복습으로 바로 시작합니다. 패널이 퀴즈로 열리고 커서가 답 칸에 있습니다. 패널에서는 오늘 복습할 개념이 있을 때 보기 줄 끝에 "q: 복습 n개"가 보이고, q를 누르면 퀴즈 보기로 가서 풀던 문제가 없으면 바로 새 문제를 받습니다. 4로 퀴즈 보기를 열고 s로 받아도 됩니다. 첫 퀴즈 전에는 s 아래에 무엇으로 몇 문제를 낼지 나옵니다. 보통은 "s를 누르면 복습할 개념으로 내 코드에서 3문제를 냅니다"이고, 이 저장소의 팀 용어가 빈자리를 채울 때는 "복습할 개념과 이 저장소의 팀 용어로"처럼 그대로 알려 줍니다. 일반적인 예제가 아니라 그 개념을 배운 노트의 내 코드로 묻고, 문제 제목에 예측, 왜, 바꿔 보기 같은 유형이 붙습니다. 답을 적고 Enter를 누르면 채점됩니다. 1.7.0에서 바뀐 것은 첫 답이 틀렸을 때입니다. 거의 맞음이나 틀림이면 정답을 바로 펼치지 않고, 오른쪽처럼 내 답대로라면 무엇이 되는지 짚은 뒤 되묻기를 하나 던집니다. 커서는 빈 "내 답 (한 번 더)" 칸에 있어서, 한/영을 바꾸지 않고 다시 적으면 됩니다. 두 번째에 맞히면 맞힘에 "되짚어 맞힘"이 붙고, 도움을 받은 것이라 복습 단계는 그대로입니다. 두 번째도 틀리면 정답을 펼치고 틀림으로 매기고, 두 번 다 거의였으면 거의 맞음입니다. 정답 보기 a는 한 번 적어 본 뒤에만 나오고, 누르면 첫 판정대로 바로 매깁니다. 답이 떠오르지 않으면 "모르겠어요"라고 적고 Enter를 누르세요. 모델을 부르지 않고 힌트를 보여 주고, 힌트를 이미 봤으면 정답을 펼치고 틀림으로 매깁니다. 커서가 답 칸에 있는 동안 글자 키는 답으로 들어가므로, 힌트나 정답은 Tab으로 버튼에 간 뒤 누르거나 마우스로 누릅니다. 데스크톱 앱, 그리고 Esc로 키를 대화에 돌려준 터미널 패널에서는 Tab 줄 대신 답 칸 아래에 "모르면 '모르겠어요'라고 적고 Enter"가 보입니다. 한 번 더를 하지 않은 채 날이 바뀌거나 새 문제를 받으면, 남은 첫 답은 첫 판정대로 매깁니다. 날이 바뀐 경우는 다음 세션 시작이나 /learn 답 위에 "날이 바뀌어 한 번 더를 기다리던 …은 첫 답의 판정대로 매겼습니다"로 알려 줍니다. 모바일처럼 입력칸이 없는 화면, 채점 호출이 실패했을 때, /learn 퀴즈 정답으로 정답을 먼저 봤을 때는 예전처럼 o, x로 스스로 채점합니다. 대화창의 /learn 퀴즈 1 내 답에도 되묻기가 세 줄로 오고, /learn 퀴즈 1 뒤에 새 답을 적어 한 번 더 답합니다. 늘어나는 비용은 첫 오답의 두 번째 채점 한 번뿐입니다.</a:t>
             </a:r>
             <a:endParaRPr lang="en-US" dirty="0"/>
           </a:p>
@@ -1464,7 +1464,7 @@
           <a:p>
             <a:r>
               <a:rPr lang="en-US" dirty="0"/>
-              <a:t>명령은 /learn 하나에 하위 명령을 붙입니다. 도움말은 1.6처럼 14줄이고, 1.7.0에서 /learn 공유, /learn 퀴즈 팀, /learn 진단이 들어갔습니다. /learn 찾기와 /learn 일지는 "가끔" 줄로 내려갔지만 그대로 동작합니다. /learn 공유는 예전 /learn 마지막을 대신합니다. 옛 이름도 그대로 되고, 이제 노트 본문을 대화창에 적는 대신 요청은 빼고 경로는 줄인 복사 글을 클립보드에 넣습니다. /learn 퀴즈는 풀던 문제가 남아 있으면 모델을 부르지 않고 그 퀴즈를 다시 보여 주고, 새 문제는 /learn 퀴즈 새로로 받습니다. 번호 없이 답만 적으면 아직 안 푼 첫 문제로 채점합니다. /learn 저장은 이제 "노트는 저절로 저장됩니다"와 자주 쓰는 명령 한 줄로 답합니다. 패널이 안 보이는 클라우드 세션이나 모바일에서도 명령만으로 퀴즈를 받고 채점받고 질문할 수 있습니다. 대화 입력칸에 /learn 뒤 한 칸을 띄우면 복습, 퀴즈, 정리, 질문, 기록, 보고서, 공유, 진단, 도움말이 힌트로 보입니다.</a:t>
+              <a:t>명령은 /learn 하나에 하위 명령을 붙입니다. 도움말은 1.6처럼 14줄이고, 1.7.0에서 /learn 공유, /learn 퀴즈 팀, /learn 진단이 들어갔습니다. /learn 찾기와 /learn 일지는 "가끔" 줄로 내려갔지만 그대로 동작합니다. /learn 공유는 예전 /learn 마지막을 대신합니다. 옛 이름도 그대로 되고, 이제 노트 본문을 대화창에 적는 대신 요청은 빼고 경로는 줄인 복사 글을 클립보드에 넣습니다. /learn 퀴즈는 풀던 문제가 남아 있으면 모델을 부르지 않고 그 퀴즈를 다시 보여 주고, 새 문제는 /learn 퀴즈 새로로 받습니다. 번호 없이 답만 적으면 아직 안 푼 첫 문제로 채점합니다. /learn 저장은 이제 "노트는 저절로 저장됩니다"와 자주 쓰는 명령 한 줄로 답합니다. 패널이 없는 VS Code 확장, 패널이 보는 화면에 뜨지 않을 수 있는 클라우드 세션, 입력칸이 없는 모바일에서도 명령만으로 퀴즈를 받고 채점받고 질문할 수 있습니다. 대화 입력칸에 /learn 뒤 한 칸을 띄우면 복습, 퀴즈, 정리, 질문, 기록, 보고서, 공유, 진단, 도움말이 힌트로 보입니다.</a:t>
             </a:r>
             <a:endParaRPr lang="en-US" dirty="0"/>
           </a:p>
@@ -1728,7 +1728,7 @@
           <a:p>
             <a:r>
               <a:rPr lang="en-US" dirty="0"/>
-              <a:t>설치는 Claude Code 안에서 두 줄입니다. 처음 설치한 세션에서는 "learn-notes가 켜졌습니다" 알림이 한 번 뜹니다. 다시 시작한 뒤 /tui fullscreen으로 전체 화면을 켜고 /learn으로 패널을 엽니다. 패널의 키는 ctrl+x tab이나 클릭으로 옮기고, Esc를 누르면 대화 입력칸으로 돌아갑니다. 오늘 복습은 /learn 복습입니다. 그다음은 평소처럼 코딩을 요청하면 됩니다. 숫자 1부터 4는 한/영 상태와 상관없이 눌리지만, q, t, c 같은 글자 키는 영문 상태에서 눌러야 합니다. Windows에서는 작업할 폴더에서 Claude Code를 켜는 것만 기억해 주세요. 이미 설치한 분은 /plugin에서 Update를 누른 뒤 /reload-plugins를 하고, /learn 도움말 첫 줄이 "learn-notes 1.7.0 명령"이면 됩니다. 1.7.0부터는 다른 창이 더 새 버전을 쓰고 있으면 옛 창에 /reload-plugins 알림이 한 번 뜹니다. 다만 이 알림은 1.7.0 창부터 보이므로, 이번 업데이트 때 열려 있던 1.6 창은 직접 /reload-plugins 해 주세요.</a:t>
+              <a:t>설치는 Claude Code 안에서 두 줄입니다. 처음 설치한 세션에서는 "learn-notes가 켜졌습니다" 알림이 한 번 뜹니다. 다시 시작한 뒤 터미널에서는 /tui fullscreen으로 전체 화면을 켜고 /learn으로 패널을 엽니다. 데스크톱 앱은 전체 화면을 켜지 않아도 오른쪽에 붙습니다. VS Code 확장에는 패널이 없으니 같은 폴더의 터미널(VS Code 아래 터미널도 됩니다)에서 claude를 켜 주세요. 패널의 키는 터미널에서는 ctrl+x tab이나 클릭, 데스크톱 앱에서는 클릭으로 옮기고, Esc를 누르면 대화 입력칸으로 돌아갑니다. 오늘 복습은 /learn 복습입니다. 그다음은 평소처럼 코딩을 요청하면 됩니다. 숫자 1부터 4는 한/영 상태와 상관없이 눌리지만, q, t, c 같은 글자 키는 영문 상태에서 눌러야 합니다. Windows에서는 작업할 폴더에서 Claude Code를 켜는 것만 기억해 주세요. 이미 설치한 분은 먼저 플러그인 목록을 새로 받아 두면 확실합니다. /plugin의 Marketplaces 탭에서 learn-notes를 골라 Update marketplace를 누르고, Installed 탭의 learn-notes에서 Update now를 누른 뒤 /reload-plugins를 합니다. Update now도 목록을 새로 받아 보지만, 그게 안 되면 옛 목록으로 판단합니다. 그 위의 Mark for update는 표시만 해 둡니다. PowerShell에서는 claude plugin marketplace update learn-notes 다음 claude plugin update learn-notes@learn-notes를 치고, 열려 있던 창에서 /reload-plugins를 하거나 다시 시작합니다. /learn 도움말 첫 줄이 "learn-notes 1.7.1 명령"이면 됩니다. 1.7.0부터는 다른 창이 더 새 버전을 쓰고 있으면 옛 창에 /reload-plugins 알림이 한 번 뜹니다. 이 알림은 1.7.0 창부터 보이므로, 1.6에서 올릴 때는 열려 있던 창마다 /reload-plugins를 한 번 하거나 다시 시작해 주세요.</a:t>
             </a:r>
             <a:endParaRPr lang="en-US" dirty="0"/>
           </a:p>
@@ -3817,7 +3817,7 @@
                   <a:schemeClr val="accent6"/>
                 </a:solidFill>
               </a:rPr>
-              <a:t>learn-notes 1.7.0 — Claude가 고친 코드가 무엇을 어떻게 달라지게 했는지 턴마다 학습 노트로 보여 주고, 잊을 때쯤 내 코드로 퀴즈를 내며, 틀린 자리는 되물어 다시 풀게 하는 Claude Code 모드</a:t>
+              <a:t>learn-notes 1.7.1 — Claude가 고친 코드가 무엇을 어떻게 달라지게 했는지 턴마다 학습 노트로 보여 주고, 잊을 때쯤 내 코드로 퀴즈를 내며, 틀린 자리는 되물어 다시 풀게 하는 Claude Code 모드</a:t>
             </a:r>
             <a:endParaRPr lang="en-US" sz="1600" dirty="0"/>
           </a:p>
@@ -13034,7 +13034,7 @@
                             <a:schemeClr val="tx1"/>
                           </a:solidFill>
                         </a:rPr>
-                        <a:t>패널 열기 · 키는 ctrl+x tab 또는 클릭으로 패널에</a:t>
+                        <a:t>패널 열기 · 키는 터미널은 ctrl+x tab · 클릭, 데스크톱 앱은 클릭으로 패널에</a:t>
                       </a:r>
                       <a:endParaRPr lang="en-US" sz="1350" dirty="0"/>
                     </a:p>
@@ -15411,7 +15411,7 @@
                   <a:schemeClr val="tx1"/>
                 </a:solidFill>
               </a:rPr>
-              <a:t>Claude Code를 다시 시작하고 </a:t>
+              <a:t>다시 시작 · 터미널은 </a:t>
             </a:r>
             <a:r>
               <a:rPr lang="en-US" sz="1600" b="1" dirty="0">
@@ -15424,6 +15424,14 @@
               </a:rPr>
               <a:t>/tui fullscreen</a:t>
             </a:r>
+            <a:r>
+              <a:rPr lang="en-US" sz="1300" dirty="0">
+                <a:solidFill>
+                  <a:srgbClr val="5A6B70"/>
+                </a:solidFill>
+              </a:rPr>
+              <a:t> (데스크톱 앱은 그대로)</a:t>
+            </a:r>
             <a:endParaRPr lang="en-US" sz="1600" dirty="0"/>
           </a:p>
         </p:txBody>
@@ -15702,11 +15710,11 @@
         <p:spPr>
           <a:xfrm>
             <a:off x="7498080" y="1371600"/>
-            <a:ext cx="4142232" cy="2423160"/>
+            <a:ext cx="4142232" cy="2103120"/>
           </a:xfrm>
           <a:prstGeom prst="roundRect">
             <a:avLst>
-              <a:gd name="adj" fmla="val 3774"/>
+              <a:gd name="adj" fmla="val 4348"/>
             </a:avLst>
           </a:prstGeom>
           <a:solidFill>
@@ -15728,7 +15736,7 @@
         </p:nvSpPr>
         <p:spPr>
           <a:xfrm>
-            <a:off x="7726680" y="1600200"/>
+            <a:off x="7726680" y="1536192"/>
             <a:ext cx="548640" cy="548640"/>
           </a:xfrm>
           <a:prstGeom prst="ellipse">
@@ -15761,7 +15769,7 @@
         </p:blipFill>
         <p:spPr>
           <a:xfrm>
-            <a:off x="7858354" y="1731874"/>
+            <a:off x="7858354" y="1667866"/>
             <a:ext cx="285293" cy="285293"/>
           </a:xfrm>
           <a:prstGeom prst="rect">
@@ -15777,7 +15785,7 @@
         </p:nvSpPr>
         <p:spPr>
           <a:xfrm>
-            <a:off x="8412480" y="1600200"/>
+            <a:off x="8412480" y="1536192"/>
             <a:ext cx="3017520" cy="548640"/>
           </a:xfrm>
           <a:prstGeom prst="rect">
@@ -15813,8 +15821,8 @@
         </p:nvSpPr>
         <p:spPr>
           <a:xfrm>
-            <a:off x="7726680" y="2286000"/>
-            <a:ext cx="3749040" cy="1417320"/>
+            <a:off x="7726680" y="2176272"/>
+            <a:ext cx="3749040" cy="1234440"/>
           </a:xfrm>
           <a:prstGeom prst="rect">
             <a:avLst/>
@@ -15889,12 +15897,12 @@
         </p:nvSpPr>
         <p:spPr>
           <a:xfrm>
-            <a:off x="7498080" y="4023360"/>
-            <a:ext cx="4142232" cy="2103120"/>
+            <a:off x="7498080" y="3657600"/>
+            <a:ext cx="4142232" cy="2468880"/>
           </a:xfrm>
           <a:prstGeom prst="roundRect">
             <a:avLst>
-              <a:gd name="adj" fmla="val 4348"/>
+              <a:gd name="adj" fmla="val 3704"/>
             </a:avLst>
           </a:prstGeom>
           <a:solidFill>
@@ -15916,7 +15924,7 @@
         </p:nvSpPr>
         <p:spPr>
           <a:xfrm>
-            <a:off x="7726680" y="4206240"/>
+            <a:off x="7726680" y="3794760"/>
             <a:ext cx="548640" cy="548640"/>
           </a:xfrm>
           <a:prstGeom prst="ellipse">
@@ -15949,7 +15957,7 @@
         </p:blipFill>
         <p:spPr>
           <a:xfrm>
-            <a:off x="7858354" y="4337914"/>
+            <a:off x="7858354" y="3926434"/>
             <a:ext cx="285293" cy="285293"/>
           </a:xfrm>
           <a:prstGeom prst="rect">
@@ -15965,7 +15973,7 @@
         </p:nvSpPr>
         <p:spPr>
           <a:xfrm>
-            <a:off x="8412480" y="4206240"/>
+            <a:off x="8412480" y="3794760"/>
             <a:ext cx="3017520" cy="548640"/>
           </a:xfrm>
           <a:prstGeom prst="rect">
@@ -16001,8 +16009,8 @@
         </p:nvSpPr>
         <p:spPr>
           <a:xfrm>
-            <a:off x="7726680" y="4846320"/>
-            <a:ext cx="3749040" cy="1188720"/>
+            <a:off x="7726680" y="4343400"/>
+            <a:ext cx="3749040" cy="1737360"/>
           </a:xfrm>
           <a:prstGeom prst="rect">
             <a:avLst/>
@@ -16016,36 +16024,110 @@
           <a:p>
             <a:pPr indent="0" marL="0">
               <a:spcAft>
-                <a:spcPts val="400"/>
+                <a:spcPts val="200"/>
               </a:spcAft>
               <a:buNone/>
             </a:pPr>
             <a:r>
-              <a:rPr lang="en-US" sz="1300" dirty="0">
+              <a:rPr lang="en-US" sz="1200" dirty="0">
                 <a:solidFill>
                   <a:schemeClr val="tx1"/>
                 </a:solidFill>
               </a:rPr>
-              <a:t>/plugin → Installed → learn-notes → Update, 그다음 /reload-plugins</a:t>
-            </a:r>
-            <a:endParaRPr lang="en-US" sz="1300" dirty="0"/>
+              <a:t>먼저 목록 새로 받기: /plugin → Marketplaces → learn-notes → Update marketplace</a:t>
+            </a:r>
+            <a:endParaRPr lang="en-US" sz="1200" dirty="0"/>
           </a:p>
           <a:p>
             <a:pPr indent="0" marL="0">
               <a:spcAft>
-                <a:spcPts val="400"/>
+                <a:spcPts val="200"/>
               </a:spcAft>
               <a:buNone/>
             </a:pPr>
             <a:r>
               <a:rPr lang="en-US" sz="1200" dirty="0">
                 <a:solidFill>
+                  <a:schemeClr val="tx1"/>
+                </a:solidFill>
+              </a:rPr>
+              <a:t>그다음 Installed → learn-notes → Update now, /reload-plugins</a:t>
+            </a:r>
+            <a:endParaRPr lang="en-US" sz="1200" dirty="0"/>
+          </a:p>
+          <a:p>
+            <a:pPr indent="0" marL="0">
+              <a:spcAft>
+                <a:spcPts val="200"/>
+              </a:spcAft>
+              <a:buNone/>
+            </a:pPr>
+            <a:r>
+              <a:rPr lang="en-US" sz="1200" dirty="0">
+                <a:solidFill>
+                  <a:schemeClr val="tx1"/>
+                </a:solidFill>
+              </a:rPr>
+              <a:t>터미널(PowerShell)은 이 두 줄 뒤 /reload-plugins</a:t>
+            </a:r>
+            <a:endParaRPr lang="en-US" sz="1200" dirty="0"/>
+          </a:p>
+          <a:p>
+            <a:pPr indent="0" marL="0">
+              <a:spcAft>
+                <a:spcPts val="200"/>
+              </a:spcAft>
+              <a:buNone/>
+            </a:pPr>
+            <a:r>
+              <a:rPr lang="en-US" sz="1050" dirty="0">
+                <a:solidFill>
+                  <a:schemeClr val="accent1"/>
+                </a:solidFill>
+                <a:latin typeface="Courier New" pitchFamily="34" charset="0"/>
+                <a:ea typeface="Courier New" pitchFamily="34" charset="-122"/>
+                <a:cs typeface="Courier New" pitchFamily="34" charset="-120"/>
+              </a:rPr>
+              <a:t>claude plugin marketplace update learn-notes</a:t>
+            </a:r>
+            <a:endParaRPr lang="en-US" sz="1200" dirty="0"/>
+          </a:p>
+          <a:p>
+            <a:pPr indent="0" marL="0">
+              <a:spcAft>
+                <a:spcPts val="200"/>
+              </a:spcAft>
+              <a:buNone/>
+            </a:pPr>
+            <a:r>
+              <a:rPr lang="en-US" sz="1050" dirty="0">
+                <a:solidFill>
+                  <a:schemeClr val="accent1"/>
+                </a:solidFill>
+                <a:latin typeface="Courier New" pitchFamily="34" charset="0"/>
+                <a:ea typeface="Courier New" pitchFamily="34" charset="-122"/>
+                <a:cs typeface="Courier New" pitchFamily="34" charset="-120"/>
+              </a:rPr>
+              <a:t>claude plugin update learn-notes@learn-notes</a:t>
+            </a:r>
+            <a:endParaRPr lang="en-US" sz="1200" dirty="0"/>
+          </a:p>
+          <a:p>
+            <a:pPr indent="0" marL="0">
+              <a:spcAft>
+                <a:spcPts val="200"/>
+              </a:spcAft>
+              <a:buNone/>
+            </a:pPr>
+            <a:r>
+              <a:rPr lang="en-US" sz="1150" dirty="0">
+                <a:solidFill>
                   <a:srgbClr val="5A6B70"/>
                 </a:solidFill>
               </a:rPr>
-              <a:t>/learn 도움말 첫 줄에 "learn-notes 1.7.0 명령"이 보이면 됩니다.</a:t>
-            </a:r>
-            <a:endParaRPr lang="en-US" sz="1300" dirty="0"/>
+              <a:t>/learn 도움말 첫 줄 "learn-notes 1.7.1 명령"으로 확인</a:t>
+            </a:r>
+            <a:endParaRPr lang="en-US" sz="1200" dirty="0"/>
           </a:p>
         </p:txBody>
       </p:sp>
@@ -18479,7 +18561,7 @@
                   <a:srgbClr val="D6DDD6"/>
                 </a:solidFill>
               </a:rPr>
-              <a:t>- 버전: learn-notes 1.7.0 · Claude Code 2.1.300</a:t>
+              <a:t>- 버전: learn-notes 1.7.1 · Claude Code 2.1.302</a:t>
             </a:r>
             <a:endParaRPr lang="en-US" sz="1150" dirty="0"/>
           </a:p>

--- a/docs/team/learn-notes-intro.pptx
+++ b/docs/team/learn-notes-intro.pptx
@@ -135,14 +135,14 @@
   <p:extLst>
     <p:ext uri="{521415D9-36F7-43E2-AB2F-B90AF26B5E84}">
       <p14:sectionLst xmlns:p14="http://schemas.microsoft.com/office/powerpoint/2010/main">
-        <p14:section name="시작" id="{4a93d1a1-58c2-4e6d-a608-45cc97faa4fc}">
+        <p14:section name="시작" id="{b74e56fb-2507-bd92-3aaf-67aa7ca80acf}">
           <p14:sldIdLst>
             <p14:sldId id="256"/>
             <p14:sldId id="257"/>
             <p14:sldId id="258"/>
           </p14:sldIdLst>
         </p14:section>
-        <p14:section name="모드(MOD)란?" id="{83745ff2-d84c-edb6-cac5-e5d173b9738c}">
+        <p14:section name="모드(MOD)란?" id="{7010ae38-70aa-8c24-7657-806198a0f1e9}">
           <p14:sldIdLst>
             <p14:sldId id="259"/>
             <p14:sldId id="260"/>
@@ -151,7 +151,7 @@
             <p14:sldId id="263"/>
           </p14:sldIdLst>
         </p14:section>
-        <p14:section name="learn-notes 기능" id="{93683e88-2bc5-fb29-8f07-2ee16f4e2dd5}">
+        <p14:section name="learn-notes 기능" id="{8b4b6cb4-aef3-e4b8-bdcd-b15b73488a8e}">
           <p14:sldIdLst>
             <p14:sldId id="264"/>
             <p14:sldId id="265"/>
@@ -167,7 +167,7 @@
             <p14:sldId id="275"/>
           </p14:sldIdLst>
         </p14:section>
-        <p14:section name="시작하기" id="{e1a4bdf4-5b9c-6248-d5a5-a99935b735f1}">
+        <p14:section name="시작하기" id="{5e20c82a-384f-758d-c1e6-37f9607262e8}">
           <p14:sldIdLst>
             <p14:sldId id="276"/>
             <p14:sldId id="277"/>
@@ -179,7 +179,7 @@
             <p14:sldId id="283"/>
           </p14:sldIdLst>
         </p14:section>
-        <p14:section name="마무리" id="{3c6faa68-49a9-f9ca-6f23-2435add34151}">
+        <p14:section name="마무리" id="{5f58aa07-91e8-f9c1-d1e1-204e9646c259}">
           <p14:sldIdLst>
             <p14:sldId id="284"/>
           </p14:sldIdLst>
@@ -588,7 +588,7 @@
           <a:p>
             <a:r>
               <a:rPr lang="en-US" dirty="0"/>
-              <a:t>안녕하세요. 오늘은 Claude Code로 코딩하면서 배운 것을 남겨 주는 모드, learn-notes 1.8.0을 소개합니다. 오른쪽은 실제 패널 화면이고, 노트 글은 작은 모델(haiku)이 실제로 쓴 글입니다. 먼저 모드가 무엇인지 짚고, 기능을 보고, 마지막에 설치하는 법과 팀으로 쓰는 법, 회사에 깔 때 담당자가 알아 둘 것을 안내하겠습니다.</a:t>
+              <a:t>안녕하세요. 오늘은 Claude Code로 코딩하면서 배운 것을 남겨 주는 모드, learn-notes 1.9.0을 소개합니다. 오른쪽은 실제 패널 화면이고, 노트 글은 작은 모델(haiku)이 실제로 쓴 글입니다. 먼저 모드가 무엇인지 짚고, 기능을 보고, 마지막에 설치하는 법과 팀으로 쓰는 법, 회사에 깔 때 담당자가 알아 둘 것을 안내하겠습니다.</a:t>
             </a:r>
             <a:endParaRPr lang="en-US" dirty="0"/>
           </a:p>
@@ -940,7 +940,7 @@
           <a:p>
             <a:r>
               <a:rPr lang="en-US" dirty="0"/>
-              <a:t>Claude가 파일을 고친 턴의 노트 끝에는 "직접 해 보기" 칸이 있습니다. 할 일과 확인만 보이고, 고칠 줄과 예시 답은 감춰 둡니다. t를 누르면 모델을 부르지 않고, "이 노트로" 키 줄과 질문 칸 아래에 "연습입니다 · 파일은 바뀌지 않습니다"와 함께 고칠 줄이 입력칸으로 펼쳐지고, 위아래 줄이 흐리게 보입니다. 오른쪽 화면이 그 모습입니다. 칸에는 원래 줄이 미리 들어 있어서 그 줄을 고치면 됩니다. Enter를 누르면 확인합니다. 패널이 키를 받을 때마다(ctrl+x tab, 클릭, 다음 세션) 키는 먼저 이 칸으로 갑니다. 그래서 영문으로 친 코드가 패널의 r, e, w 같은 키로 눌리지 않습니다. 칸 바로 위의 흐린 안내 줄이 Enter로 무엇을 하는지와 영문 상태를 알려 주고, Enter 뒤의 알림도 그 위에 뜹니다. Esc로 키를 대화에 돌려주면 터미널에서는 그 줄 끝에 "ctrl+x tab: 고칠 줄 칸으로"가 보입니다. 칸에서 Tab을 누르면 1~4 보기 버튼으로, 한 번 고친 뒤에는 a 예시 답으로 갑니다. 고치지 않았거나 한글 상태로 적었으면 모델을 부르지 않고 바로 알려 줍니다. 예시 답과 같으면 호출 없이 "해냈습니다"이고, "모르겠어요"라고 적으면 호출 없이 힌트가 나옵니다. 다르게 고쳤으면 Claude가 할 일과 확인대로 동작하는지 한 번 봅니다. 첫 시도가 틀리면 퀴즈처럼 되묻기와 한 번 더 칸이 나오고, 두 번째에 맞히면 "해냈습니다 · 되짚어 맞힘"입니다. 예시 답은 한 번 고쳐 본 뒤에 a로 볼 수 있습니다. 결과는 퀴즈와 같은 규칙으로 그 노트의 첫 개념의 복습 단계에 들어갑니다. 되짚어 맞히거나 예시 답을 봤으면 단계는 그대로입니다. 헷갈린 점은 오답 노트에 남고, 오늘 복습 10문제에는 세지 않습니다. 코드는 영문 상태에서 적어 주세요. 한 번 더를 하지 않은 채 날이 바뀌면, 다음 세션 시작에 첫 시도의 판정대로 매깁니다. 고칠 만한 한 줄이 없는 노트나 1.7.0 전에 쓴 노트에는 t가 없습니다. 데스크톱 앱의 패널에서도 같은 칸으로 고칩니다. VS Code 확장에는 패널이 없어 같은 폴더의 터미널에서 합니다. 모바일 앱에는 입력칸이 없어 예시 답만 볼 수 있습니다. 클라우드 세션의 노트는 클라우드 컴퓨터에만 있으니, 클라우드 세션의 /learn은 "데스크톱 앱에서 이 세션을 열면 패널에서 t로 고쳐 확인합니다"라고 안내합니다.</a:t>
+              <a:t>Claude가 파일을 고친 턴의 노트 끝에는 "직접 해 보기" 칸이 있습니다. 할 일과 확인만 보이고, 고칠 줄과 예시 답은 감춰 둡니다. t를 누르면 모델을 부르지 않고, "이 노트로" 키 줄과 질문 칸 아래에 "연습입니다 · 파일은 바뀌지 않습니다"와 함께 고칠 줄이 입력칸으로 펼쳐지고, 위아래 줄이 흐리게 보입니다. 오른쪽 화면이 그 모습입니다. 칸에는 원래 줄이 미리 들어 있어서 그 줄을 고치면 됩니다. Enter를 누르면 확인합니다. 패널이 키를 받을 때마다(ctrl+x tab, 클릭, 다음 세션) 키는 먼저 이 칸으로 갑니다. 그래서 영문으로 친 코드가 패널의 r, e, w 같은 키로 눌리지 않습니다. 칸 바로 위의 흐린 안내 줄이 Enter로 무엇을 하는지와 영문 상태를 알려 주고, Enter 뒤의 알림도 그 위에 뜹니다. Esc로 키를 대화에 돌려주면 터미널에서는 그 줄 끝에 "ctrl+x tab: 고칠 줄 칸으로"가 보입니다. 칸에서 Tab을 누르면 1~4 보기 버튼으로, 한 번 고친 뒤에는 a 예시 답으로 갑니다. 고치지 않았거나 한글 상태로 적었으면 모델을 부르지 않고 바로 알려 줍니다. 예시 답과 같으면 호출 없이 "해냈습니다"이고, "모르겠어요"라고 적으면 호출 없이 힌트가 나옵니다. 다르게 고쳤으면 Claude가 할 일과 확인대로 동작하는지 한 번 봅니다. 첫 시도가 틀리면 퀴즈처럼 되묻기와 한 번 더 칸이 나오고, 두 번째에 맞히면 "해냈습니다 · 되짚어 맞힘"입니다. 예시 답은 한 번 고쳐 본 뒤에 a로 볼 수 있습니다. 결과는 퀴즈와 같은 규칙으로 그 노트의 첫 개념의 복습 단계에 들어갑니다. 되짚어 맞히거나 예시 답을 봤으면 단계는 그대로입니다. 헷갈린 점은 오답 노트에 남고, 오늘 복습 10문제에는 세지 않습니다. 코드는 영문 상태에서 적어 주세요. 한 번 더를 하지 않은 채 날이 바뀌면, 다음 세션 시작에 첫 시도의 판정대로 매깁니다. 고칠 만한 한 줄이 없는 노트나 1.7.0 전에 쓴 노트에는 t가 없습니다. 팀 파일에 ## 규칙이 있는 저장소에서는, 1.9.0이 쓴 노트 가운데 직접 해 보기가 팀 규칙대로 코드를 고치는 연습으로 보이는 노트, 곧 할 일에 "(팀 규칙)"이 붙었거나 "팀 규칙과 다를 수 있음:" 줄 아래 할 일에 "팀 규칙"이 든 노트에도 t가 없습니다. 패널, c 복사, /learn 공유, 패널 없이 받는 /learn의 답에서 그 칸이 빠지고, 일지에는 남습니다. 1.8.0은 이런 연습을 개념 연습으로 매겨서, 틀리면 그 개념의 복습이 처음으로 돌아갔기 때문입니다. 드문 일입니다. 올리기 전에 쓴 지난 노트와, 이런 표시 없이 팀 규칙대로 고치게 하는 연습은 1.8.0처럼 직접 해 보기가 남고 개념 연습으로 매깁니다. 데스크톱 앱의 패널에서도 같은 칸으로 고칩니다. VS Code 확장에는 패널이 없어 같은 폴더의 터미널에서 합니다. 모바일 앱에는 입력칸이 없어 예시 답만 볼 수 있습니다. 클라우드 세션의 노트는 클라우드 컴퓨터에만 있으니, 클라우드 세션의 /learn은 "데스크톱 앱에서 이 세션을 열면 패널에서 t로 고쳐 확인합니다"라고 안내합니다.</a:t>
             </a:r>
             <a:endParaRPr lang="en-US" dirty="0"/>
           </a:p>
@@ -1028,7 +1028,7 @@
           <a:p>
             <a:r>
               <a:rPr lang="en-US" dirty="0"/>
-              <a:t>퀴즈는 /learn 복습으로 바로 시작합니다. 패널이 퀴즈로 열리고 커서가 답 칸에 있습니다. 패널에서는 오늘 복습할 개념이 있을 때 보기 줄 끝에 "q: 복습 n개"가 보이고, q를 누르면 퀴즈 보기로 가서 풀던 문제가 없으면 바로 새 문제를 받습니다. 4로 퀴즈 보기를 열고 s로 받아도 됩니다. 첫 퀴즈 전에는 s 아래에 무엇으로 몇 문제를 낼지 나옵니다. 보통은 "s를 누르면 복습할 개념으로 내 코드에서 3문제를 냅니다"이고, 이 저장소의 팀 용어가 빈자리를 채울 때는 "복습할 개념과 이 저장소의 팀 용어로"처럼 그대로 알려 줍니다. 일반적인 예제가 아니라 그 개념을 배운 노트의 내 코드로 묻고, 문제 제목에 예측, 왜, 바꿔 보기 같은 유형이 붙습니다. 1.8.0부터는 복습 단계가 7일 간격에 이르면 그 코드를 조금 바꿔 묻습니다. 조금 뒤 문제 사다리에서 봅니다. 답을 적고 Enter를 누르면 채점됩니다. 첫 답이 거의 맞음이나 틀림이면 정답을 바로 펼치지 않고, 내 답대로라면 무엇이 되는지 짚은 뒤 되묻기를 하나 던집니다. 오른쪽은 첫 답이 거의 맞음이라 "아직입니다 · 방향은 맞습니다"와 함께 되묻기가 나온 화면입니다. 커서는 빈 "내 답 (한 번 더)" 칸에 있어서, 한/영을 바꾸지 않고 다시 적으면 됩니다. 두 번째에 맞히면 맞힘에 "되짚어 맞힘"이 붙고, 도움을 받은 것이라 복습 단계는 그대로입니다. 두 번째도 틀리면 정답을 펼치고 틀림으로 매기고, 두 번 다 거의였으면 거의 맞음입니다. 정답 보기 a는 한 번 적어 본 뒤에만 나오고, 누르면 첫 판정대로 바로 매깁니다. 답이 떠오르지 않으면 "모르겠어요"라고 적고 Enter를 누르세요. 모델을 부르지 않고 힌트를 보여 주고, 힌트를 이미 봤으면 정답을 펼치고 틀림으로 매깁니다. 커서가 답 칸에 있는 동안 글자 키는 답으로 들어가므로, 힌트나 정답은 Tab으로 버튼에 간 뒤 누르거나 마우스로 누릅니다. 데스크톱 앱, 그리고 Esc로 키를 대화에 돌려준 터미널 패널에서는 Tab 줄 대신 답 칸 아래에 "모르면 '모르겠어요'라고 적고 Enter"가 보입니다. 한 번 더를 하지 않은 채 날이 바뀌거나 새 문제를 받으면, 남은 첫 답은 첫 판정대로 매깁니다. 날이 바뀐 경우는 다음 세션 시작이나 /learn 답 위에 "날이 바뀌어 한 번 더를 기다리던 …은 첫 답의 판정대로 매겼습니다"로 알려 줍니다. 모바일처럼 입력칸이 없는 화면, 채점 호출이 실패했을 때, /learn 퀴즈 정답으로 정답을 먼저 봤을 때는 예전처럼 o, x로 스스로 채점합니다. 대화창의 /learn 퀴즈 1 내 답에도 되묻기가 세 줄로 오고, /learn 퀴즈 1 뒤에 새 답을 적어 한 번 더 답합니다. 늘어나는 비용은 첫 오답의 두 번째 채점 한 번뿐입니다.</a:t>
+              <a:t>퀴즈는 /learn 복습으로 바로 시작합니다. 패널이 퀴즈로 열리고 커서가 답 칸에 있습니다. 패널에서는 오늘 복습할 개념이 있을 때 보기 줄 끝에 "q: 복습 n개"가 보이고, q를 누르면 퀴즈 보기로 가서 풀던 문제가 없으면 바로 새 문제를 받습니다. 4로 퀴즈 보기를 열고 s로 받아도 됩니다. 첫 퀴즈 전에는 s 아래에 무엇으로 몇 문제를 낼지 나옵니다. 보통은 "s를 누르면 복습할 개념으로 내 코드에서 3문제를 냅니다"이고, 이 저장소의 팀 용어가 빈자리를 채울 때는 "복습할 개념과 이 저장소의 팀 용어로"처럼 그대로 알려 줍니다. 일반적인 예제가 아니라 그 개념을 배운 노트의 내 코드로 묻고, 문제 제목에 예측, 왜, 바꿔 보기 같은 유형이 붙습니다. 복습 단계가 올라가도 30일, 60일 졸업 복습까지 내 코드로 묻습니다. 조금 뒤 따로 봅니다. 답을 적고 Enter를 누르면 채점됩니다. 첫 답이 거의 맞음이나 틀림이면 정답을 바로 펼치지 않고, 내 답대로라면 무엇이 되는지 짚은 뒤 되묻기를 하나 던집니다. 오른쪽은 첫 답이 거의 맞음이라 "아직입니다 · 방향은 맞습니다"와 함께 되묻기가 나온 화면입니다. 커서는 빈 "내 답 (한 번 더)" 칸에 있어서, 한/영을 바꾸지 않고 다시 적으면 됩니다. 두 번째에 맞히면 맞힘에 "되짚어 맞힘"이 붙고, 도움을 받은 것이라 복습 단계는 그대로입니다. 두 번째도 틀리면 정답을 펼치고 틀림으로 매기고, 두 번 다 거의였으면 거의 맞음입니다. 정답 보기 a는 한 번 적어 본 뒤에만 나오고, 누르면 첫 판정대로 바로 매깁니다. 답이 떠오르지 않으면 "모르겠어요"라고 적고 Enter를 누르세요. 모델을 부르지 않고 힌트를 보여 주고, 힌트를 이미 봤으면 정답을 펼치고 틀림으로 매깁니다. 커서가 답 칸에 있는 동안 글자 키는 답으로 들어가므로, 힌트나 정답은 Tab으로 버튼에 간 뒤 누르거나 마우스로 누릅니다. 데스크톱 앱, 그리고 Esc로 키를 대화에 돌려준 터미널 패널에서는 Tab 줄 대신 답 칸 아래에 "모르면 '모르겠어요'라고 적고 Enter"가 보입니다. 한 번 더를 하지 않은 채 날이 바뀌거나 새 문제를 받으면, 남은 첫 답은 첫 판정대로 매깁니다. 날이 바뀐 경우는 다음 세션 시작이나 /learn 답 위에 "날이 바뀌어 한 번 더를 기다리던 …은 첫 답의 판정대로 매겼습니다"로 알려 줍니다. 모바일처럼 입력칸이 없는 화면, 채점 호출이 실패했을 때, /learn 퀴즈 정답으로 정답을 먼저 봤을 때는 예전처럼 o, x로 스스로 채점합니다. 대화창의 /learn 퀴즈 1 내 답에도 되묻기가 세 줄로 오고, /learn 퀴즈 1 뒤에 새 답을 적어 한 번 더 답합니다. 늘어나는 비용은 첫 오답의 두 번째 채점 한 번뿐입니다.</a:t>
             </a:r>
             <a:endParaRPr lang="en-US" dirty="0"/>
           </a:p>
@@ -1116,7 +1116,7 @@
           <a:p>
             <a:r>
               <a:rPr lang="en-US" dirty="0"/>
-              <a:t>왼쪽은 답을 적고 Enter를 눌러 Claude가 채점한 화면입니다. 힌트를 본 뒤 맞혀서 결과 줄에 "힌트 봄"이 붙었습니다. 판정은 맞힘, 거의 맞음, 틀림 세 가지이고, 그에 따라 다음 복습 시기가 바뀝니다. 표현이 달라도 뜻이 같으면 맞힘입니다. 예측 문제는 값이 같으면 설명이 없어도 맞힘이고, 바꿔 보기는 정답과 다른 코드여도 바라는 대로 동작하면 맞힘입니다. 피드백은 내 답대로라면 무엇이 되는지 먼저 짚고, 맞은 점 하나를 인정합니다. 정답은 맞혔을 때, 두 번째 채점이 끝났을 때, a를 눌렀을 때 펼쳐집니다. 힌트를 봤으면 결과 줄에 "힌트 봄"이, 풀이 보고 풀기 문제를 맞혔으면 "풀이 봄"이, 되묻기 뒤에 맞혔으면 "되짚어 맞힘"이 붙고, 이때는 복습 단계가 그대로입니다. 채점이 이상하면 f로 맞힘과 틀림을 바꿀 수 있고, 복습 단계도 처음부터 그렇게 채점한 것처럼 돌아갑니다. 되묻기 칸에서는 f가 "맞았는데요"로 보입니다.</a:t>
+              <a:t>왼쪽은 답을 적고 Enter를 눌러 Claude가 채점한 화면입니다. 힌트를 본 뒤 맞혀서 결과 줄에 "힌트 봄"이 붙었습니다. 판정은 맞힘, 거의 맞음, 틀림 세 가지이고, 그에 따라 다음 복습 시기가 바뀝니다. 표현이 달라도 뜻이 같으면 맞힘입니다. 예측 문제는 값이 같으면 설명이 없어도 맞힘이고, 바꿔 보기는 정답과 다른 코드여도 바라는 대로 동작하면 맞힘입니다. 피드백은 내 답대로라면 무엇이 되는지 먼저 짚고, 맞은 점 하나를 인정합니다. 정답은 맞혔을 때, 두 번째 채점이 끝났을 때, a를 눌렀을 때 펼쳐집니다. 힌트를 봤으면 결과 줄에 "힌트 봄"이, 되묻기 뒤에 맞혔으면 "되짚어 맞힘"이 붙고, 이때는 복습 단계가 그대로입니다. 채점이 이상하면 f로 맞힘과 틀림을 바꿀 수 있고, 복습 단계도 처음부터 그렇게 채점한 것처럼 돌아갑니다. 되묻기 칸에서는 f가 "맞았는데요"로 보입니다.</a:t>
             </a:r>
             <a:endParaRPr lang="en-US" dirty="0"/>
           </a:p>
@@ -1204,7 +1204,7 @@
           <a:p>
             <a:r>
               <a:rPr lang="en-US" dirty="0"/>
-              <a:t>첫 답이 틀리거나 거의였으면, 채점하는 Claude가 무엇을 헷갈렸는지 한 문장으로 적어 둡니다. 되묻기 뒤 한 번 더도 틀렸거나 거의였으면 그 문장을 피드백 아래에 흐린 한 줄로 보여 줍니다. 왼쪽 화면의 "헷갈린 점: 인자를 넘기지 않으면 금액 비교가 불가능해 아무것도 세지 않는다고 봄"이 그 줄입니다. 이것을 오답 노트라고 부르지만, 새 키나 명령은 없습니다. 다음 퀴즈에서는 그 개념이 맨 앞에 "다시 도전"으로 나오고, 지난번과 다른 코드로 그 자리를 다시 묻습니다. 오른쪽 화면이 다음 날의 그 문제입니다. 헷갈린 점은 답하기 전에는 보이지 않습니다. 다른 날 힌트나 되묻기 없이 맞히면 초록으로 "지난번 헷갈린 점을 바로잡았습니다"가 나오고, 같은 날 맞히면 "바로 다시 맞혔습니다 · 다음 복습에서 한 번 더 확인합니다"가 나옵니다. 다시 도전에서 또 틀리면 "같은 곳을 또 헷갈렸습니다"와 함께 "다음 복습 퀴즈는 풀이부터 보여 줍니다"가 나옵니다. 다음 장에서 봅니다. 되묻기 뒤에 바로 맞혔으면 "헷갈린 점을 바로 고쳤습니다"가 나오고, 다른 날 다른 코드로 한 번 더 확인합니다. 답을 비웠거나 모르겠어요였으면 "떠오르지 않았습니다"로 남습니다. 1.8.0부터 헷갈린 개념은 두 곳에 더 보입니다. 하나는 노트입니다. 그 개념을 다시 만난 노트의 개념 줄 아래에 "지난번 헷갈린 개념 기본 매개변수 · 복습 퀴즈에서 다시 묻습니다"처럼 한 줄이 붙습니다. 직접 해 보기에서 틀린 것도 들어갑니다. 이름만 보이고 헷갈린 점 문장은 보이지 않습니다. 노트는 턴마다 저절로 열리니, 문장을 보이면 다음 다시 도전의 답을 미리 알려 주게 되기 때문입니다. 다른 하나는 /learn 기록입니다. 최근 30일에 같은 종류로 헷갈린 개념이 3개 이상이면 아래 카드처럼 한 줄이 나와, 내가 어떤 종류에서 자주 헷갈리는지 보여 줍니다. 이 줄은 /learn 기록의 답과 함께 대화창에 들어가 메인 Claude도 읽습니다. 종류와 개념 이름만 있고 헷갈린 점 문장은 없습니다. 헷갈린 점은 개념 모음의 복습할 개념 줄과 /learn 정리의 "헷갈리기 쉬운 것"에도 나옵니다. f로 맞힘으로 바꾸거나, /learn 안다로 아는 개념으로 옮기거나, 졸업하면 지워집니다. 모델 호출은 늘지 않습니다.</a:t>
+              <a:t>첫 답이 틀리거나 거의였으면, 채점하는 Claude가 무엇을 헷갈렸는지 한 문장으로 적어 둡니다. 되묻기 뒤 한 번 더도 틀렸거나 거의였으면 그 문장을 피드백 아래에 흐린 한 줄로 보여 줍니다. 왼쪽 화면의 "헷갈린 점: 인자를 넘기지 않으면 금액 비교가 불가능해 아무것도 세지 않는다고 봄"이 그 줄입니다. 이것을 오답 노트라고 부르지만, 새 키나 명령은 없습니다. 다음 퀴즈에서는 그 개념이 맨 앞에 "다시 도전"으로 나오고, 지난번과 다른 코드로 그 자리를 다시 묻습니다. 오른쪽 화면이 다음 날의 그 문제입니다. 헷갈린 점은 답하기 전에는 보이지 않습니다. 다른 날 힌트나 되묻기 없이 맞히면 초록으로 "지난번 헷갈린 점을 바로잡았습니다"가 나오고, 같은 날 맞히면 "바로 다시 맞혔습니다 · 다음 복습에서 한 번 더 확인합니다"가 나옵니다. 다시 도전에서 또 틀리면 "같은 곳을 또 헷갈렸습니다"가 나오고, 다음 퀴즈에서 다시 도전으로 또 묻습니다. 다음 장에서 봅니다. 되묻기 뒤에 바로 맞혔으면 "헷갈린 점을 바로 고쳤습니다"가 나오고, 다른 날 다른 코드로 한 번 더 확인합니다. 답을 비웠거나 모르겠어요였으면 "떠오르지 않았습니다"로 남습니다. 1.8.0부터 헷갈린 개념은 두 곳에 더 보입니다. 하나는 노트입니다. 그 개념을 다시 만난 노트의 개념 줄 아래에 "지난번 헷갈린 개념 기본 매개변수 · 복습 퀴즈에서 다시 묻습니다"처럼 한 줄이 붙습니다. 직접 해 보기에서 틀린 것도 들어갑니다. 이름만 보이고 헷갈린 점 문장은 보이지 않습니다. 노트는 턴마다 저절로 열리니, 문장을 보이면 다음 다시 도전의 답을 미리 알려 주게 되기 때문입니다. 다른 하나는 /learn 기록입니다. 최근 30일에 같은 종류로 헷갈린 개념이 3개 이상이면 아래 카드처럼 한 줄이 나와, 내가 어떤 종류에서 자주 헷갈리는지 보여 줍니다. 이 줄은 /learn 기록의 답과 함께 대화창에 들어가 메인 Claude도 읽습니다. 종류와 개념 이름만 있고 헷갈린 점 문장은 없습니다. 헷갈린 점은 개념 모음의 복습할 개념 줄과 /learn 정리의 "헷갈리기 쉬운 것"에도 나옵니다. f로 맞힘으로 바꾸거나, /learn 안다로 아는 개념으로 옮기거나, 졸업하면 지워집니다. 모델 호출은 늘지 않습니다.</a:t>
             </a:r>
             <a:endParaRPr lang="en-US" dirty="0"/>
           </a:p>
@@ -1292,7 +1292,7 @@
           <a:p>
             <a:r>
               <a:rPr lang="en-US" dirty="0"/>
-              <a:t>1.8.0의 문제 사다리입니다. 같은 개념도 복습 단계에 따라 다른 코드로 묻습니다. 어느 칸으로 물을지는 학습자가 고르지 않고 단계가 정합니다. 처음 두 단계, 그러니까 1일과 3일 복습에서는 그 개념을 배운 노트의 내 코드 그대로 묻습니다. 7일 간격 단계부터는 비슷한 코드입니다. 내 코드에서 값, 조건, 순서 가운데 한 곳을 바꾼 코드를 보여 주고 묻습니다. 외운 답이 아니라 원리로 맞히게 하려는 것입니다. 문제 제목에 "비슷한 코드"가 붙고, 대화창의 /learn 퀴즈에도 "(비슷한 코드)"가 붙습니다. 모델이 코드를 바꾸지 않고 그대로 보일 때도 있습니다. 문제에 보인 코드가 모두 내 코드의 한 줄이나 한 조각 그대로이거나, 내 코드에 그 코드가 정의한 함수를 부르는 줄만 더한 것이면 이 꼬리표를 떼고 1.7과 같은 문제로 보입니다. 띄어쓰기와 주석은 비교에서 뺍니다. 바꿀 값을 따로 보였거나("&gt;=로 바꾸면"처럼) 다른 일을 하는 줄을 더했으면 꼬리표를 지킵니다. 꼬리표는 화면에만 붙고, 채점과 복습 단계는 같습니다. 코드가 없는 개념은 1.7처럼 "왜"로 묻습니다. 같은 곳에서 두 번 연달아 막히면, 다시 말해 다시 도전에서 또 헷갈리면, 다음 복습 퀴즈는 풀이 보고 풀기로 묻습니다. 모르겠어요로 두 번 막힌 것도 같고, 코드가 없는 개념도 같습니다. 왼쪽 화면처럼 "풀이:" 뒤에 그 헷갈림이 드러나는 짧은 예와 결과, 까닭을 먼저 보여 주고, "이제 풀어 보세요:" 뒤에 같은 원리를 다른 값으로 묻습니다. 그 뒤에 코드만 있고 무엇을 답할지 묻는 말이 없으면 "이 코드를 실행하면 무엇이 출력될까요?"를 붙이고, 유형이 정해져 있지 않으면 예측 문제로 냅니다. 두 번째로 막힌 채점 줄은 아래 카드처럼 "다음 복습 퀴즈는 풀이부터 보여 줍니다"로 미리 알려 줍니다. 되묻기에 한 번 더 답하지 않은 채 새 퀴즈를 받아도, 남은 첫 답을 먼저 셉니다. 그 답이 두 번째 막힘이면 새 퀴즈가 바로 풀이 보고 풀기로 묻습니다. 바로잡았던 헷갈린 점을 나중에 다시 틀리면 처음부터 셉니다. 한 번이면 1.7처럼 다시 도전이고, 거기서 또 막혀야 풀이 보고 풀기입니다. 풀이를 보고 맞힌 것은 도움을 받은 것이라, 오른쪽 화면처럼 채점 줄에 "풀이 봄"이 붙고 단계는 그대로입니다. 같은 간격 뒤에 풀이 없이 다시 도전으로 한 번 더 묻고, 그때 맞히면 바로잡음입니다. 오른쪽 화면의 다음 문제는 "문제 2/3 · 비슷한 코드 · 예측"입니다. 내 코드의 qty &gt; 0을 qty &gt;= 2로 바꿔 물었습니다. 팀 용어 문제는 1.7처럼 팀 코드와 팀 설명으로 묻습니다. 두 칸은 haiku로 20문제씩 미리 재어 보고 켰습니다. 새 키와 새 설정은 없고 모델 호출 수도 그대로입니다. 풀이가 든 퀴즈만 문제 글이 조금 깁니다.</a:t>
+              <a:t>어떤 코드로 묻는지 보겠습니다. 같은 개념을 어떤 코드로 물을지는 학습자가 고르지 않습니다. 1.9.0은 모든 복습을 내 코드로 묻습니다. 1일, 3일 복습부터 7일, 14일, 그리고 30일과 60일 졸업 복습까지, 그 개념을 배운 노트의 내 코드를 그대로 보여 주고 묻습니다. 코드가 없는 개념은 "왜"로 묻습니다. 지난번 헷갈린 점이 남은 개념은 다음 퀴즈 맨 앞에 다시 도전으로 나오고, 같은 헷갈림이 드러나는 다른 코드나 값으로 묻습니다. 다시 도전에서 또 틀려도 다음 퀴즈는 다시 도전입니다. 풀이를 먼저 보여 주지 않고, 다른 코드나 값으로 한 번 더 묻습니다. 오른쪽은 예시 화면에서 기본 매개변수가 걸어온 사흘입니다. 첫날 퀴즈에서 틀려 헷갈린 점이 남았고, 다음 날 다시 도전에서 또 틀렸습니다. 그때 채점 줄은 아래 카드처럼 "같은 곳을 또 헷갈렸습니다"이고, 그 개념을 배운 노트가 패널에 있으면 "n: 이 개념을 배운 노트 · 거기서 r로 따라가기"가 붙습니다. 사흘째 복습은 같은 개념을 또 다른 코드인 makeTag로 물었고, 이번에는 맞혀서 "지난번 헷갈린 점을 바로잡았습니다"가 나왔습니다. 왼쪽 위가 그 화면입니다. 그 아래 둘째 문제는 7일 간격 단계에 있는 filter를 내 장바구니 코드 그대로 물은 "문제 2/3 · 바꿔 보기"입니다. 1.8.0을 써 보신 분께는 달라진 점이 둘 있습니다. 1.8.0은 7일 간격 단계부터 내 코드의 값이나 조건 한 곳을 바꾼 "비슷한 코드"로 물었고, 같은 곳에서 두 번 연달아 막힌 개념은 다음 복습에서 "풀이 보고 풀기"로 풀이부터 보여 주었습니다. 1.9.0은 두 칸을 모두 껐습니다. 플러그인이 haiku를 부르는 그대로 다시 재어 보니, 미리 정한 기준을 넘지 못했기 때문입니다. 풀이 보고 풀기는 출력 상한을 올린 뒤 한 번 더 재었지만, 미리 정해 둔 판정대로 세면 모범 답이 맞은 문제가 기준보다 하나 적었습니다. 모범 답이 틀릴 수 있는 문제로 초보자를 묻지 않으려는 것입니다. 그래서 문제 제목과 대화창의 /learn 퀴즈 목록에 "비슷한 코드"나 "풀이 보고 풀기"가 붙지 않고, 채점 줄에 "다음 복습 퀴즈는 풀이부터 보여 줍니다"도 붙지 않습니다. 1.8.0 창이 이미 만들어 둔 퀴즈의 비슷한 코드 문제와 풀이 보고 풀기 문제는 그대로 나오고 꼬리표도 보이며, 채점과 단계는 1.8.0과 같습니다. 풀이 보고 풀기 문제를 맞히면 "풀이 봄"이 붙고 단계는 그대로입니다. 새 키와 새 설정은 없고 모델 호출 수도 그대로입니다.</a:t>
             </a:r>
             <a:endParaRPr lang="en-US" dirty="0"/>
           </a:p>
@@ -1380,7 +1380,7 @@
           <a:p>
             <a:r>
               <a:rPr lang="en-US" dirty="0"/>
-              <a:t>간격 반복은 잊을 때쯤 다시 보여 주는 학습법입니다. 맞힐 때마다 1일, 3일, 7일, 14일, 30일, 60일로 간격이 늘어납니다. 앞 장에서 본 것처럼 7일 단계부터는 내 코드를 조금 바꾼 비슷한 코드로 묻습니다. 직접 떠올린 것만 복습으로 칩니다. 때가 된 개념을 답을 직접 적어 맞혀야 한 칸 오르고, 힌트나 풀이, 되묻기, 정답을 보고 맞히면 단계는 그대로이고 같은 간격 뒤에 다시 나옵니다. 노트에서 그 개념을 다시 만난 것은 복습 날짜를 바꾸지 않습니다. 거의 맞으면 한 칸 내려가고, 틀리면 처음 단계로 돌아갑니다. 퀴즈의 순서는 다시 도전할 개념, 때가 된 개념, 그다음 곧 때가 될 개념입니다. 팀 파일에 용어가 있는 저장소에서는 빈자리를 아직 안 만난 팀 용어가 채웁니다. 하루 복습은 10문제까지만 셉니다. 복습할 개념이 있으면 프롬프트 아래 상태줄에 "학습 노트 · 오늘 복습 3개 · /learn 복습"이 뜨고, 10문제를 채점하면 상태줄이 내려갑니다. 직접 해 보기는 이 10문제에 세지 않습니다. 60일 단계에서 때가 되어 또 맞히면 졸업해서 아는 개념이 됩니다. 아는 개념은 복습과 퀴즈에서 빠지고 다음 노트에서 다시 가르치지 않습니다. 이미 아는 개념은 /learn 안다 뒤에 이름을 적어 바로 뺄 수 있고, /learn 모른다로 되돌립니다.</a:t>
+              <a:t>간격 반복은 잊을 때쯤 다시 보여 주는 학습법입니다. 맞힐 때마다 1일, 3일, 7일, 14일, 30일, 60일로 간격이 늘어납니다. 앞 장에서 본 것처럼 30일, 60일 졸업 복습까지 모든 단계에서 내 코드로 묻습니다. 1.8.0은 7일 단계부터 코드를 조금 바꿔 물었지만, 1.9.0은 그 칸을 껐습니다. 직접 떠올린 것만 복습으로 칩니다. 때가 된 개념을 답을 직접 적어 맞혀야 한 칸 오르고, 힌트나 되묻기, 정답을 보고 맞히면 단계는 그대로이고 같은 간격 뒤에 다시 나옵니다. 노트에서 그 개념을 다시 만난 것은 복습 날짜를 바꾸지 않습니다. 거의 맞으면 한 칸 내려가고, 틀리면 처음 단계로 돌아갑니다. 퀴즈의 순서는 다시 도전할 개념, 때가 된 개념, 그다음 곧 때가 될 개념입니다. 팀 파일에 용어가 있는 저장소에서는 빈자리를 아직 안 만난 팀 용어가 채웁니다. 하루 복습은 10문제까지만 셉니다. 복습할 개념이 있으면 프롬프트 아래 상태줄에 "학습 노트 · 오늘 복습 3개 · /learn 복습"이 뜨고, 10문제를 채점하면 상태줄이 내려갑니다. 직접 해 보기는 이 10문제에 세지 않습니다. 60일 단계에서 때가 되어 또 맞히면 졸업해서 아는 개념이 됩니다. 아는 개념은 복습과 퀴즈에서 빠지고 다음 노트에서 다시 가르치지 않습니다. 이미 아는 개념은 /learn 안다 뒤에 이름을 적어 바로 뺄 수 있고, /learn 모른다로 되돌립니다.</a:t>
             </a:r>
             <a:endParaRPr lang="en-US" dirty="0"/>
           </a:p>
@@ -1644,7 +1644,7 @@
           <a:p>
             <a:r>
               <a:rPr lang="en-US" dirty="0"/>
-              <a:t>명령은 /learn 하나에 하위 명령을 붙입니다. 도움말은 1.6처럼 14줄이고, 1.7.0에서 /learn 공유, /learn 퀴즈 팀, /learn 진단이 들어갔습니다. 1.8.0의 새 명령은 리더가 쓰는 /learn 보고서 모으기 하나입니다. 도움말의 보고서 줄 끝에 붙어 있고, 영어로는 /learn report collect입니다. 조금 뒤 팀 학습 지도에서 봅니다. /learn 찾기와 /learn 일지는 "가끔" 줄로 내려갔지만 그대로 동작합니다. /learn 공유는 예전 /learn 마지막을 대신합니다. 옛 이름도 그대로 되고, 이제 노트 본문을 대화창에 적는 대신 요청은 빼고 경로는 줄인 복사 글을 클립보드에 넣습니다. /learn 퀴즈는 풀던 문제가 남아 있으면 모델을 부르지 않고 그 퀴즈를 다시 보여 주고, 새 문제는 /learn 퀴즈 새로로 받습니다. 번호 없이 답만 적으면 아직 안 푼 첫 문제로 채점합니다. /learn 저장은 이제 "노트는 저절로 저장됩니다"와 자주 쓰는 명령 한 줄로 답합니다. 패널이 없는 VS Code 확장, 패널이 보는 화면에 뜨지 않을 수 있는 클라우드 세션, 입력칸이 없는 모바일에서도 명령만으로 퀴즈를 받고 채점받고 질문할 수 있습니다. 대화 입력칸에 /learn 뒤 한 칸을 띄우면 복습, 퀴즈, 정리, 질문, 기록, 보고서, 공유, 진단, 도움말이 힌트로 보입니다.</a:t>
+              <a:t>명령은 /learn 하나에 하위 명령을 붙입니다. 도움말은 1.6처럼 14줄이고, 1.7.0에서 /learn 공유, /learn 퀴즈 팀, /learn 진단이 들어갔습니다. 1.8.0에서 리더가 쓰는 /learn 보고서 모으기가 생겼고, 1.9.0에는 새 명령이 없습니다. 도움말의 보고서 줄 끝에 붙어 있고, 영어로는 /learn report collect입니다. 조금 뒤 팀 학습 지도에서 봅니다. /learn 찾기와 /learn 일지는 "가끔" 줄로 내려갔지만 그대로 동작합니다. /learn 공유는 예전 /learn 마지막을 대신합니다. 옛 이름도 그대로 되고, 이제 노트 본문을 대화창에 적는 대신 요청은 빼고 경로는 줄인 복사 글을 클립보드에 넣습니다. /learn 퀴즈는 풀던 문제가 남아 있으면 모델을 부르지 않고 그 퀴즈를 다시 보여 주고, 새 문제는 /learn 퀴즈 새로로 받습니다. 번호 없이 답만 적으면 아직 안 푼 첫 문제로 채점합니다. /learn 저장은 이제 "노트는 저절로 저장됩니다"와 자주 쓰는 명령 한 줄로 답합니다. 패널이 없는 VS Code 확장, 패널이 보는 화면에 뜨지 않을 수 있는 클라우드 세션, 입력칸이 없는 모바일에서도 명령만으로 퀴즈를 받고 채점받고 질문할 수 있습니다. 대화 입력칸에 /learn 뒤 한 칸을 띄우면 복습, 퀴즈, 정리, 질문, 기록, 보고서, 공유, 진단, 도움말이 힌트로 보입니다.</a:t>
             </a:r>
             <a:endParaRPr lang="en-US" dirty="0"/>
           </a:p>
@@ -1820,7 +1820,7 @@
           <a:p>
             <a:r>
               <a:rPr lang="en-US" dirty="0"/>
-              <a:t>설치는 Claude Code 안에서 두 줄입니다. 처음 설치한 세션에서는 "learn-notes가 켜졌습니다" 알림이 한 번 뜹니다. 다시 시작한 뒤 터미널에서는 /tui fullscreen으로 전체 화면을 켜고 /learn으로 패널을 엽니다. 데스크톱 앱은 전체 화면을 켜지 않아도 오른쪽에 붙습니다. VS Code 확장에는 패널이 없으니 같은 폴더의 터미널(VS Code 아래 터미널도 됩니다)에서 claude를 켜 주세요. 패널의 키는 터미널에서는 ctrl+x tab이나 클릭, 데스크톱 앱에서는 클릭으로 옮기고, Esc를 누르면 대화 입력칸으로 돌아갑니다. 오늘 복습은 /learn 복습입니다. 그다음은 평소처럼 코딩을 요청하면 됩니다. 숫자 1부터 4는 한/영 상태와 상관없이 눌리지만, q, t, c 같은 글자 키는 영문 상태에서 눌러야 합니다. Windows에서는 작업할 폴더에서 Claude Code를 켜는 것만 기억해 주세요. 이미 설치한 분은 먼저 플러그인 목록을 새로 받아 두면 확실합니다. /plugin의 Marketplaces 탭에서 learn-notes를 골라 Update marketplace를 누르고, Installed 탭의 learn-notes에서 Update now를 누른 뒤 /reload-plugins를 합니다. Update now도 목록을 새로 받아 보지만, 그게 안 되면 옛 목록으로 판단합니다. 그 위의 Mark for update는 표시만 해 둡니다. PowerShell에서는 claude plugin marketplace update learn-notes 다음 claude plugin update learn-notes@learn-notes를 치고, 열려 있던 창에서 /reload-plugins를 하거나 다시 시작합니다. /learn 도움말 첫 줄이 "learn-notes 1.8.0 명령"이면 됩니다. 1.7.0부터는 다른 창이 더 새 버전을 쓰고 있으면 옛 창에 /reload-plugins 알림이 한 번 뜹니다. 이 알림은 1.7.0 창부터 보이므로, 1.6에서 올릴 때는 열려 있던 창마다 /reload-plugins를 한 번 하거나 다시 시작해 주세요.</a:t>
+              <a:t>설치는 Claude Code 안에서 두 줄입니다. 처음 설치한 세션에서는 "learn-notes가 켜졌습니다" 알림이 한 번 뜹니다. 다시 시작한 뒤 터미널에서는 /tui fullscreen으로 전체 화면을 켜고 /learn으로 패널을 엽니다. 데스크톱 앱은 전체 화면을 켜지 않아도 오른쪽에 붙습니다. VS Code 확장에는 패널이 없으니 같은 폴더의 터미널(VS Code 아래 터미널도 됩니다)에서 claude를 켜 주세요. 패널의 키는 터미널에서는 ctrl+x tab이나 클릭, 데스크톱 앱에서는 클릭으로 옮기고, Esc를 누르면 대화 입력칸으로 돌아갑니다. 오늘 복습은 /learn 복습입니다. 그다음은 평소처럼 코딩을 요청하면 됩니다. 숫자 1부터 4는 한/영 상태와 상관없이 눌리지만, q, t, c 같은 글자 키는 영문 상태에서 눌러야 합니다. Windows에서는 작업할 폴더에서 Claude Code를 켜는 것만 기억해 주세요. 이미 설치한 분은 먼저 플러그인 목록을 새로 받아 두면 확실합니다. /plugin의 Marketplaces 탭에서 learn-notes를 골라 Update marketplace를 누르고, Installed 탭의 learn-notes에서 Update now를 누른 뒤 /reload-plugins를 합니다. Update now도 목록을 새로 받아 보지만, 그게 안 되면 옛 목록으로 판단합니다. 그 위의 Mark for update는 표시만 해 둡니다. PowerShell에서는 claude plugin marketplace update learn-notes 다음 claude plugin update learn-notes@learn-notes를 치고, 열려 있던 창에서 /reload-plugins를 하거나 다시 시작합니다. /learn 도움말 첫 줄이 "learn-notes 1.9.0 명령"이면 됩니다. 1.7.0부터는 다른 창이 더 새 버전을 쓰고 있으면 옛 창에 /reload-plugins 알림이 한 번 뜹니다. 이 알림은 1.7.0 창부터 보이므로, 1.6에서 올릴 때는 열려 있던 창마다 /reload-plugins를 한 번 하거나 다시 시작해 주세요. 1.9.0으로 올리는 동안 아직 옛 판으로 열린 창이 있어도 학습 기록은 그대로 이어집니다. 회사에 깔 때 장에서 다시 봅니다.</a:t>
             </a:r>
             <a:endParaRPr lang="en-US" dirty="0"/>
           </a:p>
@@ -2172,7 +2172,7 @@
           <a:p>
             <a:r>
               <a:rPr lang="en-US" dirty="0"/>
-              <a:t>1.8.0의 새 명령, 리더가 쓰는 /learn 보고서 모으기입니다. 팀원은 매주 /learn 보고서를 리더에게만, DM이나 파일로 보냅니다. 리더는 받은 보고서를 .md나 .txt 파일 하나에 모아 저장합니다. 한 사람에 하나씩, 같은 기간으로, 이 저장소에서 만든 보고서를 모으면 됩니다. 그다음 /learn 보고서 모으기 뒤에 그 파일을 적습니다. 예를 들면 /learn 보고서 모으기 ~/Downloads/팀보고서.txt입니다. 도움말처럼 앞에 "파일"을 붙여 /learn 보고서 모으기 파일 ~/Downloads/팀보고서.txt로 쳐도 됩니다. ~는 홈 폴더이고, 상대 경로는 Claude Code를 켠 프로젝트 폴더를 기준으로 찾습니다. 따옴표로 감싼 경로나 Windows 경로, 앞에 @가 붙은 경로도 됩니다. 파일을 찾지 못하면 탐색기·Finder에 보이는 이름(다운로드·문서 폴더, 숨겨진 .txt)이 실제 경로와 다를 수 있다고 알려 줍니다. 이때는 Windows에서 Shift를 누른 채 파일을 오른쪽 클릭해 "경로로 복사"를, macOS에서 오른쪽 클릭 뒤 Option을 눌러 "경로 이름으로 복사"를 고른 뒤 붙여 넣으면 됩니다. Slack에서 복사한 글이나 카카오톡 대화 내보내기 파일도 읽고, 보낸 사람 이름과 시간은 읽지 않습니다. 1.6.0 이후에 만든 보고서를 읽습니다. 그러면 오른쪽 같은 팀 학습 지도를 만들어 클립보드에 복사합니다. 복사할 수 없는 화면에서는 대화창에 적습니다. 지도에는 사람별 줄이 없습니다. 사람 이름, 코드, 요청, 각자 쓴 "내 말로" 한 줄은 넣지 않고, 학습 노트 수, 평균 학습일, 퀴즈 정답률, 여럿이 새로 배운 개념과 다시 볼 개념, 팀 용어를 얼마나 만났는지, 모델 호출 수를 모아서 씁니다. 개념 이름은 보고서 3개 이상에 나온 것만 적고, 괄호 안 숫자는 그 보고서 수입니다. 같은 보고서가 두 번 들어 있으면 한 번만 세고, 형식이 맞지 않는 보고서와 기간이 겹치지 않는 보고서, 300개를 넘는 보고서는 빼고, 뺀 수를 답의 둘째 줄에 알려 줍니다. 보고서가 3개보다 적으면 지도를 만들지 않습니다. 팀 용어 줄은 지금 팀 파일과 같은 용어로 만든 보고서가 3개 이상일 때만 셉니다. 다른 저장소에서 만들었거나 팀 파일을 바꾸기 전에 만든 보고서가 많으면 "지금 팀 파일과 같은 용어 4개로 만든 보고서가 3개보다 적어 세지 않았습니다"처럼 적습니다. 맨 아래 "팀 파일 후보"는 여럿이 퀴즈에서 틀렸지만 팀 용어에 없는 개념입니다. 팀 파일의 ## 용어에 우리 팀 코드로 설명을 적으면 팀원의 퀴즈가 그 설명으로 묻습니다. 이 명령은 모델을 부르지 않고, 저장소에도 파일에도 쓰지 않습니다. 지도는 어디에도 저장하지 않습니다. 읽는 것은 적은 파일 하나뿐이고 2MB까지입니다. 폴더, 네트워크 위치, 권한 규칙이 막은 파일은 읽지 않습니다. 클라우드 세션은 내 컴퓨터의 파일을 읽을 수 없어 이 명령을 쓸 수 없습니다. 채널에 붙이기 전에 한 번 읽어 보세요.</a:t>
+              <a:t>1.8.0에서 생긴 명령, 리더가 쓰는 /learn 보고서 모으기입니다. 팀원은 매주 /learn 보고서를 리더에게만, DM이나 파일로 보냅니다. 리더는 받은 보고서를 .md나 .txt 파일 하나에 모아 저장합니다. 한 사람에 하나씩, 같은 기간으로, 이 저장소에서 만든 보고서를 모으면 됩니다. 그다음 /learn 보고서 모으기 뒤에 그 파일을 적습니다. 예를 들면 /learn 보고서 모으기 ~/Downloads/팀보고서.txt입니다. 도움말처럼 앞에 "파일"을 붙여 /learn 보고서 모으기 파일 ~/Downloads/팀보고서.txt로 쳐도 됩니다. ~는 홈 폴더이고, 상대 경로는 Claude Code를 켠 프로젝트 폴더를 기준으로 찾습니다. 따옴표로 감싼 경로나 Windows 경로, 앞에 @가 붙은 경로도 됩니다. 파일을 찾지 못하면 탐색기·Finder에 보이는 이름(다운로드·문서 폴더, 숨겨진 .txt)이 실제 경로와 다를 수 있다고 알려 줍니다. 이때는 Windows에서 Shift를 누른 채 파일을 오른쪽 클릭해 "경로로 복사"를, macOS에서 오른쪽 클릭 뒤 Option을 눌러 "경로 이름으로 복사"를 고른 뒤 붙여 넣으면 됩니다. Slack에서 복사한 글이나 카카오톡 대화 내보내기 파일도 읽고, 보낸 사람 이름과 시간은 읽지 않습니다. 1.6.0 이후에 만든 보고서를 읽습니다. 그러면 오른쪽 같은 팀 학습 지도를 만들어 클립보드에 복사합니다. 복사할 수 없는 화면에서는 대화창에 적습니다. 지도에는 사람별 줄이 없습니다. 사람 이름, 코드, 요청, 각자 쓴 "내 말로" 한 줄은 넣지 않고, 학습 노트 수, 평균 학습일, 퀴즈 정답률, 여럿이 새로 배운 개념과 다시 볼 개념, 팀 용어를 얼마나 만났는지, 모델 호출 수를 모아서 씁니다. 개념 이름은 보고서 3개 이상에 나온 것만 적고, 괄호 안 숫자는 그 보고서 수입니다. 같은 보고서가 두 번 들어 있으면 한 번만 세고, 형식이 맞지 않는 보고서와 기간이 겹치지 않는 보고서, 300개를 넘는 보고서는 빼고, 뺀 수를 답의 둘째 줄에 알려 줍니다. 보고서가 3개보다 적으면 지도를 만들지 않습니다. 팀 용어 줄은 지금 팀 파일과 같은 용어로 만든 보고서가 3개 이상일 때만 셉니다. 다른 저장소에서 만들었거나 팀 파일을 바꾸기 전에 만든 보고서가 많으면 "지금 팀 파일과 같은 용어 4개로 만든 보고서가 3개보다 적어 세지 않았습니다"처럼 적습니다. 맨 아래 "팀 파일 후보"는 여럿이 퀴즈에서 틀렸지만 팀 용어에 없는 개념입니다. 팀 파일의 ## 용어에 우리 팀 코드로 설명을 적으면 팀원의 퀴즈가 그 설명으로 묻습니다. 이 명령은 모델을 부르지 않고, 저장소에도 파일에도 쓰지 않습니다. 지도는 어디에도 저장하지 않습니다. 읽는 것은 적은 파일 하나뿐이고 2MB까지입니다. 폴더, 네트워크 위치, 권한 규칙이 막은 파일은 읽지 않습니다. 클라우드 세션은 내 컴퓨터의 파일을 읽을 수 없어 이 명령을 쓸 수 없습니다. 채널에 붙이기 전에 한 번 읽어 보세요.</a:t>
             </a:r>
             <a:endParaRPr lang="en-US" dirty="0"/>
           </a:p>
@@ -2260,7 +2260,7 @@
           <a:p>
             <a:r>
               <a:rPr lang="en-US" dirty="0"/>
-              <a:t>회사에 넓게 깔 때 담당자가 알아 두실 것입니다. 첫째, /learn 진단입니다. 노트가 안 생기거나 패널이 이상하면 대화창에 /learn 진단을 치게 해 주세요. 모델을 부르지 않고 버전, 다른 창의 버전, 화면, 설정(관리자가 잠근 값 표시), 오늘 노트·호출·실패 수, 저장소 크기, 최근 7일의 문제를 원인별로 정리해 클립보드에 복사하고 대화창에도 적습니다. 1.8.0부터는 오답 노트 줄이 하나 더 있습니다. 헷갈린 점이 몇 개인지, 그중 열린 것과 바로잡은 것, 유형 기타와 문장 없음, 그리고 "열린 채 두 번 이상", 곧 바로잡지 못한 채 연달아 두 번 이상 헷갈린 것(되묻기 뒤에 맞힌 것 포함)이 몇 개인지 개수만 셉니다. 코드, 요청, 파일 이름, 경로, 개념 이름, 헷갈린 점 문장은 들어 있지 않으니 팀 채널에 그대로 붙여도 됩니다. 복사할 수 없는 화면에서는 대화창에만 적습니다. 왼쪽 글은 예시 화면에서 뽑은 것입니다. 실패 알림도 원인을 말합니다. 디스크가 가득 찼는지, 폴더에 쓸 권한이 없는지, 로그인이 필요한지, 요청 한도에 걸렸는지를 나눠 알려 줍니다. 1.8.0부터는 Claude Code의 저장소가 크기 한도로 쓰기를 거절한 것도 알아듣고 "저장소가 4MB를 넘었습니다"로 알려 주며, 진단에는 "저장소 4MB 넘음"으로 나옵니다. 둘째, 버전 알림입니다. 업데이트한 뒤 다른 창이 더 새 버전을 쓰고 있으면, 옛 창에 흐린 줄과 토스트가 한 번 뜨고 /reload-plugins를 안내합니다. 저장소가 더 새 구조로 쓰였으면 옛 창은 다시 불러올 때까지 개념 모음과 복습 단계를 고치지 않고, 노트와 일지는 그대로 씁니다. 이 알림은 1.7.0 창부터 보입니다. 새 구조를 쓰는 판을 깔았다가 1.7로 되돌린 경우처럼 다시 불러와도 이 상태가 남으면, 알림 끝에 "다시 불러와도 계속되면 /learn 진단을 담당자에게 보내 주세요"가 붙고, 진단의 "다른 창" 줄에 저장소가 새 구조라는 것이 나옵니다. 창을 여러 개 열어 같은 퀴즈를 풀어도 첫 오답, 힌트, 채점이 사라지거나 두 번 세지지 않습니다. 다른 창에서 먼저 답한 문제에는 "이 문제는 그사이 다른 창에서 먼저 답했습니다. 한 번 더 적어 보세요."가 나옵니다. 셋째, 노트가 끊기지 않게 했습니다. 자동 노트가 서버 붐빔(529), 서버 오류, 연결 끊김, 시간 초과로 실패하면 노란 줄로 알리고 30초 뒤 한 번 더 씁니다. 두 번째도 실패하면 빨간 줄로 이유와 할 일을 알려 줍니다. 요청 한도에 걸린 것은 메인 세션과 나눠 쓰는 한도라 저절로 다시 쓰지 않습니다. /reload-plugins나 /config 변경 직후에 쓰다 멈춘 노트는 10분 안이면 저절로 이어 씁니다. w로 다시 쓰던 노트가 그렇게 끊기면 원래 노트로 돌아오고, "다시 불러오는 사이 노트 다시 쓰기가 끊겼습니다 · 원래 노트는 그대로입니다 · w로 다시 쓰기" 토스트가 한 번 뜹니다. 30초 뒤 다시 쓰기를 기다리는 동안 /learn 비우기를 확인하면, 그 노트는 다시 쓰지 않고 실패한 노트로 일지에 남깁니다. 구독 계정에서 5시간 사용 한도의 90%, 7일 한도의 95%를 넘으면 자동 노트를 미루고, w를 누르면 바로 씁니다. 이 문턱은 설정이 아니라 고정값입니다. 다시 쓴 호출은 모델 호출 수에는 들어가지만 하루 자동 노트 한도에는 세지 않습니다.</a:t>
+              <a:t>회사에 넓게 깔 때 담당자가 알아 두실 것입니다. 첫째, /learn 진단입니다. 노트가 안 생기거나 패널이 이상하면 대화창에 /learn 진단을 치게 해 주세요. 모델을 부르지 않고 버전, 다른 창의 버전, 화면, 설정(관리자가 잠근 값 표시), 오늘 노트·호출·실패 수, 저장소 크기, 오답 노트 개수, 최근 7일의 문제를 원인별로 정리해 클립보드에 복사하고 대화창에도 적습니다. 오답 노트 줄은 헷갈린 점이 몇 개인지, 그중 열린 것과 바로잡은 것, 유형 기타와 문장 없음, 그리고 "열린 채 두 번 이상", 곧 바로잡지 못한 채 연달아 두 번 이상 헷갈린 것(되묻기 뒤에 맞힌 것 포함)이 몇 개인지 개수만 셉니다. 코드, 요청, 파일 이름, 경로, 개념 이름, 헷갈린 점 문장은 들어 있지 않으니 팀 채널에 그대로 붙여도 됩니다. 복사할 수 없는 화면에서는 대화창에만 적습니다. 왼쪽 글은 예시 화면에서 뽑은 것으로, 다른 터미널에 아직 1.8.0 창이 열려 있던 기기의 진단입니다. 그래서 "다른 창" 줄에 1.8.0이 보입니다. 둘째, 버전이 섞인 팀입니다. 1.9.0부터는 진단의 저장소 줄 끝에 "옛 판 창의 개념 모음 쓰기"가 붙습니다. 1.9.0은 개념 모음을 쓸 때 자기가 썼다는 표식을 함께 남기고, 그 뒤 1.9.0보다 옛 판 창이 개념 모음을 다시 쓰면, 1.9.0 창이 그 개념 모음을 읽을 때 알아채서 셉니다. "없음 (10-03부터)"는 이 기기에서 1.9.0이 처음 개념 모음을 쓴 날부터 1.9.0 창이 옛 판 창의 쓰기를 보지 못했다는 뜻입니다. "마지막 10-05 01:30 (10-03부터 1번)"은 옛 판 창의 마지막 쓰기를 1.9.0 창이 처음 본 때와 그 횟수입니다. 옛 창이 쓴 시각이 아니고, 같은 쓰기를 다시 읽어도 바뀌지 않습니다. 저장소를 읽지 못하면 "읽지 못함"이라고 나옵니다. 이 기록에는 개념 이름이 없고, 같은 쓰기를 두 번 세지 않으려는 짧은 지문만 있습니다. 버전이 섞여 있어도 학습 기록은 이어집니다. 1.9.0은 옛 창이 읽는 안다 표시와 복습 단계의 사본을 계속 씁니다. 그래서 1.5부터 1.8까지의 창이 같은 기록을 함께 써도, 1.8.0 이하로 되돌려도 그대로 동작합니다. 1.9.0이 마지막으로 쓴 개념 모음에서는 그 사본을 읽지 않을 뿐입니다. 개념 모음을 쓸 때마다 저장소 읽기가 한 번 늘지만, 모델 호출은 아닙니다. 팀 전체의 진단에서 이 줄이 계속 "없음"이면, 뒷날 판이 사본 쓰기를 멈출 수 있는지 가늠하는 자료가 됩니다. 회사에 깐 뒤 진단을 받으시면 이 줄도 함께 봐 주세요. 업데이트한 뒤 다른 창이 더 새 버전을 쓰고 있으면, 옛 창에 흐린 줄과 토스트가 한 번 뜨고 /reload-plugins를 안내합니다. 저장소가 더 새 구조로 쓰였으면 옛 창은 다시 불러올 때까지 개념 모음과 복습 단계를 고치지 않고, 노트와 일지는 그대로 씁니다. 이 알림은 1.7.0 창부터 보입니다. 새 구조를 쓰는 판을 깔았다가 1.7로 되돌린 경우처럼 다시 불러와도 이 상태가 남으면, 알림 끝에 "다시 불러와도 계속되면 /learn 진단을 담당자에게 보내 주세요"가 붙고, 진단의 "다른 창" 줄에 저장소가 새 구조라는 것이 나옵니다. 창을 여러 개 열어 같은 퀴즈를 풀어도 첫 오답, 힌트, 채점이 사라지거나 두 번 세지지 않습니다. 다른 창에서 먼저 답한 문제에는 "이 문제는 그사이 다른 창에서 먼저 답했습니다. 한 번 더 적어 보세요."가 나옵니다. 실패 알림도 원인을 말합니다. 디스크가 가득 찼는지, 폴더에 쓸 권한이 없는지, 로그인이 필요한지, 요청 한도에 걸렸는지를 나눠 알려 줍니다. Claude Code의 저장소가 크기 한도로 쓰기를 거절한 것도 알아듣고 "저장소가 4MB를 넘었습니다"로 알려 주며, 진단에는 "저장소 4MB 넘음"으로 나옵니다. 셋째, 노트가 끊기지 않게 했습니다. 자동 노트가 서버 붐빔(529), 서버 오류, 연결 끊김, 시간 초과로 실패하면 노란 줄로 알리고 30초 뒤 한 번 더 씁니다. 두 번째도 실패하면 빨간 줄로 이유와 할 일을 알려 줍니다. 요청 한도에 걸린 것은 메인 세션과 나눠 쓰는 한도라 저절로 다시 쓰지 않습니다. /reload-plugins나 /config 변경 직후에 쓰다 멈춘 노트는 10분 안이면 저절로 이어 씁니다. w로 다시 쓰던 노트가 그렇게 끊기면 원래 노트로 돌아오고, "다시 불러오는 사이 노트 다시 쓰기가 끊겼습니다 · 원래 노트는 그대로입니다 · w로 다시 쓰기" 토스트가 한 번 뜹니다. 30초 뒤 다시 쓰기를 기다리는 동안 /learn 비우기를 확인하면, 그 노트는 다시 쓰지 않고 실패한 노트로 일지에 남깁니다. 구독 계정에서 5시간 사용 한도의 90%, 7일 한도의 95%를 넘으면 자동 노트를 미루고, w를 누르면 바로 씁니다. 이 문턱은 설정이 아니라 고정값입니다. 다시 쓴 호출은 모델 호출 수에는 들어가지만 하루 자동 노트 한도에는 세지 않습니다.</a:t>
             </a:r>
             <a:endParaRPr lang="en-US" dirty="0"/>
           </a:p>
@@ -2348,7 +2348,7 @@
           <a:p>
             <a:r>
               <a:rPr lang="en-US" dirty="0"/>
-              <a:t>비용은 파일을 바꾼 턴마다 작은 모델 호출 한 번이 기본입니다. 퀴즈, 채점, 질문, 정리는 쓸 때마다 한 번씩입니다. 1.7.0부터 더해진 것은 첫 오답의 두 번째 채점, 잠깐 오류로 실패한 자동 노트의 30초 뒤 한 번, 재로드로 끊긴 노트의 이어 쓰기 한 번입니다. 1.8.0은 모델 호출 수를 늘리지 않습니다. 풀이 보고 풀기가 든 퀴즈만 문제 글이 길어 출력 한도가 조금 큽니다. 노트 아래 헷갈린 개념 줄, /learn 기록의 같은 종류 줄, 진단의 오답 노트 줄, 보고서 모으기는 모델을 부르지 않습니다. 직접 해 보기는 고치지 않았거나 한글로 적었거나 예시 답과 같거나 모르겠어요면 호출이 없고, 그 밖에는 확인에 한 번, 한 번 더까지 많아야 두 번입니다. 기록, 보고서, 보고서 모으기, 힌트, 찾기, 복사, 진단은 모델을 부르지 않습니다. 뺀 파일만 바뀐 턴, JS나 CSS 같은 파일에서 띄어쓰기와 줄바꿈만 바뀐 턴도 모델을 부르지 않습니다. 하루 자동 노트 수는 dailyAutoNotes로 정할 수 있고, 사용량은 /learn 기록 맨 아래에 나옵니다. 노트와 기록은 모두 내 컴퓨터에만 저장됩니다. 다만 /learn 명령의 답은 대화창에 들어가 메인 Claude도 읽습니다. /learn 기록의 같은 종류 줄도 그렇고, 거기에는 종류와 개념 이름만 있습니다. /learn 보고서 모으기는 적은 파일 하나에서 숫자 줄과 개념·팀 용어 이름만 꺼내고 나머지는 버리며, 어디에도 저장하거나 쓰지 않습니다. 팀 용어에 적은 경로의 코드는 저장소 안 200KB 이하 파일만 읽고, 용어당 700자까지 가린 뒤 퀴즈 호출에 싣습니다. 비밀 파일과 wp-config.php, appsettings.json 같은 설정 파일은 팀 용어로 적어도 읽지 않습니다. 노트가 안 생기면 먼저 /learn 진단을 담당자에게 보내 주세요. 노란 줄은 다시 쓰기를 기다리는 중이라는 뜻이고, 빨간 줄은 이유와 할 일을 알려 줍니다. 숫자 1부터 4는 한/영과 상관없이 눌리고, 글자 키가 안 먹으면 한/영이 한글 상태인 경우가 많습니다. 그래도 안 되면 GitHub Issues나 팀 채널에 진단과 캡처를 남겨 주세요.</a:t>
+              <a:t>비용은 파일을 바꾼 턴마다 작은 모델 호출 한 번이 기본입니다. 퀴즈, 채점, 질문, 정리는 쓸 때마다 한 번씩입니다. 1.7.0부터 더해진 것은 첫 오답의 두 번째 채점, 잠깐 오류로 실패한 자동 노트의 30초 뒤 한 번, 재로드로 끊긴 노트의 이어 쓰기 한 번입니다. 1.8.0과 1.9.0은 모델 호출 수를 늘리지 않았습니다. 1.9.0은 모델에 보내는 새 문장이 없습니다. 프롬프트는 모두 1.8.0의 글로 만듭니다. 다만 7일 간격부터의 문제는 1.8.0의 내 코드 칸으로, 두 번 연달아 막힌 개념은 다시 도전 문항으로 가서 퀴즈 입력이 조금 달라질 수 있습니다. 크게 달라진 것은 노트와 퀴즈 호출의 출력 상한입니다. haiku는 답을 쓰기 전에 생각하는 몫도 출력 토큰으로 셉니다. 그래서 1.8.0의 노트 상한 1,500토큰에서는 견본 노트 106개 가운데 28개가 끝의 직접 해 보기가 잘리거나 빈 답으로 실패했습니다. 1.9.0은 노트 호출의 상한을 3,500토큰으로, 퀴즈 호출을 1,400에서 3,400토큰으로 올렸습니다. 상한은 쓴 만큼만 들기 때문에 노트 호출 하나의 출력은 약 4%, 퀴즈는 약 1% 늘고, 완성된 노트 하나로 보면 오히려 약 23% 줄어듭니다. 1.8.0에서 실패한 호출도 상한까지 출력을 다 썼기 때문입니다. 정리, 채점, 질문의 상한은 그대로입니다. 개념 모음을 쓸 때마다 저장소를 한 번 더 읽지만, 이것은 모델 호출이 아닙니다. 노트 아래 헷갈린 개념 줄, /learn 기록의 같은 종류 줄, 진단의 오답 노트 줄, 보고서 모으기는 모델을 부르지 않습니다. 직접 해 보기는 고치지 않았거나 한글로 적었거나 예시 답과 같거나 모르겠어요면 호출이 없고, 그 밖에는 확인에 한 번, 한 번 더까지 많아야 두 번입니다. 기록, 보고서, 보고서 모으기, 힌트, 찾기, 복사, 진단은 모델을 부르지 않습니다. 뺀 파일만 바뀐 턴, JS나 CSS 같은 파일에서 띄어쓰기와 줄바꿈만 바뀐 턴도 모델을 부르지 않습니다. 하루 자동 노트 수는 dailyAutoNotes로 정할 수 있고, 사용량은 /learn 기록 맨 아래에 나옵니다. 노트와 기록은 모두 내 컴퓨터에만 저장됩니다. 다만 /learn 명령의 답은 대화창에 들어가 메인 Claude도 읽습니다. /learn 기록의 같은 종류 줄도 그렇고, 거기에는 종류와 개념 이름만 있습니다. 1.9.0이 진단을 위해 저장소에 남기는 옛 판 창의 쓰기 기록에는 개념 이름이 없고, 시각과 횟수, 짧은 지문 하나뿐입니다. /learn 보고서 모으기는 적은 파일 하나에서 숫자 줄과 개념·팀 용어 이름만 꺼내고 나머지는 버리며, 어디에도 저장하거나 쓰지 않습니다. 팀 용어에 적은 경로의 코드는 저장소 안 200KB 이하 파일만 읽고, 용어당 700자까지 가린 뒤 퀴즈 호출에 싣습니다. 비밀 파일과 wp-config.php, appsettings.json 같은 설정 파일은 팀 용어로 적어도 읽지 않습니다. 노트가 안 생기면 먼저 /learn 진단을 담당자에게 보내 주세요. 노란 줄은 다시 쓰기를 기다리는 중이라는 뜻이고, 빨간 줄은 이유와 할 일을 알려 줍니다. 숫자 1부터 4는 한/영과 상관없이 눌리고, 글자 키가 안 먹으면 한/영이 한글 상태인 경우가 많습니다. 그래도 안 되면 GitHub Issues나 팀 채널에 진단과 캡처를 남겨 주세요.</a:t>
             </a:r>
             <a:endParaRPr lang="en-US" dirty="0"/>
           </a:p>
@@ -2524,7 +2524,7 @@
           <a:p>
             <a:r>
               <a:rPr lang="en-US" dirty="0"/>
-              <a:t>learn-notes가 하는 일은 네 단계입니다. Claude가 파일을 고칠 때 전후를 모으고, 턴이 끝나면 노트를 쓰고, 잊을 때쯤 내 코드로 퀴즈를 내고, 그 모든 것이 기록으로 쌓입니다. 퀴즈에서 틀리면 정답을 바로 보여 주지 않고 한 번 되물어 다시 떠올리게 합니다. 복습 단계가 오르면 문제도 조금씩 바뀌고, 같은 곳에서 두 번 연달아 막히면 다음에는 풀이부터 보여 줍니다. 사용자는 평소처럼 코딩을 요청하기만 하면 됩니다.</a:t>
+              <a:t>learn-notes가 하는 일은 네 단계입니다. Claude가 파일을 고칠 때 전후를 모으고, 턴이 끝나면 노트를 쓰고, 잊을 때쯤 내 코드로 퀴즈를 내고, 그 모든 것이 기록으로 쌓입니다. 퀴즈에서 틀리면 정답을 바로 보여 주지 않고 한 번 되물어 다시 떠올리게 합니다. 그래도 헷갈린 자리는 다음 퀴즈에서 다른 코드로 다시 묻습니다. 사용자는 평소처럼 코딩을 요청하기만 하면 됩니다.</a:t>
             </a:r>
             <a:endParaRPr lang="en-US" dirty="0"/>
           </a:p>
@@ -3052,7 +3052,7 @@
           <a:p>
             <a:r>
               <a:rPr lang="en-US" dirty="0"/>
-              <a:t>이제 learn-notes의 기능을 화면과 함께 보겠습니다. 화면은 모두 1.8.0의 실제 패널이고, 글은 haiku가 실제로 쓴 글입니다. 1.7.0에서 직접 해 보기, 퀴즈의 되묻기와 한 번 더, 오답 노트, 노트 복사, 팀 용어 연습이 생겼습니다. 1.8.0에서 새로 생긴 것은 세 가지입니다. 복습 단계에 따라 묻는 코드가 달라지는 문제 사다리(비슷한 코드, 풀이 보고 풀기), 노트 아래와 /learn 기록에 보이는 헷갈린 개념, 그리고 리더가 팀원의 보고서를 모아 만드는 팀 학습 지도입니다. 새 키와 새 설정은 없고, 새 명령은 /learn 보고서 모으기 하나입니다.</a:t>
+              <a:t>이제 learn-notes의 기능을 화면과 함께 보겠습니다. 화면은 모두 1.9.0의 실제 패널이고, 글은 haiku가 실제로 쓴 글입니다. 1.7.0에서 직접 해 보기, 퀴즈의 되묻기와 한 번 더, 오답 노트, 노트 복사, 팀 용어 연습이 생겼습니다. 1.8.0에서는 복습 단계에 따라 묻는 코드를 바꾸는 문제 사다리, 노트 아래와 /learn 기록에 보이는 헷갈린 개념, 리더가 팀원의 보고서를 모아 만드는 팀 학습 지도가 생겼습니다. 1.9.0은 학습 화면에 새 기능을 더하지 않았습니다. 가장 큰 변화는 1.8.0의 문제 사다리에 있던 두 칸, 비슷한 코드와 풀이 보고 풀기를 끈 것입니다. 이제 30일, 60일 졸업 복습까지 모두 내 코드로 묻고, 두 번 연달아 막힌 개념도 1.7처럼 다시 도전으로 묻습니다. 노트가 끝에서 잘리지 않도록 노트와 퀴즈 호출의 출력 상한도 올렸습니다. 그리고 버전이 섞인 팀을 위해 /learn 진단의 저장소 줄 끝에 "옛 판 창의 개념 모음 쓰기"가 붙습니다. 새 줄이 생기지는 않습니다. 새 키, 새 명령, 새 설정은 없습니다.</a:t>
             </a:r>
             <a:endParaRPr lang="en-US" dirty="0"/>
           </a:p>
@@ -3997,7 +3997,7 @@
                   <a:schemeClr val="accent6"/>
                 </a:solidFill>
               </a:rPr>
-              <a:t>learn-notes 1.8.0 — Claude가 고친 코드가 무엇을 어떻게 달라지게 했는지 턴마다 학습 노트로 보여 주고, 잊을 때쯤 내 코드로 퀴즈를 내며, 틀린 자리는 되물어 다시 풀게 하는 Claude Code 모드</a:t>
+              <a:t>learn-notes 1.9.0 — Claude가 고친 코드가 무엇을 어떻게 달라지게 했는지 턴마다 학습 노트로 보여 주고, 잊을 때쯤 내 코드로 퀴즈를 내며, 틀린 자리는 되물어 다시 풀게 하는 Claude Code 모드</a:t>
             </a:r>
             <a:endParaRPr lang="en-US" sz="1600" dirty="0"/>
           </a:p>
@@ -8251,7 +8251,7 @@
                   <a:schemeClr val="tx1"/>
                 </a:solidFill>
               </a:rPr>
-              <a:t>복습할 때가 된 개념부터, 그 개념을 배운 노트의 내 코드로 묻습니다(7일 단계부터는 조금 바꿔서). 한 번에 최대 3문제입니다.</a:t>
+              <a:t>복습할 때가 된 개념부터, 그 개념을 배운 노트의 내 코드로 묻습니다. 한 번에 최대 3문제입니다.</a:t>
             </a:r>
             <a:endParaRPr lang="en-US" sz="1450" dirty="0"/>
           </a:p>
@@ -10043,7 +10043,7 @@
                   <a:schemeClr val="tx2"/>
                 </a:solidFill>
               </a:rPr>
-              <a:t>힌트 봄 · 풀이 봄 · 되짚어 맞힘은 단계 그대로</a:t>
+              <a:t>힌트 봄 · 되짚어 맞힘은 단계 그대로</a:t>
             </a:r>
             <a:endParaRPr lang="en-US" sz="1300" dirty="0"/>
           </a:p>
@@ -10575,7 +10575,7 @@
                   <a:schemeClr val="tx1"/>
                 </a:solidFill>
               </a:rPr>
-              <a:t>"같은 곳을 또 헷갈렸습니다 · 다음 복습 퀴즈는 풀이부터 보여 줍니다" (다음 장)</a:t>
+              <a:t>"같은 곳을 또 헷갈렸습니다". 다음 퀴즈도 다시 도전으로 묻습니다 (다음 장)</a:t>
             </a:r>
             <a:endParaRPr lang="en-US" sz="1250" dirty="0"/>
           </a:p>
@@ -11038,7 +11038,7 @@
                   <a:schemeClr val="tx2"/>
                 </a:solidFill>
               </a:rPr>
-              <a:t>문제 사다리 — 단계가 오르면 묻는 코드가 바뀝니다</a:t>
+              <a:t>문제는 늘 내 코드로 — 두 번 막혀도 다시 도전</a:t>
             </a:r>
             <a:endParaRPr lang="en-US" sz="3000" dirty="0"/>
           </a:p>
@@ -11074,7 +11074,7 @@
                   <a:schemeClr val="tx1"/>
                 </a:solidFill>
               </a:rPr>
-              <a:t>같은 개념도 복습 단계에 따라 다른 코드로 묻습니다. 어느 칸으로 물을지는 내가 고르지 않고 단계가 정합니다.</a:t>
+              <a:t>어떤 코드로 물을지는 내가 고르지 않습니다. 1.9.0은 모든 복습을 내 코드로 묻고, 헷갈린 개념은 다시 도전으로 묻습니다.</a:t>
             </a:r>
             <a:endParaRPr lang="en-US" sz="1350" dirty="0"/>
           </a:p>
@@ -11171,7 +11171,7 @@
                   <a:schemeClr val="tx1"/>
                 </a:solidFill>
               </a:rPr>
-              <a:t>처음 두 단계(1일 · 3일 복습)는 그 개념을 배운 노트의 내 코드 그대로 묻습니다.</a:t>
+              <a:t>1일 복습부터 30 · 60일 졸업 복습까지, 그 개념을 배운 노트의 내 코드 그대로 묻습니다.</a:t>
             </a:r>
             <a:endParaRPr lang="en-US" sz="1250" dirty="0"/>
           </a:p>
@@ -11185,7 +11185,7 @@
         </p:nvSpPr>
         <p:spPr>
           <a:xfrm>
-            <a:off x="548640" y="3099816"/>
+            <a:off x="548640" y="3118104"/>
             <a:ext cx="64008" cy="822960"/>
           </a:xfrm>
           <a:prstGeom prst="rect">
@@ -11210,7 +11210,7 @@
         </p:nvSpPr>
         <p:spPr>
           <a:xfrm>
-            <a:off x="749808" y="3063240"/>
+            <a:off x="749808" y="3081528"/>
             <a:ext cx="3474720" cy="310896"/>
           </a:xfrm>
           <a:prstGeom prst="rect">
@@ -11232,7 +11232,7 @@
                   <a:schemeClr val="accent2"/>
                 </a:solidFill>
               </a:rPr>
-              <a:t>비슷한 코드</a:t>
+              <a:t>다시 도전</a:t>
             </a:r>
             <a:endParaRPr lang="en-US" sz="1500" dirty="0"/>
           </a:p>
@@ -11246,7 +11246,7 @@
         </p:nvSpPr>
         <p:spPr>
           <a:xfrm>
-            <a:off x="749808" y="3392424"/>
+            <a:off x="749808" y="3410712"/>
             <a:ext cx="3474720" cy="585216"/>
           </a:xfrm>
           <a:prstGeom prst="rect">
@@ -11268,7 +11268,7 @@
                   <a:schemeClr val="tx1"/>
                 </a:solidFill>
               </a:rPr>
-              <a:t>7일 단계부터는 내 코드의 값 · 조건 · 순서 한 곳을 바꿔 묻습니다. 외운 답이 아니라 원리로 맞히게 하려는 것입니다.</a:t>
+              <a:t>헷갈린 점이 남은 개념은 다음 퀴즈 맨 앞에서 다른 코드나 값으로 묻습니다.</a:t>
             </a:r>
             <a:endParaRPr lang="en-US" sz="1250" dirty="0"/>
           </a:p>
@@ -11282,10 +11282,435 @@
         </p:nvSpPr>
         <p:spPr>
           <a:xfrm>
-            <a:off x="548640" y="4041648"/>
+            <a:off x="548640" y="4078224"/>
             <a:ext cx="64008" cy="822960"/>
           </a:xfrm>
           <a:prstGeom prst="rect">
+            <a:avLst/>
+          </a:prstGeom>
+          <a:solidFill>
+            <a:schemeClr val="accent4"/>
+          </a:solidFill>
+          <a:ln w="12700">
+            <a:solidFill>
+              <a:schemeClr val="accent4"/>
+            </a:solidFill>
+            <a:prstDash val="solid"/>
+          </a:ln>
+        </p:spPr>
+      </p:sp>
+      <p:sp>
+        <p:nvSpPr>
+          <p:cNvPr id="11" name="Text 9"/>
+          <p:cNvSpPr txBox="1"/>
+          <p:nvPr/>
+        </p:nvSpPr>
+        <p:spPr>
+          <a:xfrm>
+            <a:off x="749808" y="4041648"/>
+            <a:ext cx="3474720" cy="310896"/>
+          </a:xfrm>
+          <a:prstGeom prst="rect">
+            <a:avLst/>
+          </a:prstGeom>
+          <a:noFill/>
+          <a:ln/>
+        </p:spPr>
+        <p:txBody>
+          <a:bodyPr wrap="square" lIns="0" tIns="0" rIns="0" bIns="0" rtlCol="0" anchor="t"/>
+          <a:lstStyle/>
+          <a:p>
+            <a:pPr indent="0" marL="0">
+              <a:buNone/>
+            </a:pPr>
+            <a:r>
+              <a:rPr lang="en-US" sz="1500" b="1" dirty="0">
+                <a:solidFill>
+                  <a:schemeClr val="accent4"/>
+                </a:solidFill>
+              </a:rPr>
+              <a:t>두 번 막혀도 다시 도전</a:t>
+            </a:r>
+            <a:endParaRPr lang="en-US" sz="1500" dirty="0"/>
+          </a:p>
+        </p:txBody>
+      </p:sp>
+      <p:sp>
+        <p:nvSpPr>
+          <p:cNvPr id="12" name="Text 10"/>
+          <p:cNvSpPr txBox="1"/>
+          <p:nvPr/>
+        </p:nvSpPr>
+        <p:spPr>
+          <a:xfrm>
+            <a:off x="749808" y="4370832"/>
+            <a:ext cx="3474720" cy="585216"/>
+          </a:xfrm>
+          <a:prstGeom prst="rect">
+            <a:avLst/>
+          </a:prstGeom>
+          <a:noFill/>
+          <a:ln/>
+        </p:spPr>
+        <p:txBody>
+          <a:bodyPr wrap="square" lIns="0" tIns="0" rIns="0" bIns="0" rtlCol="0" anchor="t"/>
+          <a:lstStyle/>
+          <a:p>
+            <a:pPr indent="0" marL="0">
+              <a:buNone/>
+            </a:pPr>
+            <a:r>
+              <a:rPr lang="en-US" sz="1250" dirty="0">
+                <a:solidFill>
+                  <a:schemeClr val="tx1"/>
+                </a:solidFill>
+              </a:rPr>
+              <a:t>또 틀려도 풀이를 먼저 보여 주지 않고, 다음 퀴즈에서 다른 코드로 한 번 더 묻습니다.</a:t>
+            </a:r>
+            <a:endParaRPr lang="en-US" sz="1250" dirty="0"/>
+          </a:p>
+        </p:txBody>
+      </p:sp>
+      <p:sp>
+        <p:nvSpPr>
+          <p:cNvPr id="13" name="rungs-off"/>
+          <p:cNvSpPr/>
+          <p:nvPr/>
+        </p:nvSpPr>
+        <p:spPr>
+          <a:xfrm>
+            <a:off x="548640" y="5047488"/>
+            <a:ext cx="3657600" cy="1060704"/>
+          </a:xfrm>
+          <a:prstGeom prst="roundRect">
+            <a:avLst>
+              <a:gd name="adj" fmla="val 8621"/>
+            </a:avLst>
+          </a:prstGeom>
+          <a:solidFill>
+            <a:schemeClr val="bg2"/>
+          </a:solidFill>
+          <a:ln w="9525">
+            <a:solidFill>
+              <a:schemeClr val="bg2"/>
+            </a:solidFill>
+            <a:prstDash val="solid"/>
+          </a:ln>
+        </p:spPr>
+      </p:sp>
+      <p:sp>
+        <p:nvSpPr>
+          <p:cNvPr id="14" name="Text 12"/>
+          <p:cNvSpPr txBox="1"/>
+          <p:nvPr/>
+        </p:nvSpPr>
+        <p:spPr>
+          <a:xfrm>
+            <a:off x="749808" y="5047488"/>
+            <a:ext cx="3291840" cy="1060704"/>
+          </a:xfrm>
+          <a:prstGeom prst="rect">
+            <a:avLst/>
+          </a:prstGeom>
+          <a:noFill/>
+          <a:ln/>
+        </p:spPr>
+        <p:txBody>
+          <a:bodyPr wrap="square" lIns="0" tIns="0" rIns="0" bIns="0" rtlCol="0" anchor="ctr"/>
+          <a:lstStyle/>
+          <a:p>
+            <a:pPr indent="0" marL="0">
+              <a:spcAft>
+                <a:spcPts val="200"/>
+              </a:spcAft>
+              <a:buNone/>
+            </a:pPr>
+            <a:r>
+              <a:rPr lang="en-US" sz="1300" b="1" dirty="0">
+                <a:solidFill>
+                  <a:schemeClr val="tx2"/>
+                </a:solidFill>
+              </a:rPr>
+              <a:t>1.9.0: 1.8.0의 두 칸은 껐습니다</a:t>
+            </a:r>
+            <a:endParaRPr lang="en-US" sz="1300" dirty="0"/>
+          </a:p>
+          <a:p>
+            <a:pPr indent="0" marL="0">
+              <a:spcAft>
+                <a:spcPts val="200"/>
+              </a:spcAft>
+              <a:buNone/>
+            </a:pPr>
+            <a:r>
+              <a:rPr lang="en-US" sz="1150" dirty="0">
+                <a:solidFill>
+                  <a:srgbClr val="5A6B70"/>
+                </a:solidFill>
+              </a:rPr>
+              <a:t>비슷한 코드 · 풀이 보고 풀기. 다시 재어 보니 기준을 넘지 못했습니다. 1.8.0 창이 만든 퀴즈의 그 문제는 그대로 나옵니다.</a:t>
+            </a:r>
+            <a:endParaRPr lang="en-US" sz="1300" dirty="0"/>
+          </a:p>
+        </p:txBody>
+      </p:sp>
+      <p:pic>
+        <p:nvPicPr>
+          <p:cNvPr id="15" name="step2-mended" descr="step2-mended">    </p:cNvPr>
+          <p:cNvPicPr>
+            <a:picLocks noChangeAspect="1"/>
+          </p:cNvPicPr>
+          <p:nvPr/>
+        </p:nvPicPr>
+        <p:blipFill>
+          <a:blip r:embed="rId1"/>
+          <a:stretch>
+            <a:fillRect/>
+          </a:stretch>
+        </p:blipFill>
+        <p:spPr>
+          <a:xfrm>
+            <a:off x="4434840" y="1325880"/>
+            <a:ext cx="3520440" cy="759857"/>
+          </a:xfrm>
+          <a:prstGeom prst="rect">
+            <a:avLst/>
+          </a:prstGeom>
+          <a:effectLst>
+            <a:outerShdw sx="100000" sy="100000" kx="0" ky="0" algn="bl" rotWithShape="0" blurRad="1.38624799340321e+46" dist="4.158743980209629e+45" dir="3.2651735040000005e+54">
+              <a:srgbClr val="0F3D3E">
+                <a:alpha val="2.8e+54"/>
+              </a:srgbClr>
+            </a:outerShdw>
+          </a:effectLst>
+        </p:spPr>
+      </p:pic>
+      <p:pic>
+        <p:nvPicPr>
+          <p:cNvPr id="16" name="step2-next" descr="step2-next">    </p:cNvPr>
+          <p:cNvPicPr>
+            <a:picLocks noChangeAspect="1"/>
+          </p:cNvPicPr>
+          <p:nvPr/>
+        </p:nvPicPr>
+        <p:blipFill>
+          <a:blip r:embed="rId2"/>
+          <a:stretch>
+            <a:fillRect/>
+          </a:stretch>
+        </p:blipFill>
+        <p:spPr>
+          <a:xfrm>
+            <a:off x="4434840" y="2177177"/>
+            <a:ext cx="3520440" cy="1951927"/>
+          </a:xfrm>
+          <a:prstGeom prst="rect">
+            <a:avLst/>
+          </a:prstGeom>
+          <a:effectLst>
+            <a:outerShdw sx="100000" sy="100000" kx="0" ky="0" algn="bl" rotWithShape="0" blurRad="1.7605349516220767e+50" dist="5.281604854866228e+49" dir="1.9591041024000004e+59">
+              <a:srgbClr val="0F3D3E">
+                <a:alpha val="2.8000000000000002e+59"/>
+              </a:srgbClr>
+            </a:outerShdw>
+          </a:effectLst>
+        </p:spPr>
+      </p:pic>
+      <p:sp>
+        <p:nvSpPr>
+          <p:cNvPr id="17" name="three-days"/>
+          <p:cNvSpPr/>
+          <p:nvPr/>
+        </p:nvSpPr>
+        <p:spPr>
+          <a:xfrm>
+            <a:off x="8119872" y="1325880"/>
+            <a:ext cx="3520440" cy="2803224"/>
+          </a:xfrm>
+          <a:prstGeom prst="roundRect">
+            <a:avLst>
+              <a:gd name="adj" fmla="val 3262"/>
+            </a:avLst>
+          </a:prstGeom>
+          <a:solidFill>
+            <a:schemeClr val="bg1"/>
+          </a:solidFill>
+          <a:ln w="12700">
+            <a:solidFill>
+              <a:srgbClr val="D9E3DF"/>
+            </a:solidFill>
+            <a:prstDash val="solid"/>
+          </a:ln>
+        </p:spPr>
+      </p:sp>
+      <p:sp>
+        <p:nvSpPr>
+          <p:cNvPr id="18" name="day-1"/>
+          <p:cNvSpPr/>
+          <p:nvPr/>
+        </p:nvSpPr>
+        <p:spPr>
+          <a:xfrm>
+            <a:off x="8302752" y="1481328"/>
+            <a:ext cx="329184" cy="329184"/>
+          </a:xfrm>
+          <a:prstGeom prst="ellipse">
+            <a:avLst/>
+          </a:prstGeom>
+          <a:solidFill>
+            <a:schemeClr val="accent4"/>
+          </a:solidFill>
+          <a:ln w="12700">
+            <a:solidFill>
+              <a:schemeClr val="accent4"/>
+            </a:solidFill>
+            <a:prstDash val="solid"/>
+          </a:ln>
+        </p:spPr>
+      </p:sp>
+      <p:sp>
+        <p:nvSpPr>
+          <p:cNvPr id="19" name="Text 15"/>
+          <p:cNvSpPr txBox="1"/>
+          <p:nvPr/>
+        </p:nvSpPr>
+        <p:spPr>
+          <a:xfrm>
+            <a:off x="8302752" y="1481328"/>
+            <a:ext cx="329184" cy="329184"/>
+          </a:xfrm>
+          <a:prstGeom prst="rect">
+            <a:avLst/>
+          </a:prstGeom>
+          <a:noFill/>
+          <a:ln/>
+        </p:spPr>
+        <p:txBody>
+          <a:bodyPr wrap="square" lIns="0" tIns="0" rIns="0" bIns="0" rtlCol="0" anchor="ctr"/>
+          <a:lstStyle/>
+          <a:p>
+            <a:pPr algn="ctr" indent="0" marL="0">
+              <a:buNone/>
+            </a:pPr>
+            <a:r>
+              <a:rPr lang="en-US" sz="1200" b="1" dirty="0">
+                <a:solidFill>
+                  <a:schemeClr val="bg1"/>
+                </a:solidFill>
+              </a:rPr>
+              <a:t>1</a:t>
+            </a:r>
+            <a:endParaRPr lang="en-US" sz="1200" dirty="0"/>
+          </a:p>
+        </p:txBody>
+      </p:sp>
+      <p:sp>
+        <p:nvSpPr>
+          <p:cNvPr id="20" name="day-line-1"/>
+          <p:cNvSpPr/>
+          <p:nvPr/>
+        </p:nvSpPr>
+        <p:spPr>
+          <a:xfrm>
+            <a:off x="8467344" y="1865376"/>
+            <a:ext cx="0" cy="385768"/>
+          </a:xfrm>
+          <a:prstGeom prst="line">
+            <a:avLst/>
+          </a:prstGeom>
+          <a:noFill/>
+          <a:ln w="19050">
+            <a:solidFill>
+              <a:srgbClr val="C5D3CE"/>
+            </a:solidFill>
+            <a:prstDash val="solid"/>
+          </a:ln>
+        </p:spPr>
+      </p:sp>
+      <p:sp>
+        <p:nvSpPr>
+          <p:cNvPr id="21" name="Text 17"/>
+          <p:cNvSpPr txBox="1"/>
+          <p:nvPr/>
+        </p:nvSpPr>
+        <p:spPr>
+          <a:xfrm>
+            <a:off x="8778240" y="1463040"/>
+            <a:ext cx="2697480" cy="329184"/>
+          </a:xfrm>
+          <a:prstGeom prst="rect">
+            <a:avLst/>
+          </a:prstGeom>
+          <a:noFill/>
+          <a:ln/>
+        </p:spPr>
+        <p:txBody>
+          <a:bodyPr wrap="square" lIns="0" tIns="0" rIns="0" bIns="0" rtlCol="0" anchor="ctr"/>
+          <a:lstStyle/>
+          <a:p>
+            <a:pPr indent="0" marL="0">
+              <a:buNone/>
+            </a:pPr>
+            <a:r>
+              <a:rPr lang="en-US" sz="1300" b="1" dirty="0">
+                <a:solidFill>
+                  <a:schemeClr val="tx2"/>
+                </a:solidFill>
+              </a:rPr>
+              <a:t>첫날 · 퀴즈</a:t>
+            </a:r>
+            <a:endParaRPr lang="en-US" sz="1300" dirty="0"/>
+          </a:p>
+        </p:txBody>
+      </p:sp>
+      <p:sp>
+        <p:nvSpPr>
+          <p:cNvPr id="22" name="Text 18"/>
+          <p:cNvSpPr txBox="1"/>
+          <p:nvPr/>
+        </p:nvSpPr>
+        <p:spPr>
+          <a:xfrm>
+            <a:off x="8778240" y="1828800"/>
+            <a:ext cx="2697480" cy="431488"/>
+          </a:xfrm>
+          <a:prstGeom prst="rect">
+            <a:avLst/>
+          </a:prstGeom>
+          <a:noFill/>
+          <a:ln/>
+        </p:spPr>
+        <p:txBody>
+          <a:bodyPr wrap="square" lIns="0" tIns="0" rIns="0" bIns="0" rtlCol="0" anchor="t"/>
+          <a:lstStyle/>
+          <a:p>
+            <a:pPr indent="0" marL="0">
+              <a:buNone/>
+            </a:pPr>
+            <a:r>
+              <a:rPr lang="en-US" sz="1150" dirty="0">
+                <a:solidFill>
+                  <a:schemeClr val="tx1"/>
+                </a:solidFill>
+              </a:rPr>
+              <a:t>✗ 틀림 → 헷갈린 점이 남음 (앞 장 ①)</a:t>
+            </a:r>
+            <a:endParaRPr lang="en-US" sz="1150" dirty="0"/>
+          </a:p>
+        </p:txBody>
+      </p:sp>
+      <p:sp>
+        <p:nvSpPr>
+          <p:cNvPr id="23" name="day-2"/>
+          <p:cNvSpPr/>
+          <p:nvPr/>
+        </p:nvSpPr>
+        <p:spPr>
+          <a:xfrm>
+            <a:off x="8302752" y="2324296"/>
+            <a:ext cx="329184" cy="329184"/>
+          </a:xfrm>
+          <a:prstGeom prst="ellipse">
             <a:avLst/>
           </a:prstGeom>
           <a:solidFill>
@@ -11301,14 +11726,109 @@
       </p:sp>
       <p:sp>
         <p:nvSpPr>
-          <p:cNvPr id="11" name="Text 9"/>
-          <p:cNvSpPr txBox="1"/>
-          <p:nvPr/>
-        </p:nvSpPr>
-        <p:spPr>
-          <a:xfrm>
-            <a:off x="749808" y="4005072"/>
-            <a:ext cx="3474720" cy="310896"/>
+          <p:cNvPr id="24" name="Text 20"/>
+          <p:cNvSpPr txBox="1"/>
+          <p:nvPr/>
+        </p:nvSpPr>
+        <p:spPr>
+          <a:xfrm>
+            <a:off x="8302752" y="2324296"/>
+            <a:ext cx="329184" cy="329184"/>
+          </a:xfrm>
+          <a:prstGeom prst="rect">
+            <a:avLst/>
+          </a:prstGeom>
+          <a:noFill/>
+          <a:ln/>
+        </p:spPr>
+        <p:txBody>
+          <a:bodyPr wrap="square" lIns="0" tIns="0" rIns="0" bIns="0" rtlCol="0" anchor="ctr"/>
+          <a:lstStyle/>
+          <a:p>
+            <a:pPr algn="ctr" indent="0" marL="0">
+              <a:buNone/>
+            </a:pPr>
+            <a:r>
+              <a:rPr lang="en-US" sz="1200" b="1" dirty="0">
+                <a:solidFill>
+                  <a:schemeClr val="bg1"/>
+                </a:solidFill>
+              </a:rPr>
+              <a:t>2</a:t>
+            </a:r>
+            <a:endParaRPr lang="en-US" sz="1200" dirty="0"/>
+          </a:p>
+        </p:txBody>
+      </p:sp>
+      <p:sp>
+        <p:nvSpPr>
+          <p:cNvPr id="25" name="day-line-2"/>
+          <p:cNvSpPr/>
+          <p:nvPr/>
+        </p:nvSpPr>
+        <p:spPr>
+          <a:xfrm>
+            <a:off x="8467344" y="2708344"/>
+            <a:ext cx="0" cy="385768"/>
+          </a:xfrm>
+          <a:prstGeom prst="line">
+            <a:avLst/>
+          </a:prstGeom>
+          <a:noFill/>
+          <a:ln w="19050">
+            <a:solidFill>
+              <a:srgbClr val="C5D3CE"/>
+            </a:solidFill>
+            <a:prstDash val="solid"/>
+          </a:ln>
+        </p:spPr>
+      </p:sp>
+      <p:sp>
+        <p:nvSpPr>
+          <p:cNvPr id="26" name="Text 22"/>
+          <p:cNvSpPr txBox="1"/>
+          <p:nvPr/>
+        </p:nvSpPr>
+        <p:spPr>
+          <a:xfrm>
+            <a:off x="8778240" y="2306008"/>
+            <a:ext cx="2697480" cy="329184"/>
+          </a:xfrm>
+          <a:prstGeom prst="rect">
+            <a:avLst/>
+          </a:prstGeom>
+          <a:noFill/>
+          <a:ln/>
+        </p:spPr>
+        <p:txBody>
+          <a:bodyPr wrap="square" lIns="0" tIns="0" rIns="0" bIns="0" rtlCol="0" anchor="ctr"/>
+          <a:lstStyle/>
+          <a:p>
+            <a:pPr indent="0" marL="0">
+              <a:buNone/>
+            </a:pPr>
+            <a:r>
+              <a:rPr lang="en-US" sz="1300" b="1" dirty="0">
+                <a:solidFill>
+                  <a:schemeClr val="tx2"/>
+                </a:solidFill>
+              </a:rPr>
+              <a:t>다음 날 · 다시 도전</a:t>
+            </a:r>
+            <a:endParaRPr lang="en-US" sz="1300" dirty="0"/>
+          </a:p>
+        </p:txBody>
+      </p:sp>
+      <p:sp>
+        <p:nvSpPr>
+          <p:cNvPr id="27" name="Text 23"/>
+          <p:cNvSpPr txBox="1"/>
+          <p:nvPr/>
+        </p:nvSpPr>
+        <p:spPr>
+          <a:xfrm>
+            <a:off x="8778240" y="2671768"/>
+            <a:ext cx="2697480" cy="431488"/>
           </a:xfrm>
           <a:prstGeom prst="rect">
             <a:avLst/>
@@ -11324,65 +11844,29 @@
               <a:buNone/>
             </a:pPr>
             <a:r>
-              <a:rPr lang="en-US" sz="1500" b="1" dirty="0">
-                <a:solidFill>
-                  <a:schemeClr val="accent5"/>
-                </a:solidFill>
-              </a:rPr>
-              <a:t>풀이 보고 풀기</a:t>
-            </a:r>
-            <a:endParaRPr lang="en-US" sz="1500" dirty="0"/>
-          </a:p>
-        </p:txBody>
-      </p:sp>
-      <p:sp>
-        <p:nvSpPr>
-          <p:cNvPr id="12" name="Text 10"/>
-          <p:cNvSpPr txBox="1"/>
-          <p:nvPr/>
-        </p:nvSpPr>
-        <p:spPr>
-          <a:xfrm>
-            <a:off x="749808" y="4334256"/>
-            <a:ext cx="3474720" cy="585216"/>
-          </a:xfrm>
-          <a:prstGeom prst="rect">
-            <a:avLst/>
-          </a:prstGeom>
-          <a:noFill/>
-          <a:ln/>
-        </p:spPr>
-        <p:txBody>
-          <a:bodyPr wrap="square" lIns="0" tIns="0" rIns="0" bIns="0" rtlCol="0" anchor="t"/>
-          <a:lstStyle/>
-          <a:p>
-            <a:pPr indent="0" marL="0">
-              <a:buNone/>
-            </a:pPr>
-            <a:r>
-              <a:rPr lang="en-US" sz="1250" dirty="0">
+              <a:rPr lang="en-US" sz="1150" dirty="0">
                 <a:solidFill>
                   <a:schemeClr val="tx1"/>
                 </a:solidFill>
               </a:rPr>
-              <a:t>같은 곳에서 두 번 연달아 막히면, 다음 복습 퀴즈가 풀이부터 보여 주고 묻습니다.</a:t>
-            </a:r>
-            <a:endParaRPr lang="en-US" sz="1250" dirty="0"/>
-          </a:p>
-        </p:txBody>
-      </p:sp>
-      <p:sp>
-        <p:nvSpPr>
-          <p:cNvPr id="13" name="rung-bar-3"/>
+              <a:t>다른 코드로 물었지만 또 틀림 → 같은 곳을 또 헷갈렸습니다</a:t>
+            </a:r>
+            <a:endParaRPr lang="en-US" sz="1150" dirty="0"/>
+          </a:p>
+        </p:txBody>
+      </p:sp>
+      <p:sp>
+        <p:nvSpPr>
+          <p:cNvPr id="28" name="day-3"/>
           <p:cNvSpPr/>
           <p:nvPr/>
         </p:nvSpPr>
         <p:spPr>
           <a:xfrm>
-            <a:off x="548640" y="4983480"/>
-            <a:ext cx="64008" cy="822960"/>
-          </a:xfrm>
-          <a:prstGeom prst="rect">
+            <a:off x="8302752" y="3167264"/>
+            <a:ext cx="329184" cy="329184"/>
+          </a:xfrm>
+          <a:prstGeom prst="ellipse">
             <a:avLst/>
           </a:prstGeom>
           <a:solidFill>
@@ -11398,14 +11882,86 @@
       </p:sp>
       <p:sp>
         <p:nvSpPr>
-          <p:cNvPr id="14" name="Text 12"/>
-          <p:cNvSpPr txBox="1"/>
-          <p:nvPr/>
-        </p:nvSpPr>
-        <p:spPr>
-          <a:xfrm>
-            <a:off x="749808" y="4946904"/>
-            <a:ext cx="3474720" cy="310896"/>
+          <p:cNvPr id="29" name="Text 25"/>
+          <p:cNvSpPr txBox="1"/>
+          <p:nvPr/>
+        </p:nvSpPr>
+        <p:spPr>
+          <a:xfrm>
+            <a:off x="8302752" y="3167264"/>
+            <a:ext cx="329184" cy="329184"/>
+          </a:xfrm>
+          <a:prstGeom prst="rect">
+            <a:avLst/>
+          </a:prstGeom>
+          <a:noFill/>
+          <a:ln/>
+        </p:spPr>
+        <p:txBody>
+          <a:bodyPr wrap="square" lIns="0" tIns="0" rIns="0" bIns="0" rtlCol="0" anchor="ctr"/>
+          <a:lstStyle/>
+          <a:p>
+            <a:pPr algn="ctr" indent="0" marL="0">
+              <a:buNone/>
+            </a:pPr>
+            <a:r>
+              <a:rPr lang="en-US" sz="1200" b="1" dirty="0">
+                <a:solidFill>
+                  <a:schemeClr val="bg1"/>
+                </a:solidFill>
+              </a:rPr>
+              <a:t>3</a:t>
+            </a:r>
+            <a:endParaRPr lang="en-US" sz="1200" dirty="0"/>
+          </a:p>
+        </p:txBody>
+      </p:sp>
+      <p:sp>
+        <p:nvSpPr>
+          <p:cNvPr id="30" name="Text 26"/>
+          <p:cNvSpPr txBox="1"/>
+          <p:nvPr/>
+        </p:nvSpPr>
+        <p:spPr>
+          <a:xfrm>
+            <a:off x="8778240" y="3148976"/>
+            <a:ext cx="2697480" cy="329184"/>
+          </a:xfrm>
+          <a:prstGeom prst="rect">
+            <a:avLst/>
+          </a:prstGeom>
+          <a:noFill/>
+          <a:ln/>
+        </p:spPr>
+        <p:txBody>
+          <a:bodyPr wrap="square" lIns="0" tIns="0" rIns="0" bIns="0" rtlCol="0" anchor="ctr"/>
+          <a:lstStyle/>
+          <a:p>
+            <a:pPr indent="0" marL="0">
+              <a:buNone/>
+            </a:pPr>
+            <a:r>
+              <a:rPr lang="en-US" sz="1300" b="1" dirty="0">
+                <a:solidFill>
+                  <a:schemeClr val="tx2"/>
+                </a:solidFill>
+              </a:rPr>
+              <a:t>사흘째 · 다시 도전</a:t>
+            </a:r>
+            <a:endParaRPr lang="en-US" sz="1300" dirty="0"/>
+          </a:p>
+        </p:txBody>
+      </p:sp>
+      <p:sp>
+        <p:nvSpPr>
+          <p:cNvPr id="31" name="Text 27"/>
+          <p:cNvSpPr txBox="1"/>
+          <p:nvPr/>
+        </p:nvSpPr>
+        <p:spPr>
+          <a:xfrm>
+            <a:off x="8778240" y="3514736"/>
+            <a:ext cx="2697480" cy="431488"/>
           </a:xfrm>
           <a:prstGeom prst="rect">
             <a:avLst/>
@@ -11421,27 +11977,27 @@
               <a:buNone/>
             </a:pPr>
             <a:r>
-              <a:rPr lang="en-US" sz="1500" b="1" dirty="0">
-                <a:solidFill>
-                  <a:schemeClr val="accent1"/>
-                </a:solidFill>
-              </a:rPr>
-              <a:t>맞혀도 단계 그대로</a:t>
-            </a:r>
-            <a:endParaRPr lang="en-US" sz="1500" dirty="0"/>
-          </a:p>
-        </p:txBody>
-      </p:sp>
-      <p:sp>
-        <p:nvSpPr>
-          <p:cNvPr id="15" name="Text 13"/>
-          <p:cNvSpPr txBox="1"/>
-          <p:nvPr/>
-        </p:nvSpPr>
-        <p:spPr>
-          <a:xfrm>
-            <a:off x="749808" y="5276088"/>
-            <a:ext cx="3474720" cy="585216"/>
+              <a:rPr lang="en-US" sz="1150" dirty="0">
+                <a:solidFill>
+                  <a:schemeClr val="tx1"/>
+                </a:solidFill>
+              </a:rPr>
+              <a:t>또 다른 코드로 물어 맞힘 → ✓ 지난번 헷갈린 점을 바로잡았습니다 (왼쪽 위)</a:t>
+            </a:r>
+            <a:endParaRPr lang="en-US" sz="1150" dirty="0"/>
+          </a:p>
+        </p:txBody>
+      </p:sp>
+      <p:sp>
+        <p:nvSpPr>
+          <p:cNvPr id="32" name="Text 28"/>
+          <p:cNvSpPr txBox="1"/>
+          <p:nvPr/>
+        </p:nvSpPr>
+        <p:spPr>
+          <a:xfrm>
+            <a:off x="4434840" y="4220544"/>
+            <a:ext cx="3520440" cy="274320"/>
           </a:xfrm>
           <a:prstGeom prst="rect">
             <a:avLst/>
@@ -11453,92 +12009,30 @@
           <a:bodyPr wrap="square" lIns="0" tIns="0" rIns="0" bIns="0" rtlCol="0" anchor="t"/>
           <a:lstStyle/>
           <a:p>
-            <a:pPr indent="0" marL="0">
-              <a:buNone/>
-            </a:pPr>
-            <a:r>
-              <a:rPr lang="en-US" sz="1250" dirty="0">
-                <a:solidFill>
-                  <a:schemeClr val="tx1"/>
-                </a:solidFill>
-              </a:rPr>
-              <a:t>채점 줄에 "· 풀이 봄". 같은 간격 뒤 풀이 없이 다시 도전으로 한 번 더 묻습니다.</a:t>
-            </a:r>
-            <a:endParaRPr lang="en-US" sz="1250" dirty="0"/>
-          </a:p>
-        </p:txBody>
-      </p:sp>
-      <p:pic>
-        <p:nvPicPr>
-          <p:cNvPr id="16" name="worked-pane" descr="worked-pane">    </p:cNvPr>
-          <p:cNvPicPr>
-            <a:picLocks noChangeAspect="1"/>
-          </p:cNvPicPr>
-          <p:nvPr/>
-        </p:nvPicPr>
-        <p:blipFill>
-          <a:blip r:embed="rId1"/>
-          <a:stretch>
-            <a:fillRect/>
-          </a:stretch>
-        </p:blipFill>
-        <p:spPr>
-          <a:xfrm>
-            <a:off x="4434840" y="1325880"/>
-            <a:ext cx="3520440" cy="2683900"/>
-          </a:xfrm>
-          <a:prstGeom prst="rect">
-            <a:avLst/>
-          </a:prstGeom>
-          <a:effectLst>
-            <a:outerShdw sx="100000" sy="100000" kx="0" ky="0" algn="bl" rotWithShape="0" blurRad="1.38624799340321e+46" dist="4.158743980209629e+45" dir="3.2651735040000005e+54">
-              <a:srgbClr val="0F3D3E">
-                <a:alpha val="2.8e+54"/>
-              </a:srgbClr>
-            </a:outerShdw>
-          </a:effectLst>
-        </p:spPr>
-      </p:pic>
-      <p:pic>
-        <p:nvPicPr>
-          <p:cNvPr id="17" name="similar-pane" descr="similar-pane">    </p:cNvPr>
-          <p:cNvPicPr>
-            <a:picLocks noChangeAspect="1"/>
-          </p:cNvPicPr>
-          <p:nvPr/>
-        </p:nvPicPr>
-        <p:blipFill>
-          <a:blip r:embed="rId2"/>
-          <a:stretch>
-            <a:fillRect/>
-          </a:stretch>
-        </p:blipFill>
-        <p:spPr>
-          <a:xfrm>
-            <a:off x="8119872" y="1325880"/>
-            <a:ext cx="3520440" cy="3015030"/>
-          </a:xfrm>
-          <a:prstGeom prst="rect">
-            <a:avLst/>
-          </a:prstGeom>
-          <a:effectLst>
-            <a:outerShdw sx="100000" sy="100000" kx="0" ky="0" algn="bl" rotWithShape="0" blurRad="1.7605349516220767e+50" dist="5.281604854866228e+49" dir="1.9591041024000004e+59">
-              <a:srgbClr val="0F3D3E">
-                <a:alpha val="2.8000000000000002e+59"/>
-              </a:srgbClr>
-            </a:outerShdw>
-          </a:effectLst>
-        </p:spPr>
-      </p:pic>
-      <p:sp>
-        <p:nvSpPr>
-          <p:cNvPr id="18" name="Text 14"/>
-          <p:cNvSpPr txBox="1"/>
-          <p:nvPr/>
-        </p:nvSpPr>
-        <p:spPr>
-          <a:xfrm>
-            <a:off x="4434840" y="4432350"/>
+            <a:pPr algn="ctr" indent="0" marL="0">
+              <a:buNone/>
+            </a:pPr>
+            <a:r>
+              <a:rPr lang="en-US" sz="1200" b="1" dirty="0">
+                <a:solidFill>
+                  <a:schemeClr val="tx2"/>
+                </a:solidFill>
+              </a:rPr>
+              <a:t>사흘째: 바로잡고, 다음 문제는 내 코드</a:t>
+            </a:r>
+            <a:endParaRPr lang="en-US" sz="1200" dirty="0"/>
+          </a:p>
+        </p:txBody>
+      </p:sp>
+      <p:sp>
+        <p:nvSpPr>
+          <p:cNvPr id="33" name="Text 29"/>
+          <p:cNvSpPr txBox="1"/>
+          <p:nvPr/>
+        </p:nvSpPr>
+        <p:spPr>
+          <a:xfrm>
+            <a:off x="8119872" y="4220544"/>
             <a:ext cx="3520440" cy="274320"/>
           </a:xfrm>
           <a:prstGeom prst="rect">
@@ -11560,7 +12054,7 @@
                   <a:schemeClr val="tx2"/>
                 </a:solidFill>
               </a:rPr>
-              <a:t>① 두 번 막힌 개념: 풀이 보고 풀기</a:t>
+              <a:t>예시 화면의 기본 매개변수가 걸어온 사흘</a:t>
             </a:r>
             <a:endParaRPr lang="en-US" sz="1200" dirty="0"/>
           </a:p>
@@ -11568,54 +12062,18 @@
       </p:sp>
       <p:sp>
         <p:nvSpPr>
-          <p:cNvPr id="19" name="Text 15"/>
-          <p:cNvSpPr txBox="1"/>
-          <p:nvPr/>
-        </p:nvSpPr>
-        <p:spPr>
-          <a:xfrm>
-            <a:off x="8119872" y="4432350"/>
-            <a:ext cx="3520440" cy="274320"/>
-          </a:xfrm>
-          <a:prstGeom prst="rect">
-            <a:avLst/>
-          </a:prstGeom>
-          <a:noFill/>
-          <a:ln/>
-        </p:spPr>
-        <p:txBody>
-          <a:bodyPr wrap="square" lIns="0" tIns="0" rIns="0" bIns="0" rtlCol="0" anchor="t"/>
-          <a:lstStyle/>
-          <a:p>
-            <a:pPr algn="ctr" indent="0" marL="0">
-              <a:buNone/>
-            </a:pPr>
-            <a:r>
-              <a:rPr lang="en-US" sz="1200" b="1" dirty="0">
-                <a:solidFill>
-                  <a:schemeClr val="tx2"/>
-                </a:solidFill>
-              </a:rPr>
-              <a:t>② 맞히면 · 풀이 봄, 다음 문제는 비슷한 코드</a:t>
-            </a:r>
-            <a:endParaRPr lang="en-US" sz="1200" dirty="0"/>
-          </a:p>
-        </p:txBody>
-      </p:sp>
-      <p:sp>
-        <p:nvSpPr>
-          <p:cNvPr id="20" name="worked-next"/>
+          <p:cNvPr id="34" name="again-line"/>
           <p:cNvSpPr/>
           <p:nvPr/>
         </p:nvSpPr>
         <p:spPr>
           <a:xfrm>
-            <a:off x="4434840" y="4843830"/>
-            <a:ext cx="7205472" cy="1264362"/>
+            <a:off x="4434840" y="4604592"/>
+            <a:ext cx="7205472" cy="1503600"/>
           </a:xfrm>
           <a:prstGeom prst="roundRect">
             <a:avLst>
-              <a:gd name="adj" fmla="val 7232"/>
+              <a:gd name="adj" fmla="val 6081"/>
             </a:avLst>
           </a:prstGeom>
           <a:solidFill>
@@ -11631,14 +12089,14 @@
       </p:sp>
       <p:sp>
         <p:nvSpPr>
-          <p:cNvPr id="21" name="Text 17"/>
-          <p:cNvSpPr txBox="1"/>
-          <p:nvPr/>
-        </p:nvSpPr>
-        <p:spPr>
-          <a:xfrm>
-            <a:off x="4663440" y="4843830"/>
-            <a:ext cx="6812280" cy="1264362"/>
+          <p:cNvPr id="35" name="Text 31"/>
+          <p:cNvSpPr txBox="1"/>
+          <p:nvPr/>
+        </p:nvSpPr>
+        <p:spPr>
+          <a:xfrm>
+            <a:off x="4663440" y="4604592"/>
+            <a:ext cx="6812280" cy="1503600"/>
           </a:xfrm>
           <a:prstGeom prst="rect">
             <a:avLst/>
@@ -11652,53 +12110,70 @@
           <a:p>
             <a:pPr indent="0" marL="0">
               <a:spcAft>
-                <a:spcPts val="300"/>
+                <a:spcPts val="600"/>
               </a:spcAft>
               <a:buNone/>
             </a:pPr>
             <a:r>
-              <a:rPr lang="en-US" sz="1350" b="1" dirty="0">
+              <a:rPr lang="en-US" sz="1450" b="1" dirty="0">
                 <a:solidFill>
                   <a:srgbClr val="A8650B"/>
                 </a:solidFill>
               </a:rPr>
-              <a:t>두 번째로 막힌 채점 줄이 미리 알려 줍니다</a:t>
-            </a:r>
-            <a:endParaRPr lang="en-US" sz="1350" dirty="0"/>
+              <a:t>다음 날, 다시 도전에서 또 틀린 채점 줄</a:t>
+            </a:r>
+            <a:endParaRPr lang="en-US" sz="1450" dirty="0"/>
           </a:p>
           <a:p>
             <a:pPr indent="0" marL="0">
               <a:spcAft>
-                <a:spcPts val="300"/>
+                <a:spcPts val="600"/>
               </a:spcAft>
               <a:buNone/>
             </a:pPr>
             <a:r>
-              <a:rPr lang="en-US" sz="1200" dirty="0">
+              <a:rPr lang="en-US" sz="1450" dirty="0">
                 <a:solidFill>
                   <a:schemeClr val="tx1"/>
                 </a:solidFill>
               </a:rPr>
-              <a:t>같은 곳을 또 헷갈렸습니다 · n: 이 개념을 배운 노트 · 다음 복습 퀴즈는 풀이부터 보여 줍니다</a:t>
-            </a:r>
-            <a:endParaRPr lang="en-US" sz="1350" dirty="0"/>
+              <a:t>같은 곳을 또 헷갈렸습니다 · n: 이 개념을 배운 노트 · 거기서 r로 따라가기</a:t>
+            </a:r>
+            <a:endParaRPr lang="en-US" sz="1450" dirty="0"/>
           </a:p>
           <a:p>
             <a:pPr indent="0" marL="0">
               <a:spcAft>
-                <a:spcPts val="300"/>
+                <a:spcPts val="600"/>
               </a:spcAft>
               <a:buNone/>
             </a:pPr>
             <a:r>
-              <a:rPr lang="en-US" sz="1150" dirty="0">
+              <a:rPr lang="en-US" sz="1200" dirty="0">
                 <a:solidFill>
                   <a:srgbClr val="5A6B70"/>
                 </a:solidFill>
               </a:rPr>
-              <a:t>팀 용어 문제는 1.7처럼 묻습니다 · 새 키 · 새 설정 없음 · 모델 호출 수는 그대로</a:t>
-            </a:r>
-            <a:endParaRPr lang="en-US" sz="1350" dirty="0"/>
+              <a:t>그 노트가 패널에 없으면 "같은 곳을 또 헷갈렸습니다"까지입니다. 1.8.0이 붙이던 "다음 복습 퀴즈는 풀이부터 보여 줍니다"는 붙지 않습니다.</a:t>
+            </a:r>
+            <a:endParaRPr lang="en-US" sz="1450" dirty="0"/>
+          </a:p>
+          <a:p>
+            <a:pPr indent="0" marL="0">
+              <a:spcAft>
+                <a:spcPts val="600"/>
+              </a:spcAft>
+              <a:buNone/>
+            </a:pPr>
+            <a:r>
+              <a:rPr lang="en-US" sz="1200" dirty="0">
+                <a:solidFill>
+                  <a:srgbClr val="5A6B70"/>
+                </a:solidFill>
+              </a:rPr>
+              <a:t>새 키 · 새 설정 없음 · 모델 호출 수 그대로</a:t>
+            </a:r>
+            <a:endParaRPr lang="en-US" sz="1450" dirty="0"/>
           </a:p>
         </p:txBody>
       </p:sp>
@@ -11840,7 +12315,7 @@
                   <a:schemeClr val="tx1"/>
                 </a:solidFill>
               </a:rPr>
-              <a:t>직접 떠올려 맞힐 때만 다음 복습까지의 간격이 늘어납니다. 7일 단계부터는 비슷한 코드로 묻고, 60일 단계에서 또 맞히면 졸업입니다.</a:t>
+              <a:t>직접 떠올려 맞힐 때만 다음 복습까지의 간격이 늘어납니다. 7일 · 30일 · 60일 복습도 내 코드로 묻고, 60일 단계에서 또 맞히면 졸업입니다.</a:t>
             </a:r>
             <a:endParaRPr lang="en-US" sz="1600" dirty="0"/>
           </a:p>
@@ -12774,7 +13249,7 @@
                   <a:schemeClr val="tx1"/>
                 </a:solidFill>
               </a:rPr>
-              <a:t>답을 직접 적어 맞혀야 한 칸 오릅니다. 힌트 · 풀이 · 되묻기 · 정답을 보고 맞히면 단계는 그대로입니다. 노트에서 다시 만난 것도 날짜를 바꾸지 않습니다.</a:t>
+              <a:t>답을 직접 적어 맞혀야 한 칸 오릅니다. 힌트 · 되묻기 · 정답을 보고 맞히면 단계는 그대로입니다. 노트에서 다시 만난 것도 날짜를 바꾸지 않습니다.</a:t>
             </a:r>
             <a:endParaRPr lang="en-US" sz="1300" dirty="0"/>
           </a:p>
@@ -17350,7 +17825,7 @@
                   <a:srgbClr val="5A6B70"/>
                 </a:solidFill>
               </a:rPr>
-              <a:t>/learn 도움말 첫 줄 "learn-notes 1.8.0 명령"으로 확인</a:t>
+              <a:t>/learn 도움말 첫 줄 "learn-notes 1.9.0 명령"으로 확인</a:t>
             </a:r>
             <a:endParaRPr lang="en-US" sz="1200" dirty="0"/>
           </a:p>
@@ -19518,6 +19993,61 @@
       </p:pic>
       <p:sp>
         <p:nvSpPr>
+          <p:cNvPr id="13" name="Text 9"/>
+          <p:cNvSpPr txBox="1"/>
+          <p:nvPr/>
+        </p:nvSpPr>
+        <p:spPr>
+          <a:xfrm>
+            <a:off x="6629400" y="5459287"/>
+            <a:ext cx="5010912" cy="457200"/>
+          </a:xfrm>
+          <a:prstGeom prst="rect">
+            <a:avLst/>
+          </a:prstGeom>
+          <a:noFill/>
+          <a:ln/>
+        </p:spPr>
+        <p:txBody>
+          <a:bodyPr wrap="square" lIns="0" tIns="0" rIns="0" bIns="0" rtlCol="0" anchor="t"/>
+          <a:lstStyle/>
+          <a:p>
+            <a:pPr indent="0" marL="0">
+              <a:buNone/>
+            </a:pPr>
+            <a:r>
+              <a:rPr lang="en-US" sz="1200" b="1" dirty="0">
+                <a:solidFill>
+                  <a:schemeClr val="accent1"/>
+                </a:solidFill>
+                <a:latin typeface="Courier New" pitchFamily="34" charset="0"/>
+                <a:ea typeface="Courier New" pitchFamily="34" charset="-122"/>
+                <a:cs typeface="Courier New" pitchFamily="34" charset="-120"/>
+              </a:rPr>
+              <a:t>/learn</a:t>
+            </a:r>
+            <a:r>
+              <a:rPr lang="en-US" sz="1200" b="1" dirty="0">
+                <a:solidFill>
+                  <a:schemeClr val="accent1"/>
+                </a:solidFill>
+              </a:rPr>
+              <a:t> 퀴즈 팀</a:t>
+            </a:r>
+            <a:r>
+              <a:rPr lang="en-US" sz="1200" dirty="0">
+                <a:solidFill>
+                  <a:srgbClr val="5A6B70"/>
+                </a:solidFill>
+              </a:rPr>
+              <a:t>의 대화창 답도 문제마다 "(팀 용어 · 팀 노트 orders.md 1~12줄)"처럼 어디서 물었는지 붙입니다.</a:t>
+            </a:r>
+            <a:endParaRPr lang="en-US" sz="1200" dirty="0"/>
+          </a:p>
+        </p:txBody>
+      </p:sp>
+      <p:sp>
+        <p:nvSpPr>
           <p:cNvPr id="25" name="Slide Number Placeholder 0"/>
           <p:cNvSpPr>
             <a:spLocks noGrp="1"/>
@@ -19673,7 +20203,7 @@
                   <a:schemeClr val="tx2"/>
                 </a:solidFill>
               </a:rPr>
-              <a:t>   리더가 쓰는 새 명령</a:t>
+              <a:t>   리더용 (1.8.0부터)</a:t>
             </a:r>
             <a:endParaRPr lang="en-US" sz="1800" dirty="0"/>
           </a:p>
@@ -20672,8 +21202,8 @@
         </p:nvSpPr>
         <p:spPr>
           <a:xfrm>
-            <a:off x="548640" y="1801368"/>
-            <a:ext cx="5760720" cy="603504"/>
+            <a:off x="548640" y="1783080"/>
+            <a:ext cx="5760720" cy="457200"/>
           </a:xfrm>
           <a:prstGeom prst="rect">
             <a:avLst/>
@@ -20694,7 +21224,7 @@
                   <a:schemeClr val="tx1"/>
                 </a:solidFill>
               </a:rPr>
-              <a:t>모델을 부르지 않고 만들어 클립보드에 복사하고 대화창에도 적습니다. 코드 · 요청 · 파일 이름 · 경로 · 개념 이름 · 헷갈린 점 문장은 들어 있지 않습니다(오답 노트는 개수만).</a:t>
+              <a:t>모델을 부르지 않고 만들어 클립보드에 복사하고 대화창에도 적습니다. 코드 · 요청 · 파일 이름 · 경로 · 개념 이름 · 헷갈린 점 문장은 들어 있지 않습니다.</a:t>
             </a:r>
             <a:endParaRPr lang="en-US" sz="1250" dirty="0"/>
           </a:p>
@@ -20708,12 +21238,12 @@
         </p:nvSpPr>
         <p:spPr>
           <a:xfrm>
-            <a:off x="548640" y="2468880"/>
-            <a:ext cx="5760720" cy="3017520"/>
+            <a:off x="548640" y="2304288"/>
+            <a:ext cx="5760720" cy="2670048"/>
           </a:xfrm>
           <a:prstGeom prst="roundRect">
             <a:avLst>
-              <a:gd name="adj" fmla="val 2424"/>
+              <a:gd name="adj" fmla="val 2740"/>
             </a:avLst>
           </a:prstGeom>
           <a:solidFill>
@@ -20735,8 +21265,8 @@
         </p:nvSpPr>
         <p:spPr>
           <a:xfrm>
-            <a:off x="822960" y="2468880"/>
-            <a:ext cx="5303520" cy="3017520"/>
+            <a:off x="822960" y="2304288"/>
+            <a:ext cx="5303520" cy="2670048"/>
           </a:xfrm>
           <a:prstGeom prst="rect">
             <a:avLst/>
@@ -20757,7 +21287,7 @@
                   <a:srgbClr val="D6DDD6"/>
                 </a:solidFill>
               </a:rPr>
-              <a:t>learn-notes 진단 · 2026-10-03 05:12</a:t>
+              <a:t>learn-notes 진단 · 2026-10-05 01:30</a:t>
             </a:r>
             <a:endParaRPr lang="en-US" sz="1100" dirty="0"/>
           </a:p>
@@ -20771,7 +21301,7 @@
                   <a:srgbClr val="D6DDD6"/>
                 </a:solidFill>
               </a:rPr>
-              <a:t>- 버전: learn-notes 1.8.0 · Claude Code 2.1.302</a:t>
+              <a:t>- 버전: learn-notes 1.9.0 · Claude Code 2.1.302</a:t>
             </a:r>
             <a:endParaRPr lang="en-US" sz="1100" dirty="0"/>
           </a:p>
@@ -20785,7 +21315,15 @@
                   <a:srgbClr val="D6DDD6"/>
                 </a:solidFill>
               </a:rPr>
-              <a:t>- 다른 창: 없음</a:t>
+              <a:t>- 다른 창: </a:t>
+            </a:r>
+            <a:r>
+              <a:rPr lang="en-US" sz="1100" b="1" dirty="0">
+                <a:solidFill>
+                  <a:srgbClr val="F2C46D"/>
+                </a:solidFill>
+              </a:rPr>
+              <a:t>1.8.0 (12시간 전)</a:t>
             </a:r>
             <a:endParaRPr lang="en-US" sz="1100" dirty="0"/>
           </a:p>
@@ -20827,7 +21365,7 @@
                   <a:srgbClr val="D6DDD6"/>
                 </a:solidFill>
               </a:rPr>
-              <a:t>- 오늘: 노트 1개 · 모델 호출 12번 · 실패 1번</a:t>
+              <a:t>- 오늘: 노트 0개 · 모델 호출 6번 · 실패 0번</a:t>
             </a:r>
             <a:endParaRPr lang="en-US" sz="1100" dirty="0"/>
           </a:p>
@@ -20841,7 +21379,15 @@
                   <a:srgbClr val="D6DDD6"/>
                 </a:solidFill>
               </a:rPr>
-              <a:t>- 저장소: 22KB / 4MB (history 11KB · quiz 5KB · quizBank 2KB)</a:t>
+              <a:t>- 저장소: 30KB / 4MB (history 14KB · quizBank 5KB · quiz 5KB)</a:t>
+            </a:r>
+            <a:r>
+              <a:rPr lang="en-US" sz="1100" b="1" dirty="0">
+                <a:solidFill>
+                  <a:srgbClr val="F2C46D"/>
+                </a:solidFill>
+              </a:rPr>
+              <a:t> · 옛 판 창의 개념 모음 쓰기: 마지막 10-05 01:30 (10-03부터 1번)</a:t>
             </a:r>
             <a:endParaRPr lang="en-US" sz="1100" dirty="0"/>
           </a:p>
@@ -20869,7 +21415,7 @@
                   <a:srgbClr val="D6DDD6"/>
                 </a:solidFill>
               </a:rPr>
-              <a:t>- 오답 노트 2개 (열림 2 · 바로잡음 0) · 유형 기타 0 · 문장 없음 0 · 열린 채 두 번 이상 0</a:t>
+              <a:t>- 오답 노트 5개 (열림 2 · 바로잡음 3) · 유형 기타 0 · 문장 없음 0 · 열린 채 두 번 이상 0</a:t>
             </a:r>
             <a:endParaRPr lang="en-US" sz="1100" dirty="0"/>
           </a:p>
@@ -20901,61 +21447,127 @@
             </a:r>
             <a:endParaRPr lang="en-US" sz="1100" dirty="0"/>
           </a:p>
+        </p:txBody>
+      </p:sp>
+      <p:sp>
+        <p:nvSpPr>
+          <p:cNvPr id="7" name="old-writes"/>
+          <p:cNvSpPr/>
+          <p:nvPr/>
+        </p:nvSpPr>
+        <p:spPr>
+          <a:xfrm>
+            <a:off x="548640" y="5084064"/>
+            <a:ext cx="5760720" cy="1024128"/>
+          </a:xfrm>
+          <a:prstGeom prst="roundRect">
+            <a:avLst>
+              <a:gd name="adj" fmla="val 8929"/>
+            </a:avLst>
+          </a:prstGeom>
+          <a:solidFill>
+            <a:srgbClr val="FDF3E2"/>
+          </a:solidFill>
+          <a:ln w="9525">
+            <a:solidFill>
+              <a:srgbClr val="FDF3E2"/>
+            </a:solidFill>
+            <a:prstDash val="solid"/>
+          </a:ln>
+        </p:spPr>
+      </p:sp>
+      <p:sp>
+        <p:nvSpPr>
+          <p:cNvPr id="8" name="Text 6"/>
+          <p:cNvSpPr txBox="1"/>
+          <p:nvPr/>
+        </p:nvSpPr>
+        <p:spPr>
+          <a:xfrm>
+            <a:off x="777240" y="5084064"/>
+            <a:ext cx="5440680" cy="1024128"/>
+          </a:xfrm>
+          <a:prstGeom prst="rect">
+            <a:avLst/>
+          </a:prstGeom>
+          <a:noFill/>
+          <a:ln/>
+        </p:spPr>
+        <p:txBody>
+          <a:bodyPr wrap="square" lIns="0" tIns="0" rIns="0" bIns="0" rtlCol="0" anchor="ctr"/>
+          <a:lstStyle/>
           <a:p>
             <a:pPr indent="0" marL="0">
-              <a:buNone/>
-            </a:pPr>
-            <a:r>
-              <a:rPr lang="en-US" sz="1100" dirty="0">
-                <a:solidFill>
-                  <a:srgbClr val="D6DDD6"/>
-                </a:solidFill>
-              </a:rPr>
-              <a:t>- 패널 초점(최근 7일): 스크롤 거절 ×2 · 마지막 10-03 05:12</a:t>
-            </a:r>
-            <a:endParaRPr lang="en-US" sz="1100" dirty="0"/>
-          </a:p>
-        </p:txBody>
-      </p:sp>
-      <p:sp>
-        <p:nvSpPr>
-          <p:cNvPr id="7" name="Text 5"/>
-          <p:cNvSpPr txBox="1"/>
-          <p:nvPr/>
-        </p:nvSpPr>
-        <p:spPr>
-          <a:xfrm>
-            <a:off x="548640" y="5559552"/>
-            <a:ext cx="5760720" cy="548640"/>
-          </a:xfrm>
-          <a:prstGeom prst="rect">
-            <a:avLst/>
-          </a:prstGeom>
-          <a:noFill/>
-          <a:ln/>
-        </p:spPr>
-        <p:txBody>
-          <a:bodyPr wrap="square" lIns="0" tIns="0" rIns="0" bIns="0" rtlCol="0" anchor="t"/>
-          <a:lstStyle/>
+              <a:spcAft>
+                <a:spcPts val="300"/>
+              </a:spcAft>
+              <a:buNone/>
+            </a:pPr>
+            <a:r>
+              <a:rPr lang="en-US" sz="1150" b="1" dirty="0">
+                <a:solidFill>
+                  <a:srgbClr val="A8650B"/>
+                </a:solidFill>
+              </a:rPr>
+              <a:t>저장소 줄 끝 · 옛 판 창의 개념 모음 쓰기 (1.9.0)</a:t>
+            </a:r>
+            <a:endParaRPr lang="en-US" sz="1150" dirty="0"/>
+          </a:p>
           <a:p>
             <a:pPr indent="0" marL="0">
-              <a:buNone/>
-            </a:pPr>
-            <a:r>
-              <a:rPr lang="en-US" sz="1250" dirty="0">
-                <a:solidFill>
-                  <a:srgbClr val="5A6B70"/>
-                </a:solidFill>
-              </a:rPr>
-              <a:t>예시 화면의 진단 글입니다(설정 줄은 줄임). 노트가 안 생기면 먼저 /learn 진단을 팀 채널이나 담당자에게 붙여 주세요.</a:t>
-            </a:r>
-            <a:endParaRPr lang="en-US" sz="1250" dirty="0"/>
-          </a:p>
-        </p:txBody>
-      </p:sp>
-      <p:sp>
-        <p:nvSpPr>
-          <p:cNvPr id="8" name="outline"/>
+              <a:spcAft>
+                <a:spcPts val="300"/>
+              </a:spcAft>
+              <a:buNone/>
+            </a:pPr>
+            <a:r>
+              <a:rPr lang="en-US" sz="1150" b="1" dirty="0">
+                <a:solidFill>
+                  <a:schemeClr val="tx1"/>
+                </a:solidFill>
+              </a:rPr>
+              <a:t>없음 (10-03부터)</a:t>
+            </a:r>
+            <a:r>
+              <a:rPr lang="en-US" sz="1150" dirty="0">
+                <a:solidFill>
+                  <a:schemeClr val="tx1"/>
+                </a:solidFill>
+              </a:rPr>
+              <a:t>   그날부터 1.9.0 창이 옛 판 창의 쓰기를 보지 못했습니다</a:t>
+            </a:r>
+            <a:endParaRPr lang="en-US" sz="1150" dirty="0"/>
+          </a:p>
+          <a:p>
+            <a:pPr indent="0" marL="0">
+              <a:spcAft>
+                <a:spcPts val="300"/>
+              </a:spcAft>
+              <a:buNone/>
+            </a:pPr>
+            <a:r>
+              <a:rPr lang="en-US" sz="1150" b="1" dirty="0">
+                <a:solidFill>
+                  <a:schemeClr val="tx1"/>
+                </a:solidFill>
+              </a:rPr>
+              <a:t>마지막 10-05 01:30 (10-03부터 1번)</a:t>
+            </a:r>
+            <a:r>
+              <a:rPr lang="en-US" sz="1150" dirty="0">
+                <a:solidFill>
+                  <a:schemeClr val="tx1"/>
+                </a:solidFill>
+              </a:rPr>
+              <a:t>   옛 판 창의 마지막 쓰기를 1.9.0 창이 처음 본 때와 본 횟수(대략)</a:t>
+            </a:r>
+            <a:endParaRPr lang="en-US" sz="1150" dirty="0"/>
+          </a:p>
+        </p:txBody>
+      </p:sp>
+      <p:sp>
+        <p:nvSpPr>
+          <p:cNvPr id="9" name="outline"/>
           <p:cNvSpPr/>
           <p:nvPr/>
         </p:nvSpPr>
@@ -20982,7 +21594,7 @@
       </p:sp>
       <p:sp>
         <p:nvSpPr>
-          <p:cNvPr id="9" name="badge-LuRefreshCw"/>
+          <p:cNvPr id="10" name="badge-LuUsers"/>
           <p:cNvSpPr/>
           <p:nvPr/>
         </p:nvSpPr>
@@ -21007,7 +21619,7 @@
       </p:sp>
       <p:pic>
         <p:nvPicPr>
-          <p:cNvPr id="10" name="icon-LuRefreshCw" descr="LuRefreshCw">    </p:cNvPr>
+          <p:cNvPr id="11" name="icon-LuUsers" descr="LuUsers">    </p:cNvPr>
           <p:cNvPicPr>
             <a:picLocks noChangeAspect="1"/>
           </p:cNvPicPr>
@@ -21031,7 +21643,7 @@
       </p:pic>
       <p:sp>
         <p:nvSpPr>
-          <p:cNvPr id="11" name="Text 8"/>
+          <p:cNvPr id="12" name="Text 9"/>
           <p:cNvSpPr txBox="1"/>
           <p:nvPr/>
         </p:nvSpPr>
@@ -21059,7 +21671,7 @@
                   <a:schemeClr val="tx2"/>
                 </a:solidFill>
               </a:rPr>
-              <a:t>옛 창에는 다시 불러오기 알림</a:t>
+              <a:t>버전이 섞인 팀도 그대로</a:t>
             </a:r>
             <a:endParaRPr lang="en-US" sz="1550" dirty="0"/>
           </a:p>
@@ -21067,7 +21679,7 @@
       </p:sp>
       <p:sp>
         <p:nvSpPr>
-          <p:cNvPr id="12" name="Text 9"/>
+          <p:cNvPr id="13" name="Text 10"/>
           <p:cNvSpPr txBox="1"/>
           <p:nvPr/>
         </p:nvSpPr>
@@ -21095,7 +21707,7 @@
                   <a:schemeClr val="tx1"/>
                 </a:solidFill>
               </a:rPr>
-              <a:t>다른 창이 더 새 버전이면 흐린 줄과 토스트가 한 번: "… /reload-plugins로 바꿉니다"</a:t>
+              <a:t>1.5~1.8 창과 같은 기록을 써도, 1.8.0 이하로 되돌려도 됩니다. 1.7 · 1.8 창에는 /reload-plugins 알림이 한 번 뜹니다.</a:t>
             </a:r>
             <a:endParaRPr lang="en-US" sz="1200" dirty="0"/>
           </a:p>
@@ -21103,7 +21715,7 @@
       </p:sp>
       <p:sp>
         <p:nvSpPr>
-          <p:cNvPr id="13" name="outline"/>
+          <p:cNvPr id="14" name="outline"/>
           <p:cNvSpPr/>
           <p:nvPr/>
         </p:nvSpPr>
@@ -21130,7 +21742,7 @@
       </p:sp>
       <p:sp>
         <p:nvSpPr>
-          <p:cNvPr id="14" name="badge-LuServerCrash"/>
+          <p:cNvPr id="15" name="badge-LuServerCrash"/>
           <p:cNvSpPr/>
           <p:nvPr/>
         </p:nvSpPr>
@@ -21155,7 +21767,7 @@
       </p:sp>
       <p:pic>
         <p:nvPicPr>
-          <p:cNvPr id="15" name="icon-LuServerCrash" descr="LuServerCrash">    </p:cNvPr>
+          <p:cNvPr id="16" name="icon-LuServerCrash" descr="LuServerCrash">    </p:cNvPr>
           <p:cNvPicPr>
             <a:picLocks noChangeAspect="1"/>
           </p:cNvPicPr>
@@ -21179,7 +21791,7 @@
       </p:pic>
       <p:sp>
         <p:nvSpPr>
-          <p:cNvPr id="16" name="Text 12"/>
+          <p:cNvPr id="17" name="Text 13"/>
           <p:cNvSpPr txBox="1"/>
           <p:nvPr/>
         </p:nvSpPr>
@@ -21215,7 +21827,7 @@
       </p:sp>
       <p:sp>
         <p:nvSpPr>
-          <p:cNvPr id="17" name="Text 13"/>
+          <p:cNvPr id="18" name="Text 14"/>
           <p:cNvSpPr txBox="1"/>
           <p:nvPr/>
         </p:nvSpPr>
@@ -21251,7 +21863,7 @@
       </p:sp>
       <p:sp>
         <p:nvSpPr>
-          <p:cNvPr id="18" name="outline"/>
+          <p:cNvPr id="19" name="outline"/>
           <p:cNvSpPr/>
           <p:nvPr/>
         </p:nvSpPr>
@@ -21278,7 +21890,7 @@
       </p:sp>
       <p:sp>
         <p:nvSpPr>
-          <p:cNvPr id="19" name="badge-LuRotateCw"/>
+          <p:cNvPr id="20" name="badge-LuRotateCw"/>
           <p:cNvSpPr/>
           <p:nvPr/>
         </p:nvSpPr>
@@ -21303,7 +21915,7 @@
       </p:sp>
       <p:pic>
         <p:nvPicPr>
-          <p:cNvPr id="20" name="icon-LuRotateCw" descr="LuRotateCw">    </p:cNvPr>
+          <p:cNvPr id="21" name="icon-LuRotateCw" descr="LuRotateCw">    </p:cNvPr>
           <p:cNvPicPr>
             <a:picLocks noChangeAspect="1"/>
           </p:cNvPicPr>
@@ -21327,7 +21939,7 @@
       </p:pic>
       <p:sp>
         <p:nvSpPr>
-          <p:cNvPr id="21" name="Text 16"/>
+          <p:cNvPr id="22" name="Text 17"/>
           <p:cNvSpPr txBox="1"/>
           <p:nvPr/>
         </p:nvSpPr>
@@ -21363,7 +21975,7 @@
       </p:sp>
       <p:sp>
         <p:nvSpPr>
-          <p:cNvPr id="22" name="Text 17"/>
+          <p:cNvPr id="23" name="Text 18"/>
           <p:cNvSpPr txBox="1"/>
           <p:nvPr/>
         </p:nvSpPr>
@@ -21399,7 +22011,7 @@
       </p:sp>
       <p:sp>
         <p:nvSpPr>
-          <p:cNvPr id="23" name="outline"/>
+          <p:cNvPr id="24" name="outline"/>
           <p:cNvSpPr/>
           <p:nvPr/>
         </p:nvSpPr>
@@ -21426,7 +22038,7 @@
       </p:sp>
       <p:sp>
         <p:nvSpPr>
-          <p:cNvPr id="24" name="badge-LuGauge"/>
+          <p:cNvPr id="25" name="badge-LuGauge"/>
           <p:cNvSpPr/>
           <p:nvPr/>
         </p:nvSpPr>
@@ -21451,7 +22063,7 @@
       </p:sp>
       <p:pic>
         <p:nvPicPr>
-          <p:cNvPr id="25" name="icon-LuGauge" descr="LuGauge">    </p:cNvPr>
+          <p:cNvPr id="26" name="icon-LuGauge" descr="LuGauge">    </p:cNvPr>
           <p:cNvPicPr>
             <a:picLocks noChangeAspect="1"/>
           </p:cNvPicPr>
@@ -21475,7 +22087,7 @@
       </p:pic>
       <p:sp>
         <p:nvSpPr>
-          <p:cNvPr id="26" name="Text 20"/>
+          <p:cNvPr id="27" name="Text 21"/>
           <p:cNvSpPr txBox="1"/>
           <p:nvPr/>
         </p:nvSpPr>
@@ -21511,7 +22123,7 @@
       </p:sp>
       <p:sp>
         <p:nvSpPr>
-          <p:cNvPr id="27" name="Text 21"/>
+          <p:cNvPr id="28" name="Text 22"/>
           <p:cNvSpPr txBox="1"/>
           <p:nvPr/>
         </p:nvSpPr>
@@ -21871,6 +22483,24 @@
                   <a:schemeClr val="tx1"/>
                 </a:solidFill>
               </a:rPr>
+              <a:t>1.9.0: 노트가 잘리지 않게 출력 상한을 올림 (쓴 만큼만 듦)</a:t>
+            </a:r>
+            <a:endParaRPr lang="en-US" sz="1300" dirty="0"/>
+          </a:p>
+          <a:p>
+            <a:pPr marL="342900" indent="-342900">
+              <a:spcAft>
+                <a:spcPts val="600"/>
+              </a:spcAft>
+              <a:buSzPct val="100000"/>
+              <a:buChar char="•"/>
+            </a:pPr>
+            <a:r>
+              <a:rPr lang="en-US" sz="1300" dirty="0">
+                <a:solidFill>
+                  <a:schemeClr val="tx1"/>
+                </a:solidFill>
+              </a:rPr>
               <a:t>하루 한도는 dailyAutoNotes, 사용량은 /learn 기록</a:t>
             </a:r>
             <a:endParaRPr lang="en-US" sz="1300" dirty="0"/>
@@ -27781,7 +28411,7 @@
                   <a:schemeClr val="accent6"/>
                 </a:solidFill>
               </a:rPr>
-              <a:t>노트 · 직접 해 보기 · 되묻는 퀴즈 · 오답 노트 · 문제 사다리 · 간격 반복 · 기록</a:t>
+              <a:t>노트 · 직접 해 보기 · 되묻는 퀴즈 · 오답 노트와 다시 도전 · 간격 반복 · 기록</a:t>
             </a:r>
             <a:endParaRPr lang="en-US" sz="1800" dirty="0"/>
           </a:p>

--- a/docs/team/learn-notes-intro.pptx
+++ b/docs/team/learn-notes-intro.pptx
@@ -135,14 +135,14 @@
   <p:extLst>
     <p:ext uri="{521415D9-36F7-43E2-AB2F-B90AF26B5E84}">
       <p14:sectionLst xmlns:p14="http://schemas.microsoft.com/office/powerpoint/2010/main">
-        <p14:section name="시작" id="{b74e56fb-2507-bd92-3aaf-67aa7ca80acf}">
+        <p14:section name="시작" id="{7a02d2b5-9ccf-4187-ad98-f5ced7b1cd2b}">
           <p14:sldIdLst>
             <p14:sldId id="256"/>
             <p14:sldId id="257"/>
             <p14:sldId id="258"/>
           </p14:sldIdLst>
         </p14:section>
-        <p14:section name="모드(MOD)란?" id="{7010ae38-70aa-8c24-7657-806198a0f1e9}">
+        <p14:section name="모드(MOD)란?" id="{2b3a77f4-d5a8-afa9-749a-73d4be9ed597}">
           <p14:sldIdLst>
             <p14:sldId id="259"/>
             <p14:sldId id="260"/>
@@ -151,7 +151,7 @@
             <p14:sldId id="263"/>
           </p14:sldIdLst>
         </p14:section>
-        <p14:section name="learn-notes 기능" id="{8b4b6cb4-aef3-e4b8-bdcd-b15b73488a8e}">
+        <p14:section name="learn-notes 기능" id="{57ff812d-ddde-27cf-0d33-57992b4eb286}">
           <p14:sldIdLst>
             <p14:sldId id="264"/>
             <p14:sldId id="265"/>
@@ -167,7 +167,7 @@
             <p14:sldId id="275"/>
           </p14:sldIdLst>
         </p14:section>
-        <p14:section name="시작하기" id="{5e20c82a-384f-758d-c1e6-37f9607262e8}">
+        <p14:section name="시작하기" id="{f4bb578b-70a1-c4df-d111-87c84c6b8ec2}">
           <p14:sldIdLst>
             <p14:sldId id="276"/>
             <p14:sldId id="277"/>
@@ -179,7 +179,7 @@
             <p14:sldId id="283"/>
           </p14:sldIdLst>
         </p14:section>
-        <p14:section name="마무리" id="{5f58aa07-91e8-f9c1-d1e1-204e9646c259}">
+        <p14:section name="마무리" id="{0e8e0a04-5b1a-2fb4-2fa4-884fc14291d2}">
           <p14:sldIdLst>
             <p14:sldId id="284"/>
           </p14:sldIdLst>
@@ -2260,7 +2260,7 @@
           <a:p>
             <a:r>
               <a:rPr lang="en-US" dirty="0"/>
-              <a:t>회사에 넓게 깔 때 담당자가 알아 두실 것입니다. 첫째, /learn 진단입니다. 노트가 안 생기거나 패널이 이상하면 대화창에 /learn 진단을 치게 해 주세요. 모델을 부르지 않고 버전, 다른 창의 버전, 화면, 설정(관리자가 잠근 값 표시), 오늘 노트·호출·실패 수, 저장소 크기, 오답 노트 개수, 최근 7일의 문제를 원인별로 정리해 클립보드에 복사하고 대화창에도 적습니다. 오답 노트 줄은 헷갈린 점이 몇 개인지, 그중 열린 것과 바로잡은 것, 유형 기타와 문장 없음, 그리고 "열린 채 두 번 이상", 곧 바로잡지 못한 채 연달아 두 번 이상 헷갈린 것(되묻기 뒤에 맞힌 것 포함)이 몇 개인지 개수만 셉니다. 코드, 요청, 파일 이름, 경로, 개념 이름, 헷갈린 점 문장은 들어 있지 않으니 팀 채널에 그대로 붙여도 됩니다. 복사할 수 없는 화면에서는 대화창에만 적습니다. 왼쪽 글은 예시 화면에서 뽑은 것으로, 다른 터미널에 아직 1.8.0 창이 열려 있던 기기의 진단입니다. 그래서 "다른 창" 줄에 1.8.0이 보입니다. 둘째, 버전이 섞인 팀입니다. 1.9.0부터는 진단의 저장소 줄 끝에 "옛 판 창의 개념 모음 쓰기"가 붙습니다. 1.9.0은 개념 모음을 쓸 때 자기가 썼다는 표식을 함께 남기고, 그 뒤 1.9.0보다 옛 판 창이 개념 모음을 다시 쓰면, 1.9.0 창이 그 개념 모음을 읽을 때 알아채서 셉니다. "없음 (10-03부터)"는 이 기기에서 1.9.0이 처음 개념 모음을 쓴 날부터 1.9.0 창이 옛 판 창의 쓰기를 보지 못했다는 뜻입니다. "마지막 10-05 01:30 (10-03부터 1번)"은 옛 판 창의 마지막 쓰기를 1.9.0 창이 처음 본 때와 그 횟수입니다. 옛 창이 쓴 시각이 아니고, 같은 쓰기를 다시 읽어도 바뀌지 않습니다. 저장소를 읽지 못하면 "읽지 못함"이라고 나옵니다. 이 기록에는 개념 이름이 없고, 같은 쓰기를 두 번 세지 않으려는 짧은 지문만 있습니다. 버전이 섞여 있어도 학습 기록은 이어집니다. 1.9.0은 옛 창이 읽는 안다 표시와 복습 단계의 사본을 계속 씁니다. 그래서 1.5부터 1.8까지의 창이 같은 기록을 함께 써도, 1.8.0 이하로 되돌려도 그대로 동작합니다. 1.9.0이 마지막으로 쓴 개념 모음에서는 그 사본을 읽지 않을 뿐입니다. 개념 모음을 쓸 때마다 저장소 읽기가 한 번 늘지만, 모델 호출은 아닙니다. 팀 전체의 진단에서 이 줄이 계속 "없음"이면, 뒷날 판이 사본 쓰기를 멈출 수 있는지 가늠하는 자료가 됩니다. 회사에 깐 뒤 진단을 받으시면 이 줄도 함께 봐 주세요. 업데이트한 뒤 다른 창이 더 새 버전을 쓰고 있으면, 옛 창에 흐린 줄과 토스트가 한 번 뜨고 /reload-plugins를 안내합니다. 저장소가 더 새 구조로 쓰였으면 옛 창은 다시 불러올 때까지 개념 모음과 복습 단계를 고치지 않고, 노트와 일지는 그대로 씁니다. 이 알림은 1.7.0 창부터 보입니다. 새 구조를 쓰는 판을 깔았다가 1.7로 되돌린 경우처럼 다시 불러와도 이 상태가 남으면, 알림 끝에 "다시 불러와도 계속되면 /learn 진단을 담당자에게 보내 주세요"가 붙고, 진단의 "다른 창" 줄에 저장소가 새 구조라는 것이 나옵니다. 창을 여러 개 열어 같은 퀴즈를 풀어도 첫 오답, 힌트, 채점이 사라지거나 두 번 세지지 않습니다. 다른 창에서 먼저 답한 문제에는 "이 문제는 그사이 다른 창에서 먼저 답했습니다. 한 번 더 적어 보세요."가 나옵니다. 실패 알림도 원인을 말합니다. 디스크가 가득 찼는지, 폴더에 쓸 권한이 없는지, 로그인이 필요한지, 요청 한도에 걸렸는지를 나눠 알려 줍니다. Claude Code의 저장소가 크기 한도로 쓰기를 거절한 것도 알아듣고 "저장소가 4MB를 넘었습니다"로 알려 주며, 진단에는 "저장소 4MB 넘음"으로 나옵니다. 셋째, 노트가 끊기지 않게 했습니다. 자동 노트가 서버 붐빔(529), 서버 오류, 연결 끊김, 시간 초과로 실패하면 노란 줄로 알리고 30초 뒤 한 번 더 씁니다. 두 번째도 실패하면 빨간 줄로 이유와 할 일을 알려 줍니다. 요청 한도에 걸린 것은 메인 세션과 나눠 쓰는 한도라 저절로 다시 쓰지 않습니다. /reload-plugins나 /config 변경 직후에 쓰다 멈춘 노트는 10분 안이면 저절로 이어 씁니다. w로 다시 쓰던 노트가 그렇게 끊기면 원래 노트로 돌아오고, "다시 불러오는 사이 노트 다시 쓰기가 끊겼습니다 · 원래 노트는 그대로입니다 · w로 다시 쓰기" 토스트가 한 번 뜹니다. 30초 뒤 다시 쓰기를 기다리는 동안 /learn 비우기를 확인하면, 그 노트는 다시 쓰지 않고 실패한 노트로 일지에 남깁니다. 구독 계정에서 5시간 사용 한도의 90%, 7일 한도의 95%를 넘으면 자동 노트를 미루고, w를 누르면 바로 씁니다. 이 문턱은 설정이 아니라 고정값입니다. 다시 쓴 호출은 모델 호출 수에는 들어가지만 하루 자동 노트 한도에는 세지 않습니다.</a:t>
+              <a:t>회사에 넓게 깔 때 담당자가 알아 두실 것입니다. 첫째, /learn 진단입니다. 노트가 안 생기거나 패널이 이상하면 대화창에 /learn 진단을 치게 해 주세요. 모델을 부르지 않고 버전, 다른 창의 버전, 화면, 설정(관리자가 잠근 값 표시), 오늘 노트·호출·실패 수, 저장소 크기, 오답 노트 개수, 최근 7일의 문제를 원인별로 정리해 클립보드에 복사하고 대화창에도 적습니다. 오답 노트 줄은 헷갈린 점이 몇 개인지, 그중 열린 것과 바로잡은 것, 유형 기타와 문장 없음, 그리고 "열린 채 두 번 이상", 곧 바로잡지 못한 채 연달아 두 번 이상 헷갈린 것(되묻기 뒤에 맞힌 것 포함)이 몇 개인지 개수만 셉니다. 코드, 요청, 파일 이름, 경로, 개념 이름, 헷갈린 점 문장은 들어 있지 않으니 팀 채널에 그대로 붙여도 됩니다. 복사할 수 없는 화면에서는 대화창에만 적습니다. 왼쪽 글은 예시 화면에서 뽑은 것으로, 다른 터미널에 아직 1.8.0 창이 열려 있던 기기의 진단입니다. 그래서 "다른 창" 줄에 1.8.0이 보입니다. 둘째, 버전이 섞인 팀입니다. 1.9.0부터는 진단의 저장소 줄 끝에 "옛 판 창의 개념 모음 쓰기"가 붙습니다. 1.9.0은 개념 모음을 쓸 때 자기가 썼다는 표식을 함께 남기고, 그 뒤 1.9.0보다 옛 판 창이 개념 모음을 다시 쓰면, 1.9.0 창이 그 개념 모음을 읽을 때 알아채서 셉니다. "없음 (10-03부터)"는 이 기기에서 1.9.0이 처음 개념 모음을 쓴 날부터 1.9.0 창이 옛 판 창의 쓰기를 보지 못했다는 뜻입니다. "마지막 10-05 01:30 (10-03부터 1번)"은 옛 판 창의 마지막 쓰기를 1.9.0 창이 처음 본 때와 그 횟수입니다. 옛 창이 쓴 시각이 아니고, 같은 쓰기를 다시 읽어도 바뀌지 않습니다. 저장소를 읽지 못하면 "읽지 못함"이라고 나옵니다. 이 기록에는 개념 이름이 없고, 같은 쓰기를 두 번 세지 않으려는 짧은 지문만 있습니다. 버전이 섞여 있어도 학습 기록은 이어집니다. 1.9.0은 옛 창이 읽는 안다 표시와 복습 단계의 사본을 계속 씁니다. 그래서 1.5부터 1.8까지의 창이 같은 기록을 함께 써도, 1.8.0 이하로 되돌려도 그대로 동작합니다. 1.9.0이 마지막으로 쓴 개념 모음에서는 그 사본을 읽지 않을 뿐입니다. 개념 모음을 쓸 때마다 저장소 읽기가 한 번 늘지만, 모델 호출은 아닙니다. 팀 전체의 진단에서 이 부분이 계속 "없음"이거나 "마지막" 날짜가 오래전이면, 뒷날 판이 사본 쓰기를 멈출 수 있는지 가늠하는 자료가 됩니다. 한 번 센 기록은 지워지지 않아서, 업데이트하는 동안 옛 판 창이 한 번만 써도 그 기기는 계속 "마지막"으로 보입니다. 그러니 날짜를 봐 주세요. 회사에 깐 뒤 진단을 받으시면 이 줄도 함께 봐 주세요. 업데이트한 뒤 다른 창이 더 새 버전을 쓰고 있으면, 옛 창에 흐린 줄과 토스트가 한 번 뜨고 /reload-plugins를 안내합니다. 저장소가 더 새 구조로 쓰였으면 옛 창은 다시 불러올 때까지 개념 모음과 복습 단계를 고치지 않고, 노트와 일지는 그대로 씁니다. 이 알림은 1.7.0 창부터 보입니다. 새 구조를 쓰는 판을 깔았다가 1.7로 되돌린 경우처럼 다시 불러와도 이 상태가 남으면, 알림 끝에 "다시 불러와도 계속되면 /learn 진단을 담당자에게 보내 주세요"가 붙고, 진단의 "다른 창" 줄에 저장소가 새 구조라는 것이 나옵니다. 창을 여러 개 열어 같은 퀴즈를 풀어도 첫 오답, 힌트, 채점이 사라지거나 두 번 세지지 않습니다. 다른 창에서 먼저 답한 문제에는 "이 문제는 그사이 다른 창에서 먼저 답했습니다. 한 번 더 적어 보세요."가 나옵니다. 실패 알림도 원인을 말합니다. 디스크가 가득 찼는지, 폴더에 쓸 권한이 없는지, 로그인이 필요한지, 요청 한도에 걸렸는지를 나눠 알려 줍니다. Claude Code의 저장소가 크기 한도로 쓰기를 거절한 것도 알아듣고 "저장소가 4MB를 넘었습니다"로 알려 주며, 진단에는 "저장소 4MB 넘음"으로 나옵니다. 셋째, 노트가 끊기지 않게 했습니다. 자동 노트가 서버 붐빔(529), 서버 오류, 연결 끊김, 시간 초과로 실패하면 노란 줄로 알리고 30초 뒤 한 번 더 씁니다. 두 번째도 실패하면 빨간 줄로 이유와 할 일을 알려 줍니다. 요청 한도에 걸린 것은 메인 세션과 나눠 쓰는 한도라 저절로 다시 쓰지 않습니다. /reload-plugins나 /config 변경 직후에 쓰다 멈춘 노트는 10분 안이면 저절로 이어 씁니다. w로 다시 쓰던 노트가 그렇게 끊기면 원래 노트로 돌아오고, "다시 불러오는 사이 노트 다시 쓰기가 끊겼습니다 · 원래 노트는 그대로입니다 · w로 다시 쓰기" 토스트가 한 번 뜹니다. 30초 뒤 다시 쓰기를 기다리는 동안 /learn 비우기를 확인하면, 그 노트는 다시 쓰지 않고 실패한 노트로 일지에 남깁니다. 구독 계정에서 5시간 사용 한도의 90%, 7일 한도의 95%를 넘으면 자동 노트를 미루고, w를 누르면 바로 씁니다. 이 문턱은 설정이 아니라 고정값입니다. 다시 쓴 호출은 모델 호출 수에는 들어가지만 하루 자동 노트 한도에는 세지 않습니다.</a:t>
             </a:r>
             <a:endParaRPr lang="en-US" dirty="0"/>
           </a:p>
